--- a/presentacion/Resumen_Presentacion.pptx
+++ b/presentacion/Resumen_Presentacion.pptx
@@ -305,7 +305,7 @@
       <c:catAx>
         <c:axId val="2094734554"/>
         <c:scaling>
-          <c:orientation val="minMax"/>
+          <c:orientation val="maxMin"/>
         </c:scaling>
         <c:delete val="0"/>
         <c:axPos val="l"/>
@@ -2633,7 +2633,7 @@
                 </a:solidFill>
                 <a:latin typeface="Calibri"/>
               </a:rPr>
-              <a:t>ROA de cartera — actual vs. propuesto</a:t>
+              <a:t>ROA real por banda de riesgo</a:t>
             </a:r>
           </a:p>
         </c:rich>
@@ -2656,20 +2656,64 @@
               <c:strCache>
                 <c:ptCount val="1"/>
                 <c:pt idx="0">
-                  <c:v>Política actual</c:v>
+                  <c:v>ROA (%)</c:v>
                 </c:pt>
               </c:strCache>
             </c:strRef>
           </c:tx>
           <c:spPr>
             <a:solidFill>
-              <a:srgbClr val="5B6584"/>
+              <a:srgbClr val="1E2761"/>
             </a:solidFill>
             <a:effectLst/>
           </c:spPr>
           <c:invertIfNegative val="0"/>
+          <c:dPt>
+            <c:idx val="0"/>
+            <c:invertIfNegative val="0"/>
+            <c:bubble3D val="0"/>
+            <c:spPr>
+              <a:solidFill>
+                <a:srgbClr val="2E8B57"/>
+              </a:solidFill>
+              <a:effectLst/>
+            </c:spPr>
+          </c:dPt>
+          <c:dPt>
+            <c:idx val="1"/>
+            <c:invertIfNegative val="0"/>
+            <c:bubble3D val="0"/>
+            <c:spPr>
+              <a:solidFill>
+                <a:srgbClr val="C9A227"/>
+              </a:solidFill>
+              <a:effectLst/>
+            </c:spPr>
+          </c:dPt>
+          <c:dPt>
+            <c:idx val="2"/>
+            <c:invertIfNegative val="0"/>
+            <c:bubble3D val="0"/>
+            <c:spPr>
+              <a:solidFill>
+                <a:srgbClr val="D97C3D"/>
+              </a:solidFill>
+              <a:effectLst/>
+            </c:spPr>
+          </c:dPt>
+          <c:dPt>
+            <c:idx val="3"/>
+            <c:invertIfNegative val="0"/>
+            <c:bubble3D val="0"/>
+            <c:spPr>
+              <a:solidFill>
+                <a:srgbClr val="B84C4C"/>
+              </a:solidFill>
+              <a:effectLst/>
+            </c:spPr>
+          </c:dPt>
           <c:dLbls>
-            <c:numFmt formatCode="0.00" sourceLinked="0"/>
+            <c:numFmt formatCode="0.0" sourceLinked="0"/>
             <c:spPr>
               <a:noFill/>
               <a:ln>
@@ -2707,117 +2751,48 @@
           </c:dLbls>
           <c:cat>
             <c:strRef>
-              <c:f>Sheet1!$A$2:$A$2</c:f>
+              <c:f>Sheet1!$A$2:$A$5</c:f>
               <c:strCache>
-                <c:ptCount val="1"/>
+                <c:ptCount val="4"/>
                 <c:pt idx="0">
-                  <c:v>ROA cartera (%)</c:v>
+                  <c:v>Bajo Riesgo</c:v>
+                </c:pt>
+                <c:pt idx="1">
+                  <c:v>Medio Riesgo</c:v>
+                </c:pt>
+                <c:pt idx="2">
+                  <c:v>Alto Riesgo</c:v>
+                </c:pt>
+                <c:pt idx="3">
+                  <c:v>Muy Alto Riesgo</c:v>
                 </c:pt>
               </c:strCache>
             </c:strRef>
           </c:cat>
           <c:val>
             <c:numRef>
-              <c:f>Sheet1!$B$2:$B$2</c:f>
+              <c:f>Sheet1!$B$2:$B$5</c:f>
               <c:numCache>
-                <c:formatCode>General</c:formatCode>
-                <c:ptCount val="1"/>
+                <c:formatCode>0.0</c:formatCode>
+                <c:ptCount val="4"/>
                 <c:pt idx="0">
-                  <c:v>1.85</c:v>
+                  <c:v>4.7</c:v>
+                </c:pt>
+                <c:pt idx="1">
+                  <c:v>7.4</c:v>
+                </c:pt>
+                <c:pt idx="2">
+                  <c:v>12.9</c:v>
+                </c:pt>
+                <c:pt idx="3">
+                  <c:v>-3.9</c:v>
                 </c:pt>
               </c:numCache>
             </c:numRef>
           </c:val>
           <c:extLst>
             <c:ext xmlns:c16="http://schemas.microsoft.com/office/drawing/2014/chart" uri="{C3380CC4-5D6E-409C-BE32-E72D297353CC}">
-              <c16:uniqueId val="{00000000-BB37-A447-90E3-585773E07476}"/>
-            </c:ext>
-          </c:extLst>
-        </c:ser>
-        <c:ser>
-          <c:idx val="1"/>
-          <c:order val="1"/>
-          <c:tx>
-            <c:strRef>
-              <c:f>Sheet1!$C$1</c:f>
-              <c:strCache>
-                <c:ptCount val="1"/>
-                <c:pt idx="0">
-                  <c:v>Modelo propuesto</c:v>
-                </c:pt>
-              </c:strCache>
-            </c:strRef>
-          </c:tx>
-          <c:spPr>
-            <a:solidFill>
-              <a:srgbClr val="2E8B57"/>
-            </a:solidFill>
-            <a:effectLst/>
-          </c:spPr>
-          <c:invertIfNegative val="0"/>
-          <c:dLbls>
-            <c:numFmt formatCode="0.00" sourceLinked="0"/>
-            <c:spPr>
-              <a:noFill/>
-              <a:ln>
-                <a:noFill/>
-              </a:ln>
-              <a:effectLst/>
-            </c:spPr>
-            <c:txPr>
-              <a:bodyPr/>
-              <a:lstStyle/>
-              <a:p>
-                <a:pPr>
-                  <a:defRPr sz="1100" b="0" i="0" u="none" strike="noStrike">
-                    <a:solidFill>
-                      <a:srgbClr val="141A45"/>
-                    </a:solidFill>
-                    <a:latin typeface="Arial"/>
-                  </a:defRPr>
-                </a:pPr>
-                <a:endParaRPr lang="en-PE"/>
-              </a:p>
-            </c:txPr>
-            <c:showLegendKey val="0"/>
-            <c:showVal val="1"/>
-            <c:showCatName val="0"/>
-            <c:showSerName val="0"/>
-            <c:showPercent val="0"/>
-            <c:showBubbleSize val="0"/>
-            <c:showLeaderLines val="0"/>
-            <c:extLst>
-              <c:ext xmlns:c15="http://schemas.microsoft.com/office/drawing/2012/chart" uri="{CE6537A1-D6FC-4f65-9D91-7224C49458BB}">
-                <c15:showLeaderLines val="0"/>
-              </c:ext>
-            </c:extLst>
-          </c:dLbls>
-          <c:cat>
-            <c:strRef>
-              <c:f>Sheet1!$A$2:$A$2</c:f>
-              <c:strCache>
-                <c:ptCount val="1"/>
-                <c:pt idx="0">
-                  <c:v>ROA cartera (%)</c:v>
-                </c:pt>
-              </c:strCache>
-            </c:strRef>
-          </c:cat>
-          <c:val>
-            <c:numRef>
-              <c:f>Sheet1!$C$2:$C$2</c:f>
-              <c:numCache>
-                <c:formatCode>General</c:formatCode>
-                <c:ptCount val="1"/>
-                <c:pt idx="0">
-                  <c:v>2.2000000000000002</c:v>
-                </c:pt>
-              </c:numCache>
-            </c:numRef>
-          </c:val>
-          <c:extLst>
-            <c:ext xmlns:c16="http://schemas.microsoft.com/office/drawing/2014/chart" uri="{C3380CC4-5D6E-409C-BE32-E72D297353CC}">
-              <c16:uniqueId val="{00000001-BB37-A447-90E3-585773E07476}"/>
+              <c16:uniqueId val="{00000000-BB37-A447-90E3-585773E07477}"/>
             </c:ext>
           </c:extLst>
         </c:ser>
@@ -2829,7 +2804,7 @@
           <c:showPercent val="0"/>
           <c:showBubbleSize val="0"/>
         </c:dLbls>
-        <c:gapWidth val="60"/>
+        <c:gapWidth val="40"/>
         <c:axId val="2094734554"/>
         <c:axId val="2094734552"/>
       </c:barChart>
@@ -2858,7 +2833,7 @@
           <a:lstStyle/>
           <a:p>
             <a:pPr>
-              <a:defRPr sz="1050" b="0" i="0" u="none" strike="noStrike">
+              <a:defRPr sz="1000" b="0" i="0" u="none" strike="noStrike">
                 <a:solidFill>
                   <a:srgbClr val="000000"/>
                 </a:solidFill>
@@ -2900,20 +2875,6 @@
         <a:effectLst/>
       </c:spPr>
     </c:plotArea>
-    <c:legend>
-      <c:legendPos val="b"/>
-      <c:overlay val="0"/>
-      <c:txPr>
-        <a:bodyPr/>
-        <a:lstStyle/>
-        <a:p>
-          <a:pPr>
-            <a:defRPr sz="1000"/>
-          </a:pPr>
-          <a:endParaRPr lang="en-US"/>
-        </a:p>
-      </c:txPr>
-    </c:legend>
     <c:plotVisOnly val="1"/>
     <c:dispBlanksAs val="span"/>
     <c:showDLblsOverMax val="1"/>
@@ -8307,14 +8268,131 @@
       </p:sp>
       <p:sp>
         <p:nvSpPr>
-          <p:cNvPr id="4" name="Shape 2"/>
+          <p:cNvPr id="28" name="Text 26"/>
+          <p:cNvSpPr/>
+          <p:nvPr/>
+        </p:nvSpPr>
+        <p:spPr>
+          <a:xfrm>
+            <a:off x="548640" y="5486400"/>
+            <a:ext cx="11064240" cy="457200"/>
+          </a:xfrm>
+          <a:prstGeom prst="rect">
+            <a:avLst/>
+          </a:prstGeom>
+          <a:noFill/>
+          <a:ln/>
+        </p:spPr>
+        <p:txBody>
+          <a:bodyPr wrap="square" lIns="0" tIns="0" rIns="0" bIns="0" rtlCol="0" anchor="ctr"/>
+          <a:lstStyle/>
+          <a:p>
+            <a:pPr marL="0" indent="0">
+              <a:buNone/>
+            </a:pPr>
+            <a:r>
+              <a:rPr lang="en-US" sz="1200" i="1" dirty="0">
+                <a:solidFill>
+                  <a:srgbClr val="5B6584"/>
+                </a:solidFill>
+                <a:latin typeface="Calibri" pitchFamily="34" charset="0"/>
+                <a:ea typeface="Calibri" pitchFamily="34" charset="-122"/>
+                <a:cs typeface="Calibri" pitchFamily="34" charset="-120"/>
+              </a:rPr>
+              <a:t>Las 4 bandas son fijas (no un cutoff continuo) y ya están calibradas en producción — ver la economía real de cada banda en la sección de impacto económico.</a:t>
+            </a:r>
+            <a:endParaRPr lang="en-US" sz="1200" dirty="0"/>
+          </a:p>
+        </p:txBody>
+      </p:sp>
+      <p:sp>
+        <p:nvSpPr>
+          <p:cNvPr id="29" name="Text 27"/>
+          <p:cNvSpPr/>
+          <p:nvPr/>
+        </p:nvSpPr>
+        <p:spPr>
+          <a:xfrm>
+            <a:off x="457200" y="6537960"/>
+            <a:ext cx="7315200" cy="274320"/>
+          </a:xfrm>
+          <a:prstGeom prst="rect">
+            <a:avLst/>
+          </a:prstGeom>
+          <a:noFill/>
+          <a:ln/>
+        </p:spPr>
+        <p:txBody>
+          <a:bodyPr wrap="square" lIns="0" tIns="0" rIns="0" bIns="0" rtlCol="0" anchor="ctr"/>
+          <a:lstStyle/>
+          <a:p>
+            <a:pPr marL="0" indent="0">
+              <a:buNone/>
+            </a:pPr>
+            <a:r>
+              <a:rPr lang="en-US" sz="900" i="1" dirty="0">
+                <a:solidFill>
+                  <a:srgbClr val="5B6584"/>
+                </a:solidFill>
+                <a:latin typeface="Calibri" pitchFamily="34" charset="0"/>
+                <a:ea typeface="Calibri" pitchFamily="34" charset="-122"/>
+                <a:cs typeface="Calibri" pitchFamily="34" charset="-120"/>
+              </a:rPr>
+              <a:t>Give Me Credit — Modelo de Scoring de Riesgo Crediticio</a:t>
+            </a:r>
+            <a:endParaRPr lang="en-US" sz="900" dirty="0"/>
+          </a:p>
+        </p:txBody>
+      </p:sp>
+      <p:sp>
+        <p:nvSpPr>
+          <p:cNvPr id="30" name="Text 28"/>
+          <p:cNvSpPr/>
+          <p:nvPr/>
+        </p:nvSpPr>
+        <p:spPr>
+          <a:xfrm>
+            <a:off x="11521440" y="6537960"/>
+            <a:ext cx="365760" cy="274320"/>
+          </a:xfrm>
+          <a:prstGeom prst="rect">
+            <a:avLst/>
+          </a:prstGeom>
+          <a:noFill/>
+          <a:ln/>
+        </p:spPr>
+        <p:txBody>
+          <a:bodyPr wrap="square" lIns="0" tIns="0" rIns="0" bIns="0" rtlCol="0" anchor="ctr"/>
+          <a:lstStyle/>
+          <a:p>
+            <a:pPr marL="0" indent="0" algn="r">
+              <a:buNone/>
+            </a:pPr>
+            <a:r>
+              <a:rPr lang="en-US" sz="900" dirty="0">
+                <a:solidFill>
+                  <a:srgbClr val="5B6584"/>
+                </a:solidFill>
+                <a:latin typeface="Calibri" pitchFamily="34" charset="0"/>
+                <a:ea typeface="Calibri" pitchFamily="34" charset="-122"/>
+                <a:cs typeface="Calibri" pitchFamily="34" charset="-120"/>
+              </a:rPr>
+              <a:t>14</a:t>
+            </a:r>
+            <a:endParaRPr lang="en-US" sz="900" dirty="0"/>
+          </a:p>
+        </p:txBody>
+      </p:sp>
+      <p:sp>
+        <p:nvSpPr>
+          <p:cNvPr id="400" name="Banda0Shape4"/>
           <p:cNvSpPr/>
           <p:nvPr/>
         </p:nvSpPr>
         <p:spPr>
           <a:xfrm>
             <a:off x="548640" y="1737360"/>
-            <a:ext cx="3566160" cy="3566160"/>
+            <a:ext cx="2594610" cy="3566160"/>
           </a:xfrm>
           <a:prstGeom prst="roundRect">
             <a:avLst>
@@ -8348,7 +8426,7 @@
       </p:sp>
       <p:sp>
         <p:nvSpPr>
-          <p:cNvPr id="5" name="Shape 3"/>
+          <p:cNvPr id="401" name="Banda0Shape5"/>
           <p:cNvSpPr/>
           <p:nvPr/>
         </p:nvSpPr>
@@ -8375,7 +8453,7 @@
       </p:sp>
       <p:sp>
         <p:nvSpPr>
-          <p:cNvPr id="6" name="Text 4"/>
+          <p:cNvPr id="402" name="Banda0Shape6"/>
           <p:cNvSpPr/>
           <p:nvPr/>
         </p:nvSpPr>
@@ -8398,7 +8476,7 @@
               <a:buNone/>
             </a:pPr>
             <a:r>
-              <a:rPr lang="en-US" sz="1400" b="1" dirty="0">
+              <a:rPr lang="en-US" sz="1150" b="1" dirty="0">
                 <a:solidFill>
                   <a:srgbClr val="FFFFFF"/>
                 </a:solidFill>
@@ -8408,20 +8486,20 @@
               </a:rPr>
               <a:t>●</a:t>
             </a:r>
-            <a:endParaRPr lang="en-US" sz="1400" dirty="0"/>
-          </a:p>
-        </p:txBody>
-      </p:sp>
-      <p:sp>
-        <p:nvSpPr>
-          <p:cNvPr id="7" name="Text 5"/>
+            <a:endParaRPr lang="en-US" sz="1150" dirty="0"/>
+          </a:p>
+        </p:txBody>
+      </p:sp>
+      <p:sp>
+        <p:nvSpPr>
+          <p:cNvPr id="403" name="Banda0Shape7"/>
           <p:cNvSpPr/>
           <p:nvPr/>
         </p:nvSpPr>
         <p:spPr>
           <a:xfrm>
             <a:off x="1463040" y="2029968"/>
-            <a:ext cx="2377440" cy="365760"/>
+            <a:ext cx="1405890" cy="502920"/>
           </a:xfrm>
           <a:prstGeom prst="rect">
             <a:avLst/>
@@ -8437,7 +8515,7 @@
               <a:buNone/>
             </a:pPr>
             <a:r>
-              <a:rPr lang="en-US" sz="1700" b="1" dirty="0">
+              <a:rPr lang="en-US" sz="1150" b="1" dirty="0">
                 <a:solidFill>
                   <a:srgbClr val="1E2761"/>
                 </a:solidFill>
@@ -8445,7 +8523,7 @@
                 <a:ea typeface="Cambria" pitchFamily="34" charset="-122"/>
                 <a:cs typeface="Cambria" pitchFamily="34" charset="-120"/>
               </a:rPr>
-              <a:t>Riesgo Bajo</a:t>
+              <a:t>Bajo Riesgo</a:t>
             </a:r>
             <a:endParaRPr lang="en-US" sz="1700" dirty="0"/>
           </a:p>
@@ -8453,14 +8531,14 @@
       </p:sp>
       <p:sp>
         <p:nvSpPr>
-          <p:cNvPr id="8" name="Text 6"/>
+          <p:cNvPr id="404" name="Banda0Shape8"/>
           <p:cNvSpPr/>
           <p:nvPr/>
         </p:nvSpPr>
         <p:spPr>
           <a:xfrm>
             <a:off x="822960" y="2606040"/>
-            <a:ext cx="3017520" cy="320040"/>
+            <a:ext cx="2045970" cy="320040"/>
           </a:xfrm>
           <a:prstGeom prst="rect">
             <a:avLst/>
@@ -8476,7 +8554,7 @@
               <a:buNone/>
             </a:pPr>
             <a:r>
-              <a:rPr lang="en-US" sz="1300" dirty="0">
+              <a:rPr lang="en-US" sz="1050" dirty="0">
                 <a:solidFill>
                   <a:srgbClr val="5B6584"/>
                 </a:solidFill>
@@ -8484,7 +8562,7 @@
                 <a:ea typeface="Calibri" pitchFamily="34" charset="-122"/>
                 <a:cs typeface="Calibri" pitchFamily="34" charset="-120"/>
               </a:rPr>
-              <a:t>Score ≥ 700</a:t>
+              <a:t>Umbral de PD</a:t>
             </a:r>
             <a:endParaRPr lang="en-US" sz="1300" dirty="0"/>
           </a:p>
@@ -8492,14 +8570,14 @@
       </p:sp>
       <p:sp>
         <p:nvSpPr>
-          <p:cNvPr id="9" name="Text 7"/>
+          <p:cNvPr id="405" name="Banda0Shape9"/>
           <p:cNvSpPr/>
           <p:nvPr/>
         </p:nvSpPr>
         <p:spPr>
           <a:xfrm>
             <a:off x="822960" y="2971800"/>
-            <a:ext cx="3017520" cy="502920"/>
+            <a:ext cx="2045970" cy="502920"/>
           </a:xfrm>
           <a:prstGeom prst="rect">
             <a:avLst/>
@@ -8515,7 +8593,7 @@
               <a:buNone/>
             </a:pPr>
             <a:r>
-              <a:rPr lang="en-US" sz="2200" b="1" dirty="0">
+              <a:rPr lang="en-US" sz="1800" b="1" dirty="0">
                 <a:solidFill>
                   <a:srgbClr val="2E8B57"/>
                 </a:solidFill>
@@ -8523,7 +8601,7 @@
                 <a:ea typeface="Cambria" pitchFamily="34" charset="-122"/>
                 <a:cs typeface="Cambria" pitchFamily="34" charset="-120"/>
               </a:rPr>
-              <a:t>PD &lt; 2%</a:t>
+              <a:t>PD ≤ 1.21%</a:t>
             </a:r>
             <a:endParaRPr lang="en-US" sz="2200" dirty="0"/>
           </a:p>
@@ -8531,14 +8609,14 @@
       </p:sp>
       <p:sp>
         <p:nvSpPr>
-          <p:cNvPr id="10" name="Shape 8"/>
+          <p:cNvPr id="406" name="Banda0Shape10"/>
           <p:cNvSpPr/>
           <p:nvPr/>
         </p:nvSpPr>
         <p:spPr>
           <a:xfrm>
             <a:off x="822960" y="3611880"/>
-            <a:ext cx="3017520" cy="0"/>
+            <a:ext cx="2045970" cy="0"/>
           </a:xfrm>
           <a:prstGeom prst="line">
             <a:avLst/>
@@ -8561,14 +8639,14 @@
       </p:sp>
       <p:sp>
         <p:nvSpPr>
-          <p:cNvPr id="11" name="Text 9"/>
+          <p:cNvPr id="407" name="Banda0Shape11"/>
           <p:cNvSpPr/>
           <p:nvPr/>
         </p:nvSpPr>
         <p:spPr>
           <a:xfrm>
             <a:off x="822960" y="3749040"/>
-            <a:ext cx="3017520" cy="1371600"/>
+            <a:ext cx="2045970" cy="1371600"/>
           </a:xfrm>
           <a:prstGeom prst="rect">
             <a:avLst/>
@@ -8584,7 +8662,7 @@
               <a:buNone/>
             </a:pPr>
             <a:r>
-              <a:rPr lang="en-US" sz="1300" dirty="0">
+              <a:rPr lang="en-US" sz="1100" dirty="0">
                 <a:solidFill>
                   <a:srgbClr val="141A45"/>
                 </a:solidFill>
@@ -8600,14 +8678,14 @@
       </p:sp>
       <p:sp>
         <p:nvSpPr>
-          <p:cNvPr id="12" name="Shape 10"/>
-          <p:cNvSpPr/>
-          <p:nvPr/>
-        </p:nvSpPr>
-        <p:spPr>
-          <a:xfrm>
-            <a:off x="4343400" y="1737360"/>
-            <a:ext cx="3566160" cy="3566160"/>
+          <p:cNvPr id="408" name="Banda1Shape4"/>
+          <p:cNvSpPr/>
+          <p:nvPr/>
+        </p:nvSpPr>
+        <p:spPr>
+          <a:xfrm>
+            <a:off x="3371850" y="1737360"/>
+            <a:ext cx="2594610" cy="3566160"/>
           </a:xfrm>
           <a:prstGeom prst="roundRect">
             <a:avLst>
@@ -8641,13 +8719,13 @@
       </p:sp>
       <p:sp>
         <p:nvSpPr>
-          <p:cNvPr id="13" name="Shape 11"/>
-          <p:cNvSpPr/>
-          <p:nvPr/>
-        </p:nvSpPr>
-        <p:spPr>
-          <a:xfrm>
-            <a:off x="4617720" y="1965960"/>
+          <p:cNvPr id="409" name="Banda1Shape5"/>
+          <p:cNvSpPr/>
+          <p:nvPr/>
+        </p:nvSpPr>
+        <p:spPr>
+          <a:xfrm>
+            <a:off x="3646170" y="1965960"/>
             <a:ext cx="457200" cy="457200"/>
           </a:xfrm>
           <a:prstGeom prst="ellipse">
@@ -8668,13 +8746,13 @@
       </p:sp>
       <p:sp>
         <p:nvSpPr>
-          <p:cNvPr id="14" name="Text 12"/>
-          <p:cNvSpPr/>
-          <p:nvPr/>
-        </p:nvSpPr>
-        <p:spPr>
-          <a:xfrm>
-            <a:off x="4617720" y="1965960"/>
+          <p:cNvPr id="410" name="Banda1Shape6"/>
+          <p:cNvSpPr/>
+          <p:nvPr/>
+        </p:nvSpPr>
+        <p:spPr>
+          <a:xfrm>
+            <a:off x="3646170" y="1965960"/>
             <a:ext cx="457200" cy="457200"/>
           </a:xfrm>
           <a:prstGeom prst="rect">
@@ -8691,7 +8769,7 @@
               <a:buNone/>
             </a:pPr>
             <a:r>
-              <a:rPr lang="en-US" sz="1400" b="1" dirty="0">
+              <a:rPr lang="en-US" sz="1150" b="1" dirty="0">
                 <a:solidFill>
                   <a:srgbClr val="FFFFFF"/>
                 </a:solidFill>
@@ -8701,20 +8779,20 @@
               </a:rPr>
               <a:t>●</a:t>
             </a:r>
-            <a:endParaRPr lang="en-US" sz="1400" dirty="0"/>
-          </a:p>
-        </p:txBody>
-      </p:sp>
-      <p:sp>
-        <p:nvSpPr>
-          <p:cNvPr id="15" name="Text 13"/>
-          <p:cNvSpPr/>
-          <p:nvPr/>
-        </p:nvSpPr>
-        <p:spPr>
-          <a:xfrm>
-            <a:off x="5257800" y="2029968"/>
-            <a:ext cx="2377440" cy="365760"/>
+            <a:endParaRPr lang="en-US" sz="1150" dirty="0"/>
+          </a:p>
+        </p:txBody>
+      </p:sp>
+      <p:sp>
+        <p:nvSpPr>
+          <p:cNvPr id="411" name="Banda1Shape7"/>
+          <p:cNvSpPr/>
+          <p:nvPr/>
+        </p:nvSpPr>
+        <p:spPr>
+          <a:xfrm>
+            <a:off x="4286250" y="2029968"/>
+            <a:ext cx="1405890" cy="502920"/>
           </a:xfrm>
           <a:prstGeom prst="rect">
             <a:avLst/>
@@ -8730,7 +8808,7 @@
               <a:buNone/>
             </a:pPr>
             <a:r>
-              <a:rPr lang="en-US" sz="1700" b="1" dirty="0">
+              <a:rPr lang="en-US" sz="1150" b="1" dirty="0">
                 <a:solidFill>
                   <a:srgbClr val="1E2761"/>
                 </a:solidFill>
@@ -8738,7 +8816,7 @@
                 <a:ea typeface="Cambria" pitchFamily="34" charset="-122"/>
                 <a:cs typeface="Cambria" pitchFamily="34" charset="-120"/>
               </a:rPr>
-              <a:t>Riesgo Medio</a:t>
+              <a:t>Medio Riesgo</a:t>
             </a:r>
             <a:endParaRPr lang="en-US" sz="1700" dirty="0"/>
           </a:p>
@@ -8746,14 +8824,14 @@
       </p:sp>
       <p:sp>
         <p:nvSpPr>
-          <p:cNvPr id="16" name="Text 14"/>
-          <p:cNvSpPr/>
-          <p:nvPr/>
-        </p:nvSpPr>
-        <p:spPr>
-          <a:xfrm>
-            <a:off x="4617720" y="2606040"/>
-            <a:ext cx="3017520" cy="320040"/>
+          <p:cNvPr id="412" name="Banda1Shape8"/>
+          <p:cNvSpPr/>
+          <p:nvPr/>
+        </p:nvSpPr>
+        <p:spPr>
+          <a:xfrm>
+            <a:off x="3646170" y="2606040"/>
+            <a:ext cx="2045970" cy="320040"/>
           </a:xfrm>
           <a:prstGeom prst="rect">
             <a:avLst/>
@@ -8769,7 +8847,7 @@
               <a:buNone/>
             </a:pPr>
             <a:r>
-              <a:rPr lang="en-US" sz="1300" dirty="0">
+              <a:rPr lang="en-US" sz="1050" dirty="0">
                 <a:solidFill>
                   <a:srgbClr val="5B6584"/>
                 </a:solidFill>
@@ -8777,7 +8855,7 @@
                 <a:ea typeface="Calibri" pitchFamily="34" charset="-122"/>
                 <a:cs typeface="Calibri" pitchFamily="34" charset="-120"/>
               </a:rPr>
-              <a:t>620 – 699</a:t>
+              <a:t>Umbral de PD</a:t>
             </a:r>
             <a:endParaRPr lang="en-US" sz="1300" dirty="0"/>
           </a:p>
@@ -8785,14 +8863,14 @@
       </p:sp>
       <p:sp>
         <p:nvSpPr>
-          <p:cNvPr id="17" name="Text 15"/>
-          <p:cNvSpPr/>
-          <p:nvPr/>
-        </p:nvSpPr>
-        <p:spPr>
-          <a:xfrm>
-            <a:off x="4617720" y="2971800"/>
-            <a:ext cx="3017520" cy="502920"/>
+          <p:cNvPr id="413" name="Banda1Shape9"/>
+          <p:cNvSpPr/>
+          <p:nvPr/>
+        </p:nvSpPr>
+        <p:spPr>
+          <a:xfrm>
+            <a:off x="3646170" y="2971800"/>
+            <a:ext cx="2045970" cy="502920"/>
           </a:xfrm>
           <a:prstGeom prst="rect">
             <a:avLst/>
@@ -8808,7 +8886,7 @@
               <a:buNone/>
             </a:pPr>
             <a:r>
-              <a:rPr lang="en-US" sz="2200" b="1" dirty="0">
+              <a:rPr lang="en-US" sz="1800" b="1" dirty="0">
                 <a:solidFill>
                   <a:srgbClr val="C9A227"/>
                 </a:solidFill>
@@ -8816,7 +8894,7 @@
                 <a:ea typeface="Cambria" pitchFamily="34" charset="-122"/>
                 <a:cs typeface="Cambria" pitchFamily="34" charset="-120"/>
               </a:rPr>
-              <a:t>PD 2% – 8%</a:t>
+              <a:t>PD ≤ 3.1%</a:t>
             </a:r>
             <a:endParaRPr lang="en-US" sz="2200" dirty="0"/>
           </a:p>
@@ -8824,14 +8902,14 @@
       </p:sp>
       <p:sp>
         <p:nvSpPr>
-          <p:cNvPr id="18" name="Shape 16"/>
-          <p:cNvSpPr/>
-          <p:nvPr/>
-        </p:nvSpPr>
-        <p:spPr>
-          <a:xfrm>
-            <a:off x="4617720" y="3611880"/>
-            <a:ext cx="3017520" cy="0"/>
+          <p:cNvPr id="414" name="Banda1Shape10"/>
+          <p:cNvSpPr/>
+          <p:nvPr/>
+        </p:nvSpPr>
+        <p:spPr>
+          <a:xfrm>
+            <a:off x="3646170" y="3611880"/>
+            <a:ext cx="2045970" cy="0"/>
           </a:xfrm>
           <a:prstGeom prst="line">
             <a:avLst/>
@@ -8854,14 +8932,14 @@
       </p:sp>
       <p:sp>
         <p:nvSpPr>
-          <p:cNvPr id="19" name="Text 17"/>
-          <p:cNvSpPr/>
-          <p:nvPr/>
-        </p:nvSpPr>
-        <p:spPr>
-          <a:xfrm>
-            <a:off x="4617720" y="3749040"/>
-            <a:ext cx="3017520" cy="1371600"/>
+          <p:cNvPr id="415" name="Banda1Shape11"/>
+          <p:cNvSpPr/>
+          <p:nvPr/>
+        </p:nvSpPr>
+        <p:spPr>
+          <a:xfrm>
+            <a:off x="3646170" y="3749040"/>
+            <a:ext cx="2045970" cy="1371600"/>
           </a:xfrm>
           <a:prstGeom prst="rect">
             <a:avLst/>
@@ -8877,7 +8955,7 @@
               <a:buNone/>
             </a:pPr>
             <a:r>
-              <a:rPr lang="en-US" sz="1300" dirty="0">
+              <a:rPr lang="en-US" sz="1100" dirty="0">
                 <a:solidFill>
                   <a:srgbClr val="141A45"/>
                 </a:solidFill>
@@ -8893,14 +8971,14 @@
       </p:sp>
       <p:sp>
         <p:nvSpPr>
-          <p:cNvPr id="20" name="Shape 18"/>
-          <p:cNvSpPr/>
-          <p:nvPr/>
-        </p:nvSpPr>
-        <p:spPr>
-          <a:xfrm>
-            <a:off x="8138160" y="1737360"/>
-            <a:ext cx="3566160" cy="3566160"/>
+          <p:cNvPr id="416" name="Banda2Shape4"/>
+          <p:cNvSpPr/>
+          <p:nvPr/>
+        </p:nvSpPr>
+        <p:spPr>
+          <a:xfrm>
+            <a:off x="6195060" y="1737360"/>
+            <a:ext cx="2594610" cy="3566160"/>
           </a:xfrm>
           <a:prstGeom prst="roundRect">
             <a:avLst>
@@ -8934,20 +9012,20 @@
       </p:sp>
       <p:sp>
         <p:nvSpPr>
-          <p:cNvPr id="21" name="Shape 19"/>
-          <p:cNvSpPr/>
-          <p:nvPr/>
-        </p:nvSpPr>
-        <p:spPr>
-          <a:xfrm>
-            <a:off x="8412480" y="1965960"/>
+          <p:cNvPr id="417" name="Banda2Shape5"/>
+          <p:cNvSpPr/>
+          <p:nvPr/>
+        </p:nvSpPr>
+        <p:spPr>
+          <a:xfrm>
+            <a:off x="6469380" y="1965960"/>
             <a:ext cx="457200" cy="457200"/>
           </a:xfrm>
           <a:prstGeom prst="ellipse">
             <a:avLst/>
           </a:prstGeom>
           <a:solidFill>
-            <a:srgbClr val="B84C4C"/>
+            <a:srgbClr val="D97C3D"/>
           </a:solidFill>
           <a:ln/>
         </p:spPr>
@@ -8961,13 +9039,13 @@
       </p:sp>
       <p:sp>
         <p:nvSpPr>
-          <p:cNvPr id="22" name="Text 20"/>
-          <p:cNvSpPr/>
-          <p:nvPr/>
-        </p:nvSpPr>
-        <p:spPr>
-          <a:xfrm>
-            <a:off x="8412480" y="1965960"/>
+          <p:cNvPr id="418" name="Banda2Shape6"/>
+          <p:cNvSpPr/>
+          <p:nvPr/>
+        </p:nvSpPr>
+        <p:spPr>
+          <a:xfrm>
+            <a:off x="6469380" y="1965960"/>
             <a:ext cx="457200" cy="457200"/>
           </a:xfrm>
           <a:prstGeom prst="rect">
@@ -8984,7 +9062,7 @@
               <a:buNone/>
             </a:pPr>
             <a:r>
-              <a:rPr lang="en-US" sz="1400" b="1" dirty="0">
+              <a:rPr lang="en-US" sz="1150" b="1" dirty="0">
                 <a:solidFill>
                   <a:srgbClr val="FFFFFF"/>
                 </a:solidFill>
@@ -8994,20 +9072,20 @@
               </a:rPr>
               <a:t>●</a:t>
             </a:r>
-            <a:endParaRPr lang="en-US" sz="1400" dirty="0"/>
-          </a:p>
-        </p:txBody>
-      </p:sp>
-      <p:sp>
-        <p:nvSpPr>
-          <p:cNvPr id="23" name="Text 21"/>
-          <p:cNvSpPr/>
-          <p:nvPr/>
-        </p:nvSpPr>
-        <p:spPr>
-          <a:xfrm>
-            <a:off x="9052560" y="2029968"/>
-            <a:ext cx="2377440" cy="365760"/>
+            <a:endParaRPr lang="en-US" sz="1150" dirty="0"/>
+          </a:p>
+        </p:txBody>
+      </p:sp>
+      <p:sp>
+        <p:nvSpPr>
+          <p:cNvPr id="419" name="Banda2Shape7"/>
+          <p:cNvSpPr/>
+          <p:nvPr/>
+        </p:nvSpPr>
+        <p:spPr>
+          <a:xfrm>
+            <a:off x="7109460" y="2029968"/>
+            <a:ext cx="1405890" cy="502920"/>
           </a:xfrm>
           <a:prstGeom prst="rect">
             <a:avLst/>
@@ -9023,7 +9101,7 @@
               <a:buNone/>
             </a:pPr>
             <a:r>
-              <a:rPr lang="en-US" sz="1700" b="1" dirty="0">
+              <a:rPr lang="en-US" sz="1150" b="1" dirty="0">
                 <a:solidFill>
                   <a:srgbClr val="1E2761"/>
                 </a:solidFill>
@@ -9031,7 +9109,7 @@
                 <a:ea typeface="Cambria" pitchFamily="34" charset="-122"/>
                 <a:cs typeface="Cambria" pitchFamily="34" charset="-120"/>
               </a:rPr>
-              <a:t>Riesgo Alto</a:t>
+              <a:t>Alto Riesgo</a:t>
             </a:r>
             <a:endParaRPr lang="en-US" sz="1700" dirty="0"/>
           </a:p>
@@ -9039,14 +9117,14 @@
       </p:sp>
       <p:sp>
         <p:nvSpPr>
-          <p:cNvPr id="24" name="Text 22"/>
-          <p:cNvSpPr/>
-          <p:nvPr/>
-        </p:nvSpPr>
-        <p:spPr>
-          <a:xfrm>
-            <a:off x="8412480" y="2606040"/>
-            <a:ext cx="3017520" cy="320040"/>
+          <p:cNvPr id="420" name="Banda2Shape8"/>
+          <p:cNvSpPr/>
+          <p:nvPr/>
+        </p:nvSpPr>
+        <p:spPr>
+          <a:xfrm>
+            <a:off x="6469380" y="2606040"/>
+            <a:ext cx="2045970" cy="320040"/>
           </a:xfrm>
           <a:prstGeom prst="rect">
             <a:avLst/>
@@ -9062,7 +9140,7 @@
               <a:buNone/>
             </a:pPr>
             <a:r>
-              <a:rPr lang="en-US" sz="1300" dirty="0">
+              <a:rPr lang="en-US" sz="1050" dirty="0">
                 <a:solidFill>
                   <a:srgbClr val="5B6584"/>
                 </a:solidFill>
@@ -9070,7 +9148,7 @@
                 <a:ea typeface="Calibri" pitchFamily="34" charset="-122"/>
                 <a:cs typeface="Calibri" pitchFamily="34" charset="-120"/>
               </a:rPr>
-              <a:t>Score &lt; 620</a:t>
+              <a:t>Umbral de PD</a:t>
             </a:r>
             <a:endParaRPr lang="en-US" sz="1300" dirty="0"/>
           </a:p>
@@ -9078,14 +9156,14 @@
       </p:sp>
       <p:sp>
         <p:nvSpPr>
-          <p:cNvPr id="25" name="Text 23"/>
-          <p:cNvSpPr/>
-          <p:nvPr/>
-        </p:nvSpPr>
-        <p:spPr>
-          <a:xfrm>
-            <a:off x="8412480" y="2971800"/>
-            <a:ext cx="3017520" cy="502920"/>
+          <p:cNvPr id="421" name="Banda2Shape9"/>
+          <p:cNvSpPr/>
+          <p:nvPr/>
+        </p:nvSpPr>
+        <p:spPr>
+          <a:xfrm>
+            <a:off x="6469380" y="2971800"/>
+            <a:ext cx="2045970" cy="502920"/>
           </a:xfrm>
           <a:prstGeom prst="rect">
             <a:avLst/>
@@ -9101,15 +9179,15 @@
               <a:buNone/>
             </a:pPr>
             <a:r>
-              <a:rPr lang="en-US" sz="2200" b="1" dirty="0">
-                <a:solidFill>
-                  <a:srgbClr val="B84C4C"/>
+              <a:rPr lang="en-US" sz="1800" b="1" dirty="0">
+                <a:solidFill>
+                  <a:srgbClr val="D97C3D"/>
                 </a:solidFill>
                 <a:latin typeface="Cambria" pitchFamily="34" charset="0"/>
                 <a:ea typeface="Cambria" pitchFamily="34" charset="-122"/>
                 <a:cs typeface="Cambria" pitchFamily="34" charset="-120"/>
               </a:rPr>
-              <a:t>PD &gt; 8%</a:t>
+              <a:t>PD ≤ 16.7%</a:t>
             </a:r>
             <a:endParaRPr lang="en-US" sz="2200" dirty="0"/>
           </a:p>
@@ -9117,14 +9195,14 @@
       </p:sp>
       <p:sp>
         <p:nvSpPr>
-          <p:cNvPr id="26" name="Shape 24"/>
-          <p:cNvSpPr/>
-          <p:nvPr/>
-        </p:nvSpPr>
-        <p:spPr>
-          <a:xfrm>
-            <a:off x="8412480" y="3611880"/>
-            <a:ext cx="3017520" cy="0"/>
+          <p:cNvPr id="422" name="Banda2Shape10"/>
+          <p:cNvSpPr/>
+          <p:nvPr/>
+        </p:nvSpPr>
+        <p:spPr>
+          <a:xfrm>
+            <a:off x="6469380" y="3611880"/>
+            <a:ext cx="2045970" cy="0"/>
           </a:xfrm>
           <a:prstGeom prst="line">
             <a:avLst/>
@@ -9147,14 +9225,14 @@
       </p:sp>
       <p:sp>
         <p:nvSpPr>
-          <p:cNvPr id="27" name="Text 25"/>
-          <p:cNvSpPr/>
-          <p:nvPr/>
-        </p:nvSpPr>
-        <p:spPr>
-          <a:xfrm>
-            <a:off x="8412480" y="3749040"/>
-            <a:ext cx="3017520" cy="1371600"/>
+          <p:cNvPr id="423" name="Banda2Shape11"/>
+          <p:cNvSpPr/>
+          <p:nvPr/>
+        </p:nvSpPr>
+        <p:spPr>
+          <a:xfrm>
+            <a:off x="6469380" y="3749040"/>
+            <a:ext cx="2045970" cy="1371600"/>
           </a:xfrm>
           <a:prstGeom prst="rect">
             <a:avLst/>
@@ -9170,7 +9248,7 @@
               <a:buNone/>
             </a:pPr>
             <a:r>
-              <a:rPr lang="en-US" sz="1300" dirty="0">
+              <a:rPr lang="en-US" sz="1100" dirty="0">
                 <a:solidFill>
                   <a:srgbClr val="141A45"/>
                 </a:solidFill>
@@ -9178,7 +9256,7 @@
                 <a:ea typeface="Calibri" pitchFamily="34" charset="-122"/>
                 <a:cs typeface="Calibri" pitchFamily="34" charset="-120"/>
               </a:rPr>
-              <a:t>Rechazo o garantías adicionales</a:t>
+              <a:t>Garantías adicionales o repricing (aún rentable: ROA 12.9%)</a:t>
             </a:r>
             <a:endParaRPr lang="en-US" sz="1300" dirty="0"/>
           </a:p>
@@ -9186,53 +9264,121 @@
       </p:sp>
       <p:sp>
         <p:nvSpPr>
-          <p:cNvPr id="28" name="Text 26"/>
-          <p:cNvSpPr/>
-          <p:nvPr/>
-        </p:nvSpPr>
-        <p:spPr>
-          <a:xfrm>
-            <a:off x="548640" y="5486400"/>
-            <a:ext cx="11064240" cy="457200"/>
-          </a:xfrm>
-          <a:prstGeom prst="rect">
-            <a:avLst/>
-          </a:prstGeom>
-          <a:noFill/>
-          <a:ln/>
-        </p:spPr>
-        <p:txBody>
-          <a:bodyPr wrap="square" lIns="0" tIns="0" rIns="0" bIns="0" rtlCol="0" anchor="ctr"/>
-          <a:lstStyle/>
-          <a:p>
-            <a:pPr marL="0" indent="0">
-              <a:buNone/>
-            </a:pPr>
-            <a:r>
-              <a:rPr lang="en-US" sz="1200" i="1" dirty="0">
-                <a:solidFill>
-                  <a:srgbClr val="5B6584"/>
+          <p:cNvPr id="424" name="Banda3Shape4"/>
+          <p:cNvSpPr/>
+          <p:nvPr/>
+        </p:nvSpPr>
+        <p:spPr>
+          <a:xfrm>
+            <a:off x="9018270" y="1737360"/>
+            <a:ext cx="2594610" cy="3566160"/>
+          </a:xfrm>
+          <a:prstGeom prst="roundRect">
+            <a:avLst>
+              <a:gd name="adj" fmla="val 2051"/>
+            </a:avLst>
+          </a:prstGeom>
+          <a:solidFill>
+            <a:srgbClr val="FFFFFF"/>
+          </a:solidFill>
+          <a:ln w="12700">
+            <a:solidFill>
+              <a:srgbClr val="E2E7F2"/>
+            </a:solidFill>
+            <a:prstDash val="solid"/>
+          </a:ln>
+          <a:effectLst>
+            <a:outerShdw blurRad="76200" dist="25400" dir="5400000" algn="bl" rotWithShape="0">
+              <a:srgbClr val="1E2761">
+                <a:alpha val="10000"/>
+              </a:srgbClr>
+            </a:outerShdw>
+          </a:effectLst>
+        </p:spPr>
+        <p:txBody>
+          <a:bodyPr/>
+          <a:lstStyle/>
+          <a:p>
+            <a:endParaRPr lang="en-PE"/>
+          </a:p>
+        </p:txBody>
+      </p:sp>
+      <p:sp>
+        <p:nvSpPr>
+          <p:cNvPr id="425" name="Banda3Shape5"/>
+          <p:cNvSpPr/>
+          <p:nvPr/>
+        </p:nvSpPr>
+        <p:spPr>
+          <a:xfrm>
+            <a:off x="9292590" y="1965960"/>
+            <a:ext cx="457200" cy="457200"/>
+          </a:xfrm>
+          <a:prstGeom prst="ellipse">
+            <a:avLst/>
+          </a:prstGeom>
+          <a:solidFill>
+            <a:srgbClr val="B84C4C"/>
+          </a:solidFill>
+          <a:ln/>
+        </p:spPr>
+        <p:txBody>
+          <a:bodyPr/>
+          <a:lstStyle/>
+          <a:p>
+            <a:endParaRPr lang="en-PE"/>
+          </a:p>
+        </p:txBody>
+      </p:sp>
+      <p:sp>
+        <p:nvSpPr>
+          <p:cNvPr id="426" name="Banda3Shape6"/>
+          <p:cNvSpPr/>
+          <p:nvPr/>
+        </p:nvSpPr>
+        <p:spPr>
+          <a:xfrm>
+            <a:off x="9292590" y="1965960"/>
+            <a:ext cx="457200" cy="457200"/>
+          </a:xfrm>
+          <a:prstGeom prst="rect">
+            <a:avLst/>
+          </a:prstGeom>
+          <a:noFill/>
+          <a:ln/>
+        </p:spPr>
+        <p:txBody>
+          <a:bodyPr wrap="square" lIns="0" tIns="0" rIns="0" bIns="0" rtlCol="0" anchor="ctr"/>
+          <a:lstStyle/>
+          <a:p>
+            <a:pPr marL="0" indent="0" algn="ctr">
+              <a:buNone/>
+            </a:pPr>
+            <a:r>
+              <a:rPr lang="en-US" sz="1150" b="1" dirty="0">
+                <a:solidFill>
+                  <a:srgbClr val="FFFFFF"/>
                 </a:solidFill>
                 <a:latin typeface="Calibri" pitchFamily="34" charset="0"/>
                 <a:ea typeface="Calibri" pitchFamily="34" charset="-122"/>
                 <a:cs typeface="Calibri" pitchFamily="34" charset="-120"/>
               </a:rPr>
-              <a:t>El cutoff óptimo se define junto con negocio, balanceando tasa de aprobación vs. mora esperada (ver simulación de escenarios).</a:t>
-            </a:r>
-            <a:endParaRPr lang="en-US" sz="1200" dirty="0"/>
-          </a:p>
-        </p:txBody>
-      </p:sp>
-      <p:sp>
-        <p:nvSpPr>
-          <p:cNvPr id="29" name="Text 27"/>
-          <p:cNvSpPr/>
-          <p:nvPr/>
-        </p:nvSpPr>
-        <p:spPr>
-          <a:xfrm>
-            <a:off x="457200" y="6537960"/>
-            <a:ext cx="7315200" cy="274320"/>
+              <a:t>●</a:t>
+            </a:r>
+            <a:endParaRPr lang="en-US" sz="1150" dirty="0"/>
+          </a:p>
+        </p:txBody>
+      </p:sp>
+      <p:sp>
+        <p:nvSpPr>
+          <p:cNvPr id="427" name="Banda3Shape7"/>
+          <p:cNvSpPr/>
+          <p:nvPr/>
+        </p:nvSpPr>
+        <p:spPr>
+          <a:xfrm>
+            <a:off x="9932670" y="2029968"/>
+            <a:ext cx="1405890" cy="502920"/>
           </a:xfrm>
           <a:prstGeom prst="rect">
             <a:avLst/>
@@ -9248,7 +9394,46 @@
               <a:buNone/>
             </a:pPr>
             <a:r>
-              <a:rPr lang="en-US" sz="900" i="1" dirty="0">
+              <a:rPr lang="en-US" sz="1150" b="1" dirty="0">
+                <a:solidFill>
+                  <a:srgbClr val="1E2761"/>
+                </a:solidFill>
+                <a:latin typeface="Cambria" pitchFamily="34" charset="0"/>
+                <a:ea typeface="Cambria" pitchFamily="34" charset="-122"/>
+                <a:cs typeface="Cambria" pitchFamily="34" charset="-120"/>
+              </a:rPr>
+              <a:t>Muy Alto Riesgo</a:t>
+            </a:r>
+            <a:endParaRPr lang="en-US" sz="1700" dirty="0"/>
+          </a:p>
+        </p:txBody>
+      </p:sp>
+      <p:sp>
+        <p:nvSpPr>
+          <p:cNvPr id="428" name="Banda3Shape8"/>
+          <p:cNvSpPr/>
+          <p:nvPr/>
+        </p:nvSpPr>
+        <p:spPr>
+          <a:xfrm>
+            <a:off x="9292590" y="2606040"/>
+            <a:ext cx="2045970" cy="320040"/>
+          </a:xfrm>
+          <a:prstGeom prst="rect">
+            <a:avLst/>
+          </a:prstGeom>
+          <a:noFill/>
+          <a:ln/>
+        </p:spPr>
+        <p:txBody>
+          <a:bodyPr wrap="square" lIns="0" tIns="0" rIns="0" bIns="0" rtlCol="0" anchor="ctr"/>
+          <a:lstStyle/>
+          <a:p>
+            <a:pPr marL="0" indent="0">
+              <a:buNone/>
+            </a:pPr>
+            <a:r>
+              <a:rPr lang="en-US" sz="1050" dirty="0">
                 <a:solidFill>
                   <a:srgbClr val="5B6584"/>
                 </a:solidFill>
@@ -9256,48 +9441,117 @@
                 <a:ea typeface="Calibri" pitchFamily="34" charset="-122"/>
                 <a:cs typeface="Calibri" pitchFamily="34" charset="-120"/>
               </a:rPr>
-              <a:t>Give Me Credit — Modelo de Scoring de Riesgo Crediticio</a:t>
-            </a:r>
-            <a:endParaRPr lang="en-US" sz="900" dirty="0"/>
-          </a:p>
-        </p:txBody>
-      </p:sp>
-      <p:sp>
-        <p:nvSpPr>
-          <p:cNvPr id="30" name="Text 28"/>
-          <p:cNvSpPr/>
-          <p:nvPr/>
-        </p:nvSpPr>
-        <p:spPr>
-          <a:xfrm>
-            <a:off x="11521440" y="6537960"/>
-            <a:ext cx="365760" cy="274320"/>
-          </a:xfrm>
-          <a:prstGeom prst="rect">
-            <a:avLst/>
-          </a:prstGeom>
-          <a:noFill/>
-          <a:ln/>
-        </p:spPr>
-        <p:txBody>
-          <a:bodyPr wrap="square" lIns="0" tIns="0" rIns="0" bIns="0" rtlCol="0" anchor="ctr"/>
-          <a:lstStyle/>
-          <a:p>
-            <a:pPr marL="0" indent="0" algn="r">
-              <a:buNone/>
-            </a:pPr>
-            <a:r>
-              <a:rPr lang="en-US" sz="900" dirty="0">
-                <a:solidFill>
-                  <a:srgbClr val="5B6584"/>
+              <a:t>Umbral de PD</a:t>
+            </a:r>
+            <a:endParaRPr lang="en-US" sz="1300" dirty="0"/>
+          </a:p>
+        </p:txBody>
+      </p:sp>
+      <p:sp>
+        <p:nvSpPr>
+          <p:cNvPr id="429" name="Banda3Shape9"/>
+          <p:cNvSpPr/>
+          <p:nvPr/>
+        </p:nvSpPr>
+        <p:spPr>
+          <a:xfrm>
+            <a:off x="9292590" y="2971800"/>
+            <a:ext cx="2045970" cy="502920"/>
+          </a:xfrm>
+          <a:prstGeom prst="rect">
+            <a:avLst/>
+          </a:prstGeom>
+          <a:noFill/>
+          <a:ln/>
+        </p:spPr>
+        <p:txBody>
+          <a:bodyPr wrap="square" lIns="0" tIns="0" rIns="0" bIns="0" rtlCol="0" anchor="ctr"/>
+          <a:lstStyle/>
+          <a:p>
+            <a:pPr marL="0" indent="0">
+              <a:buNone/>
+            </a:pPr>
+            <a:r>
+              <a:rPr lang="en-US" sz="1800" b="1" dirty="0">
+                <a:solidFill>
+                  <a:srgbClr val="B84C4C"/>
+                </a:solidFill>
+                <a:latin typeface="Cambria" pitchFamily="34" charset="0"/>
+                <a:ea typeface="Cambria" pitchFamily="34" charset="-122"/>
+                <a:cs typeface="Cambria" pitchFamily="34" charset="-120"/>
+              </a:rPr>
+              <a:t>PD &gt; 16.7%</a:t>
+            </a:r>
+            <a:endParaRPr lang="en-US" sz="2200" dirty="0"/>
+          </a:p>
+        </p:txBody>
+      </p:sp>
+      <p:sp>
+        <p:nvSpPr>
+          <p:cNvPr id="430" name="Banda3Shape10"/>
+          <p:cNvSpPr/>
+          <p:nvPr/>
+        </p:nvSpPr>
+        <p:spPr>
+          <a:xfrm>
+            <a:off x="9292590" y="3611880"/>
+            <a:ext cx="2045970" cy="0"/>
+          </a:xfrm>
+          <a:prstGeom prst="line">
+            <a:avLst/>
+          </a:prstGeom>
+          <a:noFill/>
+          <a:ln w="12700">
+            <a:solidFill>
+              <a:srgbClr val="E2E7F2"/>
+            </a:solidFill>
+            <a:prstDash val="solid"/>
+          </a:ln>
+        </p:spPr>
+        <p:txBody>
+          <a:bodyPr/>
+          <a:lstStyle/>
+          <a:p>
+            <a:endParaRPr lang="en-PE"/>
+          </a:p>
+        </p:txBody>
+      </p:sp>
+      <p:sp>
+        <p:nvSpPr>
+          <p:cNvPr id="431" name="Banda3Shape11"/>
+          <p:cNvSpPr/>
+          <p:nvPr/>
+        </p:nvSpPr>
+        <p:spPr>
+          <a:xfrm>
+            <a:off x="9292590" y="3749040"/>
+            <a:ext cx="2045970" cy="1371600"/>
+          </a:xfrm>
+          <a:prstGeom prst="rect">
+            <a:avLst/>
+          </a:prstGeom>
+          <a:noFill/>
+          <a:ln/>
+        </p:spPr>
+        <p:txBody>
+          <a:bodyPr wrap="square" lIns="0" tIns="0" rIns="0" bIns="0" rtlCol="0" anchor="ctr"/>
+          <a:lstStyle/>
+          <a:p>
+            <a:pPr marL="0" indent="0">
+              <a:buNone/>
+            </a:pPr>
+            <a:r>
+              <a:rPr lang="en-US" sz="1100" dirty="0">
+                <a:solidFill>
+                  <a:srgbClr val="141A45"/>
                 </a:solidFill>
                 <a:latin typeface="Calibri" pitchFamily="34" charset="0"/>
                 <a:ea typeface="Calibri" pitchFamily="34" charset="-122"/>
                 <a:cs typeface="Calibri" pitchFamily="34" charset="-120"/>
               </a:rPr>
-              <a:t>14</a:t>
-            </a:r>
-            <a:endParaRPr lang="en-US" sz="900" dirty="0"/>
+              <a:t>Rechazo (único segmento no rentable: ROA -3.9%)</a:t>
+            </a:r>
+            <a:endParaRPr lang="en-US" sz="1300" dirty="0"/>
           </a:p>
         </p:txBody>
       </p:sp>
@@ -9940,7 +10194,7 @@
                 <a:ea typeface="Cambria" pitchFamily="34" charset="-122"/>
                 <a:cs typeface="Cambria" pitchFamily="34" charset="-120"/>
               </a:rPr>
-              <a:t>Carga de deuda vs. ingreso</a:t>
+              <a:t>Edad del cliente</a:t>
             </a:r>
             <a:endParaRPr lang="en-US" sz="1350" dirty="0"/>
           </a:p>
@@ -9979,7 +10233,7 @@
                 <a:ea typeface="Calibri" pitchFamily="34" charset="-122"/>
                 <a:cs typeface="Calibri" pitchFamily="34" charset="-120"/>
               </a:rPr>
-              <a:t>A mayor proporción del ingreso comprometida en deuda, mayor probabilidad de incumplimiento.</a:t>
+              <a:t>Los segmentos más jóvenes muestran mayor riesgo relativo, probablemente por menor historial crediticio.</a:t>
             </a:r>
             <a:endParaRPr lang="en-US" sz="1200" dirty="0"/>
           </a:p>
@@ -10118,7 +10372,7 @@
                 <a:ea typeface="Cambria" pitchFamily="34" charset="-122"/>
                 <a:cs typeface="Cambria" pitchFamily="34" charset="-120"/>
               </a:rPr>
-              <a:t>Edad del cliente</a:t>
+              <a:t>Carga de deuda vs. ingreso</a:t>
             </a:r>
             <a:endParaRPr lang="en-US" sz="1350" dirty="0"/>
           </a:p>
@@ -10157,7 +10411,7 @@
                 <a:ea typeface="Calibri" pitchFamily="34" charset="-122"/>
                 <a:cs typeface="Calibri" pitchFamily="34" charset="-120"/>
               </a:rPr>
-              <a:t>Los segmentos más jóvenes muestran mayor riesgo relativo, probablemente por menor historial crediticio.</a:t>
+              <a:t>A mayor proporción del ingreso comprometida en deuda, mayor probabilidad de incumplimiento.</a:t>
             </a:r>
             <a:endParaRPr lang="en-US" sz="1200" dirty="0"/>
           </a:p>
@@ -10426,7 +10680,7 @@
                 <a:ea typeface="Cambria" pitchFamily="34" charset="-122"/>
                 <a:cs typeface="Cambria" pitchFamily="34" charset="-120"/>
               </a:rPr>
-              <a:t>+0.35 p.p.</a:t>
+              <a:t>7.18%</a:t>
             </a:r>
             <a:endParaRPr lang="en-US" sz="3200" dirty="0"/>
           </a:p>
@@ -10465,7 +10719,7 @@
                 <a:ea typeface="Calibri" pitchFamily="34" charset="-122"/>
                 <a:cs typeface="Calibri" pitchFamily="34" charset="-120"/>
               </a:rPr>
-              <a:t>Mejora estimada en ROA de la cartera</a:t>
+              <a:t>ROA de cartera (ponderado, real)</a:t>
             </a:r>
             <a:endParaRPr lang="en-US" sz="1200" dirty="0"/>
           </a:p>
@@ -10545,7 +10799,7 @@
                 <a:ea typeface="Cambria" pitchFamily="34" charset="-122"/>
                 <a:cs typeface="Cambria" pitchFamily="34" charset="-120"/>
               </a:rPr>
-              <a:t>-18%</a:t>
+              <a:t>91.6%</a:t>
             </a:r>
             <a:endParaRPr lang="en-US" sz="3200" dirty="0"/>
           </a:p>
@@ -10584,7 +10838,7 @@
                 <a:ea typeface="Calibri" pitchFamily="34" charset="-122"/>
                 <a:cs typeface="Calibri" pitchFamily="34" charset="-120"/>
               </a:rPr>
-              <a:t>Reducción de pérdida esperada vs. política actual</a:t>
+              <a:t>de la cartera en bandas rentables (Bajo + Medio + Alto)</a:t>
             </a:r>
             <a:endParaRPr lang="en-US" sz="1200" dirty="0"/>
           </a:p>
@@ -10658,13 +10912,13 @@
             <a:r>
               <a:rPr lang="en-US" sz="3200" b="1" dirty="0">
                 <a:solidFill>
-                  <a:srgbClr val="C9A227"/>
+                  <a:srgbClr val="B84C4C"/>
                 </a:solidFill>
                 <a:latin typeface="Cambria" pitchFamily="34" charset="0"/>
                 <a:ea typeface="Cambria" pitchFamily="34" charset="-122"/>
                 <a:cs typeface="Cambria" pitchFamily="34" charset="-120"/>
               </a:rPr>
-              <a:t>+6%</a:t>
+              <a:t>-3.9%</a:t>
             </a:r>
             <a:endParaRPr lang="en-US" sz="3200" dirty="0"/>
           </a:p>
@@ -10703,7 +10957,7 @@
                 <a:ea typeface="Calibri" pitchFamily="34" charset="-122"/>
                 <a:cs typeface="Calibri" pitchFamily="34" charset="-120"/>
               </a:rPr>
-              <a:t>Clientes buenos adicionales aprobados</a:t>
+              <a:t>ROA de Muy Alto Riesgo — único segmento no rentable</a:t>
             </a:r>
             <a:endParaRPr lang="en-US" sz="1200" dirty="0"/>
           </a:p>
@@ -10826,7 +11080,7 @@
                 <a:ea typeface="Calibri" pitchFamily="34" charset="-122"/>
                 <a:cs typeface="Calibri" pitchFamily="34" charset="-120"/>
               </a:rPr>
-              <a:t>Ingresos por intereses y comisiones, menos pérdida esperada (PD × LGD × EAD) y costo de capital, sobre el total de activos de la cartera simulada bajo el nuevo cutoff.</a:t>
+              <a:t>Ingresos por intereses y comisiones, menos pérdida esperada (PD × LGD × EAD) y costo de capital, sobre la cartera real segmentada en las 4 bandas de riesgo del modelo (gestion_portafolio(), 04_model_evaluation.ipynb).</a:t>
             </a:r>
             <a:endParaRPr lang="en-US" sz="1200" dirty="0"/>
           </a:p>
@@ -11015,7 +11269,7 @@
                 <a:ea typeface="Cambria" pitchFamily="34" charset="-122"/>
                 <a:cs typeface="Cambria" pitchFamily="34" charset="-120"/>
               </a:rPr>
-              <a:t>Simulación de escenarios de cutoff</a:t>
+              <a:t>Economía de cartera por banda de riesgo</a:t>
             </a:r>
             <a:endParaRPr lang="en-US" sz="3200" dirty="0"/>
           </a:p>
@@ -11054,7 +11308,7 @@
                 <a:ea typeface="Calibri" pitchFamily="34" charset="-122"/>
                 <a:cs typeface="Calibri" pitchFamily="34" charset="-120"/>
               </a:rPr>
-              <a:t>El trade-off central para negocio: aprobación vs. mora esperada vs. ROA, según dónde se fije el cutoff.</a:t>
+              <a:t>Participación, tasa activa, ROA y utilidad neta reales de las 4 bandas de riesgo — la base con la que se validaron los thresholds del modelo en producción.</a:t>
             </a:r>
             <a:endParaRPr lang="en-US" sz="1250" dirty="0"/>
           </a:p>
@@ -11066,13 +11320,7 @@
           <p:cNvGraphicFramePr>
             <a:graphicFrameLocks noGrp="1"/>
           </p:cNvGraphicFramePr>
-          <p:nvPr>
-            <p:extLst>
-              <p:ext uri="{D42A27DB-BD31-4B8C-83A1-F6EECF244321}">
-                <p14:modId xmlns:p14="http://schemas.microsoft.com/office/powerpoint/2010/main" val="1579011935"/>
-              </p:ext>
-            </p:extLst>
-          </p:nvPr>
+          <p:nvPr/>
         </p:nvGraphicFramePr>
         <p:xfrm>
           <a:off x="548640" y="1965960"/>
@@ -11083,53 +11331,23 @@
             <a:tbl>
               <a:tblPr/>
               <a:tblGrid>
-                <a:gridCol w="2468880">
-                  <a:extLst>
-                    <a:ext uri="{9D8B030D-6E8A-4147-A177-3AD203B41FA5}">
-                      <a16:colId xmlns:a16="http://schemas.microsoft.com/office/drawing/2014/main" val="20000"/>
-                    </a:ext>
-                  </a:extLst>
-                </a:gridCol>
-                <a:gridCol w="2148840">
-                  <a:extLst>
-                    <a:ext uri="{9D8B030D-6E8A-4147-A177-3AD203B41FA5}">
-                      <a16:colId xmlns:a16="http://schemas.microsoft.com/office/drawing/2014/main" val="20001"/>
-                    </a:ext>
-                  </a:extLst>
-                </a:gridCol>
-                <a:gridCol w="2148840">
-                  <a:extLst>
-                    <a:ext uri="{9D8B030D-6E8A-4147-A177-3AD203B41FA5}">
-                      <a16:colId xmlns:a16="http://schemas.microsoft.com/office/drawing/2014/main" val="20002"/>
-                    </a:ext>
-                  </a:extLst>
-                </a:gridCol>
-                <a:gridCol w="2148840">
-                  <a:extLst>
-                    <a:ext uri="{9D8B030D-6E8A-4147-A177-3AD203B41FA5}">
-                      <a16:colId xmlns:a16="http://schemas.microsoft.com/office/drawing/2014/main" val="20003"/>
-                    </a:ext>
-                  </a:extLst>
-                </a:gridCol>
-                <a:gridCol w="2148840">
-                  <a:extLst>
-                    <a:ext uri="{9D8B030D-6E8A-4147-A177-3AD203B41FA5}">
-                      <a16:colId xmlns:a16="http://schemas.microsoft.com/office/drawing/2014/main" val="20004"/>
-                    </a:ext>
-                  </a:extLst>
-                </a:gridCol>
+                <a:gridCol w="2468880"/>
+                <a:gridCol w="2148840"/>
+                <a:gridCol w="2148840"/>
+                <a:gridCol w="2148840"/>
+                <a:gridCol w="2148840"/>
               </a:tblGrid>
-              <a:tr h="548640">
+              <a:tr h="438912">
                 <a:tc>
                   <a:txBody>
                     <a:bodyPr/>
                     <a:lstStyle/>
                     <a:p>
-                      <a:pPr marL="0" indent="0" algn="ctr">
+                      <a:pPr marL="0" indent="0" algn="l">
                         <a:buNone/>
                       </a:pPr>
                       <a:r>
-                        <a:rPr lang="en-US" sz="1250" b="1" dirty="0">
+                        <a:rPr lang="en-US" sz="1150" b="1" dirty="0">
                           <a:solidFill>
                             <a:srgbClr val="FFFFFF"/>
                           </a:solidFill>
@@ -11137,9 +11355,9 @@
                           <a:ea typeface="Calibri" pitchFamily="34" charset="-122"/>
                           <a:cs typeface="Calibri" pitchFamily="34" charset="-120"/>
                         </a:rPr>
-                        <a:t>Escenario</a:t>
+                        <a:t>Banda</a:t>
                       </a:r>
-                      <a:endParaRPr lang="en-US" sz="1250" dirty="0">
+                      <a:endParaRPr lang="en-US" sz="1150" dirty="0">
                         <a:latin typeface="Calibri" charset="0"/>
                         <a:ea typeface="Calibri" charset="0"/>
                         <a:cs typeface="Calibri" charset="0"/>
@@ -11197,7 +11415,7 @@
                         <a:buNone/>
                       </a:pPr>
                       <a:r>
-                        <a:rPr lang="en-US" sz="1250" b="1" dirty="0">
+                        <a:rPr lang="en-US" sz="1150" b="1" dirty="0">
                           <a:solidFill>
                             <a:srgbClr val="FFFFFF"/>
                           </a:solidFill>
@@ -11205,9 +11423,9 @@
                           <a:ea typeface="Calibri" pitchFamily="34" charset="-122"/>
                           <a:cs typeface="Calibri" pitchFamily="34" charset="-120"/>
                         </a:rPr>
-                        <a:t>Cutoff (score)</a:t>
+                        <a:t>Participación %</a:t>
                       </a:r>
-                      <a:endParaRPr lang="en-US" sz="1250" dirty="0">
+                      <a:endParaRPr lang="en-US" sz="1150" dirty="0">
                         <a:latin typeface="Calibri" charset="0"/>
                         <a:ea typeface="Calibri" charset="0"/>
                         <a:cs typeface="Calibri" charset="0"/>
@@ -11265,7 +11483,7 @@
                         <a:buNone/>
                       </a:pPr>
                       <a:r>
-                        <a:rPr lang="en-US" sz="1250" b="1" dirty="0">
+                        <a:rPr lang="en-US" sz="1150" b="1" dirty="0">
                           <a:solidFill>
                             <a:srgbClr val="FFFFFF"/>
                           </a:solidFill>
@@ -11273,9 +11491,9 @@
                           <a:ea typeface="Calibri" pitchFamily="34" charset="-122"/>
                           <a:cs typeface="Calibri" pitchFamily="34" charset="-120"/>
                         </a:rPr>
-                        <a:t>Tasa de aprobación</a:t>
+                        <a:t>Tasa activa %</a:t>
                       </a:r>
-                      <a:endParaRPr lang="en-US" sz="1250" dirty="0">
+                      <a:endParaRPr lang="en-US" sz="1150" dirty="0">
                         <a:latin typeface="Calibri" charset="0"/>
                         <a:ea typeface="Calibri" charset="0"/>
                         <a:cs typeface="Calibri" charset="0"/>
@@ -11333,7 +11551,7 @@
                         <a:buNone/>
                       </a:pPr>
                       <a:r>
-                        <a:rPr lang="en-US" sz="1250" b="1" dirty="0">
+                        <a:rPr lang="en-US" sz="1150" b="1" dirty="0">
                           <a:solidFill>
                             <a:srgbClr val="FFFFFF"/>
                           </a:solidFill>
@@ -11341,9 +11559,9 @@
                           <a:ea typeface="Calibri" pitchFamily="34" charset="-122"/>
                           <a:cs typeface="Calibri" pitchFamily="34" charset="-120"/>
                         </a:rPr>
-                        <a:t>Mora esperada</a:t>
+                        <a:t>ROA %</a:t>
                       </a:r>
-                      <a:endParaRPr lang="en-US" sz="1250" dirty="0">
+                      <a:endParaRPr lang="en-US" sz="1150" dirty="0">
                         <a:latin typeface="Calibri" charset="0"/>
                         <a:ea typeface="Calibri" charset="0"/>
                         <a:cs typeface="Calibri" charset="0"/>
@@ -11401,7 +11619,7 @@
                         <a:buNone/>
                       </a:pPr>
                       <a:r>
-                        <a:rPr lang="en-US" sz="1250" b="1" dirty="0">
+                        <a:rPr lang="en-US" sz="1150" b="1" dirty="0">
                           <a:solidFill>
                             <a:srgbClr val="FFFFFF"/>
                           </a:solidFill>
@@ -11409,9 +11627,9 @@
                           <a:ea typeface="Calibri" pitchFamily="34" charset="-122"/>
                           <a:cs typeface="Calibri" pitchFamily="34" charset="-120"/>
                         </a:rPr>
-                        <a:t>ROA estimado</a:t>
+                        <a:t>Utilidad neta</a:t>
                       </a:r>
-                      <a:endParaRPr lang="en-US" sz="1250" dirty="0">
+                      <a:endParaRPr lang="en-US" sz="1150" dirty="0">
                         <a:latin typeface="Calibri" charset="0"/>
                         <a:ea typeface="Calibri" charset="0"/>
                         <a:cs typeface="Calibri" charset="0"/>
@@ -11460,13 +11678,8 @@
                     </a:solidFill>
                   </a:tcPr>
                 </a:tc>
-                <a:extLst>
-                  <a:ext uri="{0D108BD9-81ED-4DB2-BD59-A6C34878D82A}">
-                    <a16:rowId xmlns:a16="http://schemas.microsoft.com/office/drawing/2014/main" val="10000"/>
-                  </a:ext>
-                </a:extLst>
               </a:tr>
-              <a:tr h="548640">
+              <a:tr h="438912">
                 <a:tc>
                   <a:txBody>
                     <a:bodyPr/>
@@ -11476,7 +11689,7 @@
                         <a:buNone/>
                       </a:pPr>
                       <a:r>
-                        <a:rPr lang="en-US" sz="1300" b="1" dirty="0">
+                        <a:rPr lang="en-US" sz="1150" b="1" dirty="0">
                           <a:solidFill>
                             <a:srgbClr val="141A45"/>
                           </a:solidFill>
@@ -11484,9 +11697,351 @@
                           <a:ea typeface="Calibri" pitchFamily="34" charset="-122"/>
                           <a:cs typeface="Calibri" pitchFamily="34" charset="-120"/>
                         </a:rPr>
-                        <a:t>Conservador</a:t>
+                        <a:t>Bajo Riesgo</a:t>
                       </a:r>
-                      <a:endParaRPr lang="en-US" sz="1300" dirty="0">
+                      <a:endParaRPr lang="en-US" sz="1150" dirty="0">
+                        <a:latin typeface="Calibri" charset="0"/>
+                        <a:ea typeface="Calibri" charset="0"/>
+                        <a:cs typeface="Calibri" charset="0"/>
+                      </a:endParaRPr>
+                    </a:p>
+                  </a:txBody>
+                  <a:tcPr anchor="ctr">
+                    <a:lnL w="12700" cap="flat" cmpd="sng" algn="ctr">
+                      <a:solidFill>
+                        <a:srgbClr val="E2E7F2"/>
+                      </a:solidFill>
+                      <a:prstDash val="solid"/>
+                      <a:round/>
+                      <a:headEnd type="none" w="med" len="med"/>
+                      <a:tailEnd type="none" w="med" len="med"/>
+                    </a:lnL>
+                    <a:lnR w="12700" cap="flat" cmpd="sng" algn="ctr">
+                      <a:solidFill>
+                        <a:srgbClr val="E2E7F2"/>
+                      </a:solidFill>
+                      <a:prstDash val="solid"/>
+                      <a:round/>
+                      <a:headEnd type="none" w="med" len="med"/>
+                      <a:tailEnd type="none" w="med" len="med"/>
+                    </a:lnR>
+                    <a:lnT w="12700" cap="flat" cmpd="sng" algn="ctr">
+                      <a:solidFill>
+                        <a:srgbClr val="E2E7F2"/>
+                      </a:solidFill>
+                      <a:prstDash val="solid"/>
+                      <a:round/>
+                      <a:headEnd type="none" w="med" len="med"/>
+                      <a:tailEnd type="none" w="med" len="med"/>
+                    </a:lnT>
+                    <a:lnB w="12700" cap="flat" cmpd="sng" algn="ctr">
+                      <a:solidFill>
+                        <a:srgbClr val="E2E7F2"/>
+                      </a:solidFill>
+                      <a:prstDash val="solid"/>
+                      <a:round/>
+                      <a:headEnd type="none" w="med" len="med"/>
+                      <a:tailEnd type="none" w="med" len="med"/>
+                    </a:lnB>
+                    <a:solidFill>
+                      <a:srgbClr val="FFFFFF"/>
+                    </a:solidFill>
+                  </a:tcPr>
+                </a:tc>
+                <a:tc>
+                  <a:txBody>
+                    <a:bodyPr/>
+                    <a:lstStyle/>
+                    <a:p>
+                      <a:pPr marL="0" indent="0" algn="ctr">
+                        <a:buNone/>
+                      </a:pPr>
+                      <a:r>
+                        <a:rPr lang="en-US" sz="1150" dirty="0">
+                          <a:solidFill>
+                            <a:srgbClr val="141A45"/>
+                          </a:solidFill>
+                          <a:latin typeface="Calibri" pitchFamily="34" charset="0"/>
+                          <a:ea typeface="Calibri" pitchFamily="34" charset="-122"/>
+                          <a:cs typeface="Calibri" pitchFamily="34" charset="-120"/>
+                        </a:rPr>
+                        <a:t>32.6%</a:t>
+                      </a:r>
+                      <a:endParaRPr lang="en-US" sz="1150" dirty="0">
+                        <a:latin typeface="Calibri" charset="0"/>
+                        <a:ea typeface="Calibri" charset="0"/>
+                        <a:cs typeface="Calibri" charset="0"/>
+                      </a:endParaRPr>
+                    </a:p>
+                  </a:txBody>
+                  <a:tcPr anchor="ctr">
+                    <a:lnL w="12700" cap="flat" cmpd="sng" algn="ctr">
+                      <a:solidFill>
+                        <a:srgbClr val="E2E7F2"/>
+                      </a:solidFill>
+                      <a:prstDash val="solid"/>
+                      <a:round/>
+                      <a:headEnd type="none" w="med" len="med"/>
+                      <a:tailEnd type="none" w="med" len="med"/>
+                    </a:lnL>
+                    <a:lnR w="12700" cap="flat" cmpd="sng" algn="ctr">
+                      <a:solidFill>
+                        <a:srgbClr val="E2E7F2"/>
+                      </a:solidFill>
+                      <a:prstDash val="solid"/>
+                      <a:round/>
+                      <a:headEnd type="none" w="med" len="med"/>
+                      <a:tailEnd type="none" w="med" len="med"/>
+                    </a:lnR>
+                    <a:lnT w="12700" cap="flat" cmpd="sng" algn="ctr">
+                      <a:solidFill>
+                        <a:srgbClr val="E2E7F2"/>
+                      </a:solidFill>
+                      <a:prstDash val="solid"/>
+                      <a:round/>
+                      <a:headEnd type="none" w="med" len="med"/>
+                      <a:tailEnd type="none" w="med" len="med"/>
+                    </a:lnT>
+                    <a:lnB w="12700" cap="flat" cmpd="sng" algn="ctr">
+                      <a:solidFill>
+                        <a:srgbClr val="E2E7F2"/>
+                      </a:solidFill>
+                      <a:prstDash val="solid"/>
+                      <a:round/>
+                      <a:headEnd type="none" w="med" len="med"/>
+                      <a:tailEnd type="none" w="med" len="med"/>
+                    </a:lnB>
+                    <a:solidFill>
+                      <a:srgbClr val="FFFFFF"/>
+                    </a:solidFill>
+                  </a:tcPr>
+                </a:tc>
+                <a:tc>
+                  <a:txBody>
+                    <a:bodyPr/>
+                    <a:lstStyle/>
+                    <a:p>
+                      <a:pPr marL="0" indent="0" algn="ctr">
+                        <a:buNone/>
+                      </a:pPr>
+                      <a:r>
+                        <a:rPr lang="en-US" sz="1150" dirty="0">
+                          <a:solidFill>
+                            <a:srgbClr val="141A45"/>
+                          </a:solidFill>
+                          <a:latin typeface="Calibri" pitchFamily="34" charset="0"/>
+                          <a:ea typeface="Calibri" pitchFamily="34" charset="-122"/>
+                          <a:cs typeface="Calibri" pitchFamily="34" charset="-120"/>
+                        </a:rPr>
+                        <a:t>14.0%</a:t>
+                      </a:r>
+                      <a:endParaRPr lang="en-US" sz="1150" dirty="0">
+                        <a:latin typeface="Calibri" charset="0"/>
+                        <a:ea typeface="Calibri" charset="0"/>
+                        <a:cs typeface="Calibri" charset="0"/>
+                      </a:endParaRPr>
+                    </a:p>
+                  </a:txBody>
+                  <a:tcPr anchor="ctr">
+                    <a:lnL w="12700" cap="flat" cmpd="sng" algn="ctr">
+                      <a:solidFill>
+                        <a:srgbClr val="E2E7F2"/>
+                      </a:solidFill>
+                      <a:prstDash val="solid"/>
+                      <a:round/>
+                      <a:headEnd type="none" w="med" len="med"/>
+                      <a:tailEnd type="none" w="med" len="med"/>
+                    </a:lnL>
+                    <a:lnR w="12700" cap="flat" cmpd="sng" algn="ctr">
+                      <a:solidFill>
+                        <a:srgbClr val="E2E7F2"/>
+                      </a:solidFill>
+                      <a:prstDash val="solid"/>
+                      <a:round/>
+                      <a:headEnd type="none" w="med" len="med"/>
+                      <a:tailEnd type="none" w="med" len="med"/>
+                    </a:lnR>
+                    <a:lnT w="12700" cap="flat" cmpd="sng" algn="ctr">
+                      <a:solidFill>
+                        <a:srgbClr val="E2E7F2"/>
+                      </a:solidFill>
+                      <a:prstDash val="solid"/>
+                      <a:round/>
+                      <a:headEnd type="none" w="med" len="med"/>
+                      <a:tailEnd type="none" w="med" len="med"/>
+                    </a:lnT>
+                    <a:lnB w="12700" cap="flat" cmpd="sng" algn="ctr">
+                      <a:solidFill>
+                        <a:srgbClr val="E2E7F2"/>
+                      </a:solidFill>
+                      <a:prstDash val="solid"/>
+                      <a:round/>
+                      <a:headEnd type="none" w="med" len="med"/>
+                      <a:tailEnd type="none" w="med" len="med"/>
+                    </a:lnB>
+                    <a:solidFill>
+                      <a:srgbClr val="FFFFFF"/>
+                    </a:solidFill>
+                  </a:tcPr>
+                </a:tc>
+                <a:tc>
+                  <a:txBody>
+                    <a:bodyPr/>
+                    <a:lstStyle/>
+                    <a:p>
+                      <a:pPr marL="0" indent="0" algn="ctr">
+                        <a:buNone/>
+                      </a:pPr>
+                      <a:r>
+                        <a:rPr lang="en-US" sz="1150" dirty="0">
+                          <a:solidFill>
+                            <a:srgbClr val="141A45"/>
+                          </a:solidFill>
+                          <a:latin typeface="Calibri" pitchFamily="34" charset="0"/>
+                          <a:ea typeface="Calibri" pitchFamily="34" charset="-122"/>
+                          <a:cs typeface="Calibri" pitchFamily="34" charset="-120"/>
+                        </a:rPr>
+                        <a:t>4.7%</a:t>
+                      </a:r>
+                      <a:endParaRPr lang="en-US" sz="1150" dirty="0">
+                        <a:latin typeface="Calibri" charset="0"/>
+                        <a:ea typeface="Calibri" charset="0"/>
+                        <a:cs typeface="Calibri" charset="0"/>
+                      </a:endParaRPr>
+                    </a:p>
+                  </a:txBody>
+                  <a:tcPr anchor="ctr">
+                    <a:lnL w="12700" cap="flat" cmpd="sng" algn="ctr">
+                      <a:solidFill>
+                        <a:srgbClr val="E2E7F2"/>
+                      </a:solidFill>
+                      <a:prstDash val="solid"/>
+                      <a:round/>
+                      <a:headEnd type="none" w="med" len="med"/>
+                      <a:tailEnd type="none" w="med" len="med"/>
+                    </a:lnL>
+                    <a:lnR w="12700" cap="flat" cmpd="sng" algn="ctr">
+                      <a:solidFill>
+                        <a:srgbClr val="E2E7F2"/>
+                      </a:solidFill>
+                      <a:prstDash val="solid"/>
+                      <a:round/>
+                      <a:headEnd type="none" w="med" len="med"/>
+                      <a:tailEnd type="none" w="med" len="med"/>
+                    </a:lnR>
+                    <a:lnT w="12700" cap="flat" cmpd="sng" algn="ctr">
+                      <a:solidFill>
+                        <a:srgbClr val="E2E7F2"/>
+                      </a:solidFill>
+                      <a:prstDash val="solid"/>
+                      <a:round/>
+                      <a:headEnd type="none" w="med" len="med"/>
+                      <a:tailEnd type="none" w="med" len="med"/>
+                    </a:lnT>
+                    <a:lnB w="12700" cap="flat" cmpd="sng" algn="ctr">
+                      <a:solidFill>
+                        <a:srgbClr val="E2E7F2"/>
+                      </a:solidFill>
+                      <a:prstDash val="solid"/>
+                      <a:round/>
+                      <a:headEnd type="none" w="med" len="med"/>
+                      <a:tailEnd type="none" w="med" len="med"/>
+                    </a:lnB>
+                    <a:solidFill>
+                      <a:srgbClr val="FFFFFF"/>
+                    </a:solidFill>
+                  </a:tcPr>
+                </a:tc>
+                <a:tc>
+                  <a:txBody>
+                    <a:bodyPr/>
+                    <a:lstStyle/>
+                    <a:p>
+                      <a:pPr marL="0" indent="0" algn="ctr">
+                        <a:buNone/>
+                      </a:pPr>
+                      <a:r>
+                        <a:rPr lang="en-US" sz="1150" dirty="0">
+                          <a:solidFill>
+                            <a:srgbClr val="141A45"/>
+                          </a:solidFill>
+                          <a:latin typeface="Calibri" pitchFamily="34" charset="0"/>
+                          <a:ea typeface="Calibri" pitchFamily="34" charset="-122"/>
+                          <a:cs typeface="Calibri" pitchFamily="34" charset="-120"/>
+                        </a:rPr>
+                        <a:t>S/13.3M</a:t>
+                      </a:r>
+                      <a:endParaRPr lang="en-US" sz="1150" dirty="0">
+                        <a:latin typeface="Calibri" charset="0"/>
+                        <a:ea typeface="Calibri" charset="0"/>
+                        <a:cs typeface="Calibri" charset="0"/>
+                      </a:endParaRPr>
+                    </a:p>
+                  </a:txBody>
+                  <a:tcPr anchor="ctr">
+                    <a:lnL w="12700" cap="flat" cmpd="sng" algn="ctr">
+                      <a:solidFill>
+                        <a:srgbClr val="E2E7F2"/>
+                      </a:solidFill>
+                      <a:prstDash val="solid"/>
+                      <a:round/>
+                      <a:headEnd type="none" w="med" len="med"/>
+                      <a:tailEnd type="none" w="med" len="med"/>
+                    </a:lnL>
+                    <a:lnR w="12700" cap="flat" cmpd="sng" algn="ctr">
+                      <a:solidFill>
+                        <a:srgbClr val="E2E7F2"/>
+                      </a:solidFill>
+                      <a:prstDash val="solid"/>
+                      <a:round/>
+                      <a:headEnd type="none" w="med" len="med"/>
+                      <a:tailEnd type="none" w="med" len="med"/>
+                    </a:lnR>
+                    <a:lnT w="12700" cap="flat" cmpd="sng" algn="ctr">
+                      <a:solidFill>
+                        <a:srgbClr val="E2E7F2"/>
+                      </a:solidFill>
+                      <a:prstDash val="solid"/>
+                      <a:round/>
+                      <a:headEnd type="none" w="med" len="med"/>
+                      <a:tailEnd type="none" w="med" len="med"/>
+                    </a:lnT>
+                    <a:lnB w="12700" cap="flat" cmpd="sng" algn="ctr">
+                      <a:solidFill>
+                        <a:srgbClr val="E2E7F2"/>
+                      </a:solidFill>
+                      <a:prstDash val="solid"/>
+                      <a:round/>
+                      <a:headEnd type="none" w="med" len="med"/>
+                      <a:tailEnd type="none" w="med" len="med"/>
+                    </a:lnB>
+                    <a:solidFill>
+                      <a:srgbClr val="FFFFFF"/>
+                    </a:solidFill>
+                  </a:tcPr>
+                </a:tc>
+              </a:tr>
+              <a:tr h="438912">
+                <a:tc>
+                  <a:txBody>
+                    <a:bodyPr/>
+                    <a:lstStyle/>
+                    <a:p>
+                      <a:pPr marL="0" indent="0" algn="l">
+                        <a:buNone/>
+                      </a:pPr>
+                      <a:r>
+                        <a:rPr lang="en-US" sz="1150" b="1" dirty="0">
+                          <a:solidFill>
+                            <a:srgbClr val="141A45"/>
+                          </a:solidFill>
+                          <a:latin typeface="Calibri" pitchFamily="34" charset="0"/>
+                          <a:ea typeface="Calibri" pitchFamily="34" charset="-122"/>
+                          <a:cs typeface="Calibri" pitchFamily="34" charset="-120"/>
+                        </a:rPr>
+                        <a:t>Medio Riesgo</a:t>
+                      </a:r>
+                      <a:endParaRPr lang="en-US" sz="1150" dirty="0">
                         <a:latin typeface="Calibri" charset="0"/>
                         <a:ea typeface="Calibri" charset="0"/>
                         <a:cs typeface="Calibri" charset="0"/>
@@ -11544,7 +12099,7 @@
                         <a:buNone/>
                       </a:pPr>
                       <a:r>
-                        <a:rPr lang="en-US" sz="1300" dirty="0">
+                        <a:rPr lang="en-US" sz="1150" dirty="0">
                           <a:solidFill>
                             <a:srgbClr val="141A45"/>
                           </a:solidFill>
@@ -11552,9 +12107,9 @@
                           <a:ea typeface="Calibri" pitchFamily="34" charset="-122"/>
                           <a:cs typeface="Calibri" pitchFamily="34" charset="-120"/>
                         </a:rPr>
-                        <a:t>660</a:t>
+                        <a:t>30.1%</a:t>
                       </a:r>
-                      <a:endParaRPr lang="en-US" sz="1300" dirty="0">
+                      <a:endParaRPr lang="en-US" sz="1150" dirty="0">
                         <a:latin typeface="Calibri" charset="0"/>
                         <a:ea typeface="Calibri" charset="0"/>
                         <a:cs typeface="Calibri" charset="0"/>
@@ -11612,7 +12167,7 @@
                         <a:buNone/>
                       </a:pPr>
                       <a:r>
-                        <a:rPr lang="en-US" sz="1300" dirty="0">
+                        <a:rPr lang="en-US" sz="1150" dirty="0">
                           <a:solidFill>
                             <a:srgbClr val="141A45"/>
                           </a:solidFill>
@@ -11620,9 +12175,9 @@
                           <a:ea typeface="Calibri" pitchFamily="34" charset="-122"/>
                           <a:cs typeface="Calibri" pitchFamily="34" charset="-120"/>
                         </a:rPr>
-                        <a:t>72%</a:t>
+                        <a:t>18.0%</a:t>
                       </a:r>
-                      <a:endParaRPr lang="en-US" sz="1300" dirty="0">
+                      <a:endParaRPr lang="en-US" sz="1150" dirty="0">
                         <a:latin typeface="Calibri" charset="0"/>
                         <a:ea typeface="Calibri" charset="0"/>
                         <a:cs typeface="Calibri" charset="0"/>
@@ -11680,7 +12235,7 @@
                         <a:buNone/>
                       </a:pPr>
                       <a:r>
-                        <a:rPr lang="en-US" sz="1300" dirty="0">
+                        <a:rPr lang="en-US" sz="1150" dirty="0">
                           <a:solidFill>
                             <a:srgbClr val="141A45"/>
                           </a:solidFill>
@@ -11688,9 +12243,9 @@
                           <a:ea typeface="Calibri" pitchFamily="34" charset="-122"/>
                           <a:cs typeface="Calibri" pitchFamily="34" charset="-120"/>
                         </a:rPr>
-                        <a:t>2.1%</a:t>
+                        <a:t>7.4%</a:t>
                       </a:r>
-                      <a:endParaRPr lang="en-US" sz="1300" dirty="0">
+                      <a:endParaRPr lang="en-US" sz="1150" dirty="0">
                         <a:latin typeface="Calibri" charset="0"/>
                         <a:ea typeface="Calibri" charset="0"/>
                         <a:cs typeface="Calibri" charset="0"/>
@@ -11748,7 +12303,7 @@
                         <a:buNone/>
                       </a:pPr>
                       <a:r>
-                        <a:rPr lang="en-US" sz="1300" dirty="0">
+                        <a:rPr lang="en-US" sz="1150" dirty="0">
                           <a:solidFill>
                             <a:srgbClr val="141A45"/>
                           </a:solidFill>
@@ -11756,9 +12311,9 @@
                           <a:ea typeface="Calibri" pitchFamily="34" charset="-122"/>
                           <a:cs typeface="Calibri" pitchFamily="34" charset="-120"/>
                         </a:rPr>
-                        <a:t>2.05%</a:t>
+                        <a:t>S/19.3M</a:t>
                       </a:r>
-                      <a:endParaRPr lang="en-US" sz="1300" dirty="0">
+                      <a:endParaRPr lang="en-US" sz="1150" dirty="0">
                         <a:latin typeface="Calibri" charset="0"/>
                         <a:ea typeface="Calibri" charset="0"/>
                         <a:cs typeface="Calibri" charset="0"/>
@@ -11807,13 +12362,8 @@
                     </a:solidFill>
                   </a:tcPr>
                 </a:tc>
-                <a:extLst>
-                  <a:ext uri="{0D108BD9-81ED-4DB2-BD59-A6C34878D82A}">
-                    <a16:rowId xmlns:a16="http://schemas.microsoft.com/office/drawing/2014/main" val="10001"/>
-                  </a:ext>
-                </a:extLst>
               </a:tr>
-              <a:tr h="548640">
+              <a:tr h="438912">
                 <a:tc>
                   <a:txBody>
                     <a:bodyPr/>
@@ -11823,7 +12373,7 @@
                         <a:buNone/>
                       </a:pPr>
                       <a:r>
-                        <a:rPr lang="en-US" sz="1300" b="1" dirty="0">
+                        <a:rPr lang="en-US" sz="1150" b="1" dirty="0">
                           <a:solidFill>
                             <a:srgbClr val="141A45"/>
                           </a:solidFill>
@@ -11831,9 +12381,9 @@
                           <a:ea typeface="Calibri" pitchFamily="34" charset="-122"/>
                           <a:cs typeface="Calibri" pitchFamily="34" charset="-120"/>
                         </a:rPr>
-                        <a:t>Recomendado</a:t>
+                        <a:t>Alto Riesgo</a:t>
                       </a:r>
-                      <a:endParaRPr lang="en-US" sz="1300" dirty="0">
+                      <a:endParaRPr lang="en-US" sz="1150" dirty="0">
                         <a:latin typeface="Calibri" charset="0"/>
                         <a:ea typeface="Calibri" charset="0"/>
                         <a:cs typeface="Calibri" charset="0"/>
@@ -11878,7 +12428,7 @@
                       <a:tailEnd type="none" w="med" len="med"/>
                     </a:lnB>
                     <a:solidFill>
-                      <a:srgbClr val="EAF1FF"/>
+                      <a:srgbClr val="FFFFFF"/>
                     </a:solidFill>
                   </a:tcPr>
                 </a:tc>
@@ -11891,17 +12441,17 @@
                         <a:buNone/>
                       </a:pPr>
                       <a:r>
-                        <a:rPr lang="en-US" sz="1300" b="1" dirty="0">
+                        <a:rPr lang="en-US" sz="1150" dirty="0">
                           <a:solidFill>
-                            <a:srgbClr val="1E2761"/>
+                            <a:srgbClr val="141A45"/>
                           </a:solidFill>
                           <a:latin typeface="Calibri" pitchFamily="34" charset="0"/>
                           <a:ea typeface="Calibri" pitchFamily="34" charset="-122"/>
                           <a:cs typeface="Calibri" pitchFamily="34" charset="-120"/>
                         </a:rPr>
-                        <a:t>635</a:t>
+                        <a:t>28.9%</a:t>
                       </a:r>
-                      <a:endParaRPr lang="en-US" sz="1300" dirty="0">
+                      <a:endParaRPr lang="en-US" sz="1150" dirty="0">
                         <a:latin typeface="Calibri" charset="0"/>
                         <a:ea typeface="Calibri" charset="0"/>
                         <a:cs typeface="Calibri" charset="0"/>
@@ -11946,7 +12496,7 @@
                       <a:tailEnd type="none" w="med" len="med"/>
                     </a:lnB>
                     <a:solidFill>
-                      <a:srgbClr val="EAF1FF"/>
+                      <a:srgbClr val="FFFFFF"/>
                     </a:solidFill>
                   </a:tcPr>
                 </a:tc>
@@ -11959,17 +12509,17 @@
                         <a:buNone/>
                       </a:pPr>
                       <a:r>
-                        <a:rPr lang="en-US" sz="1300" b="1" dirty="0">
+                        <a:rPr lang="en-US" sz="1150" dirty="0">
                           <a:solidFill>
-                            <a:srgbClr val="1E2761"/>
+                            <a:srgbClr val="141A45"/>
                           </a:solidFill>
                           <a:latin typeface="Calibri" pitchFamily="34" charset="0"/>
                           <a:ea typeface="Calibri" pitchFamily="34" charset="-122"/>
                           <a:cs typeface="Calibri" pitchFamily="34" charset="-120"/>
                         </a:rPr>
-                        <a:t>81%</a:t>
+                        <a:t>28.0%</a:t>
                       </a:r>
-                      <a:endParaRPr lang="en-US" sz="1300" dirty="0">
+                      <a:endParaRPr lang="en-US" sz="1150" dirty="0">
                         <a:latin typeface="Calibri" charset="0"/>
                         <a:ea typeface="Calibri" charset="0"/>
                         <a:cs typeface="Calibri" charset="0"/>
@@ -12014,7 +12564,7 @@
                       <a:tailEnd type="none" w="med" len="med"/>
                     </a:lnB>
                     <a:solidFill>
-                      <a:srgbClr val="EAF1FF"/>
+                      <a:srgbClr val="FFFFFF"/>
                     </a:solidFill>
                   </a:tcPr>
                 </a:tc>
@@ -12027,17 +12577,17 @@
                         <a:buNone/>
                       </a:pPr>
                       <a:r>
-                        <a:rPr lang="en-US" sz="1300" b="1" dirty="0">
+                        <a:rPr lang="en-US" sz="1150" dirty="0">
                           <a:solidFill>
-                            <a:srgbClr val="1E2761"/>
+                            <a:srgbClr val="141A45"/>
                           </a:solidFill>
                           <a:latin typeface="Calibri" pitchFamily="34" charset="0"/>
                           <a:ea typeface="Calibri" pitchFamily="34" charset="-122"/>
                           <a:cs typeface="Calibri" pitchFamily="34" charset="-120"/>
                         </a:rPr>
-                        <a:t>3.0%</a:t>
+                        <a:t>12.9%</a:t>
                       </a:r>
-                      <a:endParaRPr lang="en-US" sz="1300" dirty="0">
+                      <a:endParaRPr lang="en-US" sz="1150" dirty="0">
                         <a:latin typeface="Calibri" charset="0"/>
                         <a:ea typeface="Calibri" charset="0"/>
                         <a:cs typeface="Calibri" charset="0"/>
@@ -12082,7 +12632,7 @@
                       <a:tailEnd type="none" w="med" len="med"/>
                     </a:lnB>
                     <a:solidFill>
-                      <a:srgbClr val="EAF1FF"/>
+                      <a:srgbClr val="FFFFFF"/>
                     </a:solidFill>
                   </a:tcPr>
                 </a:tc>
@@ -12095,17 +12645,17 @@
                         <a:buNone/>
                       </a:pPr>
                       <a:r>
-                        <a:rPr lang="en-US" sz="1300" b="1" dirty="0">
+                        <a:rPr lang="en-US" sz="1150" dirty="0">
                           <a:solidFill>
-                            <a:srgbClr val="1E2761"/>
+                            <a:srgbClr val="141A45"/>
                           </a:solidFill>
                           <a:latin typeface="Calibri" pitchFamily="34" charset="0"/>
                           <a:ea typeface="Calibri" pitchFamily="34" charset="-122"/>
                           <a:cs typeface="Calibri" pitchFamily="34" charset="-120"/>
                         </a:rPr>
-                        <a:t>2.20%</a:t>
+                        <a:t>S/32.5M</a:t>
                       </a:r>
-                      <a:endParaRPr lang="en-US" sz="1300" dirty="0">
+                      <a:endParaRPr lang="en-US" sz="1150" dirty="0">
                         <a:latin typeface="Calibri" charset="0"/>
                         <a:ea typeface="Calibri" charset="0"/>
                         <a:cs typeface="Calibri" charset="0"/>
@@ -12150,17 +12700,12 @@
                       <a:tailEnd type="none" w="med" len="med"/>
                     </a:lnB>
                     <a:solidFill>
-                      <a:srgbClr val="EAF1FF"/>
+                      <a:srgbClr val="FFFFFF"/>
                     </a:solidFill>
                   </a:tcPr>
                 </a:tc>
-                <a:extLst>
-                  <a:ext uri="{0D108BD9-81ED-4DB2-BD59-A6C34878D82A}">
-                    <a16:rowId xmlns:a16="http://schemas.microsoft.com/office/drawing/2014/main" val="10002"/>
-                  </a:ext>
-                </a:extLst>
               </a:tr>
-              <a:tr h="548640">
+              <a:tr h="438912">
                 <a:tc>
                   <a:txBody>
                     <a:bodyPr/>
@@ -12170,7 +12715,7 @@
                         <a:buNone/>
                       </a:pPr>
                       <a:r>
-                        <a:rPr lang="en-US" sz="1300" b="1" dirty="0">
+                        <a:rPr lang="en-US" sz="1150" b="1" dirty="0">
                           <a:solidFill>
                             <a:srgbClr val="141A45"/>
                           </a:solidFill>
@@ -12178,9 +12723,9 @@
                           <a:ea typeface="Calibri" pitchFamily="34" charset="-122"/>
                           <a:cs typeface="Calibri" pitchFamily="34" charset="-120"/>
                         </a:rPr>
-                        <a:t>Agresivo</a:t>
+                        <a:t>Muy Alto Riesgo</a:t>
                       </a:r>
-                      <a:endParaRPr lang="en-US" sz="1300" dirty="0">
+                      <a:endParaRPr lang="en-US" sz="1150" dirty="0">
                         <a:latin typeface="Calibri" charset="0"/>
                         <a:ea typeface="Calibri" charset="0"/>
                         <a:cs typeface="Calibri" charset="0"/>
@@ -12238,7 +12783,7 @@
                         <a:buNone/>
                       </a:pPr>
                       <a:r>
-                        <a:rPr lang="en-US" sz="1300" dirty="0">
+                        <a:rPr lang="en-US" sz="1150" dirty="0">
                           <a:solidFill>
                             <a:srgbClr val="141A45"/>
                           </a:solidFill>
@@ -12246,9 +12791,9 @@
                           <a:ea typeface="Calibri" pitchFamily="34" charset="-122"/>
                           <a:cs typeface="Calibri" pitchFamily="34" charset="-120"/>
                         </a:rPr>
-                        <a:t>610</a:t>
+                        <a:t>8.4%</a:t>
                       </a:r>
-                      <a:endParaRPr lang="en-US" sz="1300" dirty="0">
+                      <a:endParaRPr lang="en-US" sz="1150" dirty="0">
                         <a:latin typeface="Calibri" charset="0"/>
                         <a:ea typeface="Calibri" charset="0"/>
                         <a:cs typeface="Calibri" charset="0"/>
@@ -12306,7 +12851,7 @@
                         <a:buNone/>
                       </a:pPr>
                       <a:r>
-                        <a:rPr lang="en-US" sz="1300" dirty="0">
+                        <a:rPr lang="en-US" sz="1150" dirty="0">
                           <a:solidFill>
                             <a:srgbClr val="141A45"/>
                           </a:solidFill>
@@ -12314,9 +12859,9 @@
                           <a:ea typeface="Calibri" pitchFamily="34" charset="-122"/>
                           <a:cs typeface="Calibri" pitchFamily="34" charset="-120"/>
                         </a:rPr>
-                        <a:t>89%</a:t>
+                        <a:t>35.0%</a:t>
                       </a:r>
-                      <a:endParaRPr lang="en-US" sz="1300" dirty="0">
+                      <a:endParaRPr lang="en-US" sz="1150" dirty="0">
                         <a:latin typeface="Calibri" charset="0"/>
                         <a:ea typeface="Calibri" charset="0"/>
                         <a:cs typeface="Calibri" charset="0"/>
@@ -12374,7 +12919,7 @@
                         <a:buNone/>
                       </a:pPr>
                       <a:r>
-                        <a:rPr lang="en-US" sz="1300" dirty="0">
+                        <a:rPr lang="en-US" sz="1150" dirty="0">
                           <a:solidFill>
                             <a:srgbClr val="141A45"/>
                           </a:solidFill>
@@ -12382,9 +12927,9 @@
                           <a:ea typeface="Calibri" pitchFamily="34" charset="-122"/>
                           <a:cs typeface="Calibri" pitchFamily="34" charset="-120"/>
                         </a:rPr>
-                        <a:t>4.6%</a:t>
+                        <a:t>-3.9%</a:t>
                       </a:r>
-                      <a:endParaRPr lang="en-US" sz="1300" dirty="0">
+                      <a:endParaRPr lang="en-US" sz="1150" dirty="0">
                         <a:latin typeface="Calibri" charset="0"/>
                         <a:ea typeface="Calibri" charset="0"/>
                         <a:cs typeface="Calibri" charset="0"/>
@@ -12442,7 +12987,7 @@
                         <a:buNone/>
                       </a:pPr>
                       <a:r>
-                        <a:rPr lang="en-US" sz="1300" dirty="0">
+                        <a:rPr lang="en-US" sz="1150" dirty="0">
                           <a:solidFill>
                             <a:srgbClr val="141A45"/>
                           </a:solidFill>
@@ -12450,9 +12995,9 @@
                           <a:ea typeface="Calibri" pitchFamily="34" charset="-122"/>
                           <a:cs typeface="Calibri" pitchFamily="34" charset="-120"/>
                         </a:rPr>
-                        <a:t>2.02%</a:t>
+                        <a:t>S/-2.8M</a:t>
                       </a:r>
-                      <a:endParaRPr lang="en-US" sz="1300" dirty="0">
+                      <a:endParaRPr lang="en-US" sz="1150" dirty="0">
                         <a:latin typeface="Calibri" charset="0"/>
                         <a:ea typeface="Calibri" charset="0"/>
                         <a:cs typeface="Calibri" charset="0"/>
@@ -12501,11 +13046,6 @@
                     </a:solidFill>
                   </a:tcPr>
                 </a:tc>
-                <a:extLst>
-                  <a:ext uri="{0D108BD9-81ED-4DB2-BD59-A6C34878D82A}">
-                    <a16:rowId xmlns:a16="http://schemas.microsoft.com/office/drawing/2014/main" val="10003"/>
-                  </a:ext>
-                </a:extLst>
               </a:tr>
             </a:tbl>
           </a:graphicData>
@@ -12683,7 +13223,7 @@
                 <a:ea typeface="Calibri" pitchFamily="34" charset="-122"/>
                 <a:cs typeface="Calibri" pitchFamily="34" charset="-120"/>
               </a:rPr>
-              <a:t>El escenario 'Recomendado' (cutoff 635) maximiza el ROA de cartera: un cutoff más agresivo aprueba más volumen pero la mora adicional erosiona la rentabilidad marginal.</a:t>
+              <a:t>El foco de gestión debe estar en Muy Alto Riesgo (8.4% de la cartera, ROA -3.9%) — candidata a rechazo o repricing. Las otras 3 bandas ya son rentables (ROA 4.7% a 12.9%) y no requieren intervención.</a:t>
             </a:r>
             <a:endParaRPr lang="en-US" sz="1250" dirty="0"/>
           </a:p>
@@ -13018,7 +13558,7 @@
                 <a:ea typeface="Cambria" pitchFamily="34" charset="-122"/>
                 <a:cs typeface="Cambria" pitchFamily="34" charset="-120"/>
               </a:rPr>
-              <a:t>Cutoff operativo</a:t>
+              <a:t>Política de 4 bandas</a:t>
             </a:r>
             <a:endParaRPr lang="en-US" sz="1500" dirty="0"/>
           </a:p>
@@ -13057,7 +13597,7 @@
                 <a:ea typeface="Calibri" pitchFamily="34" charset="-122"/>
                 <a:cs typeface="Calibri" pitchFamily="34" charset="-120"/>
               </a:rPr>
-              <a:t>Adoptar el escenario recomendado (score 635) como política inicial, con revisión a 90 días.</a:t>
+              <a:t>Adoptar las 4 bandas de riesgo ya calibradas en producción, con foco de revisión a 90 días en el tratamiento de Muy Alto Riesgo (única banda no rentable).</a:t>
             </a:r>
             <a:endParaRPr lang="en-US" sz="1200" dirty="0"/>
           </a:p>
@@ -14042,7 +14582,7 @@
                 <a:ea typeface="Calibri" pitchFamily="34" charset="-122"/>
                 <a:cs typeface="Calibri" pitchFamily="34" charset="-120"/>
               </a:rPr>
-              <a:t>Con el cutoff recomendado, el ROA de cartera mejora en +0.35 p.p. y la pérdida esperada cae 18% frente a la política vigente.</a:t>
+              <a:t>Con las 4 bandas de riesgo calibradas, el ROA de cartera ponderado es 7.18% y el 91.6% de la cartera está en bandas rentables — Muy Alto Riesgo (8.4%, ROA -3.9%) es el único segmento candidato a rechazo o repricing.</a:t>
             </a:r>
             <a:endParaRPr lang="en-US" sz="1400" dirty="0"/>
           </a:p>
@@ -19665,7 +20205,6 @@
             <a:pPr marL="0" indent="0">
               <a:buNone/>
             </a:pPr>
-            <a:endParaRPr lang="en-US" sz="1250" dirty="0"/>
             <a:r>
               <a:rPr lang="en-US" sz="1250" i="1" dirty="0">
                 <a:solidFill>
@@ -19677,6 +20216,7 @@
               </a:rPr>
               <a:t>Comparación de AUC (cross-validation) entre los 6 algoritmos evaluados en 03_training_model.ipynb.</a:t>
             </a:r>
+            <a:endParaRPr lang="en-US" sz="1250" dirty="0"/>
           </a:p>
         </p:txBody>
       </p:sp>
@@ -19839,7 +20379,6 @@
             <a:pPr marL="0" indent="0">
               <a:buNone/>
             </a:pPr>
-            <a:endParaRPr lang="en-US" sz="1500" dirty="0"/>
             <a:r>
               <a:rPr lang="en-US" sz="1500" b="1" dirty="0">
                 <a:solidFill>
@@ -19851,6 +20390,7 @@
               </a:rPr>
               <a:t>Por qué CatBoost</a:t>
             </a:r>
+            <a:endParaRPr lang="en-US" sz="1500" dirty="0"/>
           </a:p>
         </p:txBody>
       </p:sp>
@@ -19905,7 +20445,6 @@
             <a:pPr marL="0" indent="0">
               <a:buNone/>
             </a:pPr>
-            <a:endParaRPr lang="en-US" sz="1150" dirty="0"/>
             <a:r>
               <a:rPr lang="en-US" sz="1150" dirty="0">
                 <a:solidFill>
@@ -19917,6 +20456,7 @@
               </a:rPr>
               <a:t>LogisticRegression alcanzó un AUC (CV) de 0.825 — competitivo e interpretable, pero no fue el modelo elegido.</a:t>
             </a:r>
+            <a:endParaRPr lang="en-US" sz="1150" dirty="0"/>
           </a:p>
         </p:txBody>
       </p:sp>
@@ -19971,7 +20511,6 @@
             <a:pPr marL="0" indent="0">
               <a:buNone/>
             </a:pPr>
-            <a:endParaRPr lang="en-US" sz="1150" dirty="0"/>
             <a:r>
               <a:rPr lang="en-US" sz="1150" dirty="0">
                 <a:solidFill>
@@ -19983,6 +20522,7 @@
               </a:rPr>
               <a:t>CatBoost (0.864) y LightGBM (0.865) tuvieron mejor poder predictivo en la comparación de 6 modelos evaluados.</a:t>
             </a:r>
+            <a:endParaRPr lang="en-US" sz="1150" dirty="0"/>
           </a:p>
         </p:txBody>
       </p:sp>
@@ -20037,7 +20577,6 @@
             <a:pPr marL="0" indent="0">
               <a:buNone/>
             </a:pPr>
-            <a:endParaRPr lang="en-US" sz="1150" dirty="0"/>
             <a:r>
               <a:rPr lang="en-US" sz="1150" dirty="0">
                 <a:solidFill>
@@ -20049,6 +20588,7 @@
               </a:rPr>
               <a:t>CatBoost se seleccionó como campeón de producción por su balance entre desempeño e interpretabilidad (soporte nativo de SHAP).</a:t>
             </a:r>
+            <a:endParaRPr lang="en-US" sz="1150" dirty="0"/>
           </a:p>
         </p:txBody>
       </p:sp>
@@ -21237,7 +21777,6 @@
             <a:pPr marL="0" indent="0">
               <a:buNone/>
             </a:pPr>
-            <a:endParaRPr lang="en-US" sz="1700" dirty="0"/>
             <a:r>
               <a:rPr lang="en-US" sz="1700" b="1" dirty="0">
                 <a:solidFill>
@@ -21249,6 +21788,7 @@
               </a:rPr>
               <a:t>Bajo Riesgo</a:t>
             </a:r>
+            <a:endParaRPr lang="en-US" sz="1700" dirty="0"/>
           </a:p>
         </p:txBody>
       </p:sp>
@@ -21276,7 +21816,6 @@
             <a:pPr marL="0" indent="0">
               <a:buNone/>
             </a:pPr>
-            <a:endParaRPr lang="en-US" sz="1300" dirty="0"/>
             <a:r>
               <a:rPr lang="en-US" sz="1300" dirty="0">
                 <a:solidFill>
@@ -21288,6 +21827,7 @@
               </a:rPr>
               <a:t>Cliente real (set de validación)</a:t>
             </a:r>
+            <a:endParaRPr lang="en-US" sz="1300" dirty="0"/>
           </a:p>
         </p:txBody>
       </p:sp>
@@ -21315,7 +21855,6 @@
             <a:pPr marL="0" indent="0">
               <a:buNone/>
             </a:pPr>
-            <a:endParaRPr lang="en-US" sz="2200" dirty="0"/>
             <a:r>
               <a:rPr lang="en-US" sz="2200" b="1" dirty="0">
                 <a:solidFill>
@@ -21327,6 +21866,7 @@
               </a:rPr>
               <a:t>PD: 0.60%</a:t>
             </a:r>
+            <a:endParaRPr lang="en-US" sz="2200" dirty="0"/>
           </a:p>
         </p:txBody>
       </p:sp>
@@ -21491,7 +22031,6 @@
             <a:pPr marL="0" indent="0">
               <a:buNone/>
             </a:pPr>
-            <a:endParaRPr lang="en-US" sz="1700" dirty="0"/>
             <a:r>
               <a:rPr lang="en-US" sz="1700" b="1" dirty="0">
                 <a:solidFill>
@@ -21503,6 +22042,7 @@
               </a:rPr>
               <a:t>Medio Riesgo</a:t>
             </a:r>
+            <a:endParaRPr lang="en-US" sz="1700" dirty="0"/>
           </a:p>
         </p:txBody>
       </p:sp>
@@ -21530,7 +22070,6 @@
             <a:pPr marL="0" indent="0">
               <a:buNone/>
             </a:pPr>
-            <a:endParaRPr lang="en-US" sz="1300" dirty="0"/>
             <a:r>
               <a:rPr lang="en-US" sz="1300" dirty="0">
                 <a:solidFill>
@@ -21542,6 +22081,7 @@
               </a:rPr>
               <a:t>Cliente real (set de validación)</a:t>
             </a:r>
+            <a:endParaRPr lang="en-US" sz="1300" dirty="0"/>
           </a:p>
         </p:txBody>
       </p:sp>
@@ -21569,7 +22109,6 @@
             <a:pPr marL="0" indent="0">
               <a:buNone/>
             </a:pPr>
-            <a:endParaRPr lang="en-US" sz="2200" dirty="0"/>
             <a:r>
               <a:rPr lang="en-US" sz="2200" b="1" dirty="0">
                 <a:solidFill>
@@ -21581,6 +22120,7 @@
               </a:rPr>
               <a:t>PD: 2.00%</a:t>
             </a:r>
+            <a:endParaRPr lang="en-US" sz="2200" dirty="0"/>
           </a:p>
         </p:txBody>
       </p:sp>
@@ -21745,7 +22285,6 @@
             <a:pPr marL="0" indent="0">
               <a:buNone/>
             </a:pPr>
-            <a:endParaRPr lang="en-US" sz="1700" dirty="0"/>
             <a:r>
               <a:rPr lang="en-US" sz="1700" b="1" dirty="0">
                 <a:solidFill>
@@ -21757,6 +22296,7 @@
               </a:rPr>
               <a:t>Alto Riesgo</a:t>
             </a:r>
+            <a:endParaRPr lang="en-US" sz="1700" dirty="0"/>
           </a:p>
         </p:txBody>
       </p:sp>
@@ -21784,7 +22324,6 @@
             <a:pPr marL="0" indent="0">
               <a:buNone/>
             </a:pPr>
-            <a:endParaRPr lang="en-US" sz="1300" dirty="0"/>
             <a:r>
               <a:rPr lang="en-US" sz="1300" dirty="0">
                 <a:solidFill>
@@ -21796,6 +22335,7 @@
               </a:rPr>
               <a:t>Cliente real (set de validación)</a:t>
             </a:r>
+            <a:endParaRPr lang="en-US" sz="1300" dirty="0"/>
           </a:p>
         </p:txBody>
       </p:sp>
@@ -21823,7 +22363,6 @@
             <a:pPr marL="0" indent="0">
               <a:buNone/>
             </a:pPr>
-            <a:endParaRPr lang="en-US" sz="2200" dirty="0"/>
             <a:r>
               <a:rPr lang="en-US" sz="2200" b="1" dirty="0">
                 <a:solidFill>
@@ -21835,6 +22374,7 @@
               </a:rPr>
               <a:t>PD: 8.00%</a:t>
             </a:r>
+            <a:endParaRPr lang="en-US" sz="2200" dirty="0"/>
           </a:p>
         </p:txBody>
       </p:sp>

--- a/presentacion/Resumen_Presentacion.pptx
+++ b/presentacion/Resumen_Presentacion.pptx
@@ -5,7 +5,7 @@
     <p:sldMasterId id="2147483648" r:id="rId1"/>
   </p:sldMasterIdLst>
   <p:notesMasterIdLst>
-    <p:notesMasterId r:id="rId22"/>
+    <p:notesMasterId r:id="rId21"/>
   </p:notesMasterIdLst>
   <p:sldIdLst>
     <p:sldId id="256" r:id="rId2"/>
@@ -17,9 +17,9 @@
     <p:sldId id="263" r:id="rId8"/>
     <p:sldId id="278" r:id="rId9"/>
     <p:sldId id="264" r:id="rId10"/>
-    <p:sldId id="265" r:id="rId11"/>
-    <p:sldId id="266" r:id="rId12"/>
-    <p:sldId id="267" r:id="rId13"/>
+    <p:sldId id="266" r:id="rId11"/>
+    <p:sldId id="267" r:id="rId12"/>
+    <p:sldId id="265" r:id="rId13"/>
     <p:sldId id="268" r:id="rId14"/>
     <p:sldId id="269" r:id="rId15"/>
     <p:sldId id="270" r:id="rId16"/>
@@ -27,7 +27,6 @@
     <p:sldId id="272" r:id="rId18"/>
     <p:sldId id="273" r:id="rId19"/>
     <p:sldId id="274" r:id="rId20"/>
-    <p:sldId id="276" r:id="rId21"/>
   </p:sldIdLst>
   <p:sldSz cx="12192000" cy="6858000"/>
   <p:notesSz cx="6858000" cy="12192000"/>
@@ -159,6 +158,568 @@
                 </a:solidFill>
                 <a:latin typeface="Calibri"/>
               </a:rPr>
+              <a:t>Comparación de modelos — AUC (cross-validation)</a:t>
+            </a:r>
+          </a:p>
+        </c:rich>
+      </c:tx>
+      <c:overlay val="0"/>
+    </c:title>
+    <c:autoTitleDeleted val="0"/>
+    <c:plotArea>
+      <c:layout/>
+      <c:barChart>
+        <c:barDir val="bar"/>
+        <c:grouping val="clustered"/>
+        <c:varyColors val="0"/>
+        <c:ser>
+          <c:idx val="0"/>
+          <c:order val="0"/>
+          <c:tx>
+            <c:strRef>
+              <c:f>Sheet1!$B$1</c:f>
+              <c:strCache>
+                <c:ptCount val="1"/>
+                <c:pt idx="0">
+                  <c:v>AUC (CV)</c:v>
+                </c:pt>
+              </c:strCache>
+            </c:strRef>
+          </c:tx>
+          <c:spPr>
+            <a:solidFill>
+              <a:srgbClr val="1E2761"/>
+            </a:solidFill>
+            <a:effectLst/>
+          </c:spPr>
+          <c:invertIfNegative val="0"/>
+          <c:dLbls>
+            <c:numFmt formatCode="0.000" sourceLinked="0"/>
+            <c:spPr>
+              <a:noFill/>
+              <a:ln>
+                <a:noFill/>
+              </a:ln>
+              <a:effectLst/>
+            </c:spPr>
+            <c:txPr>
+              <a:bodyPr/>
+              <a:lstStyle/>
+              <a:p>
+                <a:pPr>
+                  <a:defRPr sz="1000" b="0" i="0" u="none" strike="noStrike">
+                    <a:solidFill>
+                      <a:srgbClr val="141A45"/>
+                    </a:solidFill>
+                    <a:latin typeface="Arial"/>
+                  </a:defRPr>
+                </a:pPr>
+                <a:endParaRPr lang="en-PE"/>
+              </a:p>
+            </c:txPr>
+            <c:showLegendKey val="0"/>
+            <c:showVal val="1"/>
+            <c:showCatName val="0"/>
+            <c:showSerName val="0"/>
+            <c:showPercent val="0"/>
+            <c:showBubbleSize val="0"/>
+            <c:showLeaderLines val="0"/>
+            <c:extLst>
+              <c:ext xmlns:c15="http://schemas.microsoft.com/office/drawing/2012/chart" uri="{CE6537A1-D6FC-4f65-9D91-7224C49458BB}">
+                <c15:showLeaderLines val="0"/>
+              </c:ext>
+            </c:extLst>
+          </c:dLbls>
+          <c:cat>
+            <c:strRef>
+              <c:f>Sheet1!$A$2:$A$7</c:f>
+              <c:strCache>
+                <c:ptCount val="6"/>
+                <c:pt idx="0">
+                  <c:v>LightGBM</c:v>
+                </c:pt>
+                <c:pt idx="1">
+                  <c:v>CatBoost</c:v>
+                </c:pt>
+                <c:pt idx="2">
+                  <c:v>XGBoost</c:v>
+                </c:pt>
+                <c:pt idx="3">
+                  <c:v>RandomForest</c:v>
+                </c:pt>
+                <c:pt idx="4">
+                  <c:v>LogisticRegression</c:v>
+                </c:pt>
+                <c:pt idx="5">
+                  <c:v>DecisionTree</c:v>
+                </c:pt>
+              </c:strCache>
+            </c:strRef>
+          </c:cat>
+          <c:val>
+            <c:numRef>
+              <c:f>Sheet1!$B$2:$B$7</c:f>
+              <c:numCache>
+                <c:formatCode>0.000</c:formatCode>
+                <c:ptCount val="6"/>
+                <c:pt idx="0">
+                  <c:v>0.86499999999999999</c:v>
+                </c:pt>
+                <c:pt idx="1">
+                  <c:v>0.86399999999999999</c:v>
+                </c:pt>
+                <c:pt idx="2">
+                  <c:v>0.85599999999999998</c:v>
+                </c:pt>
+                <c:pt idx="3">
+                  <c:v>0.84</c:v>
+                </c:pt>
+                <c:pt idx="4">
+                  <c:v>0.82499999999999996</c:v>
+                </c:pt>
+                <c:pt idx="5">
+                  <c:v>0.61399999999999999</c:v>
+                </c:pt>
+              </c:numCache>
+            </c:numRef>
+          </c:val>
+          <c:extLst>
+            <c:ext xmlns:c16="http://schemas.microsoft.com/office/drawing/2014/chart" uri="{C3380CC4-5D6E-409C-BE32-E72D297353CC}">
+              <c16:uniqueId val="{00000000-598E-9547-9037-C4444C194B21}"/>
+            </c:ext>
+          </c:extLst>
+        </c:ser>
+        <c:dLbls>
+          <c:showLegendKey val="0"/>
+          <c:showVal val="1"/>
+          <c:showCatName val="0"/>
+          <c:showSerName val="0"/>
+          <c:showPercent val="0"/>
+          <c:showBubbleSize val="0"/>
+        </c:dLbls>
+        <c:gapWidth val="150"/>
+        <c:axId val="2094734554"/>
+        <c:axId val="2094734552"/>
+      </c:barChart>
+      <c:catAx>
+        <c:axId val="2094734554"/>
+        <c:scaling>
+          <c:orientation val="minMax"/>
+        </c:scaling>
+        <c:delete val="0"/>
+        <c:axPos val="l"/>
+        <c:numFmt formatCode="General" sourceLinked="1"/>
+        <c:majorTickMark val="out"/>
+        <c:minorTickMark val="none"/>
+        <c:tickLblPos val="nextTo"/>
+        <c:spPr>
+          <a:ln w="12700" cap="flat">
+            <a:solidFill>
+              <a:srgbClr val="888888"/>
+            </a:solidFill>
+            <a:prstDash val="solid"/>
+            <a:round/>
+          </a:ln>
+        </c:spPr>
+        <c:txPr>
+          <a:bodyPr/>
+          <a:lstStyle/>
+          <a:p>
+            <a:pPr>
+              <a:defRPr sz="1050" b="0" i="0" u="none" strike="noStrike">
+                <a:solidFill>
+                  <a:srgbClr val="141A45"/>
+                </a:solidFill>
+                <a:latin typeface="Arial"/>
+              </a:defRPr>
+            </a:pPr>
+            <a:endParaRPr lang="en-US"/>
+          </a:p>
+        </c:txPr>
+        <c:crossAx val="2094734552"/>
+        <c:crosses val="autoZero"/>
+        <c:auto val="1"/>
+        <c:lblAlgn val="ctr"/>
+        <c:lblOffset val="100"/>
+        <c:noMultiLvlLbl val="1"/>
+      </c:catAx>
+      <c:valAx>
+        <c:axId val="2094734552"/>
+        <c:scaling>
+          <c:orientation val="minMax"/>
+        </c:scaling>
+        <c:delete val="1"/>
+        <c:axPos val="b"/>
+        <c:numFmt formatCode="General" sourceLinked="0"/>
+        <c:majorTickMark val="out"/>
+        <c:minorTickMark val="none"/>
+        <c:tickLblPos val="low"/>
+        <c:crossAx val="2094734554"/>
+        <c:crosses val="autoZero"/>
+        <c:crossBetween val="between"/>
+      </c:valAx>
+      <c:spPr>
+        <a:solidFill>
+          <a:srgbClr val="F7F9FC"/>
+        </a:solidFill>
+        <a:ln>
+          <a:noFill/>
+        </a:ln>
+        <a:effectLst/>
+      </c:spPr>
+    </c:plotArea>
+    <c:plotVisOnly val="1"/>
+    <c:dispBlanksAs val="span"/>
+    <c:showDLblsOverMax val="1"/>
+  </c:chart>
+  <c:spPr>
+    <a:noFill/>
+    <a:ln>
+      <a:noFill/>
+    </a:ln>
+    <a:effectLst/>
+  </c:spPr>
+  <c:externalData r:id="rId1">
+    <c:autoUpdate val="0"/>
+  </c:externalData>
+</c:chartSpace>
+</file>
+
+<file path=ppt/charts/chart10.xml><?xml version="1.0" encoding="utf-8"?>
+<c:chartSpace xmlns:c="http://schemas.openxmlformats.org/drawingml/2006/chart" xmlns:a="http://schemas.openxmlformats.org/drawingml/2006/main" xmlns:r="http://schemas.openxmlformats.org/officeDocument/2006/relationships" xmlns:c16r2="http://schemas.microsoft.com/office/drawing/2015/06/chart">
+  <c:date1904 val="0"/>
+  <c:lang val="en-US"/>
+  <c:roundedCorners val="1"/>
+  <c:style val="2"/>
+  <c:chart>
+    <c:title>
+      <c:tx>
+        <c:rich>
+          <a:bodyPr/>
+          <a:lstStyle/>
+          <a:p>
+            <a:pPr>
+              <a:defRPr sz="1250" b="0" i="0" u="none" strike="noStrike">
+                <a:solidFill>
+                  <a:srgbClr val="1E2761"/>
+                </a:solidFill>
+                <a:latin typeface="Calibri"/>
+              </a:defRPr>
+            </a:pPr>
+            <a:r>
+              <a:rPr lang="en-US" sz="1250" b="0" i="0" u="none" strike="noStrike">
+                <a:solidFill>
+                  <a:srgbClr val="1E2761"/>
+                </a:solidFill>
+                <a:latin typeface="Calibri"/>
+              </a:rPr>
+              <a:t>ROA real por banda de riesgo</a:t>
+            </a:r>
+          </a:p>
+        </c:rich>
+      </c:tx>
+      <c:overlay val="0"/>
+    </c:title>
+    <c:autoTitleDeleted val="0"/>
+    <c:plotArea>
+      <c:layout/>
+      <c:barChart>
+        <c:barDir val="col"/>
+        <c:grouping val="clustered"/>
+        <c:varyColors val="0"/>
+        <c:ser>
+          <c:idx val="0"/>
+          <c:order val="0"/>
+          <c:tx>
+            <c:strRef>
+              <c:f>Sheet1!$B$1</c:f>
+              <c:strCache>
+                <c:ptCount val="1"/>
+                <c:pt idx="0">
+                  <c:v>ROA (%)</c:v>
+                </c:pt>
+              </c:strCache>
+            </c:strRef>
+          </c:tx>
+          <c:spPr>
+            <a:solidFill>
+              <a:srgbClr val="1E2761"/>
+            </a:solidFill>
+            <a:effectLst/>
+          </c:spPr>
+          <c:invertIfNegative val="0"/>
+          <c:dPt>
+            <c:idx val="0"/>
+            <c:invertIfNegative val="0"/>
+            <c:bubble3D val="0"/>
+            <c:spPr>
+              <a:solidFill>
+                <a:srgbClr val="2E8B57"/>
+              </a:solidFill>
+              <a:effectLst/>
+            </c:spPr>
+            <c:extLst>
+              <c:ext xmlns:c16="http://schemas.microsoft.com/office/drawing/2014/chart" uri="{C3380CC4-5D6E-409C-BE32-E72D297353CC}">
+                <c16:uniqueId val="{00000001-2D9C-984A-B354-1F20B3A978FB}"/>
+              </c:ext>
+            </c:extLst>
+          </c:dPt>
+          <c:dPt>
+            <c:idx val="1"/>
+            <c:invertIfNegative val="0"/>
+            <c:bubble3D val="0"/>
+            <c:spPr>
+              <a:solidFill>
+                <a:srgbClr val="C9A227"/>
+              </a:solidFill>
+              <a:effectLst/>
+            </c:spPr>
+            <c:extLst>
+              <c:ext xmlns:c16="http://schemas.microsoft.com/office/drawing/2014/chart" uri="{C3380CC4-5D6E-409C-BE32-E72D297353CC}">
+                <c16:uniqueId val="{00000003-2D9C-984A-B354-1F20B3A978FB}"/>
+              </c:ext>
+            </c:extLst>
+          </c:dPt>
+          <c:dPt>
+            <c:idx val="2"/>
+            <c:invertIfNegative val="0"/>
+            <c:bubble3D val="0"/>
+            <c:spPr>
+              <a:solidFill>
+                <a:srgbClr val="D97C3D"/>
+              </a:solidFill>
+              <a:effectLst/>
+            </c:spPr>
+            <c:extLst>
+              <c:ext xmlns:c16="http://schemas.microsoft.com/office/drawing/2014/chart" uri="{C3380CC4-5D6E-409C-BE32-E72D297353CC}">
+                <c16:uniqueId val="{00000005-2D9C-984A-B354-1F20B3A978FB}"/>
+              </c:ext>
+            </c:extLst>
+          </c:dPt>
+          <c:dPt>
+            <c:idx val="3"/>
+            <c:invertIfNegative val="0"/>
+            <c:bubble3D val="0"/>
+            <c:spPr>
+              <a:solidFill>
+                <a:srgbClr val="B84C4C"/>
+              </a:solidFill>
+              <a:effectLst/>
+            </c:spPr>
+            <c:extLst>
+              <c:ext xmlns:c16="http://schemas.microsoft.com/office/drawing/2014/chart" uri="{C3380CC4-5D6E-409C-BE32-E72D297353CC}">
+                <c16:uniqueId val="{00000007-2D9C-984A-B354-1F20B3A978FB}"/>
+              </c:ext>
+            </c:extLst>
+          </c:dPt>
+          <c:dLbls>
+            <c:numFmt formatCode="0.0" sourceLinked="0"/>
+            <c:spPr>
+              <a:noFill/>
+              <a:ln>
+                <a:noFill/>
+              </a:ln>
+              <a:effectLst/>
+            </c:spPr>
+            <c:txPr>
+              <a:bodyPr/>
+              <a:lstStyle/>
+              <a:p>
+                <a:pPr>
+                  <a:defRPr sz="1100" b="0" i="0" u="none" strike="noStrike">
+                    <a:solidFill>
+                      <a:srgbClr val="141A45"/>
+                    </a:solidFill>
+                    <a:latin typeface="Arial"/>
+                  </a:defRPr>
+                </a:pPr>
+                <a:endParaRPr lang="en-PE"/>
+              </a:p>
+            </c:txPr>
+            <c:showLegendKey val="0"/>
+            <c:showVal val="1"/>
+            <c:showCatName val="0"/>
+            <c:showSerName val="0"/>
+            <c:showPercent val="0"/>
+            <c:showBubbleSize val="0"/>
+            <c:showLeaderLines val="0"/>
+            <c:extLst>
+              <c:ext xmlns:c15="http://schemas.microsoft.com/office/drawing/2012/chart" uri="{CE6537A1-D6FC-4f65-9D91-7224C49458BB}">
+                <c15:showLeaderLines val="0"/>
+              </c:ext>
+            </c:extLst>
+          </c:dLbls>
+          <c:cat>
+            <c:strRef>
+              <c:f>Sheet1!$A$2:$A$5</c:f>
+              <c:strCache>
+                <c:ptCount val="4"/>
+                <c:pt idx="0">
+                  <c:v>Bajo Riesgo</c:v>
+                </c:pt>
+                <c:pt idx="1">
+                  <c:v>Medio Riesgo</c:v>
+                </c:pt>
+                <c:pt idx="2">
+                  <c:v>Alto Riesgo</c:v>
+                </c:pt>
+                <c:pt idx="3">
+                  <c:v>Muy Alto Riesgo</c:v>
+                </c:pt>
+              </c:strCache>
+            </c:strRef>
+          </c:cat>
+          <c:val>
+            <c:numRef>
+              <c:f>Sheet1!$B$2:$B$5</c:f>
+              <c:numCache>
+                <c:formatCode>0.0</c:formatCode>
+                <c:ptCount val="4"/>
+                <c:pt idx="0">
+                  <c:v>4.7</c:v>
+                </c:pt>
+                <c:pt idx="1">
+                  <c:v>7.4</c:v>
+                </c:pt>
+                <c:pt idx="2">
+                  <c:v>12.9</c:v>
+                </c:pt>
+                <c:pt idx="3">
+                  <c:v>-3.9</c:v>
+                </c:pt>
+              </c:numCache>
+            </c:numRef>
+          </c:val>
+          <c:extLst>
+            <c:ext xmlns:c16="http://schemas.microsoft.com/office/drawing/2014/chart" uri="{C3380CC4-5D6E-409C-BE32-E72D297353CC}">
+              <c16:uniqueId val="{00000000-BB37-A447-90E3-585773E07477}"/>
+            </c:ext>
+          </c:extLst>
+        </c:ser>
+        <c:dLbls>
+          <c:showLegendKey val="0"/>
+          <c:showVal val="1"/>
+          <c:showCatName val="0"/>
+          <c:showSerName val="0"/>
+          <c:showPercent val="0"/>
+          <c:showBubbleSize val="0"/>
+        </c:dLbls>
+        <c:gapWidth val="40"/>
+        <c:axId val="2094734554"/>
+        <c:axId val="2094734552"/>
+      </c:barChart>
+      <c:catAx>
+        <c:axId val="2094734554"/>
+        <c:scaling>
+          <c:orientation val="minMax"/>
+        </c:scaling>
+        <c:delete val="0"/>
+        <c:axPos val="b"/>
+        <c:numFmt formatCode="General" sourceLinked="1"/>
+        <c:majorTickMark val="out"/>
+        <c:minorTickMark val="none"/>
+        <c:tickLblPos val="low"/>
+        <c:spPr>
+          <a:ln w="12700" cap="flat">
+            <a:solidFill>
+              <a:srgbClr val="888888"/>
+            </a:solidFill>
+            <a:prstDash val="solid"/>
+            <a:round/>
+          </a:ln>
+        </c:spPr>
+        <c:txPr>
+          <a:bodyPr/>
+          <a:lstStyle/>
+          <a:p>
+            <a:pPr>
+              <a:defRPr sz="1000" b="0" i="0" u="none" strike="noStrike">
+                <a:solidFill>
+                  <a:srgbClr val="000000"/>
+                </a:solidFill>
+                <a:latin typeface="Arial"/>
+              </a:defRPr>
+            </a:pPr>
+            <a:endParaRPr lang="en-US"/>
+          </a:p>
+        </c:txPr>
+        <c:crossAx val="2094734552"/>
+        <c:crosses val="autoZero"/>
+        <c:auto val="1"/>
+        <c:lblAlgn val="ctr"/>
+        <c:lblOffset val="100"/>
+        <c:noMultiLvlLbl val="1"/>
+      </c:catAx>
+      <c:valAx>
+        <c:axId val="2094734552"/>
+        <c:scaling>
+          <c:orientation val="minMax"/>
+        </c:scaling>
+        <c:delete val="1"/>
+        <c:axPos val="l"/>
+        <c:numFmt formatCode="General" sourceLinked="0"/>
+        <c:majorTickMark val="out"/>
+        <c:minorTickMark val="none"/>
+        <c:tickLblPos val="nextTo"/>
+        <c:crossAx val="2094734554"/>
+        <c:crosses val="autoZero"/>
+        <c:crossBetween val="between"/>
+      </c:valAx>
+      <c:spPr>
+        <a:solidFill>
+          <a:srgbClr val="F7F9FC"/>
+        </a:solidFill>
+        <a:ln>
+          <a:noFill/>
+        </a:ln>
+        <a:effectLst/>
+      </c:spPr>
+    </c:plotArea>
+    <c:plotVisOnly val="1"/>
+    <c:dispBlanksAs val="span"/>
+    <c:showDLblsOverMax val="1"/>
+  </c:chart>
+  <c:spPr>
+    <a:noFill/>
+    <a:ln>
+      <a:noFill/>
+    </a:ln>
+    <a:effectLst/>
+  </c:spPr>
+  <c:externalData r:id="rId1">
+    <c:autoUpdate val="0"/>
+  </c:externalData>
+</c:chartSpace>
+</file>
+
+<file path=ppt/charts/chart2.xml><?xml version="1.0" encoding="utf-8"?>
+<c:chartSpace xmlns:c="http://schemas.openxmlformats.org/drawingml/2006/chart" xmlns:a="http://schemas.openxmlformats.org/drawingml/2006/main" xmlns:r="http://schemas.openxmlformats.org/officeDocument/2006/relationships" xmlns:c16r2="http://schemas.microsoft.com/office/drawing/2015/06/chart">
+  <c:date1904 val="0"/>
+  <c:lang val="en-US"/>
+  <c:roundedCorners val="1"/>
+  <c:style val="2"/>
+  <c:chart>
+    <c:title>
+      <c:tx>
+        <c:rich>
+          <a:bodyPr/>
+          <a:lstStyle/>
+          <a:p>
+            <a:pPr>
+              <a:defRPr sz="1300" b="0" i="0" u="none" strike="noStrike">
+                <a:solidFill>
+                  <a:srgbClr val="1E2761"/>
+                </a:solidFill>
+                <a:latin typeface="Calibri"/>
+              </a:defRPr>
+            </a:pPr>
+            <a:r>
+              <a:rPr lang="en-US" sz="1300" b="0" i="0" u="none" strike="noStrike">
+                <a:solidFill>
+                  <a:srgbClr val="1E2761"/>
+                </a:solidFill>
+                <a:latin typeface="Calibri"/>
+              </a:rPr>
               <a:t>Importancia de variables (SHAP – valor absoluto medio)</a:t>
             </a:r>
           </a:p>
@@ -264,22 +825,22 @@
                 <c:formatCode>0.0000</c:formatCode>
                 <c:ptCount val="6"/>
                 <c:pt idx="0">
-                  <c:v>0.0278</c:v>
+                  <c:v>2.7799999999999998E-2</c:v>
                 </c:pt>
                 <c:pt idx="1">
-                  <c:v>0.0183</c:v>
+                  <c:v>1.83E-2</c:v>
                 </c:pt>
                 <c:pt idx="2">
-                  <c:v>0.0178</c:v>
+                  <c:v>1.78E-2</c:v>
                 </c:pt>
                 <c:pt idx="3">
-                  <c:v>0.0124</c:v>
+                  <c:v>1.24E-2</c:v>
                 </c:pt>
                 <c:pt idx="4">
-                  <c:v>0.0079</c:v>
+                  <c:v>7.9000000000000008E-3</c:v>
                 </c:pt>
                 <c:pt idx="5">
-                  <c:v>0.0063</c:v>
+                  <c:v>6.3E-3</c:v>
                 </c:pt>
               </c:numCache>
             </c:numRef>
@@ -350,7 +911,7 @@
           <c:orientation val="minMax"/>
         </c:scaling>
         <c:delete val="1"/>
-        <c:axPos val="b"/>
+        <c:axPos val="t"/>
         <c:numFmt formatCode="General" sourceLinked="0"/>
         <c:majorTickMark val="out"/>
         <c:minorTickMark val="none"/>
@@ -386,7 +947,7 @@
 </c:chartSpace>
 </file>
 
-<file path=ppt/charts/chart10.xml><?xml version="1.0" encoding="utf-8"?>
+<file path=ppt/charts/chart3.xml><?xml version="1.0" encoding="utf-8"?>
 <c:chartSpace xmlns:c="http://schemas.openxmlformats.org/drawingml/2006/chart" xmlns:a="http://schemas.openxmlformats.org/drawingml/2006/main" xmlns:r="http://schemas.openxmlformats.org/officeDocument/2006/relationships" xmlns:c16r2="http://schemas.microsoft.com/office/drawing/2015/06/chart">
   <c:date1904 val="0"/>
   <c:lang val="en-US"/>
@@ -430,19 +991,19 @@
                   <c:v>Base 2.95%</c:v>
                 </c:pt>
                 <c:pt idx="1">
-                  <c:v>Util. crédito +4.46pp</c:v>
+                  <c:v>Util. crédito −1.30pp</c:v>
                 </c:pt>
                 <c:pt idx="2">
-                  <c:v>Ratio deuda +1.52pp</c:v>
+                  <c:v>Edad −0.59pp</c:v>
                 </c:pt>
                 <c:pt idx="3">
-                  <c:v>Atraso 30-59d −1.25pp</c:v>
+                  <c:v>Ratio deuda −0.22pp</c:v>
                 </c:pt>
                 <c:pt idx="4">
-                  <c:v>Otras +0.32pp</c:v>
+                  <c:v>Otras −0.24pp</c:v>
                 </c:pt>
                 <c:pt idx="5">
-                  <c:v>Final 8.00%</c:v>
+                  <c:v>Final 0.60%</c:v>
                 </c:pt>
               </c:strCache>
             </c:strRef>
@@ -454,26 +1015,31 @@
                 <c:formatCode>0.00</c:formatCode>
                 <c:ptCount val="6"/>
                 <c:pt idx="0">
-                  <c:v>0.0</c:v>
+                  <c:v>0</c:v>
                 </c:pt>
                 <c:pt idx="1">
-                  <c:v>2.9523</c:v>
+                  <c:v>1.6473000000000002</c:v>
                 </c:pt>
                 <c:pt idx="2">
-                  <c:v>7.4135</c:v>
+                  <c:v>1.0582000000000003</c:v>
                 </c:pt>
                 <c:pt idx="3">
-                  <c:v>7.6846000000000005</c:v>
+                  <c:v>0.83820000000000028</c:v>
                 </c:pt>
                 <c:pt idx="4">
-                  <c:v>7.6846000000000005</c:v>
+                  <c:v>0.59990000000000032</c:v>
                 </c:pt>
                 <c:pt idx="5">
-                  <c:v>0.0</c:v>
+                  <c:v>0</c:v>
                 </c:pt>
               </c:numCache>
             </c:numRef>
           </c:val>
+          <c:extLst>
+            <c:ext xmlns:c16="http://schemas.microsoft.com/office/drawing/2014/chart" uri="{C3380CC4-5D6E-409C-BE32-E72D297353CC}">
+              <c16:uniqueId val="{00000000-821C-9F42-82A8-EC232B8443D1}"/>
+            </c:ext>
+          </c:extLst>
         </c:ser>
         <c:ser>
           <c:idx val="1"/>
@@ -505,6 +1071,743 @@
               </a:solidFill>
               <a:effectLst/>
             </c:spPr>
+            <c:extLst>
+              <c:ext xmlns:c16="http://schemas.microsoft.com/office/drawing/2014/chart" uri="{C3380CC4-5D6E-409C-BE32-E72D297353CC}">
+                <c16:uniqueId val="{00000002-821C-9F42-82A8-EC232B8443D1}"/>
+              </c:ext>
+            </c:extLst>
+          </c:dPt>
+          <c:dPt>
+            <c:idx val="1"/>
+            <c:invertIfNegative val="0"/>
+            <c:bubble3D val="0"/>
+            <c:spPr>
+              <a:solidFill>
+                <a:srgbClr val="2E8B57"/>
+              </a:solidFill>
+              <a:effectLst/>
+            </c:spPr>
+            <c:extLst>
+              <c:ext xmlns:c16="http://schemas.microsoft.com/office/drawing/2014/chart" uri="{C3380CC4-5D6E-409C-BE32-E72D297353CC}">
+                <c16:uniqueId val="{00000004-821C-9F42-82A8-EC232B8443D1}"/>
+              </c:ext>
+            </c:extLst>
+          </c:dPt>
+          <c:dPt>
+            <c:idx val="2"/>
+            <c:invertIfNegative val="0"/>
+            <c:bubble3D val="0"/>
+            <c:spPr>
+              <a:solidFill>
+                <a:srgbClr val="2E8B57"/>
+              </a:solidFill>
+              <a:effectLst/>
+            </c:spPr>
+            <c:extLst>
+              <c:ext xmlns:c16="http://schemas.microsoft.com/office/drawing/2014/chart" uri="{C3380CC4-5D6E-409C-BE32-E72D297353CC}">
+                <c16:uniqueId val="{00000006-821C-9F42-82A8-EC232B8443D1}"/>
+              </c:ext>
+            </c:extLst>
+          </c:dPt>
+          <c:dPt>
+            <c:idx val="3"/>
+            <c:invertIfNegative val="0"/>
+            <c:bubble3D val="0"/>
+            <c:spPr>
+              <a:solidFill>
+                <a:srgbClr val="2E8B57"/>
+              </a:solidFill>
+              <a:effectLst/>
+            </c:spPr>
+            <c:extLst>
+              <c:ext xmlns:c16="http://schemas.microsoft.com/office/drawing/2014/chart" uri="{C3380CC4-5D6E-409C-BE32-E72D297353CC}">
+                <c16:uniqueId val="{00000008-821C-9F42-82A8-EC232B8443D1}"/>
+              </c:ext>
+            </c:extLst>
+          </c:dPt>
+          <c:dPt>
+            <c:idx val="4"/>
+            <c:invertIfNegative val="0"/>
+            <c:bubble3D val="0"/>
+            <c:spPr>
+              <a:solidFill>
+                <a:srgbClr val="2E8B57"/>
+              </a:solidFill>
+              <a:effectLst/>
+            </c:spPr>
+            <c:extLst>
+              <c:ext xmlns:c16="http://schemas.microsoft.com/office/drawing/2014/chart" uri="{C3380CC4-5D6E-409C-BE32-E72D297353CC}">
+                <c16:uniqueId val="{0000000A-821C-9F42-82A8-EC232B8443D1}"/>
+              </c:ext>
+            </c:extLst>
+          </c:dPt>
+          <c:dPt>
+            <c:idx val="5"/>
+            <c:invertIfNegative val="0"/>
+            <c:bubble3D val="0"/>
+            <c:spPr>
+              <a:solidFill>
+                <a:srgbClr val="1E2761"/>
+              </a:solidFill>
+              <a:effectLst/>
+            </c:spPr>
+            <c:extLst>
+              <c:ext xmlns:c16="http://schemas.microsoft.com/office/drawing/2014/chart" uri="{C3380CC4-5D6E-409C-BE32-E72D297353CC}">
+                <c16:uniqueId val="{0000000C-821C-9F42-82A8-EC232B8443D1}"/>
+              </c:ext>
+            </c:extLst>
+          </c:dPt>
+          <c:cat>
+            <c:strRef>
+              <c:f>Sheet1!$A$2:$A$7</c:f>
+              <c:strCache>
+                <c:ptCount val="6"/>
+                <c:pt idx="0">
+                  <c:v>Base 2.95%</c:v>
+                </c:pt>
+                <c:pt idx="1">
+                  <c:v>Util. crédito −1.30pp</c:v>
+                </c:pt>
+                <c:pt idx="2">
+                  <c:v>Edad −0.59pp</c:v>
+                </c:pt>
+                <c:pt idx="3">
+                  <c:v>Ratio deuda −0.22pp</c:v>
+                </c:pt>
+                <c:pt idx="4">
+                  <c:v>Otras −0.24pp</c:v>
+                </c:pt>
+                <c:pt idx="5">
+                  <c:v>Final 0.60%</c:v>
+                </c:pt>
+              </c:strCache>
+            </c:strRef>
+          </c:cat>
+          <c:val>
+            <c:numRef>
+              <c:f>Sheet1!$C$2:$C$7</c:f>
+              <c:numCache>
+                <c:formatCode>0.00</c:formatCode>
+                <c:ptCount val="6"/>
+                <c:pt idx="0">
+                  <c:v>2.9523000000000001</c:v>
+                </c:pt>
+                <c:pt idx="1">
+                  <c:v>1.3049999999999999</c:v>
+                </c:pt>
+                <c:pt idx="2">
+                  <c:v>0.58909999999999996</c:v>
+                </c:pt>
+                <c:pt idx="3">
+                  <c:v>0.22</c:v>
+                </c:pt>
+                <c:pt idx="4">
+                  <c:v>0.23830000000000001</c:v>
+                </c:pt>
+                <c:pt idx="5">
+                  <c:v>0.6</c:v>
+                </c:pt>
+              </c:numCache>
+            </c:numRef>
+          </c:val>
+          <c:extLst>
+            <c:ext xmlns:c16="http://schemas.microsoft.com/office/drawing/2014/chart" uri="{C3380CC4-5D6E-409C-BE32-E72D297353CC}">
+              <c16:uniqueId val="{0000000D-821C-9F42-82A8-EC232B8443D1}"/>
+            </c:ext>
+          </c:extLst>
+        </c:ser>
+        <c:dLbls>
+          <c:showLegendKey val="0"/>
+          <c:showVal val="0"/>
+          <c:showCatName val="0"/>
+          <c:showSerName val="0"/>
+          <c:showPercent val="0"/>
+          <c:showBubbleSize val="0"/>
+        </c:dLbls>
+        <c:gapWidth val="30"/>
+        <c:overlap val="100"/>
+        <c:axId val="20947380"/>
+        <c:axId val="20947381"/>
+      </c:barChart>
+      <c:catAx>
+        <c:axId val="20947380"/>
+        <c:scaling>
+          <c:orientation val="minMax"/>
+        </c:scaling>
+        <c:delete val="0"/>
+        <c:axPos val="b"/>
+        <c:numFmt formatCode="General" sourceLinked="1"/>
+        <c:majorTickMark val="none"/>
+        <c:minorTickMark val="none"/>
+        <c:tickLblPos val="low"/>
+        <c:spPr>
+          <a:ln w="9525" cap="flat">
+            <a:solidFill>
+              <a:srgbClr val="888888"/>
+            </a:solidFill>
+            <a:prstDash val="solid"/>
+            <a:round/>
+          </a:ln>
+        </c:spPr>
+        <c:txPr>
+          <a:bodyPr rot="-2700000" vert="horz"/>
+          <a:lstStyle/>
+          <a:p>
+            <a:pPr>
+              <a:defRPr sz="700" b="0" i="0" u="none" strike="noStrike">
+                <a:solidFill>
+                  <a:srgbClr val="141A45"/>
+                </a:solidFill>
+                <a:latin typeface="Arial"/>
+              </a:defRPr>
+            </a:pPr>
+            <a:endParaRPr lang="en-US"/>
+          </a:p>
+        </c:txPr>
+        <c:crossAx val="20947381"/>
+        <c:crosses val="autoZero"/>
+        <c:auto val="1"/>
+        <c:lblAlgn val="ctr"/>
+        <c:lblOffset val="100"/>
+        <c:noMultiLvlLbl val="1"/>
+      </c:catAx>
+      <c:valAx>
+        <c:axId val="20947381"/>
+        <c:scaling>
+          <c:orientation val="minMax"/>
+        </c:scaling>
+        <c:delete val="1"/>
+        <c:axPos val="l"/>
+        <c:numFmt formatCode="General" sourceLinked="0"/>
+        <c:majorTickMark val="none"/>
+        <c:minorTickMark val="none"/>
+        <c:tickLblPos val="nextTo"/>
+        <c:crossAx val="20947380"/>
+        <c:crosses val="autoZero"/>
+        <c:crossBetween val="between"/>
+      </c:valAx>
+      <c:spPr>
+        <a:solidFill>
+          <a:srgbClr val="FFFFFF"/>
+        </a:solidFill>
+        <a:ln>
+          <a:noFill/>
+        </a:ln>
+        <a:effectLst/>
+      </c:spPr>
+    </c:plotArea>
+    <c:plotVisOnly val="1"/>
+    <c:dispBlanksAs val="gap"/>
+    <c:showDLblsOverMax val="1"/>
+  </c:chart>
+  <c:spPr>
+    <a:noFill/>
+    <a:ln>
+      <a:noFill/>
+    </a:ln>
+    <a:effectLst/>
+  </c:spPr>
+  <c:externalData r:id="rId1">
+    <c:autoUpdate val="0"/>
+  </c:externalData>
+</c:chartSpace>
+</file>
+
+<file path=ppt/charts/chart4.xml><?xml version="1.0" encoding="utf-8"?>
+<c:chartSpace xmlns:c="http://schemas.openxmlformats.org/drawingml/2006/chart" xmlns:a="http://schemas.openxmlformats.org/drawingml/2006/main" xmlns:r="http://schemas.openxmlformats.org/officeDocument/2006/relationships" xmlns:c16r2="http://schemas.microsoft.com/office/drawing/2015/06/chart">
+  <c:date1904 val="0"/>
+  <c:lang val="en-US"/>
+  <c:roundedCorners val="1"/>
+  <c:style val="2"/>
+  <c:chart>
+    <c:autoTitleDeleted val="1"/>
+    <c:plotArea>
+      <c:layout/>
+      <c:barChart>
+        <c:barDir val="col"/>
+        <c:grouping val="stacked"/>
+        <c:varyColors val="0"/>
+        <c:ser>
+          <c:idx val="0"/>
+          <c:order val="0"/>
+          <c:tx>
+            <c:strRef>
+              <c:f>Sheet1!$B$1</c:f>
+              <c:strCache>
+                <c:ptCount val="1"/>
+                <c:pt idx="0">
+                  <c:v>Piso</c:v>
+                </c:pt>
+              </c:strCache>
+            </c:strRef>
+          </c:tx>
+          <c:spPr>
+            <a:noFill/>
+            <a:ln>
+              <a:noFill/>
+            </a:ln>
+          </c:spPr>
+          <c:invertIfNegative val="0"/>
+          <c:cat>
+            <c:strRef>
+              <c:f>Sheet1!$A$2:$A$7</c:f>
+              <c:strCache>
+                <c:ptCount val="6"/>
+                <c:pt idx="0">
+                  <c:v>Base 2.95%</c:v>
+                </c:pt>
+                <c:pt idx="1">
+                  <c:v>Atraso 30-59d −0.46pp</c:v>
+                </c:pt>
+                <c:pt idx="2">
+                  <c:v>Ingreso mensual +0.28pp</c:v>
+                </c:pt>
+                <c:pt idx="3">
+                  <c:v>N° líneas −0.27pp</c:v>
+                </c:pt>
+                <c:pt idx="4">
+                  <c:v>Otras −0.49pp</c:v>
+                </c:pt>
+                <c:pt idx="5">
+                  <c:v>Final 2.00%</c:v>
+                </c:pt>
+              </c:strCache>
+            </c:strRef>
+          </c:cat>
+          <c:val>
+            <c:numRef>
+              <c:f>Sheet1!$B$2:$B$7</c:f>
+              <c:numCache>
+                <c:formatCode>0.00</c:formatCode>
+                <c:ptCount val="6"/>
+                <c:pt idx="0">
+                  <c:v>0</c:v>
+                </c:pt>
+                <c:pt idx="1">
+                  <c:v>2.4881000000000002</c:v>
+                </c:pt>
+                <c:pt idx="2">
+                  <c:v>2.4881000000000002</c:v>
+                </c:pt>
+                <c:pt idx="3">
+                  <c:v>2.4891000000000001</c:v>
+                </c:pt>
+                <c:pt idx="4">
+                  <c:v>2.0004</c:v>
+                </c:pt>
+                <c:pt idx="5">
+                  <c:v>0</c:v>
+                </c:pt>
+              </c:numCache>
+            </c:numRef>
+          </c:val>
+          <c:extLst>
+            <c:ext xmlns:c16="http://schemas.microsoft.com/office/drawing/2014/chart" uri="{C3380CC4-5D6E-409C-BE32-E72D297353CC}">
+              <c16:uniqueId val="{00000000-497A-EE48-AB80-D277F25899CF}"/>
+            </c:ext>
+          </c:extLst>
+        </c:ser>
+        <c:ser>
+          <c:idx val="1"/>
+          <c:order val="1"/>
+          <c:tx>
+            <c:strRef>
+              <c:f>Sheet1!$C$1</c:f>
+              <c:strCache>
+                <c:ptCount val="1"/>
+                <c:pt idx="0">
+                  <c:v>Contribución</c:v>
+                </c:pt>
+              </c:strCache>
+            </c:strRef>
+          </c:tx>
+          <c:spPr>
+            <a:solidFill>
+              <a:srgbClr val="1E2761"/>
+            </a:solidFill>
+          </c:spPr>
+          <c:invertIfNegative val="0"/>
+          <c:dPt>
+            <c:idx val="0"/>
+            <c:invertIfNegative val="0"/>
+            <c:bubble3D val="0"/>
+            <c:spPr>
+              <a:solidFill>
+                <a:srgbClr val="1E2761"/>
+              </a:solidFill>
+              <a:effectLst/>
+            </c:spPr>
+            <c:extLst>
+              <c:ext xmlns:c16="http://schemas.microsoft.com/office/drawing/2014/chart" uri="{C3380CC4-5D6E-409C-BE32-E72D297353CC}">
+                <c16:uniqueId val="{00000002-497A-EE48-AB80-D277F25899CF}"/>
+              </c:ext>
+            </c:extLst>
+          </c:dPt>
+          <c:dPt>
+            <c:idx val="1"/>
+            <c:invertIfNegative val="0"/>
+            <c:bubble3D val="0"/>
+            <c:spPr>
+              <a:solidFill>
+                <a:srgbClr val="2E8B57"/>
+              </a:solidFill>
+              <a:effectLst/>
+            </c:spPr>
+            <c:extLst>
+              <c:ext xmlns:c16="http://schemas.microsoft.com/office/drawing/2014/chart" uri="{C3380CC4-5D6E-409C-BE32-E72D297353CC}">
+                <c16:uniqueId val="{00000004-497A-EE48-AB80-D277F25899CF}"/>
+              </c:ext>
+            </c:extLst>
+          </c:dPt>
+          <c:dPt>
+            <c:idx val="2"/>
+            <c:invertIfNegative val="0"/>
+            <c:bubble3D val="0"/>
+            <c:spPr>
+              <a:solidFill>
+                <a:srgbClr val="B84C4C"/>
+              </a:solidFill>
+              <a:effectLst/>
+            </c:spPr>
+            <c:extLst>
+              <c:ext xmlns:c16="http://schemas.microsoft.com/office/drawing/2014/chart" uri="{C3380CC4-5D6E-409C-BE32-E72D297353CC}">
+                <c16:uniqueId val="{00000006-497A-EE48-AB80-D277F25899CF}"/>
+              </c:ext>
+            </c:extLst>
+          </c:dPt>
+          <c:dPt>
+            <c:idx val="3"/>
+            <c:invertIfNegative val="0"/>
+            <c:bubble3D val="0"/>
+            <c:spPr>
+              <a:solidFill>
+                <a:srgbClr val="2E8B57"/>
+              </a:solidFill>
+              <a:effectLst/>
+            </c:spPr>
+            <c:extLst>
+              <c:ext xmlns:c16="http://schemas.microsoft.com/office/drawing/2014/chart" uri="{C3380CC4-5D6E-409C-BE32-E72D297353CC}">
+                <c16:uniqueId val="{00000008-497A-EE48-AB80-D277F25899CF}"/>
+              </c:ext>
+            </c:extLst>
+          </c:dPt>
+          <c:dPt>
+            <c:idx val="4"/>
+            <c:invertIfNegative val="0"/>
+            <c:bubble3D val="0"/>
+            <c:spPr>
+              <a:solidFill>
+                <a:srgbClr val="2E8B57"/>
+              </a:solidFill>
+              <a:effectLst/>
+            </c:spPr>
+            <c:extLst>
+              <c:ext xmlns:c16="http://schemas.microsoft.com/office/drawing/2014/chart" uri="{C3380CC4-5D6E-409C-BE32-E72D297353CC}">
+                <c16:uniqueId val="{0000000A-497A-EE48-AB80-D277F25899CF}"/>
+              </c:ext>
+            </c:extLst>
+          </c:dPt>
+          <c:dPt>
+            <c:idx val="5"/>
+            <c:invertIfNegative val="0"/>
+            <c:bubble3D val="0"/>
+            <c:spPr>
+              <a:solidFill>
+                <a:srgbClr val="1E2761"/>
+              </a:solidFill>
+              <a:effectLst/>
+            </c:spPr>
+            <c:extLst>
+              <c:ext xmlns:c16="http://schemas.microsoft.com/office/drawing/2014/chart" uri="{C3380CC4-5D6E-409C-BE32-E72D297353CC}">
+                <c16:uniqueId val="{0000000C-497A-EE48-AB80-D277F25899CF}"/>
+              </c:ext>
+            </c:extLst>
+          </c:dPt>
+          <c:cat>
+            <c:strRef>
+              <c:f>Sheet1!$A$2:$A$7</c:f>
+              <c:strCache>
+                <c:ptCount val="6"/>
+                <c:pt idx="0">
+                  <c:v>Base 2.95%</c:v>
+                </c:pt>
+                <c:pt idx="1">
+                  <c:v>Atraso 30-59d −0.46pp</c:v>
+                </c:pt>
+                <c:pt idx="2">
+                  <c:v>Ingreso mensual +0.28pp</c:v>
+                </c:pt>
+                <c:pt idx="3">
+                  <c:v>N° líneas −0.27pp</c:v>
+                </c:pt>
+                <c:pt idx="4">
+                  <c:v>Otras −0.49pp</c:v>
+                </c:pt>
+                <c:pt idx="5">
+                  <c:v>Final 2.00%</c:v>
+                </c:pt>
+              </c:strCache>
+            </c:strRef>
+          </c:cat>
+          <c:val>
+            <c:numRef>
+              <c:f>Sheet1!$C$2:$C$7</c:f>
+              <c:numCache>
+                <c:formatCode>0.00</c:formatCode>
+                <c:ptCount val="6"/>
+                <c:pt idx="0">
+                  <c:v>2.9523000000000001</c:v>
+                </c:pt>
+                <c:pt idx="1">
+                  <c:v>0.4642</c:v>
+                </c:pt>
+                <c:pt idx="2">
+                  <c:v>0.27589999999999998</c:v>
+                </c:pt>
+                <c:pt idx="3">
+                  <c:v>0.27489999999999998</c:v>
+                </c:pt>
+                <c:pt idx="4">
+                  <c:v>0.48870000000000002</c:v>
+                </c:pt>
+                <c:pt idx="5">
+                  <c:v>2.0003000000000002</c:v>
+                </c:pt>
+              </c:numCache>
+            </c:numRef>
+          </c:val>
+          <c:extLst>
+            <c:ext xmlns:c16="http://schemas.microsoft.com/office/drawing/2014/chart" uri="{C3380CC4-5D6E-409C-BE32-E72D297353CC}">
+              <c16:uniqueId val="{0000000D-497A-EE48-AB80-D277F25899CF}"/>
+            </c:ext>
+          </c:extLst>
+        </c:ser>
+        <c:dLbls>
+          <c:showLegendKey val="0"/>
+          <c:showVal val="0"/>
+          <c:showCatName val="0"/>
+          <c:showSerName val="0"/>
+          <c:showPercent val="0"/>
+          <c:showBubbleSize val="0"/>
+        </c:dLbls>
+        <c:gapWidth val="30"/>
+        <c:overlap val="100"/>
+        <c:axId val="20947390"/>
+        <c:axId val="20947391"/>
+      </c:barChart>
+      <c:catAx>
+        <c:axId val="20947390"/>
+        <c:scaling>
+          <c:orientation val="minMax"/>
+        </c:scaling>
+        <c:delete val="0"/>
+        <c:axPos val="b"/>
+        <c:numFmt formatCode="General" sourceLinked="1"/>
+        <c:majorTickMark val="none"/>
+        <c:minorTickMark val="none"/>
+        <c:tickLblPos val="low"/>
+        <c:spPr>
+          <a:ln w="9525" cap="flat">
+            <a:solidFill>
+              <a:srgbClr val="888888"/>
+            </a:solidFill>
+            <a:prstDash val="solid"/>
+            <a:round/>
+          </a:ln>
+        </c:spPr>
+        <c:txPr>
+          <a:bodyPr rot="-2700000" vert="horz"/>
+          <a:lstStyle/>
+          <a:p>
+            <a:pPr>
+              <a:defRPr sz="700" b="0" i="0" u="none" strike="noStrike">
+                <a:solidFill>
+                  <a:srgbClr val="141A45"/>
+                </a:solidFill>
+                <a:latin typeface="Arial"/>
+              </a:defRPr>
+            </a:pPr>
+            <a:endParaRPr lang="en-US"/>
+          </a:p>
+        </c:txPr>
+        <c:crossAx val="20947391"/>
+        <c:crosses val="autoZero"/>
+        <c:auto val="1"/>
+        <c:lblAlgn val="ctr"/>
+        <c:lblOffset val="100"/>
+        <c:noMultiLvlLbl val="1"/>
+      </c:catAx>
+      <c:valAx>
+        <c:axId val="20947391"/>
+        <c:scaling>
+          <c:orientation val="minMax"/>
+        </c:scaling>
+        <c:delete val="1"/>
+        <c:axPos val="l"/>
+        <c:numFmt formatCode="General" sourceLinked="0"/>
+        <c:majorTickMark val="none"/>
+        <c:minorTickMark val="none"/>
+        <c:tickLblPos val="nextTo"/>
+        <c:crossAx val="20947390"/>
+        <c:crosses val="autoZero"/>
+        <c:crossBetween val="between"/>
+      </c:valAx>
+      <c:spPr>
+        <a:solidFill>
+          <a:srgbClr val="FFFFFF"/>
+        </a:solidFill>
+        <a:ln>
+          <a:noFill/>
+        </a:ln>
+        <a:effectLst/>
+      </c:spPr>
+    </c:plotArea>
+    <c:plotVisOnly val="1"/>
+    <c:dispBlanksAs val="gap"/>
+    <c:showDLblsOverMax val="1"/>
+  </c:chart>
+  <c:spPr>
+    <a:noFill/>
+    <a:ln>
+      <a:noFill/>
+    </a:ln>
+    <a:effectLst/>
+  </c:spPr>
+  <c:externalData r:id="rId1">
+    <c:autoUpdate val="0"/>
+  </c:externalData>
+</c:chartSpace>
+</file>
+
+<file path=ppt/charts/chart5.xml><?xml version="1.0" encoding="utf-8"?>
+<c:chartSpace xmlns:c="http://schemas.openxmlformats.org/drawingml/2006/chart" xmlns:a="http://schemas.openxmlformats.org/drawingml/2006/main" xmlns:r="http://schemas.openxmlformats.org/officeDocument/2006/relationships" xmlns:c16r2="http://schemas.microsoft.com/office/drawing/2015/06/chart">
+  <c:date1904 val="0"/>
+  <c:lang val="en-US"/>
+  <c:roundedCorners val="1"/>
+  <c:style val="2"/>
+  <c:chart>
+    <c:autoTitleDeleted val="1"/>
+    <c:plotArea>
+      <c:layout/>
+      <c:barChart>
+        <c:barDir val="col"/>
+        <c:grouping val="stacked"/>
+        <c:varyColors val="0"/>
+        <c:ser>
+          <c:idx val="0"/>
+          <c:order val="0"/>
+          <c:tx>
+            <c:strRef>
+              <c:f>Sheet1!$B$1</c:f>
+              <c:strCache>
+                <c:ptCount val="1"/>
+                <c:pt idx="0">
+                  <c:v>Piso</c:v>
+                </c:pt>
+              </c:strCache>
+            </c:strRef>
+          </c:tx>
+          <c:spPr>
+            <a:noFill/>
+            <a:ln>
+              <a:noFill/>
+            </a:ln>
+          </c:spPr>
+          <c:invertIfNegative val="0"/>
+          <c:cat>
+            <c:strRef>
+              <c:f>Sheet1!$A$2:$A$7</c:f>
+              <c:strCache>
+                <c:ptCount val="6"/>
+                <c:pt idx="0">
+                  <c:v>Base 2.95%</c:v>
+                </c:pt>
+                <c:pt idx="1">
+                  <c:v>Util. crédito +4.46pp</c:v>
+                </c:pt>
+                <c:pt idx="2">
+                  <c:v>Ratio deuda +1.52pp</c:v>
+                </c:pt>
+                <c:pt idx="3">
+                  <c:v>Atraso 30-59d −1.25pp</c:v>
+                </c:pt>
+                <c:pt idx="4">
+                  <c:v>Otras +0.32pp</c:v>
+                </c:pt>
+                <c:pt idx="5">
+                  <c:v>Final 8.00%</c:v>
+                </c:pt>
+              </c:strCache>
+            </c:strRef>
+          </c:cat>
+          <c:val>
+            <c:numRef>
+              <c:f>Sheet1!$B$2:$B$7</c:f>
+              <c:numCache>
+                <c:formatCode>0.00</c:formatCode>
+                <c:ptCount val="6"/>
+                <c:pt idx="0">
+                  <c:v>0</c:v>
+                </c:pt>
+                <c:pt idx="1">
+                  <c:v>2.9523000000000001</c:v>
+                </c:pt>
+                <c:pt idx="2">
+                  <c:v>7.4135</c:v>
+                </c:pt>
+                <c:pt idx="3">
+                  <c:v>7.6846000000000005</c:v>
+                </c:pt>
+                <c:pt idx="4">
+                  <c:v>7.6846000000000005</c:v>
+                </c:pt>
+                <c:pt idx="5">
+                  <c:v>0</c:v>
+                </c:pt>
+              </c:numCache>
+            </c:numRef>
+          </c:val>
+          <c:extLst>
+            <c:ext xmlns:c16="http://schemas.microsoft.com/office/drawing/2014/chart" uri="{C3380CC4-5D6E-409C-BE32-E72D297353CC}">
+              <c16:uniqueId val="{00000000-A0F4-1D42-97F8-FD683733DD7F}"/>
+            </c:ext>
+          </c:extLst>
+        </c:ser>
+        <c:ser>
+          <c:idx val="1"/>
+          <c:order val="1"/>
+          <c:tx>
+            <c:strRef>
+              <c:f>Sheet1!$C$1</c:f>
+              <c:strCache>
+                <c:ptCount val="1"/>
+                <c:pt idx="0">
+                  <c:v>Contribución</c:v>
+                </c:pt>
+              </c:strCache>
+            </c:strRef>
+          </c:tx>
+          <c:spPr>
+            <a:solidFill>
+              <a:srgbClr val="1E2761"/>
+            </a:solidFill>
+          </c:spPr>
+          <c:invertIfNegative val="0"/>
+          <c:dPt>
+            <c:idx val="0"/>
+            <c:invertIfNegative val="0"/>
+            <c:bubble3D val="0"/>
+            <c:spPr>
+              <a:solidFill>
+                <a:srgbClr val="1E2761"/>
+              </a:solidFill>
+              <a:effectLst/>
+            </c:spPr>
+            <c:extLst>
+              <c:ext xmlns:c16="http://schemas.microsoft.com/office/drawing/2014/chart" uri="{C3380CC4-5D6E-409C-BE32-E72D297353CC}">
+                <c16:uniqueId val="{00000002-A0F4-1D42-97F8-FD683733DD7F}"/>
+              </c:ext>
+            </c:extLst>
           </c:dPt>
           <c:dPt>
             <c:idx val="1"/>
@@ -516,6 +1819,11 @@
               </a:solidFill>
               <a:effectLst/>
             </c:spPr>
+            <c:extLst>
+              <c:ext xmlns:c16="http://schemas.microsoft.com/office/drawing/2014/chart" uri="{C3380CC4-5D6E-409C-BE32-E72D297353CC}">
+                <c16:uniqueId val="{00000004-A0F4-1D42-97F8-FD683733DD7F}"/>
+              </c:ext>
+            </c:extLst>
           </c:dPt>
           <c:dPt>
             <c:idx val="2"/>
@@ -527,6 +1835,11 @@
               </a:solidFill>
               <a:effectLst/>
             </c:spPr>
+            <c:extLst>
+              <c:ext xmlns:c16="http://schemas.microsoft.com/office/drawing/2014/chart" uri="{C3380CC4-5D6E-409C-BE32-E72D297353CC}">
+                <c16:uniqueId val="{00000006-A0F4-1D42-97F8-FD683733DD7F}"/>
+              </c:ext>
+            </c:extLst>
           </c:dPt>
           <c:dPt>
             <c:idx val="3"/>
@@ -538,6 +1851,11 @@
               </a:solidFill>
               <a:effectLst/>
             </c:spPr>
+            <c:extLst>
+              <c:ext xmlns:c16="http://schemas.microsoft.com/office/drawing/2014/chart" uri="{C3380CC4-5D6E-409C-BE32-E72D297353CC}">
+                <c16:uniqueId val="{00000008-A0F4-1D42-97F8-FD683733DD7F}"/>
+              </c:ext>
+            </c:extLst>
           </c:dPt>
           <c:dPt>
             <c:idx val="4"/>
@@ -549,6 +1867,11 @@
               </a:solidFill>
               <a:effectLst/>
             </c:spPr>
+            <c:extLst>
+              <c:ext xmlns:c16="http://schemas.microsoft.com/office/drawing/2014/chart" uri="{C3380CC4-5D6E-409C-BE32-E72D297353CC}">
+                <c16:uniqueId val="{0000000A-A0F4-1D42-97F8-FD683733DD7F}"/>
+              </c:ext>
+            </c:extLst>
           </c:dPt>
           <c:dPt>
             <c:idx val="5"/>
@@ -560,6 +1883,11 @@
               </a:solidFill>
               <a:effectLst/>
             </c:spPr>
+            <c:extLst>
+              <c:ext xmlns:c16="http://schemas.microsoft.com/office/drawing/2014/chart" uri="{C3380CC4-5D6E-409C-BE32-E72D297353CC}">
+                <c16:uniqueId val="{0000000C-A0F4-1D42-97F8-FD683733DD7F}"/>
+              </c:ext>
+            </c:extLst>
           </c:dPt>
           <c:cat>
             <c:strRef>
@@ -594,27 +1922,40 @@
                 <c:formatCode>0.00</c:formatCode>
                 <c:ptCount val="6"/>
                 <c:pt idx="0">
-                  <c:v>2.9523</c:v>
+                  <c:v>2.9523000000000001</c:v>
                 </c:pt>
                 <c:pt idx="1">
-                  <c:v>4.4612</c:v>
+                  <c:v>4.4611999999999998</c:v>
                 </c:pt>
                 <c:pt idx="2">
                   <c:v>1.5223</c:v>
                 </c:pt>
                 <c:pt idx="3">
-                  <c:v>1.2512</c:v>
+                  <c:v>1.2512000000000001</c:v>
                 </c:pt>
                 <c:pt idx="4">
-                  <c:v>0.3153</c:v>
+                  <c:v>0.31530000000000002</c:v>
                 </c:pt>
                 <c:pt idx="5">
-                  <c:v>7.9999</c:v>
+                  <c:v>7.9999000000000002</c:v>
                 </c:pt>
               </c:numCache>
             </c:numRef>
           </c:val>
+          <c:extLst>
+            <c:ext xmlns:c16="http://schemas.microsoft.com/office/drawing/2014/chart" uri="{C3380CC4-5D6E-409C-BE32-E72D297353CC}">
+              <c16:uniqueId val="{0000000D-A0F4-1D42-97F8-FD683733DD7F}"/>
+            </c:ext>
+          </c:extLst>
         </c:ser>
+        <c:dLbls>
+          <c:showLegendKey val="0"/>
+          <c:showVal val="0"/>
+          <c:showCatName val="0"/>
+          <c:showSerName val="0"/>
+          <c:showPercent val="0"/>
+          <c:showBubbleSize val="0"/>
+        </c:dLbls>
         <c:gapWidth val="30"/>
         <c:overlap val="100"/>
         <c:axId val="209473100"/>
@@ -704,7 +2045,7 @@
 </c:chartSpace>
 </file>
 
-<file path=ppt/charts/chart2.xml><?xml version="1.0" encoding="utf-8"?>
+<file path=ppt/charts/chart6.xml><?xml version="1.0" encoding="utf-8"?>
 <c:chartSpace xmlns:c="http://schemas.openxmlformats.org/drawingml/2006/chart" xmlns:a="http://schemas.openxmlformats.org/drawingml/2006/main" xmlns:r="http://schemas.openxmlformats.org/officeDocument/2006/relationships" xmlns:c16r2="http://schemas.microsoft.com/office/drawing/2015/06/chart">
   <c:date1904 val="0"/>
   <c:lang val="en-US"/>
@@ -782,19 +2123,19 @@
                   <c:v>0</c:v>
                 </c:pt>
                 <c:pt idx="1">
-                  <c:v>0.0077</c:v>
+                  <c:v>7.7000000000000002E-3</c:v>
                 </c:pt>
                 <c:pt idx="2">
-                  <c:v>0.0186</c:v>
+                  <c:v>1.8599999999999998E-2</c:v>
                 </c:pt>
                 <c:pt idx="3">
-                  <c:v>0.0333</c:v>
+                  <c:v>3.3300000000000003E-2</c:v>
                 </c:pt>
                 <c:pt idx="4">
-                  <c:v>0.0528</c:v>
+                  <c:v>5.28E-2</c:v>
                 </c:pt>
                 <c:pt idx="5">
-                  <c:v>0.0764</c:v>
+                  <c:v>7.6399999999999996E-2</c:v>
                 </c:pt>
                 <c:pt idx="6">
                   <c:v>0.113</c:v>
@@ -803,13 +2144,13 @@
                   <c:v>0.1653</c:v>
                 </c:pt>
                 <c:pt idx="8">
-                  <c:v>0.2353</c:v>
+                  <c:v>0.23530000000000001</c:v>
                 </c:pt>
                 <c:pt idx="9">
-                  <c:v>0.3439</c:v>
+                  <c:v>0.34389999999999998</c:v>
                 </c:pt>
                 <c:pt idx="10">
-                  <c:v>0.538</c:v>
+                  <c:v>0.53800000000000003</c:v>
                 </c:pt>
                 <c:pt idx="11">
                   <c:v>1</c:v>
@@ -830,31 +2171,31 @@
                   <c:v>0.1759</c:v>
                 </c:pt>
                 <c:pt idx="2">
-                  <c:v>0.2985</c:v>
+                  <c:v>0.29849999999999999</c:v>
                 </c:pt>
                 <c:pt idx="3">
-                  <c:v>0.4112</c:v>
+                  <c:v>0.41120000000000001</c:v>
                 </c:pt>
                 <c:pt idx="4">
-                  <c:v>0.5013</c:v>
+                  <c:v>0.50129999999999997</c:v>
                 </c:pt>
                 <c:pt idx="5">
-                  <c:v>0.5868</c:v>
+                  <c:v>0.58679999999999999</c:v>
                 </c:pt>
                 <c:pt idx="6">
-                  <c:v>0.6619</c:v>
+                  <c:v>0.66190000000000004</c:v>
                 </c:pt>
                 <c:pt idx="7">
-                  <c:v>0.735</c:v>
+                  <c:v>0.73499999999999999</c:v>
                 </c:pt>
                 <c:pt idx="8">
                   <c:v>0.8075</c:v>
                 </c:pt>
                 <c:pt idx="9">
-                  <c:v>0.8773</c:v>
+                  <c:v>0.87729999999999997</c:v>
                 </c:pt>
                 <c:pt idx="10">
-                  <c:v>0.9471</c:v>
+                  <c:v>0.94710000000000005</c:v>
                 </c:pt>
                 <c:pt idx="11">
                   <c:v>1</c:v>
@@ -1035,6 +2376,7 @@
         </c:txPr>
         <c:crossAx val="2094734554"/>
         <c:crosses val="autoZero"/>
+        <c:crossBetween val="midCat"/>
       </c:valAx>
       <c:spPr>
         <a:solidFill>
@@ -1077,682 +2419,7 @@
 </c:chartSpace>
 </file>
 
-<file path=ppt/charts/chart3.xml><?xml version="1.0" encoding="utf-8"?>
-<c:chartSpace xmlns:c="http://schemas.openxmlformats.org/drawingml/2006/chart" xmlns:a="http://schemas.openxmlformats.org/drawingml/2006/main" xmlns:r="http://schemas.openxmlformats.org/officeDocument/2006/relationships" xmlns:c16r2="http://schemas.microsoft.com/office/drawing/2015/06/chart">
-  <c:date1904 val="0"/>
-  <c:lang val="en-US"/>
-  <c:roundedCorners val="1"/>
-  <c:style val="2"/>
-  <c:chart>
-    <c:title>
-      <c:tx>
-        <c:rich>
-          <a:bodyPr/>
-          <a:lstStyle/>
-          <a:p>
-            <a:pPr>
-              <a:defRPr sz="1150" b="0" i="0" u="none" strike="noStrike">
-                <a:solidFill>
-                  <a:srgbClr val="1E2761"/>
-                </a:solidFill>
-                <a:latin typeface="Calibri"/>
-              </a:defRPr>
-            </a:pPr>
-            <a:r>
-              <a:rPr lang="en-US" sz="1150" b="0" i="0" u="none" strike="noStrike">
-                <a:solidFill>
-                  <a:srgbClr val="1E2761"/>
-                </a:solidFill>
-                <a:latin typeface="Calibri"/>
-              </a:rPr>
-              <a:t>Tasa de default: observada vs. predicha ± IC Vasicek 95% (por decil)</a:t>
-            </a:r>
-          </a:p>
-        </c:rich>
-      </c:tx>
-      <c:overlay val="0"/>
-    </c:title>
-    <c:autoTitleDeleted val="0"/>
-    <c:plotArea>
-      <c:layout/>
-      <c:areaChart>
-        <c:grouping val="stacked"/>
-        <c:varyColors val="0"/>
-        <c:ser>
-          <c:idx val="0"/>
-          <c:order val="0"/>
-          <c:tx>
-            <c:strRef>
-              <c:f>Sheet1!$D$1</c:f>
-              <c:strCache>
-                <c:ptCount val="1"/>
-                <c:pt idx="0">
-                  <c:v>_base</c:v>
-                </c:pt>
-              </c:strCache>
-            </c:strRef>
-          </c:tx>
-          <c:spPr>
-            <a:noFill/>
-            <a:ln>
-              <a:noFill/>
-            </a:ln>
-          </c:spPr>
-          <c:cat>
-            <c:strRef>
-              <c:f>Sheet1!$A$2:$A$11</c:f>
-              <c:strCache>
-                <c:ptCount val="10"/>
-                <c:pt idx="0">
-                  <c:v>D1</c:v>
-                </c:pt>
-                <c:pt idx="1">
-                  <c:v>D2</c:v>
-                </c:pt>
-                <c:pt idx="2">
-                  <c:v>D3</c:v>
-                </c:pt>
-                <c:pt idx="3">
-                  <c:v>D4</c:v>
-                </c:pt>
-                <c:pt idx="4">
-                  <c:v>D5</c:v>
-                </c:pt>
-                <c:pt idx="5">
-                  <c:v>D6</c:v>
-                </c:pt>
-                <c:pt idx="6">
-                  <c:v>D7</c:v>
-                </c:pt>
-                <c:pt idx="7">
-                  <c:v>D8</c:v>
-                </c:pt>
-                <c:pt idx="8">
-                  <c:v>D9</c:v>
-                </c:pt>
-                <c:pt idx="9">
-                  <c:v>D10</c:v>
-                </c:pt>
-              </c:strCache>
-            </c:strRef>
-          </c:cat>
-          <c:val>
-            <c:numRef>
-              <c:f>Sheet1!$D$2:$D$11</c:f>
-              <c:numCache>
-                <c:formatCode>0.00</c:formatCode>
-                <c:ptCount val="10"/>
-                <c:pt idx="0">
-                  <c:v>0.01</c:v>
-                </c:pt>
-                <c:pt idx="1">
-                  <c:v>0.02</c:v>
-                </c:pt>
-                <c:pt idx="2">
-                  <c:v>0.04</c:v>
-                </c:pt>
-                <c:pt idx="3">
-                  <c:v>0.13</c:v>
-                </c:pt>
-                <c:pt idx="4">
-                  <c:v>0.20</c:v>
-                </c:pt>
-                <c:pt idx="5">
-                  <c:v>0.46</c:v>
-                </c:pt>
-                <c:pt idx="6">
-                  <c:v>1.00</c:v>
-                </c:pt>
-                <c:pt idx="7">
-                  <c:v>2.52</c:v>
-                </c:pt>
-                <c:pt idx="8">
-                  <c:v>5.75</c:v>
-                </c:pt>
-                <c:pt idx="9">
-                  <c:v>25.02</c:v>
-                </c:pt>
-              </c:numCache>
-            </c:numRef>
-          </c:val>
-        </c:ser>
-        <c:ser>
-          <c:idx val="1"/>
-          <c:order val="1"/>
-          <c:tx>
-            <c:strRef>
-              <c:f>Sheet1!$E$1</c:f>
-              <c:strCache>
-                <c:ptCount val="1"/>
-                <c:pt idx="0">
-                  <c:v>Intervalo Vasicek (95%)</c:v>
-                </c:pt>
-              </c:strCache>
-            </c:strRef>
-          </c:tx>
-          <c:spPr>
-            <a:solidFill>
-              <a:srgbClr val="6FA8DC">
-                <a:alpha val="28000"/>
-              </a:srgbClr>
-            </a:solidFill>
-            <a:ln>
-              <a:noFill/>
-            </a:ln>
-          </c:spPr>
-          <c:cat>
-            <c:strRef>
-              <c:f>Sheet1!$A$2:$A$11</c:f>
-              <c:strCache>
-                <c:ptCount val="10"/>
-                <c:pt idx="0">
-                  <c:v>D1</c:v>
-                </c:pt>
-                <c:pt idx="1">
-                  <c:v>D2</c:v>
-                </c:pt>
-                <c:pt idx="2">
-                  <c:v>D3</c:v>
-                </c:pt>
-                <c:pt idx="3">
-                  <c:v>D4</c:v>
-                </c:pt>
-                <c:pt idx="4">
-                  <c:v>D5</c:v>
-                </c:pt>
-                <c:pt idx="5">
-                  <c:v>D6</c:v>
-                </c:pt>
-                <c:pt idx="6">
-                  <c:v>D7</c:v>
-                </c:pt>
-                <c:pt idx="7">
-                  <c:v>D8</c:v>
-                </c:pt>
-                <c:pt idx="8">
-                  <c:v>D9</c:v>
-                </c:pt>
-                <c:pt idx="9">
-                  <c:v>D10</c:v>
-                </c:pt>
-              </c:strCache>
-            </c:strRef>
-          </c:cat>
-          <c:val>
-            <c:numRef>
-              <c:f>Sheet1!$E$2:$E$11</c:f>
-              <c:numCache>
-                <c:formatCode>0.00</c:formatCode>
-                <c:ptCount val="10"/>
-                <c:pt idx="0">
-                  <c:v>1.85</c:v>
-                </c:pt>
-                <c:pt idx="1">
-                  <c:v>2.60</c:v>
-                </c:pt>
-                <c:pt idx="2">
-                  <c:v>3.33</c:v>
-                </c:pt>
-                <c:pt idx="3">
-                  <c:v>4.91</c:v>
-                </c:pt>
-                <c:pt idx="4">
-                  <c:v>5.61</c:v>
-                </c:pt>
-                <c:pt idx="5">
-                  <c:v>7.09</c:v>
-                </c:pt>
-                <c:pt idx="6">
-                  <c:v>8.50</c:v>
-                </c:pt>
-                <c:pt idx="7">
-                  <c:v>10.49</c:v>
-                </c:pt>
-                <c:pt idx="8">
-                  <c:v>13.73</c:v>
-                </c:pt>
-                <c:pt idx="9">
-                  <c:v>25.60</c:v>
-                </c:pt>
-              </c:numCache>
-            </c:numRef>
-          </c:val>
-        </c:ser>
-        <c:axId val="2094734554"/>
-        <c:axId val="2094734552"/>
-      </c:areaChart>
-      <c:lineChart>
-        <c:grouping val="standard"/>
-        <c:varyColors val="0"/>
-        <c:ser>
-          <c:idx val="2"/>
-          <c:order val="2"/>
-          <c:tx>
-            <c:strRef>
-              <c:f>Sheet1!$B$1</c:f>
-              <c:strCache>
-                <c:ptCount val="1"/>
-                <c:pt idx="0">
-                  <c:v>Observado</c:v>
-                </c:pt>
-              </c:strCache>
-            </c:strRef>
-          </c:tx>
-          <c:spPr>
-            <a:ln w="31750" cap="flat">
-              <a:solidFill>
-                <a:srgbClr val="C9A227"/>
-              </a:solidFill>
-              <a:prstDash val="solid"/>
-              <a:round/>
-            </a:ln>
-            <a:effectLst/>
-          </c:spPr>
-          <c:marker>
-            <c:symbol val="circle"/>
-            <c:size val="5"/>
-            <c:spPr>
-              <a:solidFill>
-                <a:srgbClr val="C9A227"/>
-              </a:solidFill>
-              <a:ln w="9525" cap="flat">
-                <a:solidFill>
-                  <a:srgbClr val="C9A227"/>
-                </a:solidFill>
-                <a:prstDash val="solid"/>
-                <a:round/>
-              </a:ln>
-              <a:effectLst/>
-            </c:spPr>
-          </c:marker>
-          <c:cat>
-            <c:strRef>
-              <c:f>Sheet1!$A$2:$A$11</c:f>
-              <c:strCache>
-                <c:ptCount val="10"/>
-                <c:pt idx="0">
-                  <c:v>D1</c:v>
-                </c:pt>
-                <c:pt idx="1">
-                  <c:v>D2</c:v>
-                </c:pt>
-                <c:pt idx="2">
-                  <c:v>D3</c:v>
-                </c:pt>
-                <c:pt idx="3">
-                  <c:v>D4</c:v>
-                </c:pt>
-                <c:pt idx="4">
-                  <c:v>D5</c:v>
-                </c:pt>
-                <c:pt idx="5">
-                  <c:v>D6</c:v>
-                </c:pt>
-                <c:pt idx="6">
-                  <c:v>D7</c:v>
-                </c:pt>
-                <c:pt idx="7">
-                  <c:v>D8</c:v>
-                </c:pt>
-                <c:pt idx="8">
-                  <c:v>D9</c:v>
-                </c:pt>
-                <c:pt idx="9">
-                  <c:v>D10</c:v>
-                </c:pt>
-              </c:strCache>
-            </c:strRef>
-          </c:cat>
-          <c:val>
-            <c:numRef>
-              <c:f>Sheet1!$B$2:$B$11</c:f>
-              <c:numCache>
-                <c:formatCode>0.00</c:formatCode>
-                <c:ptCount val="10"/>
-                <c:pt idx="0">
-                  <c:v>0.59</c:v>
-                </c:pt>
-                <c:pt idx="1">
-                  <c:v>0.83</c:v>
-                </c:pt>
-                <c:pt idx="2">
-                  <c:v>1.07</c:v>
-                </c:pt>
-                <c:pt idx="3">
-                  <c:v>1.37</c:v>
-                </c:pt>
-                <c:pt idx="4">
-                  <c:v>1.78</c:v>
-                </c:pt>
-                <c:pt idx="5">
-                  <c:v>2.53</c:v>
-                </c:pt>
-                <c:pt idx="6">
-                  <c:v>3.96</c:v>
-                </c:pt>
-                <c:pt idx="7">
-                  <c:v>6.42</c:v>
-                </c:pt>
-                <c:pt idx="8">
-                  <c:v>11.31</c:v>
-                </c:pt>
-                <c:pt idx="9">
-                  <c:v>36.45</c:v>
-                </c:pt>
-              </c:numCache>
-            </c:numRef>
-          </c:val>
-          <c:smooth val="0"/>
-          <c:extLst>
-            <c:ext xmlns:c16="http://schemas.microsoft.com/office/drawing/2014/chart" uri="{C3380CC4-5D6E-409C-BE32-E72D297353CC}">
-              <c16:uniqueId val="{00000000-3E6E-4A46-8442-DB900D048546}"/>
-            </c:ext>
-          </c:extLst>
-        </c:ser>
-        <c:ser>
-          <c:idx val="3"/>
-          <c:order val="3"/>
-          <c:tx>
-            <c:strRef>
-              <c:f>Sheet1!$C$1</c:f>
-              <c:strCache>
-                <c:ptCount val="1"/>
-                <c:pt idx="0">
-                  <c:v>Predicho (calibrado)</c:v>
-                </c:pt>
-              </c:strCache>
-            </c:strRef>
-          </c:tx>
-          <c:spPr>
-            <a:ln w="31750" cap="flat">
-              <a:solidFill>
-                <a:srgbClr val="1E2761"/>
-              </a:solidFill>
-              <a:prstDash val="solid"/>
-              <a:round/>
-            </a:ln>
-            <a:effectLst/>
-          </c:spPr>
-          <c:marker>
-            <c:symbol val="circle"/>
-            <c:size val="5"/>
-            <c:spPr>
-              <a:solidFill>
-                <a:srgbClr val="1E2761"/>
-              </a:solidFill>
-              <a:ln w="9525" cap="flat">
-                <a:solidFill>
-                  <a:srgbClr val="1E2761"/>
-                </a:solidFill>
-                <a:prstDash val="solid"/>
-                <a:round/>
-              </a:ln>
-              <a:effectLst/>
-            </c:spPr>
-          </c:marker>
-          <c:cat>
-            <c:strRef>
-              <c:f>Sheet1!$A$2:$A$11</c:f>
-              <c:strCache>
-                <c:ptCount val="10"/>
-                <c:pt idx="0">
-                  <c:v>D1</c:v>
-                </c:pt>
-                <c:pt idx="1">
-                  <c:v>D2</c:v>
-                </c:pt>
-                <c:pt idx="2">
-                  <c:v>D3</c:v>
-                </c:pt>
-                <c:pt idx="3">
-                  <c:v>D4</c:v>
-                </c:pt>
-                <c:pt idx="4">
-                  <c:v>D5</c:v>
-                </c:pt>
-                <c:pt idx="5">
-                  <c:v>D6</c:v>
-                </c:pt>
-                <c:pt idx="6">
-                  <c:v>D7</c:v>
-                </c:pt>
-                <c:pt idx="7">
-                  <c:v>D8</c:v>
-                </c:pt>
-                <c:pt idx="8">
-                  <c:v>D9</c:v>
-                </c:pt>
-                <c:pt idx="9">
-                  <c:v>D10</c:v>
-                </c:pt>
-              </c:strCache>
-            </c:strRef>
-          </c:cat>
-          <c:val>
-            <c:numRef>
-              <c:f>Sheet1!$C$2:$C$11</c:f>
-              <c:numCache>
-                <c:formatCode>0.00</c:formatCode>
-                <c:ptCount val="10"/>
-                <c:pt idx="0">
-                  <c:v>0.38</c:v>
-                </c:pt>
-                <c:pt idx="1">
-                  <c:v>0.58</c:v>
-                </c:pt>
-                <c:pt idx="2">
-                  <c:v>0.80</c:v>
-                </c:pt>
-                <c:pt idx="3">
-                  <c:v>1.40</c:v>
-                </c:pt>
-                <c:pt idx="4">
-                  <c:v>1.73</c:v>
-                </c:pt>
-                <c:pt idx="5">
-                  <c:v>2.64</c:v>
-                </c:pt>
-                <c:pt idx="6">
-                  <c:v>3.91</c:v>
-                </c:pt>
-                <c:pt idx="7">
-                  <c:v>6.58</c:v>
-                </c:pt>
-                <c:pt idx="8">
-                  <c:v>11.53</c:v>
-                </c:pt>
-                <c:pt idx="9">
-                  <c:v>37.29</c:v>
-                </c:pt>
-              </c:numCache>
-            </c:numRef>
-          </c:val>
-          <c:smooth val="0"/>
-          <c:extLst>
-            <c:ext xmlns:c16="http://schemas.microsoft.com/office/drawing/2014/chart" uri="{C3380CC4-5D6E-409C-BE32-E72D297353CC}">
-              <c16:uniqueId val="{00000001-3E6E-4A46-8442-DB900D048546}"/>
-            </c:ext>
-          </c:extLst>
-        </c:ser>
-        <c:dLbls>
-          <c:showLegendKey val="0"/>
-          <c:showVal val="0"/>
-          <c:showCatName val="0"/>
-          <c:showSerName val="0"/>
-          <c:showPercent val="0"/>
-          <c:showBubbleSize val="0"/>
-        </c:dLbls>
-        <c:marker val="1"/>
-        <c:smooth val="0"/>
-        <c:axId val="2094734554"/>
-        <c:axId val="2094734552"/>
-      </c:lineChart>
-      <c:catAx>
-        <c:axId val="2094734554"/>
-        <c:scaling>
-          <c:orientation val="minMax"/>
-        </c:scaling>
-        <c:delete val="0"/>
-        <c:axPos val="b"/>
-        <c:numFmt formatCode="General" sourceLinked="1"/>
-        <c:majorTickMark val="out"/>
-        <c:minorTickMark val="none"/>
-        <c:tickLblPos val="low"/>
-        <c:spPr>
-          <a:ln w="12700" cap="flat">
-            <a:solidFill>
-              <a:srgbClr val="888888"/>
-            </a:solidFill>
-            <a:prstDash val="solid"/>
-            <a:round/>
-          </a:ln>
-        </c:spPr>
-        <c:txPr>
-          <a:bodyPr/>
-          <a:lstStyle/>
-          <a:p>
-            <a:pPr>
-              <a:defRPr sz="1000" b="0" i="0" u="none" strike="noStrike">
-                <a:solidFill>
-                  <a:srgbClr val="000000"/>
-                </a:solidFill>
-                <a:latin typeface="Arial"/>
-              </a:defRPr>
-            </a:pPr>
-            <a:endParaRPr lang="en-US"/>
-          </a:p>
-        </c:txPr>
-        <c:crossAx val="2094734552"/>
-        <c:crosses val="autoZero"/>
-        <c:auto val="1"/>
-        <c:lblAlgn val="ctr"/>
-        <c:lblOffset val="100"/>
-        <c:noMultiLvlLbl val="1"/>
-      </c:catAx>
-      <c:valAx>
-        <c:axId val="2094734552"/>
-        <c:scaling>
-          <c:orientation val="minMax"/>
-        </c:scaling>
-        <c:delete val="0"/>
-        <c:axPos val="l"/>
-        <c:majorGridlines>
-          <c:spPr>
-            <a:ln w="12700" cap="flat">
-              <a:solidFill>
-                <a:srgbClr val="E2E7F2"/>
-              </a:solidFill>
-              <a:prstDash val="solid"/>
-              <a:round/>
-            </a:ln>
-          </c:spPr>
-        </c:majorGridlines>
-        <c:title>
-          <c:tx>
-            <c:rich>
-              <a:bodyPr/>
-              <a:lstStyle/>
-              <a:p>
-                <a:pPr>
-                  <a:defRPr sz="1000" b="0" i="0" u="none" strike="noStrike">
-                    <a:solidFill>
-                      <a:srgbClr val="000000"/>
-                    </a:solidFill>
-                    <a:latin typeface="Arial"/>
-                  </a:defRPr>
-                </a:pPr>
-                <a:r>
-                  <a:rPr lang="en-US" sz="1000" b="0" i="0" u="none" strike="noStrike">
-                    <a:solidFill>
-                      <a:srgbClr val="000000"/>
-                    </a:solidFill>
-                    <a:latin typeface="Arial"/>
-                  </a:rPr>
-                  <a:t>% Default</a:t>
-                </a:r>
-              </a:p>
-            </c:rich>
-          </c:tx>
-          <c:overlay val="0"/>
-        </c:title>
-        <c:numFmt formatCode="General" sourceLinked="0"/>
-        <c:majorTickMark val="out"/>
-        <c:minorTickMark val="none"/>
-        <c:tickLblPos val="nextTo"/>
-        <c:spPr>
-          <a:ln w="12700" cap="flat">
-            <a:solidFill>
-              <a:srgbClr val="888888"/>
-            </a:solidFill>
-            <a:prstDash val="solid"/>
-            <a:round/>
-          </a:ln>
-        </c:spPr>
-        <c:txPr>
-          <a:bodyPr/>
-          <a:lstStyle/>
-          <a:p>
-            <a:pPr>
-              <a:defRPr sz="1000" b="0" i="0" u="none" strike="noStrike">
-                <a:solidFill>
-                  <a:srgbClr val="000000"/>
-                </a:solidFill>
-                <a:latin typeface="Arial"/>
-              </a:defRPr>
-            </a:pPr>
-            <a:endParaRPr lang="en-US"/>
-          </a:p>
-        </c:txPr>
-        <c:crossAx val="2094734554"/>
-        <c:crosses val="autoZero"/>
-        <c:crossBetween val="between"/>
-      </c:valAx>
-      <c:spPr>
-        <a:solidFill>
-          <a:srgbClr val="F7F9FC"/>
-        </a:solidFill>
-        <a:ln>
-          <a:noFill/>
-        </a:ln>
-        <a:effectLst/>
-      </c:spPr>
-    </c:plotArea>
-    <c:legend>
-      <c:legendPos val="b"/>
-      <c:legendEntry>
-        <c:idx val="0"/>
-        <c:delete val="1"/>
-      </c:legendEntry>
-      <c:overlay val="0"/>
-      <c:txPr>
-        <a:bodyPr/>
-        <a:lstStyle/>
-        <a:p>
-          <a:pPr>
-            <a:defRPr sz="900"/>
-          </a:pPr>
-          <a:endParaRPr lang="en-US"/>
-        </a:p>
-      </c:txPr>
-    </c:legend>
-    <c:plotVisOnly val="1"/>
-    <c:dispBlanksAs val="span"/>
-    <c:showDLblsOverMax val="1"/>
-  </c:chart>
-  <c:spPr>
-    <a:noFill/>
-    <a:ln>
-      <a:noFill/>
-    </a:ln>
-    <a:effectLst/>
-  </c:spPr>
-  <c:externalData r:id="rId1">
-    <c:autoUpdate val="0"/>
-  </c:externalData>
-</c:chartSpace>
-</file>
-
-<file path=ppt/charts/chart4.xml><?xml version="1.0" encoding="utf-8"?>
+<file path=ppt/charts/chart7.xml><?xml version="1.0" encoding="utf-8"?>
 <c:chartSpace xmlns:c="http://schemas.openxmlformats.org/drawingml/2006/chart" xmlns:a="http://schemas.openxmlformats.org/drawingml/2006/main" xmlns:r="http://schemas.openxmlformats.org/officeDocument/2006/relationships" xmlns:c16r2="http://schemas.microsoft.com/office/drawing/2015/06/chart">
   <c:date1904 val="0"/>
   <c:lang val="en-US"/>
@@ -1923,10 +2590,10 @@
                 <c:formatCode>0.00</c:formatCode>
                 <c:ptCount val="12"/>
                 <c:pt idx="0">
-                  <c:v>0.70</c:v>
+                  <c:v>0.7</c:v>
                 </c:pt>
                 <c:pt idx="1">
-                  <c:v>0.70</c:v>
+                  <c:v>0.7</c:v>
                 </c:pt>
                 <c:pt idx="2">
                   <c:v>0.69</c:v>
@@ -1944,7 +2611,7 @@
                   <c:v>0.67</c:v>
                 </c:pt>
                 <c:pt idx="7">
-                  <c:v>0.70</c:v>
+                  <c:v>0.7</c:v>
                 </c:pt>
                 <c:pt idx="8">
                   <c:v>0.68</c:v>
@@ -1953,10 +2620,10 @@
                   <c:v>0.66</c:v>
                 </c:pt>
                 <c:pt idx="10">
-                  <c:v>0.70</c:v>
+                  <c:v>0.7</c:v>
                 </c:pt>
                 <c:pt idx="11">
-                  <c:v>0.70</c:v>
+                  <c:v>0.7</c:v>
                 </c:pt>
               </c:numCache>
             </c:numRef>
@@ -2103,7 +2770,7 @@
 </c:chartSpace>
 </file>
 
-<file path=ppt/charts/chart5.xml><?xml version="1.0" encoding="utf-8"?>
+<file path=ppt/charts/chart8.xml><?xml version="1.0" encoding="utf-8"?>
 <c:chartSpace xmlns:c="http://schemas.openxmlformats.org/drawingml/2006/chart" xmlns:a="http://schemas.openxmlformats.org/drawingml/2006/main" xmlns:r="http://schemas.openxmlformats.org/officeDocument/2006/relationships" xmlns:c16r2="http://schemas.microsoft.com/office/drawing/2015/06/chart">
   <c:date1904 val="0"/>
   <c:lang val="en-US"/>
@@ -2245,7 +2912,7 @@
                   <c:v>11.32</c:v>
                 </c:pt>
                 <c:pt idx="2">
-                  <c:v>10.60</c:v>
+                  <c:v>10.6</c:v>
                 </c:pt>
                 <c:pt idx="3">
                   <c:v>11.29</c:v>
@@ -2403,7 +3070,7 @@
                   <c:v>6.59</c:v>
                 </c:pt>
                 <c:pt idx="7">
-                  <c:v>6.80</c:v>
+                  <c:v>6.8</c:v>
                 </c:pt>
                 <c:pt idx="8">
                   <c:v>6.72</c:v>
@@ -2605,7 +3272,7 @@
 </c:chartSpace>
 </file>
 
-<file path=ppt/charts/chart6.xml><?xml version="1.0" encoding="utf-8"?>
+<file path=ppt/charts/chart9.xml><?xml version="1.0" encoding="utf-8"?>
 <c:chartSpace xmlns:c="http://schemas.openxmlformats.org/drawingml/2006/chart" xmlns:a="http://schemas.openxmlformats.org/drawingml/2006/main" xmlns:r="http://schemas.openxmlformats.org/officeDocument/2006/relationships" xmlns:c16r2="http://schemas.microsoft.com/office/drawing/2015/06/chart">
   <c:date1904 val="0"/>
   <c:lang val="en-US"/>
@@ -2619,7 +3286,7 @@
           <a:lstStyle/>
           <a:p>
             <a:pPr>
-              <a:defRPr sz="1250" b="0" i="0" u="none" strike="noStrike">
+              <a:defRPr sz="1150" b="0" i="0" u="none" strike="noStrike">
                 <a:solidFill>
                   <a:srgbClr val="1E2761"/>
                 </a:solidFill>
@@ -2627,13 +3294,13 @@
               </a:defRPr>
             </a:pPr>
             <a:r>
-              <a:rPr lang="en-US" sz="1250" b="0" i="0" u="none" strike="noStrike">
+              <a:rPr lang="en-US" sz="1150" b="0" i="0" u="none" strike="noStrike">
                 <a:solidFill>
                   <a:srgbClr val="1E2761"/>
                 </a:solidFill>
                 <a:latin typeface="Calibri"/>
               </a:rPr>
-              <a:t>ROA real por banda de riesgo</a:t>
+              <a:t>Tasa de default: observada vs. predicha ± IC Vasicek 95% (por decil)</a:t>
             </a:r>
           </a:p>
         </c:rich>
@@ -2643,171 +3310,496 @@
     <c:autoTitleDeleted val="0"/>
     <c:plotArea>
       <c:layout/>
-      <c:barChart>
-        <c:barDir val="col"/>
-        <c:grouping val="clustered"/>
+      <c:areaChart>
+        <c:grouping val="stacked"/>
         <c:varyColors val="0"/>
         <c:ser>
           <c:idx val="0"/>
           <c:order val="0"/>
           <c:tx>
             <c:strRef>
-              <c:f>Sheet1!$B$1</c:f>
+              <c:f>Sheet1!$D$1</c:f>
               <c:strCache>
                 <c:ptCount val="1"/>
                 <c:pt idx="0">
-                  <c:v>ROA (%)</c:v>
+                  <c:v>_base</c:v>
+                </c:pt>
+              </c:strCache>
+            </c:strRef>
+          </c:tx>
+          <c:spPr>
+            <a:noFill/>
+            <a:ln>
+              <a:noFill/>
+            </a:ln>
+          </c:spPr>
+          <c:cat>
+            <c:strRef>
+              <c:f>Sheet1!$A$2:$A$11</c:f>
+              <c:strCache>
+                <c:ptCount val="10"/>
+                <c:pt idx="0">
+                  <c:v>D1</c:v>
+                </c:pt>
+                <c:pt idx="1">
+                  <c:v>D2</c:v>
+                </c:pt>
+                <c:pt idx="2">
+                  <c:v>D3</c:v>
+                </c:pt>
+                <c:pt idx="3">
+                  <c:v>D4</c:v>
+                </c:pt>
+                <c:pt idx="4">
+                  <c:v>D5</c:v>
+                </c:pt>
+                <c:pt idx="5">
+                  <c:v>D6</c:v>
+                </c:pt>
+                <c:pt idx="6">
+                  <c:v>D7</c:v>
+                </c:pt>
+                <c:pt idx="7">
+                  <c:v>D8</c:v>
+                </c:pt>
+                <c:pt idx="8">
+                  <c:v>D9</c:v>
+                </c:pt>
+                <c:pt idx="9">
+                  <c:v>D10</c:v>
+                </c:pt>
+              </c:strCache>
+            </c:strRef>
+          </c:cat>
+          <c:val>
+            <c:numRef>
+              <c:f>Sheet1!$D$2:$D$11</c:f>
+              <c:numCache>
+                <c:formatCode>0.00</c:formatCode>
+                <c:ptCount val="10"/>
+                <c:pt idx="0">
+                  <c:v>0.01</c:v>
+                </c:pt>
+                <c:pt idx="1">
+                  <c:v>0.02</c:v>
+                </c:pt>
+                <c:pt idx="2">
+                  <c:v>0.04</c:v>
+                </c:pt>
+                <c:pt idx="3">
+                  <c:v>0.13</c:v>
+                </c:pt>
+                <c:pt idx="4">
+                  <c:v>0.2</c:v>
+                </c:pt>
+                <c:pt idx="5">
+                  <c:v>0.46</c:v>
+                </c:pt>
+                <c:pt idx="6">
+                  <c:v>1</c:v>
+                </c:pt>
+                <c:pt idx="7">
+                  <c:v>2.52</c:v>
+                </c:pt>
+                <c:pt idx="8">
+                  <c:v>5.75</c:v>
+                </c:pt>
+                <c:pt idx="9">
+                  <c:v>25.02</c:v>
+                </c:pt>
+              </c:numCache>
+            </c:numRef>
+          </c:val>
+          <c:extLst>
+            <c:ext xmlns:c16="http://schemas.microsoft.com/office/drawing/2014/chart" uri="{C3380CC4-5D6E-409C-BE32-E72D297353CC}">
+              <c16:uniqueId val="{00000000-40BD-CD44-AAC4-FF1AFCA2B47B}"/>
+            </c:ext>
+          </c:extLst>
+        </c:ser>
+        <c:ser>
+          <c:idx val="1"/>
+          <c:order val="1"/>
+          <c:tx>
+            <c:strRef>
+              <c:f>Sheet1!$E$1</c:f>
+              <c:strCache>
+                <c:ptCount val="1"/>
+                <c:pt idx="0">
+                  <c:v>Intervalo Vasicek (95%)</c:v>
                 </c:pt>
               </c:strCache>
             </c:strRef>
           </c:tx>
           <c:spPr>
             <a:solidFill>
-              <a:srgbClr val="1E2761"/>
+              <a:srgbClr val="6FA8DC">
+                <a:alpha val="28000"/>
+              </a:srgbClr>
             </a:solidFill>
-            <a:effectLst/>
+            <a:ln>
+              <a:noFill/>
+            </a:ln>
           </c:spPr>
-          <c:invertIfNegative val="0"/>
-          <c:dPt>
-            <c:idx val="0"/>
-            <c:invertIfNegative val="0"/>
-            <c:bubble3D val="0"/>
-            <c:spPr>
-              <a:solidFill>
-                <a:srgbClr val="2E8B57"/>
-              </a:solidFill>
-              <a:effectLst/>
-            </c:spPr>
-          </c:dPt>
-          <c:dPt>
-            <c:idx val="1"/>
-            <c:invertIfNegative val="0"/>
-            <c:bubble3D val="0"/>
-            <c:spPr>
-              <a:solidFill>
-                <a:srgbClr val="C9A227"/>
-              </a:solidFill>
-              <a:effectLst/>
-            </c:spPr>
-          </c:dPt>
-          <c:dPt>
-            <c:idx val="2"/>
-            <c:invertIfNegative val="0"/>
-            <c:bubble3D val="0"/>
-            <c:spPr>
-              <a:solidFill>
-                <a:srgbClr val="D97C3D"/>
-              </a:solidFill>
-              <a:effectLst/>
-            </c:spPr>
-          </c:dPt>
-          <c:dPt>
-            <c:idx val="3"/>
-            <c:invertIfNegative val="0"/>
-            <c:bubble3D val="0"/>
-            <c:spPr>
-              <a:solidFill>
-                <a:srgbClr val="B84C4C"/>
-              </a:solidFill>
-              <a:effectLst/>
-            </c:spPr>
-          </c:dPt>
-          <c:dLbls>
-            <c:numFmt formatCode="0.0" sourceLinked="0"/>
-            <c:spPr>
-              <a:noFill/>
-              <a:ln>
-                <a:noFill/>
-              </a:ln>
-              <a:effectLst/>
-            </c:spPr>
-            <c:txPr>
-              <a:bodyPr/>
-              <a:lstStyle/>
-              <a:p>
-                <a:pPr>
-                  <a:defRPr sz="1100" b="0" i="0" u="none" strike="noStrike">
-                    <a:solidFill>
-                      <a:srgbClr val="141A45"/>
-                    </a:solidFill>
-                    <a:latin typeface="Arial"/>
-                  </a:defRPr>
-                </a:pPr>
-                <a:endParaRPr lang="en-PE"/>
-              </a:p>
-            </c:txPr>
-            <c:showLegendKey val="0"/>
-            <c:showVal val="1"/>
-            <c:showCatName val="0"/>
-            <c:showSerName val="0"/>
-            <c:showPercent val="0"/>
-            <c:showBubbleSize val="0"/>
-            <c:showLeaderLines val="0"/>
-            <c:extLst>
-              <c:ext xmlns:c15="http://schemas.microsoft.com/office/drawing/2012/chart" uri="{CE6537A1-D6FC-4f65-9D91-7224C49458BB}">
-                <c15:showLeaderLines val="0"/>
-              </c:ext>
-            </c:extLst>
-          </c:dLbls>
           <c:cat>
             <c:strRef>
-              <c:f>Sheet1!$A$2:$A$5</c:f>
+              <c:f>Sheet1!$A$2:$A$11</c:f>
               <c:strCache>
-                <c:ptCount val="4"/>
+                <c:ptCount val="10"/>
                 <c:pt idx="0">
-                  <c:v>Bajo Riesgo</c:v>
+                  <c:v>D1</c:v>
                 </c:pt>
                 <c:pt idx="1">
-                  <c:v>Medio Riesgo</c:v>
+                  <c:v>D2</c:v>
                 </c:pt>
                 <c:pt idx="2">
-                  <c:v>Alto Riesgo</c:v>
+                  <c:v>D3</c:v>
                 </c:pt>
                 <c:pt idx="3">
-                  <c:v>Muy Alto Riesgo</c:v>
+                  <c:v>D4</c:v>
+                </c:pt>
+                <c:pt idx="4">
+                  <c:v>D5</c:v>
+                </c:pt>
+                <c:pt idx="5">
+                  <c:v>D6</c:v>
+                </c:pt>
+                <c:pt idx="6">
+                  <c:v>D7</c:v>
+                </c:pt>
+                <c:pt idx="7">
+                  <c:v>D8</c:v>
+                </c:pt>
+                <c:pt idx="8">
+                  <c:v>D9</c:v>
+                </c:pt>
+                <c:pt idx="9">
+                  <c:v>D10</c:v>
                 </c:pt>
               </c:strCache>
             </c:strRef>
           </c:cat>
           <c:val>
             <c:numRef>
-              <c:f>Sheet1!$B$2:$B$5</c:f>
+              <c:f>Sheet1!$E$2:$E$11</c:f>
               <c:numCache>
-                <c:formatCode>0.0</c:formatCode>
-                <c:ptCount val="4"/>
+                <c:formatCode>0.00</c:formatCode>
+                <c:ptCount val="10"/>
                 <c:pt idx="0">
-                  <c:v>4.7</c:v>
+                  <c:v>1.85</c:v>
                 </c:pt>
                 <c:pt idx="1">
-                  <c:v>7.4</c:v>
+                  <c:v>2.6</c:v>
                 </c:pt>
                 <c:pt idx="2">
-                  <c:v>12.9</c:v>
+                  <c:v>3.33</c:v>
                 </c:pt>
                 <c:pt idx="3">
-                  <c:v>-3.9</c:v>
+                  <c:v>4.91</c:v>
+                </c:pt>
+                <c:pt idx="4">
+                  <c:v>5.61</c:v>
+                </c:pt>
+                <c:pt idx="5">
+                  <c:v>7.09</c:v>
+                </c:pt>
+                <c:pt idx="6">
+                  <c:v>8.5</c:v>
+                </c:pt>
+                <c:pt idx="7">
+                  <c:v>10.49</c:v>
+                </c:pt>
+                <c:pt idx="8">
+                  <c:v>13.73</c:v>
+                </c:pt>
+                <c:pt idx="9">
+                  <c:v>25.6</c:v>
                 </c:pt>
               </c:numCache>
             </c:numRef>
           </c:val>
           <c:extLst>
             <c:ext xmlns:c16="http://schemas.microsoft.com/office/drawing/2014/chart" uri="{C3380CC4-5D6E-409C-BE32-E72D297353CC}">
-              <c16:uniqueId val="{00000000-BB37-A447-90E3-585773E07477}"/>
+              <c16:uniqueId val="{00000001-40BD-CD44-AAC4-FF1AFCA2B47B}"/>
             </c:ext>
           </c:extLst>
         </c:ser>
         <c:dLbls>
           <c:showLegendKey val="0"/>
-          <c:showVal val="1"/>
+          <c:showVal val="0"/>
           <c:showCatName val="0"/>
           <c:showSerName val="0"/>
           <c:showPercent val="0"/>
           <c:showBubbleSize val="0"/>
         </c:dLbls>
-        <c:gapWidth val="40"/>
         <c:axId val="2094734554"/>
         <c:axId val="2094734552"/>
-      </c:barChart>
+      </c:areaChart>
+      <c:lineChart>
+        <c:grouping val="standard"/>
+        <c:varyColors val="0"/>
+        <c:ser>
+          <c:idx val="2"/>
+          <c:order val="2"/>
+          <c:tx>
+            <c:strRef>
+              <c:f>Sheet1!$B$1</c:f>
+              <c:strCache>
+                <c:ptCount val="1"/>
+                <c:pt idx="0">
+                  <c:v>Observado</c:v>
+                </c:pt>
+              </c:strCache>
+            </c:strRef>
+          </c:tx>
+          <c:spPr>
+            <a:ln w="31750" cap="flat">
+              <a:solidFill>
+                <a:srgbClr val="C9A227"/>
+              </a:solidFill>
+              <a:prstDash val="solid"/>
+              <a:round/>
+            </a:ln>
+            <a:effectLst/>
+          </c:spPr>
+          <c:marker>
+            <c:symbol val="circle"/>
+            <c:size val="5"/>
+            <c:spPr>
+              <a:solidFill>
+                <a:srgbClr val="C9A227"/>
+              </a:solidFill>
+              <a:ln w="9525" cap="flat">
+                <a:solidFill>
+                  <a:srgbClr val="C9A227"/>
+                </a:solidFill>
+                <a:prstDash val="solid"/>
+                <a:round/>
+              </a:ln>
+              <a:effectLst/>
+            </c:spPr>
+          </c:marker>
+          <c:cat>
+            <c:strRef>
+              <c:f>Sheet1!$A$2:$A$11</c:f>
+              <c:strCache>
+                <c:ptCount val="10"/>
+                <c:pt idx="0">
+                  <c:v>D1</c:v>
+                </c:pt>
+                <c:pt idx="1">
+                  <c:v>D2</c:v>
+                </c:pt>
+                <c:pt idx="2">
+                  <c:v>D3</c:v>
+                </c:pt>
+                <c:pt idx="3">
+                  <c:v>D4</c:v>
+                </c:pt>
+                <c:pt idx="4">
+                  <c:v>D5</c:v>
+                </c:pt>
+                <c:pt idx="5">
+                  <c:v>D6</c:v>
+                </c:pt>
+                <c:pt idx="6">
+                  <c:v>D7</c:v>
+                </c:pt>
+                <c:pt idx="7">
+                  <c:v>D8</c:v>
+                </c:pt>
+                <c:pt idx="8">
+                  <c:v>D9</c:v>
+                </c:pt>
+                <c:pt idx="9">
+                  <c:v>D10</c:v>
+                </c:pt>
+              </c:strCache>
+            </c:strRef>
+          </c:cat>
+          <c:val>
+            <c:numRef>
+              <c:f>Sheet1!$B$2:$B$11</c:f>
+              <c:numCache>
+                <c:formatCode>0.00</c:formatCode>
+                <c:ptCount val="10"/>
+                <c:pt idx="0">
+                  <c:v>0.59</c:v>
+                </c:pt>
+                <c:pt idx="1">
+                  <c:v>0.83</c:v>
+                </c:pt>
+                <c:pt idx="2">
+                  <c:v>1.07</c:v>
+                </c:pt>
+                <c:pt idx="3">
+                  <c:v>1.37</c:v>
+                </c:pt>
+                <c:pt idx="4">
+                  <c:v>1.78</c:v>
+                </c:pt>
+                <c:pt idx="5">
+                  <c:v>2.5299999999999998</c:v>
+                </c:pt>
+                <c:pt idx="6">
+                  <c:v>3.96</c:v>
+                </c:pt>
+                <c:pt idx="7">
+                  <c:v>6.42</c:v>
+                </c:pt>
+                <c:pt idx="8">
+                  <c:v>11.31</c:v>
+                </c:pt>
+                <c:pt idx="9">
+                  <c:v>36.450000000000003</c:v>
+                </c:pt>
+              </c:numCache>
+            </c:numRef>
+          </c:val>
+          <c:smooth val="0"/>
+          <c:extLst>
+            <c:ext xmlns:c16="http://schemas.microsoft.com/office/drawing/2014/chart" uri="{C3380CC4-5D6E-409C-BE32-E72D297353CC}">
+              <c16:uniqueId val="{00000000-3E6E-4A46-8442-DB900D048546}"/>
+            </c:ext>
+          </c:extLst>
+        </c:ser>
+        <c:ser>
+          <c:idx val="3"/>
+          <c:order val="3"/>
+          <c:tx>
+            <c:strRef>
+              <c:f>Sheet1!$C$1</c:f>
+              <c:strCache>
+                <c:ptCount val="1"/>
+                <c:pt idx="0">
+                  <c:v>Predicho (calibrado)</c:v>
+                </c:pt>
+              </c:strCache>
+            </c:strRef>
+          </c:tx>
+          <c:spPr>
+            <a:ln w="31750" cap="flat">
+              <a:solidFill>
+                <a:srgbClr val="1E2761"/>
+              </a:solidFill>
+              <a:prstDash val="solid"/>
+              <a:round/>
+            </a:ln>
+            <a:effectLst/>
+          </c:spPr>
+          <c:marker>
+            <c:symbol val="circle"/>
+            <c:size val="5"/>
+            <c:spPr>
+              <a:solidFill>
+                <a:srgbClr val="1E2761"/>
+              </a:solidFill>
+              <a:ln w="9525" cap="flat">
+                <a:solidFill>
+                  <a:srgbClr val="1E2761"/>
+                </a:solidFill>
+                <a:prstDash val="solid"/>
+                <a:round/>
+              </a:ln>
+              <a:effectLst/>
+            </c:spPr>
+          </c:marker>
+          <c:cat>
+            <c:strRef>
+              <c:f>Sheet1!$A$2:$A$11</c:f>
+              <c:strCache>
+                <c:ptCount val="10"/>
+                <c:pt idx="0">
+                  <c:v>D1</c:v>
+                </c:pt>
+                <c:pt idx="1">
+                  <c:v>D2</c:v>
+                </c:pt>
+                <c:pt idx="2">
+                  <c:v>D3</c:v>
+                </c:pt>
+                <c:pt idx="3">
+                  <c:v>D4</c:v>
+                </c:pt>
+                <c:pt idx="4">
+                  <c:v>D5</c:v>
+                </c:pt>
+                <c:pt idx="5">
+                  <c:v>D6</c:v>
+                </c:pt>
+                <c:pt idx="6">
+                  <c:v>D7</c:v>
+                </c:pt>
+                <c:pt idx="7">
+                  <c:v>D8</c:v>
+                </c:pt>
+                <c:pt idx="8">
+                  <c:v>D9</c:v>
+                </c:pt>
+                <c:pt idx="9">
+                  <c:v>D10</c:v>
+                </c:pt>
+              </c:strCache>
+            </c:strRef>
+          </c:cat>
+          <c:val>
+            <c:numRef>
+              <c:f>Sheet1!$C$2:$C$11</c:f>
+              <c:numCache>
+                <c:formatCode>0.00</c:formatCode>
+                <c:ptCount val="10"/>
+                <c:pt idx="0">
+                  <c:v>0.38</c:v>
+                </c:pt>
+                <c:pt idx="1">
+                  <c:v>0.57999999999999996</c:v>
+                </c:pt>
+                <c:pt idx="2">
+                  <c:v>0.8</c:v>
+                </c:pt>
+                <c:pt idx="3">
+                  <c:v>1.4</c:v>
+                </c:pt>
+                <c:pt idx="4">
+                  <c:v>1.73</c:v>
+                </c:pt>
+                <c:pt idx="5">
+                  <c:v>2.64</c:v>
+                </c:pt>
+                <c:pt idx="6">
+                  <c:v>3.91</c:v>
+                </c:pt>
+                <c:pt idx="7">
+                  <c:v>6.58</c:v>
+                </c:pt>
+                <c:pt idx="8">
+                  <c:v>11.53</c:v>
+                </c:pt>
+                <c:pt idx="9">
+                  <c:v>37.29</c:v>
+                </c:pt>
+              </c:numCache>
+            </c:numRef>
+          </c:val>
+          <c:smooth val="0"/>
+          <c:extLst>
+            <c:ext xmlns:c16="http://schemas.microsoft.com/office/drawing/2014/chart" uri="{C3380CC4-5D6E-409C-BE32-E72D297353CC}">
+              <c16:uniqueId val="{00000001-3E6E-4A46-8442-DB900D048546}"/>
+            </c:ext>
+          </c:extLst>
+        </c:ser>
+        <c:dLbls>
+          <c:showLegendKey val="0"/>
+          <c:showVal val="0"/>
+          <c:showCatName val="0"/>
+          <c:showSerName val="0"/>
+          <c:showPercent val="0"/>
+          <c:showBubbleSize val="0"/>
+        </c:dLbls>
+        <c:marker val="1"/>
+        <c:smooth val="0"/>
+        <c:axId val="2094734554"/>
+        <c:axId val="2094734552"/>
+      </c:lineChart>
       <c:catAx>
         <c:axId val="2094734554"/>
         <c:scaling>
@@ -2855,222 +3847,48 @@
         <c:scaling>
           <c:orientation val="minMax"/>
         </c:scaling>
-        <c:delete val="1"/>
+        <c:delete val="0"/>
         <c:axPos val="l"/>
-        <c:numFmt formatCode="General" sourceLinked="0"/>
-        <c:majorTickMark val="out"/>
-        <c:minorTickMark val="none"/>
-        <c:tickLblPos val="nextTo"/>
-        <c:crossAx val="2094734554"/>
-        <c:crosses val="autoZero"/>
-        <c:crossBetween val="between"/>
-      </c:valAx>
-      <c:spPr>
-        <a:solidFill>
-          <a:srgbClr val="F7F9FC"/>
-        </a:solidFill>
-        <a:ln>
-          <a:noFill/>
-        </a:ln>
-        <a:effectLst/>
-      </c:spPr>
-    </c:plotArea>
-    <c:plotVisOnly val="1"/>
-    <c:dispBlanksAs val="span"/>
-    <c:showDLblsOverMax val="1"/>
-  </c:chart>
-  <c:spPr>
-    <a:noFill/>
-    <a:ln>
-      <a:noFill/>
-    </a:ln>
-    <a:effectLst/>
-  </c:spPr>
-  <c:externalData r:id="rId1">
-    <c:autoUpdate val="0"/>
-  </c:externalData>
-</c:chartSpace>
-</file>
-
-<file path=ppt/charts/chart7.xml><?xml version="1.0" encoding="utf-8"?>
-<c:chartSpace xmlns:c="http://schemas.openxmlformats.org/drawingml/2006/chart" xmlns:a="http://schemas.openxmlformats.org/drawingml/2006/main" xmlns:r="http://schemas.openxmlformats.org/officeDocument/2006/relationships" xmlns:c16r2="http://schemas.microsoft.com/office/drawing/2015/06/chart">
-  <c:date1904 val="0"/>
-  <c:lang val="en-US"/>
-  <c:roundedCorners val="1"/>
-  <c:style val="2"/>
-  <c:chart>
-    <c:title>
-      <c:tx>
-        <c:rich>
-          <a:bodyPr/>
-          <a:lstStyle/>
-          <a:p>
-            <a:pPr>
-              <a:defRPr sz="1300" b="0" i="0" u="none" strike="noStrike">
-                <a:solidFill>
-                  <a:srgbClr val="1E2761"/>
-                </a:solidFill>
-                <a:latin typeface="Calibri"/>
-              </a:defRPr>
-            </a:pPr>
-            <a:r>
-              <a:rPr lang="en-US" sz="1300" b="0" i="0" u="none" strike="noStrike">
-                <a:solidFill>
-                  <a:srgbClr val="1E2761"/>
-                </a:solidFill>
-                <a:latin typeface="Calibri"/>
-              </a:rPr>
-              <a:t>Comparación de modelos — AUC (cross-validation)</a:t>
-            </a:r>
-          </a:p>
-        </c:rich>
-      </c:tx>
-      <c:overlay val="0"/>
-    </c:title>
-    <c:autoTitleDeleted val="0"/>
-    <c:plotArea>
-      <c:layout/>
-      <c:barChart>
-        <c:barDir val="bar"/>
-        <c:grouping val="clustered"/>
-        <c:varyColors val="0"/>
-        <c:ser>
-          <c:idx val="0"/>
-          <c:order val="0"/>
+        <c:majorGridlines>
+          <c:spPr>
+            <a:ln w="12700" cap="flat">
+              <a:solidFill>
+                <a:srgbClr val="E2E7F2"/>
+              </a:solidFill>
+              <a:prstDash val="solid"/>
+              <a:round/>
+            </a:ln>
+          </c:spPr>
+        </c:majorGridlines>
+        <c:title>
           <c:tx>
-            <c:strRef>
-              <c:f>Sheet1!$B$1</c:f>
-              <c:strCache>
-                <c:ptCount val="1"/>
-                <c:pt idx="0">
-                  <c:v>AUC (CV)</c:v>
-                </c:pt>
-              </c:strCache>
-            </c:strRef>
-          </c:tx>
-          <c:spPr>
-            <a:solidFill>
-              <a:srgbClr val="1E2761"/>
-            </a:solidFill>
-            <a:effectLst/>
-          </c:spPr>
-          <c:invertIfNegative val="0"/>
-          <c:dLbls>
-            <c:numFmt formatCode="0.000" sourceLinked="0"/>
-            <c:spPr>
-              <a:noFill/>
-              <a:ln>
-                <a:noFill/>
-              </a:ln>
-              <a:effectLst/>
-            </c:spPr>
-            <c:txPr>
+            <c:rich>
               <a:bodyPr/>
               <a:lstStyle/>
               <a:p>
                 <a:pPr>
                   <a:defRPr sz="1000" b="0" i="0" u="none" strike="noStrike">
                     <a:solidFill>
-                      <a:srgbClr val="141A45"/>
+                      <a:srgbClr val="000000"/>
                     </a:solidFill>
                     <a:latin typeface="Arial"/>
                   </a:defRPr>
                 </a:pPr>
-                <a:endParaRPr lang="en-PE"/>
+                <a:r>
+                  <a:rPr lang="en-US" sz="1000" b="0" i="0" u="none" strike="noStrike">
+                    <a:solidFill>
+                      <a:srgbClr val="000000"/>
+                    </a:solidFill>
+                    <a:latin typeface="Arial"/>
+                  </a:rPr>
+                  <a:t>% Default</a:t>
+                </a:r>
               </a:p>
-            </c:txPr>
-            <c:showLegendKey val="0"/>
-            <c:showVal val="1"/>
-            <c:showCatName val="0"/>
-            <c:showSerName val="0"/>
-            <c:showPercent val="0"/>
-            <c:showBubbleSize val="0"/>
-            <c:showLeaderLines val="0"/>
-            <c:extLst>
-              <c:ext xmlns:c15="http://schemas.microsoft.com/office/drawing/2012/chart" uri="{CE6537A1-D6FC-4f65-9D91-7224C49458BB}">
-                <c15:showLeaderLines val="0"/>
-              </c:ext>
-            </c:extLst>
-          </c:dLbls>
-          <c:cat>
-            <c:strRef>
-              <c:f>Sheet1!$A$2:$A$7</c:f>
-              <c:strCache>
-                <c:ptCount val="6"/>
-                <c:pt idx="0">
-                  <c:v>LightGBM</c:v>
-                </c:pt>
-                <c:pt idx="1">
-                  <c:v>CatBoost</c:v>
-                </c:pt>
-                <c:pt idx="2">
-                  <c:v>XGBoost</c:v>
-                </c:pt>
-                <c:pt idx="3">
-                  <c:v>RandomForest</c:v>
-                </c:pt>
-                <c:pt idx="4">
-                  <c:v>LogisticRegression</c:v>
-                </c:pt>
-                <c:pt idx="5">
-                  <c:v>DecisionTree</c:v>
-                </c:pt>
-              </c:strCache>
-            </c:strRef>
-          </c:cat>
-          <c:val>
-            <c:numRef>
-              <c:f>Sheet1!$B$2:$B$7</c:f>
-              <c:numCache>
-                <c:formatCode>0.000</c:formatCode>
-                <c:ptCount val="6"/>
-                <c:pt idx="0">
-                  <c:v>0.865</c:v>
-                </c:pt>
-                <c:pt idx="1">
-                  <c:v>0.864</c:v>
-                </c:pt>
-                <c:pt idx="2">
-                  <c:v>0.856</c:v>
-                </c:pt>
-                <c:pt idx="3">
-                  <c:v>0.84</c:v>
-                </c:pt>
-                <c:pt idx="4">
-                  <c:v>0.825</c:v>
-                </c:pt>
-                <c:pt idx="5">
-                  <c:v>0.614</c:v>
-                </c:pt>
-              </c:numCache>
-            </c:numRef>
-          </c:val>
-          <c:extLst>
-            <c:ext xmlns:c16="http://schemas.microsoft.com/office/drawing/2014/chart" uri="{C3380CC4-5D6E-409C-BE32-E72D297353CC}">
-              <c16:uniqueId val="{00000000-598E-9547-9037-C4444C194B21}"/>
-            </c:ext>
-          </c:extLst>
-        </c:ser>
-        <c:dLbls>
-          <c:showLegendKey val="0"/>
-          <c:showVal val="1"/>
-          <c:showCatName val="0"/>
-          <c:showSerName val="0"/>
-          <c:showPercent val="0"/>
-          <c:showBubbleSize val="0"/>
-        </c:dLbls>
-        <c:gapWidth val="150"/>
-        <c:axId val="2094734554"/>
-        <c:axId val="2094734552"/>
-      </c:barChart>
-      <c:catAx>
-        <c:axId val="2094734554"/>
-        <c:scaling>
-          <c:orientation val="minMax"/>
-        </c:scaling>
-        <c:delete val="0"/>
-        <c:axPos val="l"/>
-        <c:numFmt formatCode="General" sourceLinked="1"/>
+            </c:rich>
+          </c:tx>
+          <c:overlay val="0"/>
+        </c:title>
+        <c:numFmt formatCode="General" sourceLinked="0"/>
         <c:majorTickMark val="out"/>
         <c:minorTickMark val="none"/>
         <c:tickLblPos val="nextTo"/>
@@ -3088,9 +3906,9 @@
           <a:lstStyle/>
           <a:p>
             <a:pPr>
-              <a:defRPr sz="1050" b="0" i="0" u="none" strike="noStrike">
-                <a:solidFill>
-                  <a:srgbClr val="141A45"/>
+              <a:defRPr sz="1000" b="0" i="0" u="none" strike="noStrike">
+                <a:solidFill>
+                  <a:srgbClr val="000000"/>
                 </a:solidFill>
                 <a:latin typeface="Arial"/>
               </a:defRPr>
@@ -3098,24 +3916,6 @@
             <a:endParaRPr lang="en-US"/>
           </a:p>
         </c:txPr>
-        <c:crossAx val="2094734552"/>
-        <c:crosses val="autoZero"/>
-        <c:auto val="1"/>
-        <c:lblAlgn val="ctr"/>
-        <c:lblOffset val="100"/>
-        <c:noMultiLvlLbl val="1"/>
-      </c:catAx>
-      <c:valAx>
-        <c:axId val="2094734552"/>
-        <c:scaling>
-          <c:orientation val="minMax"/>
-        </c:scaling>
-        <c:delete val="1"/>
-        <c:axPos val="b"/>
-        <c:numFmt formatCode="General" sourceLinked="0"/>
-        <c:majorTickMark val="out"/>
-        <c:minorTickMark val="none"/>
-        <c:tickLblPos val="low"/>
         <c:crossAx val="2094734554"/>
         <c:crosses val="autoZero"/>
         <c:crossBetween val="between"/>
@@ -3130,644 +3930,26 @@
         <a:effectLst/>
       </c:spPr>
     </c:plotArea>
+    <c:legend>
+      <c:legendPos val="b"/>
+      <c:legendEntry>
+        <c:idx val="0"/>
+        <c:delete val="1"/>
+      </c:legendEntry>
+      <c:overlay val="0"/>
+      <c:txPr>
+        <a:bodyPr/>
+        <a:lstStyle/>
+        <a:p>
+          <a:pPr>
+            <a:defRPr sz="900"/>
+          </a:pPr>
+          <a:endParaRPr lang="en-US"/>
+        </a:p>
+      </c:txPr>
+    </c:legend>
     <c:plotVisOnly val="1"/>
     <c:dispBlanksAs val="span"/>
-    <c:showDLblsOverMax val="1"/>
-  </c:chart>
-  <c:spPr>
-    <a:noFill/>
-    <a:ln>
-      <a:noFill/>
-    </a:ln>
-    <a:effectLst/>
-  </c:spPr>
-  <c:externalData r:id="rId1">
-    <c:autoUpdate val="0"/>
-  </c:externalData>
-</c:chartSpace>
-</file>
-
-<file path=ppt/charts/chart8.xml><?xml version="1.0" encoding="utf-8"?>
-<c:chartSpace xmlns:c="http://schemas.openxmlformats.org/drawingml/2006/chart" xmlns:a="http://schemas.openxmlformats.org/drawingml/2006/main" xmlns:r="http://schemas.openxmlformats.org/officeDocument/2006/relationships" xmlns:c16r2="http://schemas.microsoft.com/office/drawing/2015/06/chart">
-  <c:date1904 val="0"/>
-  <c:lang val="en-US"/>
-  <c:roundedCorners val="1"/>
-  <c:style val="2"/>
-  <c:chart>
-    <c:autoTitleDeleted val="1"/>
-    <c:plotArea>
-      <c:layout/>
-      <c:barChart>
-        <c:barDir val="col"/>
-        <c:grouping val="stacked"/>
-        <c:varyColors val="0"/>
-        <c:ser>
-          <c:idx val="0"/>
-          <c:order val="0"/>
-          <c:tx>
-            <c:strRef>
-              <c:f>Sheet1!$B$1</c:f>
-              <c:strCache>
-                <c:ptCount val="1"/>
-                <c:pt idx="0">
-                  <c:v>Piso</c:v>
-                </c:pt>
-              </c:strCache>
-            </c:strRef>
-          </c:tx>
-          <c:spPr>
-            <a:noFill/>
-            <a:ln>
-              <a:noFill/>
-            </a:ln>
-          </c:spPr>
-          <c:invertIfNegative val="0"/>
-          <c:cat>
-            <c:strRef>
-              <c:f>Sheet1!$A$2:$A$7</c:f>
-              <c:strCache>
-                <c:ptCount val="6"/>
-                <c:pt idx="0">
-                  <c:v>Base 2.95%</c:v>
-                </c:pt>
-                <c:pt idx="1">
-                  <c:v>Util. crédito −1.30pp</c:v>
-                </c:pt>
-                <c:pt idx="2">
-                  <c:v>Edad −0.59pp</c:v>
-                </c:pt>
-                <c:pt idx="3">
-                  <c:v>Ratio deuda −0.22pp</c:v>
-                </c:pt>
-                <c:pt idx="4">
-                  <c:v>Otras −0.24pp</c:v>
-                </c:pt>
-                <c:pt idx="5">
-                  <c:v>Final 0.60%</c:v>
-                </c:pt>
-              </c:strCache>
-            </c:strRef>
-          </c:cat>
-          <c:val>
-            <c:numRef>
-              <c:f>Sheet1!$B$2:$B$7</c:f>
-              <c:numCache>
-                <c:formatCode>0.00</c:formatCode>
-                <c:ptCount val="6"/>
-                <c:pt idx="0">
-                  <c:v>0.0</c:v>
-                </c:pt>
-                <c:pt idx="1">
-                  <c:v>1.6473000000000002</c:v>
-                </c:pt>
-                <c:pt idx="2">
-                  <c:v>1.0582000000000003</c:v>
-                </c:pt>
-                <c:pt idx="3">
-                  <c:v>0.8382000000000003</c:v>
-                </c:pt>
-                <c:pt idx="4">
-                  <c:v>0.5999000000000003</c:v>
-                </c:pt>
-                <c:pt idx="5">
-                  <c:v>0.0</c:v>
-                </c:pt>
-              </c:numCache>
-            </c:numRef>
-          </c:val>
-        </c:ser>
-        <c:ser>
-          <c:idx val="1"/>
-          <c:order val="1"/>
-          <c:tx>
-            <c:strRef>
-              <c:f>Sheet1!$C$1</c:f>
-              <c:strCache>
-                <c:ptCount val="1"/>
-                <c:pt idx="0">
-                  <c:v>Contribución</c:v>
-                </c:pt>
-              </c:strCache>
-            </c:strRef>
-          </c:tx>
-          <c:spPr>
-            <a:solidFill>
-              <a:srgbClr val="1E2761"/>
-            </a:solidFill>
-          </c:spPr>
-          <c:invertIfNegative val="0"/>
-          <c:dPt>
-            <c:idx val="0"/>
-            <c:invertIfNegative val="0"/>
-            <c:bubble3D val="0"/>
-            <c:spPr>
-              <a:solidFill>
-                <a:srgbClr val="1E2761"/>
-              </a:solidFill>
-              <a:effectLst/>
-            </c:spPr>
-          </c:dPt>
-          <c:dPt>
-            <c:idx val="1"/>
-            <c:invertIfNegative val="0"/>
-            <c:bubble3D val="0"/>
-            <c:spPr>
-              <a:solidFill>
-                <a:srgbClr val="2E8B57"/>
-              </a:solidFill>
-              <a:effectLst/>
-            </c:spPr>
-          </c:dPt>
-          <c:dPt>
-            <c:idx val="2"/>
-            <c:invertIfNegative val="0"/>
-            <c:bubble3D val="0"/>
-            <c:spPr>
-              <a:solidFill>
-                <a:srgbClr val="2E8B57"/>
-              </a:solidFill>
-              <a:effectLst/>
-            </c:spPr>
-          </c:dPt>
-          <c:dPt>
-            <c:idx val="3"/>
-            <c:invertIfNegative val="0"/>
-            <c:bubble3D val="0"/>
-            <c:spPr>
-              <a:solidFill>
-                <a:srgbClr val="2E8B57"/>
-              </a:solidFill>
-              <a:effectLst/>
-            </c:spPr>
-          </c:dPt>
-          <c:dPt>
-            <c:idx val="4"/>
-            <c:invertIfNegative val="0"/>
-            <c:bubble3D val="0"/>
-            <c:spPr>
-              <a:solidFill>
-                <a:srgbClr val="2E8B57"/>
-              </a:solidFill>
-              <a:effectLst/>
-            </c:spPr>
-          </c:dPt>
-          <c:dPt>
-            <c:idx val="5"/>
-            <c:invertIfNegative val="0"/>
-            <c:bubble3D val="0"/>
-            <c:spPr>
-              <a:solidFill>
-                <a:srgbClr val="1E2761"/>
-              </a:solidFill>
-              <a:effectLst/>
-            </c:spPr>
-          </c:dPt>
-          <c:cat>
-            <c:strRef>
-              <c:f>Sheet1!$A$2:$A$7</c:f>
-              <c:strCache>
-                <c:ptCount val="6"/>
-                <c:pt idx="0">
-                  <c:v>Base 2.95%</c:v>
-                </c:pt>
-                <c:pt idx="1">
-                  <c:v>Util. crédito −1.30pp</c:v>
-                </c:pt>
-                <c:pt idx="2">
-                  <c:v>Edad −0.59pp</c:v>
-                </c:pt>
-                <c:pt idx="3">
-                  <c:v>Ratio deuda −0.22pp</c:v>
-                </c:pt>
-                <c:pt idx="4">
-                  <c:v>Otras −0.24pp</c:v>
-                </c:pt>
-                <c:pt idx="5">
-                  <c:v>Final 0.60%</c:v>
-                </c:pt>
-              </c:strCache>
-            </c:strRef>
-          </c:cat>
-          <c:val>
-            <c:numRef>
-              <c:f>Sheet1!$C$2:$C$7</c:f>
-              <c:numCache>
-                <c:formatCode>0.00</c:formatCode>
-                <c:ptCount val="6"/>
-                <c:pt idx="0">
-                  <c:v>2.9523</c:v>
-                </c:pt>
-                <c:pt idx="1">
-                  <c:v>1.305</c:v>
-                </c:pt>
-                <c:pt idx="2">
-                  <c:v>0.5891</c:v>
-                </c:pt>
-                <c:pt idx="3">
-                  <c:v>0.22</c:v>
-                </c:pt>
-                <c:pt idx="4">
-                  <c:v>0.2383</c:v>
-                </c:pt>
-                <c:pt idx="5">
-                  <c:v>0.6</c:v>
-                </c:pt>
-              </c:numCache>
-            </c:numRef>
-          </c:val>
-        </c:ser>
-        <c:gapWidth val="30"/>
-        <c:overlap val="100"/>
-        <c:axId val="20947380"/>
-        <c:axId val="20947381"/>
-      </c:barChart>
-      <c:catAx>
-        <c:axId val="20947380"/>
-        <c:scaling>
-          <c:orientation val="minMax"/>
-        </c:scaling>
-        <c:delete val="0"/>
-        <c:axPos val="b"/>
-        <c:numFmt formatCode="General" sourceLinked="1"/>
-        <c:majorTickMark val="none"/>
-        <c:minorTickMark val="none"/>
-        <c:tickLblPos val="low"/>
-        <c:spPr>
-          <a:ln w="9525" cap="flat">
-            <a:solidFill>
-              <a:srgbClr val="888888"/>
-            </a:solidFill>
-            <a:prstDash val="solid"/>
-            <a:round/>
-          </a:ln>
-        </c:spPr>
-        <c:txPr>
-          <a:bodyPr rot="-2700000" vert="horz"/>
-          <a:lstStyle/>
-          <a:p>
-            <a:pPr>
-              <a:defRPr sz="700" b="0" i="0" u="none" strike="noStrike">
-                <a:solidFill>
-                  <a:srgbClr val="141A45"/>
-                </a:solidFill>
-                <a:latin typeface="Arial"/>
-              </a:defRPr>
-            </a:pPr>
-            <a:endParaRPr lang="en-US"/>
-          </a:p>
-        </c:txPr>
-        <c:crossAx val="20947381"/>
-        <c:crosses val="autoZero"/>
-        <c:auto val="1"/>
-        <c:lblAlgn val="ctr"/>
-        <c:lblOffset val="100"/>
-        <c:noMultiLvlLbl val="1"/>
-      </c:catAx>
-      <c:valAx>
-        <c:axId val="20947381"/>
-        <c:scaling>
-          <c:orientation val="minMax"/>
-        </c:scaling>
-        <c:delete val="1"/>
-        <c:axPos val="l"/>
-        <c:numFmt formatCode="General" sourceLinked="0"/>
-        <c:majorTickMark val="none"/>
-        <c:minorTickMark val="none"/>
-        <c:tickLblPos val="nextTo"/>
-        <c:crossAx val="20947380"/>
-        <c:crosses val="autoZero"/>
-        <c:crossBetween val="between"/>
-      </c:valAx>
-      <c:spPr>
-        <a:solidFill>
-          <a:srgbClr val="FFFFFF"/>
-        </a:solidFill>
-        <a:ln>
-          <a:noFill/>
-        </a:ln>
-        <a:effectLst/>
-      </c:spPr>
-    </c:plotArea>
-    <c:plotVisOnly val="1"/>
-    <c:dispBlanksAs val="gap"/>
-    <c:showDLblsOverMax val="1"/>
-  </c:chart>
-  <c:spPr>
-    <a:noFill/>
-    <a:ln>
-      <a:noFill/>
-    </a:ln>
-    <a:effectLst/>
-  </c:spPr>
-  <c:externalData r:id="rId1">
-    <c:autoUpdate val="0"/>
-  </c:externalData>
-</c:chartSpace>
-</file>
-
-<file path=ppt/charts/chart9.xml><?xml version="1.0" encoding="utf-8"?>
-<c:chartSpace xmlns:c="http://schemas.openxmlformats.org/drawingml/2006/chart" xmlns:a="http://schemas.openxmlformats.org/drawingml/2006/main" xmlns:r="http://schemas.openxmlformats.org/officeDocument/2006/relationships" xmlns:c16r2="http://schemas.microsoft.com/office/drawing/2015/06/chart">
-  <c:date1904 val="0"/>
-  <c:lang val="en-US"/>
-  <c:roundedCorners val="1"/>
-  <c:style val="2"/>
-  <c:chart>
-    <c:autoTitleDeleted val="1"/>
-    <c:plotArea>
-      <c:layout/>
-      <c:barChart>
-        <c:barDir val="col"/>
-        <c:grouping val="stacked"/>
-        <c:varyColors val="0"/>
-        <c:ser>
-          <c:idx val="0"/>
-          <c:order val="0"/>
-          <c:tx>
-            <c:strRef>
-              <c:f>Sheet1!$B$1</c:f>
-              <c:strCache>
-                <c:ptCount val="1"/>
-                <c:pt idx="0">
-                  <c:v>Piso</c:v>
-                </c:pt>
-              </c:strCache>
-            </c:strRef>
-          </c:tx>
-          <c:spPr>
-            <a:noFill/>
-            <a:ln>
-              <a:noFill/>
-            </a:ln>
-          </c:spPr>
-          <c:invertIfNegative val="0"/>
-          <c:cat>
-            <c:strRef>
-              <c:f>Sheet1!$A$2:$A$7</c:f>
-              <c:strCache>
-                <c:ptCount val="6"/>
-                <c:pt idx="0">
-                  <c:v>Base 2.95%</c:v>
-                </c:pt>
-                <c:pt idx="1">
-                  <c:v>Atraso 30-59d −0.46pp</c:v>
-                </c:pt>
-                <c:pt idx="2">
-                  <c:v>Ingreso mensual +0.28pp</c:v>
-                </c:pt>
-                <c:pt idx="3">
-                  <c:v>N° líneas −0.27pp</c:v>
-                </c:pt>
-                <c:pt idx="4">
-                  <c:v>Otras −0.49pp</c:v>
-                </c:pt>
-                <c:pt idx="5">
-                  <c:v>Final 2.00%</c:v>
-                </c:pt>
-              </c:strCache>
-            </c:strRef>
-          </c:cat>
-          <c:val>
-            <c:numRef>
-              <c:f>Sheet1!$B$2:$B$7</c:f>
-              <c:numCache>
-                <c:formatCode>0.00</c:formatCode>
-                <c:ptCount val="6"/>
-                <c:pt idx="0">
-                  <c:v>0.0</c:v>
-                </c:pt>
-                <c:pt idx="1">
-                  <c:v>2.4881</c:v>
-                </c:pt>
-                <c:pt idx="2">
-                  <c:v>2.4881</c:v>
-                </c:pt>
-                <c:pt idx="3">
-                  <c:v>2.4891</c:v>
-                </c:pt>
-                <c:pt idx="4">
-                  <c:v>2.0004</c:v>
-                </c:pt>
-                <c:pt idx="5">
-                  <c:v>0.0</c:v>
-                </c:pt>
-              </c:numCache>
-            </c:numRef>
-          </c:val>
-        </c:ser>
-        <c:ser>
-          <c:idx val="1"/>
-          <c:order val="1"/>
-          <c:tx>
-            <c:strRef>
-              <c:f>Sheet1!$C$1</c:f>
-              <c:strCache>
-                <c:ptCount val="1"/>
-                <c:pt idx="0">
-                  <c:v>Contribución</c:v>
-                </c:pt>
-              </c:strCache>
-            </c:strRef>
-          </c:tx>
-          <c:spPr>
-            <a:solidFill>
-              <a:srgbClr val="1E2761"/>
-            </a:solidFill>
-          </c:spPr>
-          <c:invertIfNegative val="0"/>
-          <c:dPt>
-            <c:idx val="0"/>
-            <c:invertIfNegative val="0"/>
-            <c:bubble3D val="0"/>
-            <c:spPr>
-              <a:solidFill>
-                <a:srgbClr val="1E2761"/>
-              </a:solidFill>
-              <a:effectLst/>
-            </c:spPr>
-          </c:dPt>
-          <c:dPt>
-            <c:idx val="1"/>
-            <c:invertIfNegative val="0"/>
-            <c:bubble3D val="0"/>
-            <c:spPr>
-              <a:solidFill>
-                <a:srgbClr val="2E8B57"/>
-              </a:solidFill>
-              <a:effectLst/>
-            </c:spPr>
-          </c:dPt>
-          <c:dPt>
-            <c:idx val="2"/>
-            <c:invertIfNegative val="0"/>
-            <c:bubble3D val="0"/>
-            <c:spPr>
-              <a:solidFill>
-                <a:srgbClr val="B84C4C"/>
-              </a:solidFill>
-              <a:effectLst/>
-            </c:spPr>
-          </c:dPt>
-          <c:dPt>
-            <c:idx val="3"/>
-            <c:invertIfNegative val="0"/>
-            <c:bubble3D val="0"/>
-            <c:spPr>
-              <a:solidFill>
-                <a:srgbClr val="2E8B57"/>
-              </a:solidFill>
-              <a:effectLst/>
-            </c:spPr>
-          </c:dPt>
-          <c:dPt>
-            <c:idx val="4"/>
-            <c:invertIfNegative val="0"/>
-            <c:bubble3D val="0"/>
-            <c:spPr>
-              <a:solidFill>
-                <a:srgbClr val="2E8B57"/>
-              </a:solidFill>
-              <a:effectLst/>
-            </c:spPr>
-          </c:dPt>
-          <c:dPt>
-            <c:idx val="5"/>
-            <c:invertIfNegative val="0"/>
-            <c:bubble3D val="0"/>
-            <c:spPr>
-              <a:solidFill>
-                <a:srgbClr val="1E2761"/>
-              </a:solidFill>
-              <a:effectLst/>
-            </c:spPr>
-          </c:dPt>
-          <c:cat>
-            <c:strRef>
-              <c:f>Sheet1!$A$2:$A$7</c:f>
-              <c:strCache>
-                <c:ptCount val="6"/>
-                <c:pt idx="0">
-                  <c:v>Base 2.95%</c:v>
-                </c:pt>
-                <c:pt idx="1">
-                  <c:v>Atraso 30-59d −0.46pp</c:v>
-                </c:pt>
-                <c:pt idx="2">
-                  <c:v>Ingreso mensual +0.28pp</c:v>
-                </c:pt>
-                <c:pt idx="3">
-                  <c:v>N° líneas −0.27pp</c:v>
-                </c:pt>
-                <c:pt idx="4">
-                  <c:v>Otras −0.49pp</c:v>
-                </c:pt>
-                <c:pt idx="5">
-                  <c:v>Final 2.00%</c:v>
-                </c:pt>
-              </c:strCache>
-            </c:strRef>
-          </c:cat>
-          <c:val>
-            <c:numRef>
-              <c:f>Sheet1!$C$2:$C$7</c:f>
-              <c:numCache>
-                <c:formatCode>0.00</c:formatCode>
-                <c:ptCount val="6"/>
-                <c:pt idx="0">
-                  <c:v>2.9523</c:v>
-                </c:pt>
-                <c:pt idx="1">
-                  <c:v>0.4642</c:v>
-                </c:pt>
-                <c:pt idx="2">
-                  <c:v>0.2759</c:v>
-                </c:pt>
-                <c:pt idx="3">
-                  <c:v>0.2749</c:v>
-                </c:pt>
-                <c:pt idx="4">
-                  <c:v>0.4887</c:v>
-                </c:pt>
-                <c:pt idx="5">
-                  <c:v>2.0003</c:v>
-                </c:pt>
-              </c:numCache>
-            </c:numRef>
-          </c:val>
-        </c:ser>
-        <c:gapWidth val="30"/>
-        <c:overlap val="100"/>
-        <c:axId val="20947390"/>
-        <c:axId val="20947391"/>
-      </c:barChart>
-      <c:catAx>
-        <c:axId val="20947390"/>
-        <c:scaling>
-          <c:orientation val="minMax"/>
-        </c:scaling>
-        <c:delete val="0"/>
-        <c:axPos val="b"/>
-        <c:numFmt formatCode="General" sourceLinked="1"/>
-        <c:majorTickMark val="none"/>
-        <c:minorTickMark val="none"/>
-        <c:tickLblPos val="low"/>
-        <c:spPr>
-          <a:ln w="9525" cap="flat">
-            <a:solidFill>
-              <a:srgbClr val="888888"/>
-            </a:solidFill>
-            <a:prstDash val="solid"/>
-            <a:round/>
-          </a:ln>
-        </c:spPr>
-        <c:txPr>
-          <a:bodyPr rot="-2700000" vert="horz"/>
-          <a:lstStyle/>
-          <a:p>
-            <a:pPr>
-              <a:defRPr sz="700" b="0" i="0" u="none" strike="noStrike">
-                <a:solidFill>
-                  <a:srgbClr val="141A45"/>
-                </a:solidFill>
-                <a:latin typeface="Arial"/>
-              </a:defRPr>
-            </a:pPr>
-            <a:endParaRPr lang="en-US"/>
-          </a:p>
-        </c:txPr>
-        <c:crossAx val="20947391"/>
-        <c:crosses val="autoZero"/>
-        <c:auto val="1"/>
-        <c:lblAlgn val="ctr"/>
-        <c:lblOffset val="100"/>
-        <c:noMultiLvlLbl val="1"/>
-      </c:catAx>
-      <c:valAx>
-        <c:axId val="20947391"/>
-        <c:scaling>
-          <c:orientation val="minMax"/>
-        </c:scaling>
-        <c:delete val="1"/>
-        <c:axPos val="l"/>
-        <c:numFmt formatCode="General" sourceLinked="0"/>
-        <c:majorTickMark val="none"/>
-        <c:minorTickMark val="none"/>
-        <c:tickLblPos val="nextTo"/>
-        <c:crossAx val="20947390"/>
-        <c:crosses val="autoZero"/>
-        <c:crossBetween val="between"/>
-      </c:valAx>
-      <c:spPr>
-        <a:solidFill>
-          <a:srgbClr val="FFFFFF"/>
-        </a:solidFill>
-        <a:ln>
-          <a:noFill/>
-        </a:ln>
-        <a:effectLst/>
-      </c:spPr>
-    </c:plotArea>
-    <c:plotVisOnly val="1"/>
-    <c:dispBlanksAs val="gap"/>
     <c:showDLblsOverMax val="1"/>
   </c:chart>
   <c:spPr>
@@ -4898,90 +5080,6 @@
             <a:fld id="{F7021451-1387-4CA6-816F-3879F97B5CBC}" type="slidenum">
               <a:rPr lang="en-US"/>
               <a:t>2</a:t>
-            </a:fld>
-            <a:endParaRPr lang="en-US"/>
-          </a:p>
-        </p:txBody>
-      </p:sp>
-    </p:spTree>
-    <p:extLst>
-      <p:ext uri="{BB962C8B-B14F-4D97-AF65-F5344CB8AC3E}">
-        <p14:creationId xmlns:p14="http://schemas.microsoft.com/office/powerpoint/2010/main" val="1024086991"/>
-      </p:ext>
-    </p:extLst>
-  </p:cSld>
-  <p:clrMapOvr>
-    <a:masterClrMapping/>
-  </p:clrMapOvr>
-</p:notes>
-</file>
-
-<file path=ppt/notesSlides/notesSlide20.xml><?xml version="1.0" encoding="utf-8"?>
-<p:notes xmlns:a="http://schemas.openxmlformats.org/drawingml/2006/main" xmlns:r="http://schemas.openxmlformats.org/officeDocument/2006/relationships" xmlns:p="http://schemas.openxmlformats.org/presentationml/2006/main">
-  <p:cSld>
-    <p:spTree>
-      <p:nvGrpSpPr>
-        <p:cNvPr id="1" name=""/>
-        <p:cNvGrpSpPr/>
-        <p:nvPr/>
-      </p:nvGrpSpPr>
-      <p:grpSpPr>
-        <a:xfrm>
-          <a:off x="0" y="0"/>
-          <a:ext cx="0" cy="0"/>
-          <a:chOff x="0" y="0"/>
-          <a:chExt cx="0" cy="0"/>
-        </a:xfrm>
-      </p:grpSpPr>
-      <p:sp>
-        <p:nvSpPr>
-          <p:cNvPr id="2" name="Slide Image Placeholder 1"/>
-          <p:cNvSpPr>
-            <a:spLocks noGrp="1" noRot="1" noChangeAspect="1"/>
-          </p:cNvSpPr>
-          <p:nvPr>
-            <p:ph type="sldImg"/>
-          </p:nvPr>
-        </p:nvSpPr>
-        <p:spPr/>
-      </p:sp>
-      <p:sp>
-        <p:nvSpPr>
-          <p:cNvPr id="3" name="Notes Placeholder 2"/>
-          <p:cNvSpPr>
-            <a:spLocks noGrp="1"/>
-          </p:cNvSpPr>
-          <p:nvPr>
-            <p:ph type="body" idx="1"/>
-          </p:nvPr>
-        </p:nvSpPr>
-        <p:spPr/>
-        <p:txBody>
-          <a:bodyPr/>
-          <a:lstStyle/>
-          <a:p>
-            <a:endParaRPr lang="en-US" dirty="0"/>
-          </a:p>
-        </p:txBody>
-      </p:sp>
-      <p:sp>
-        <p:nvSpPr>
-          <p:cNvPr id="4" name="Slide Number Placeholder 3"/>
-          <p:cNvSpPr>
-            <a:spLocks noGrp="1"/>
-          </p:cNvSpPr>
-          <p:nvPr>
-            <p:ph type="sldNum" sz="quarter" idx="10"/>
-          </p:nvPr>
-        </p:nvSpPr>
-        <p:spPr/>
-        <p:txBody>
-          <a:bodyPr/>
-          <a:lstStyle/>
-          <a:p>
-            <a:fld id="{F7021451-1387-4CA6-816F-3879F97B5CBC}" type="slidenum">
-              <a:rPr lang="en-US"/>
-              <a:t>20</a:t>
             </a:fld>
             <a:endParaRPr lang="en-US"/>
           </a:p>
@@ -6361,587 +6459,6 @@
 
 <file path=ppt/slides/slide10.xml><?xml version="1.0" encoding="utf-8"?>
 <p:sld xmlns:a="http://schemas.openxmlformats.org/drawingml/2006/main" xmlns:r="http://schemas.openxmlformats.org/officeDocument/2006/relationships" xmlns:p="http://schemas.openxmlformats.org/presentationml/2006/main">
-  <p:cSld name="Slide 10">
-    <p:bg>
-      <p:bgPr>
-        <a:solidFill>
-          <a:srgbClr val="F7F9FC"/>
-        </a:solidFill>
-        <a:effectLst/>
-      </p:bgPr>
-    </p:bg>
-    <p:spTree>
-      <p:nvGrpSpPr>
-        <p:cNvPr id="1" name=""/>
-        <p:cNvGrpSpPr/>
-        <p:nvPr/>
-      </p:nvGrpSpPr>
-      <p:grpSpPr>
-        <a:xfrm>
-          <a:off x="0" y="0"/>
-          <a:ext cx="0" cy="0"/>
-          <a:chOff x="0" y="0"/>
-          <a:chExt cx="0" cy="0"/>
-        </a:xfrm>
-      </p:grpSpPr>
-      <p:sp>
-        <p:nvSpPr>
-          <p:cNvPr id="2" name="Text 0"/>
-          <p:cNvSpPr/>
-          <p:nvPr/>
-        </p:nvSpPr>
-        <p:spPr>
-          <a:xfrm>
-            <a:off x="548640" y="384048"/>
-            <a:ext cx="5486400" cy="274320"/>
-          </a:xfrm>
-          <a:prstGeom prst="rect">
-            <a:avLst/>
-          </a:prstGeom>
-          <a:noFill/>
-          <a:ln/>
-        </p:spPr>
-        <p:txBody>
-          <a:bodyPr wrap="square" lIns="0" tIns="0" rIns="0" bIns="0" rtlCol="0" anchor="ctr"/>
-          <a:lstStyle/>
-          <a:p>
-            <a:pPr marL="0" indent="0">
-              <a:buNone/>
-            </a:pPr>
-            <a:r>
-              <a:rPr lang="en-US" sz="1200" b="1" kern="0" spc="200" dirty="0">
-                <a:solidFill>
-                  <a:srgbClr val="C9A227"/>
-                </a:solidFill>
-                <a:latin typeface="Calibri" pitchFamily="34" charset="0"/>
-                <a:ea typeface="Calibri" pitchFamily="34" charset="-122"/>
-                <a:cs typeface="Calibri" pitchFamily="34" charset="-120"/>
-              </a:rPr>
-              <a:t>BLOQUE TÉCNICO</a:t>
-            </a:r>
-            <a:endParaRPr lang="en-US" sz="1200" dirty="0"/>
-          </a:p>
-        </p:txBody>
-      </p:sp>
-      <p:sp>
-        <p:nvSpPr>
-          <p:cNvPr id="3" name="Text 1"/>
-          <p:cNvSpPr/>
-          <p:nvPr/>
-        </p:nvSpPr>
-        <p:spPr>
-          <a:xfrm>
-            <a:off x="548640" y="658368"/>
-            <a:ext cx="11064240" cy="822960"/>
-          </a:xfrm>
-          <a:prstGeom prst="rect">
-            <a:avLst/>
-          </a:prstGeom>
-          <a:noFill/>
-          <a:ln/>
-        </p:spPr>
-        <p:txBody>
-          <a:bodyPr wrap="square" lIns="0" tIns="0" rIns="0" bIns="0" rtlCol="0" anchor="ctr"/>
-          <a:lstStyle/>
-          <a:p>
-            <a:pPr marL="0" indent="0">
-              <a:buNone/>
-            </a:pPr>
-            <a:r>
-              <a:rPr lang="en-US" sz="3200" b="1" dirty="0">
-                <a:solidFill>
-                  <a:srgbClr val="1E2761"/>
-                </a:solidFill>
-                <a:latin typeface="Cambria" pitchFamily="34" charset="0"/>
-                <a:ea typeface="Cambria" pitchFamily="34" charset="-122"/>
-                <a:cs typeface="Cambria" pitchFamily="34" charset="-120"/>
-              </a:rPr>
-              <a:t>Calibración del modelo</a:t>
-            </a:r>
-            <a:endParaRPr lang="en-US" sz="3200" dirty="0"/>
-          </a:p>
-        </p:txBody>
-      </p:sp>
-      <p:sp>
-        <p:nvSpPr>
-          <p:cNvPr id="4" name="Text 2"/>
-          <p:cNvSpPr/>
-          <p:nvPr/>
-        </p:nvSpPr>
-        <p:spPr>
-          <a:xfrm>
-            <a:off x="548640" y="1417320"/>
-            <a:ext cx="10789920" cy="457200"/>
-          </a:xfrm>
-          <a:prstGeom prst="rect">
-            <a:avLst/>
-          </a:prstGeom>
-          <a:noFill/>
-          <a:ln/>
-        </p:spPr>
-        <p:txBody>
-          <a:bodyPr wrap="square" lIns="0" tIns="0" rIns="0" bIns="0" rtlCol="0" anchor="ctr"/>
-          <a:lstStyle/>
-          <a:p>
-            <a:pPr marL="0" indent="0">
-              <a:buNone/>
-            </a:pPr>
-            <a:r>
-              <a:rPr lang="en-US" sz="1250" dirty="0">
-                <a:solidFill>
-                  <a:srgbClr val="5B6584"/>
-                </a:solidFill>
-                <a:latin typeface="Calibri" pitchFamily="34" charset="0"/>
-                <a:ea typeface="Calibri" pitchFamily="34" charset="-122"/>
-                <a:cs typeface="Calibri" pitchFamily="34" charset="-120"/>
-              </a:rPr>
-              <a:t>Que el modelo discrimine bien no basta: la probabilidad predicha debe reflejar la tasa de default real, porque de ahí salen pricing y provisiones.</a:t>
-            </a:r>
-            <a:endParaRPr lang="en-US" sz="1250" dirty="0"/>
-          </a:p>
-        </p:txBody>
-      </p:sp>
-      <p:graphicFrame>
-        <p:nvGraphicFramePr>
-          <p:cNvPr id="5" name="Chart 0"/>
-          <p:cNvGraphicFramePr/>
-          <p:nvPr/>
-        </p:nvGraphicFramePr>
-        <p:xfrm>
-          <a:off x="548640" y="2011680"/>
-          <a:ext cx="6400800" cy="4206240"/>
-        </p:xfrm>
-        <a:graphic>
-          <a:graphicData uri="http://schemas.openxmlformats.org/drawingml/2006/chart">
-            <c:chart xmlns:c="http://schemas.openxmlformats.org/drawingml/2006/chart" xmlns:r="http://schemas.openxmlformats.org/officeDocument/2006/relationships" r:id="rId3"/>
-          </a:graphicData>
-        </a:graphic>
-      </p:graphicFrame>
-      <p:sp>
-        <p:nvSpPr>
-          <p:cNvPr id="6" name="Shape 3"/>
-          <p:cNvSpPr/>
-          <p:nvPr/>
-        </p:nvSpPr>
-        <p:spPr>
-          <a:xfrm>
-            <a:off x="7223760" y="2011680"/>
-            <a:ext cx="4389120" cy="4206240"/>
-          </a:xfrm>
-          <a:prstGeom prst="roundRect">
-            <a:avLst>
-              <a:gd name="adj" fmla="val 1739"/>
-            </a:avLst>
-          </a:prstGeom>
-          <a:solidFill>
-            <a:srgbClr val="FFFFFF"/>
-          </a:solidFill>
-          <a:ln w="12700">
-            <a:solidFill>
-              <a:srgbClr val="E2E7F2"/>
-            </a:solidFill>
-            <a:prstDash val="solid"/>
-          </a:ln>
-        </p:spPr>
-        <p:txBody>
-          <a:bodyPr/>
-          <a:lstStyle/>
-          <a:p>
-            <a:endParaRPr lang="en-PE"/>
-          </a:p>
-        </p:txBody>
-      </p:sp>
-      <p:sp>
-        <p:nvSpPr>
-          <p:cNvPr id="7" name="Text 4"/>
-          <p:cNvSpPr/>
-          <p:nvPr/>
-        </p:nvSpPr>
-        <p:spPr>
-          <a:xfrm>
-            <a:off x="7498080" y="2240280"/>
-            <a:ext cx="3840480" cy="365760"/>
-          </a:xfrm>
-          <a:prstGeom prst="rect">
-            <a:avLst/>
-          </a:prstGeom>
-          <a:noFill/>
-          <a:ln/>
-        </p:spPr>
-        <p:txBody>
-          <a:bodyPr wrap="square" lIns="0" tIns="0" rIns="0" bIns="0" rtlCol="0" anchor="ctr"/>
-          <a:lstStyle/>
-          <a:p>
-            <a:pPr marL="0" indent="0">
-              <a:buNone/>
-            </a:pPr>
-            <a:r>
-              <a:rPr lang="en-US" sz="1500" b="1" dirty="0">
-                <a:solidFill>
-                  <a:srgbClr val="1E2761"/>
-                </a:solidFill>
-                <a:latin typeface="Cambria" pitchFamily="34" charset="0"/>
-                <a:ea typeface="Cambria" pitchFamily="34" charset="-122"/>
-                <a:cs typeface="Cambria" pitchFamily="34" charset="-120"/>
-              </a:rPr>
-              <a:t>Método y lectura</a:t>
-            </a:r>
-            <a:endParaRPr lang="en-US" sz="1500" dirty="0"/>
-          </a:p>
-        </p:txBody>
-      </p:sp>
-      <p:sp>
-        <p:nvSpPr>
-          <p:cNvPr id="8" name="Shape 5"/>
-          <p:cNvSpPr/>
-          <p:nvPr/>
-        </p:nvSpPr>
-        <p:spPr>
-          <a:xfrm>
-            <a:off x="7498080" y="2798064"/>
-            <a:ext cx="82296" cy="82296"/>
-          </a:xfrm>
-          <a:prstGeom prst="ellipse">
-            <a:avLst/>
-          </a:prstGeom>
-          <a:solidFill>
-            <a:srgbClr val="C9A227"/>
-          </a:solidFill>
-          <a:ln/>
-        </p:spPr>
-        <p:txBody>
-          <a:bodyPr/>
-          <a:lstStyle/>
-          <a:p>
-            <a:endParaRPr lang="en-PE"/>
-          </a:p>
-        </p:txBody>
-      </p:sp>
-      <p:sp>
-        <p:nvSpPr>
-          <p:cNvPr id="9" name="Text 6"/>
-          <p:cNvSpPr/>
-          <p:nvPr/>
-        </p:nvSpPr>
-        <p:spPr>
-          <a:xfrm>
-            <a:off x="7726680" y="2651760"/>
-            <a:ext cx="3794760" cy="777240"/>
-          </a:xfrm>
-          <a:prstGeom prst="rect">
-            <a:avLst/>
-          </a:prstGeom>
-          <a:noFill/>
-          <a:ln/>
-        </p:spPr>
-        <p:txBody>
-          <a:bodyPr wrap="square" lIns="0" tIns="0" rIns="0" bIns="0" rtlCol="0" anchor="ctr"/>
-          <a:lstStyle/>
-          <a:p>
-            <a:pPr marL="0" indent="0">
-              <a:buNone/>
-            </a:pPr>
-            <a:r>
-              <a:rPr lang="en-US" sz="1150" dirty="0">
-                <a:solidFill>
-                  <a:srgbClr val="141A45"/>
-                </a:solidFill>
-                <a:latin typeface="Calibri" pitchFamily="34" charset="0"/>
-                <a:ea typeface="Calibri" pitchFamily="34" charset="-122"/>
-                <a:cs typeface="Calibri" pitchFamily="34" charset="-120"/>
-              </a:rPr>
-              <a:t>Método aplicado: Platt scaling sobre el score base.</a:t>
-            </a:r>
-            <a:endParaRPr lang="en-US" sz="1150" dirty="0"/>
-          </a:p>
-        </p:txBody>
-      </p:sp>
-      <p:sp>
-        <p:nvSpPr>
-          <p:cNvPr id="10" name="Shape 7"/>
-          <p:cNvSpPr/>
-          <p:nvPr/>
-        </p:nvSpPr>
-        <p:spPr>
-          <a:xfrm>
-            <a:off x="7498080" y="3666744"/>
-            <a:ext cx="82296" cy="82296"/>
-          </a:xfrm>
-          <a:prstGeom prst="ellipse">
-            <a:avLst/>
-          </a:prstGeom>
-          <a:solidFill>
-            <a:srgbClr val="C9A227"/>
-          </a:solidFill>
-          <a:ln/>
-        </p:spPr>
-        <p:txBody>
-          <a:bodyPr/>
-          <a:lstStyle/>
-          <a:p>
-            <a:endParaRPr lang="en-PE"/>
-          </a:p>
-        </p:txBody>
-      </p:sp>
-      <p:sp>
-        <p:nvSpPr>
-          <p:cNvPr id="11" name="Text 8"/>
-          <p:cNvSpPr/>
-          <p:nvPr/>
-        </p:nvSpPr>
-        <p:spPr>
-          <a:xfrm>
-            <a:off x="7726680" y="3520440"/>
-            <a:ext cx="3794760" cy="777240"/>
-          </a:xfrm>
-          <a:prstGeom prst="rect">
-            <a:avLst/>
-          </a:prstGeom>
-          <a:noFill/>
-          <a:ln/>
-        </p:spPr>
-        <p:txBody>
-          <a:bodyPr wrap="square" lIns="0" tIns="0" rIns="0" bIns="0" rtlCol="0" anchor="ctr"/>
-          <a:lstStyle/>
-          <a:p>
-            <a:pPr marL="0" indent="0">
-              <a:buNone/>
-            </a:pPr>
-            <a:r>
-              <a:rPr lang="en-US" sz="1150" dirty="0">
-                <a:solidFill>
-                  <a:srgbClr val="141A45"/>
-                </a:solidFill>
-                <a:latin typeface="Calibri" pitchFamily="34" charset="0"/>
-                <a:ea typeface="Calibri" pitchFamily="34" charset="-122"/>
-                <a:cs typeface="Calibri" pitchFamily="34" charset="-120"/>
-              </a:rPr>
-              <a:t>Los 10 deciles caen dentro del intervalo de Vasicek (95%, ρ Basel retail) — calibración validada estadísticamente, no solo visualmente.</a:t>
-            </a:r>
-            <a:endParaRPr lang="en-US" sz="1150" dirty="0"/>
-          </a:p>
-        </p:txBody>
-      </p:sp>
-      <p:sp>
-        <p:nvSpPr>
-          <p:cNvPr id="12" name="Shape 9"/>
-          <p:cNvSpPr/>
-          <p:nvPr/>
-        </p:nvSpPr>
-        <p:spPr>
-          <a:xfrm>
-            <a:off x="7498080" y="4535424"/>
-            <a:ext cx="82296" cy="82296"/>
-          </a:xfrm>
-          <a:prstGeom prst="ellipse">
-            <a:avLst/>
-          </a:prstGeom>
-          <a:solidFill>
-            <a:srgbClr val="C9A227"/>
-          </a:solidFill>
-          <a:ln/>
-        </p:spPr>
-        <p:txBody>
-          <a:bodyPr/>
-          <a:lstStyle/>
-          <a:p>
-            <a:endParaRPr lang="en-PE"/>
-          </a:p>
-        </p:txBody>
-      </p:sp>
-      <p:sp>
-        <p:nvSpPr>
-          <p:cNvPr id="13" name="Text 10"/>
-          <p:cNvSpPr/>
-          <p:nvPr/>
-        </p:nvSpPr>
-        <p:spPr>
-          <a:xfrm>
-            <a:off x="7726680" y="4389120"/>
-            <a:ext cx="3794760" cy="777240"/>
-          </a:xfrm>
-          <a:prstGeom prst="rect">
-            <a:avLst/>
-          </a:prstGeom>
-          <a:noFill/>
-          <a:ln/>
-        </p:spPr>
-        <p:txBody>
-          <a:bodyPr wrap="square" lIns="0" tIns="0" rIns="0" bIns="0" rtlCol="0" anchor="ctr"/>
-          <a:lstStyle/>
-          <a:p>
-            <a:pPr marL="0" indent="0">
-              <a:buNone/>
-            </a:pPr>
-            <a:r>
-              <a:rPr lang="en-US" sz="1150" dirty="0">
-                <a:solidFill>
-                  <a:srgbClr val="141A45"/>
-                </a:solidFill>
-                <a:latin typeface="Calibri" pitchFamily="34" charset="0"/>
-                <a:ea typeface="Calibri" pitchFamily="34" charset="-122"/>
-                <a:cs typeface="Calibri" pitchFamily="34" charset="-120"/>
-              </a:rPr>
-              <a:t>El decil de mayor riesgo (D10) es el más sensible: revisar aquí ante recalibraciones futuras.</a:t>
-            </a:r>
-            <a:endParaRPr lang="en-US" sz="1150" dirty="0"/>
-          </a:p>
-        </p:txBody>
-      </p:sp>
-      <p:sp>
-        <p:nvSpPr>
-          <p:cNvPr id="14" name="Shape 11"/>
-          <p:cNvSpPr/>
-          <p:nvPr/>
-        </p:nvSpPr>
-        <p:spPr>
-          <a:xfrm>
-            <a:off x="7498080" y="5404104"/>
-            <a:ext cx="82296" cy="82296"/>
-          </a:xfrm>
-          <a:prstGeom prst="ellipse">
-            <a:avLst/>
-          </a:prstGeom>
-          <a:solidFill>
-            <a:srgbClr val="C9A227"/>
-          </a:solidFill>
-          <a:ln/>
-        </p:spPr>
-        <p:txBody>
-          <a:bodyPr/>
-          <a:lstStyle/>
-          <a:p>
-            <a:endParaRPr lang="en-PE"/>
-          </a:p>
-        </p:txBody>
-      </p:sp>
-      <p:sp>
-        <p:nvSpPr>
-          <p:cNvPr id="15" name="Text 12"/>
-          <p:cNvSpPr/>
-          <p:nvPr/>
-        </p:nvSpPr>
-        <p:spPr>
-          <a:xfrm>
-            <a:off x="7726680" y="5257800"/>
-            <a:ext cx="3794760" cy="777240"/>
-          </a:xfrm>
-          <a:prstGeom prst="rect">
-            <a:avLst/>
-          </a:prstGeom>
-          <a:noFill/>
-          <a:ln/>
-        </p:spPr>
-        <p:txBody>
-          <a:bodyPr wrap="square" lIns="0" tIns="0" rIns="0" bIns="0" rtlCol="0" anchor="ctr"/>
-          <a:lstStyle/>
-          <a:p>
-            <a:pPr marL="0" indent="0">
-              <a:buNone/>
-            </a:pPr>
-            <a:r>
-              <a:rPr lang="en-US" sz="1150" dirty="0">
-                <a:solidFill>
-                  <a:srgbClr val="141A45"/>
-                </a:solidFill>
-                <a:latin typeface="Calibri" pitchFamily="34" charset="0"/>
-                <a:ea typeface="Calibri" pitchFamily="34" charset="-122"/>
-                <a:cs typeface="Calibri" pitchFamily="34" charset="-120"/>
-              </a:rPr>
-              <a:t>Habilita uso directo del score para pricing basado en riesgo y cálculo de provisiones (PD × LGD × EAD).</a:t>
-            </a:r>
-            <a:endParaRPr lang="en-US" sz="1150" dirty="0"/>
-          </a:p>
-        </p:txBody>
-      </p:sp>
-      <p:sp>
-        <p:nvSpPr>
-          <p:cNvPr id="16" name="Text 13"/>
-          <p:cNvSpPr/>
-          <p:nvPr/>
-        </p:nvSpPr>
-        <p:spPr>
-          <a:xfrm>
-            <a:off x="457200" y="6537960"/>
-            <a:ext cx="7315200" cy="274320"/>
-          </a:xfrm>
-          <a:prstGeom prst="rect">
-            <a:avLst/>
-          </a:prstGeom>
-          <a:noFill/>
-          <a:ln/>
-        </p:spPr>
-        <p:txBody>
-          <a:bodyPr wrap="square" lIns="0" tIns="0" rIns="0" bIns="0" rtlCol="0" anchor="ctr"/>
-          <a:lstStyle/>
-          <a:p>
-            <a:pPr marL="0" indent="0">
-              <a:buNone/>
-            </a:pPr>
-            <a:r>
-              <a:rPr lang="en-US" sz="900" i="1" dirty="0">
-                <a:solidFill>
-                  <a:srgbClr val="5B6584"/>
-                </a:solidFill>
-                <a:latin typeface="Calibri" pitchFamily="34" charset="0"/>
-                <a:ea typeface="Calibri" pitchFamily="34" charset="-122"/>
-                <a:cs typeface="Calibri" pitchFamily="34" charset="-120"/>
-              </a:rPr>
-              <a:t>Give Me Credit — Modelo de Scoring de Riesgo Crediticio</a:t>
-            </a:r>
-            <a:endParaRPr lang="en-US" sz="900" dirty="0"/>
-          </a:p>
-        </p:txBody>
-      </p:sp>
-      <p:sp>
-        <p:nvSpPr>
-          <p:cNvPr id="17" name="Text 14"/>
-          <p:cNvSpPr/>
-          <p:nvPr/>
-        </p:nvSpPr>
-        <p:spPr>
-          <a:xfrm>
-            <a:off x="11521440" y="6537960"/>
-            <a:ext cx="365760" cy="274320"/>
-          </a:xfrm>
-          <a:prstGeom prst="rect">
-            <a:avLst/>
-          </a:prstGeom>
-          <a:noFill/>
-          <a:ln/>
-        </p:spPr>
-        <p:txBody>
-          <a:bodyPr wrap="square" lIns="0" tIns="0" rIns="0" bIns="0" rtlCol="0" anchor="ctr"/>
-          <a:lstStyle/>
-          <a:p>
-            <a:pPr marL="0" indent="0" algn="r">
-              <a:buNone/>
-            </a:pPr>
-            <a:r>
-              <a:rPr lang="en-US" sz="900" dirty="0">
-                <a:solidFill>
-                  <a:srgbClr val="5B6584"/>
-                </a:solidFill>
-                <a:latin typeface="Calibri" pitchFamily="34" charset="0"/>
-                <a:ea typeface="Calibri" pitchFamily="34" charset="-122"/>
-                <a:cs typeface="Calibri" pitchFamily="34" charset="-120"/>
-              </a:rPr>
-              <a:t>10</a:t>
-            </a:r>
-            <a:endParaRPr lang="en-US" sz="900" dirty="0"/>
-          </a:p>
-        </p:txBody>
-      </p:sp>
-    </p:spTree>
-  </p:cSld>
-  <p:clrMapOvr>
-    <a:masterClrMapping/>
-  </p:clrMapOvr>
-</p:sld>
-</file>
-
-<file path=ppt/slides/slide11.xml><?xml version="1.0" encoding="utf-8"?>
-<p:sld xmlns:a="http://schemas.openxmlformats.org/drawingml/2006/main" xmlns:r="http://schemas.openxmlformats.org/officeDocument/2006/relationships" xmlns:p="http://schemas.openxmlformats.org/presentationml/2006/main">
   <p:cSld name="Slide 11">
     <p:bg>
       <p:bgPr>
@@ -7252,7 +6769,7 @@
 </p:sld>
 </file>
 
-<file path=ppt/slides/slide12.xml><?xml version="1.0" encoding="utf-8"?>
+<file path=ppt/slides/slide11.xml><?xml version="1.0" encoding="utf-8"?>
 <p:sld xmlns:a="http://schemas.openxmlformats.org/drawingml/2006/main" xmlns:r="http://schemas.openxmlformats.org/officeDocument/2006/relationships" xmlns:p="http://schemas.openxmlformats.org/presentationml/2006/main">
   <p:cSld name="Slide 12">
     <p:bg>
@@ -7419,7 +6936,7 @@
         <p:spPr>
           <a:xfrm>
             <a:off x="7040880" y="2057400"/>
-            <a:ext cx="4572000" cy="4023360"/>
+            <a:ext cx="4572000" cy="4361688"/>
           </a:xfrm>
           <a:prstGeom prst="roundRect">
             <a:avLst>
@@ -7868,6 +7385,653 @@
                 <a:cs typeface="Calibri" pitchFamily="34" charset="-120"/>
               </a:rPr>
               <a:t>12</a:t>
+            </a:r>
+            <a:endParaRPr lang="en-US" sz="900" dirty="0"/>
+          </a:p>
+        </p:txBody>
+      </p:sp>
+    </p:spTree>
+  </p:cSld>
+  <p:clrMapOvr>
+    <a:masterClrMapping/>
+  </p:clrMapOvr>
+</p:sld>
+</file>
+
+<file path=ppt/slides/slide12.xml><?xml version="1.0" encoding="utf-8"?>
+<p:sld xmlns:a="http://schemas.openxmlformats.org/drawingml/2006/main" xmlns:r="http://schemas.openxmlformats.org/officeDocument/2006/relationships" xmlns:p="http://schemas.openxmlformats.org/presentationml/2006/main">
+  <p:cSld name="Slide 10">
+    <p:bg>
+      <p:bgPr>
+        <a:solidFill>
+          <a:srgbClr val="F7F9FC"/>
+        </a:solidFill>
+        <a:effectLst/>
+      </p:bgPr>
+    </p:bg>
+    <p:spTree>
+      <p:nvGrpSpPr>
+        <p:cNvPr id="1" name=""/>
+        <p:cNvGrpSpPr/>
+        <p:nvPr/>
+      </p:nvGrpSpPr>
+      <p:grpSpPr>
+        <a:xfrm>
+          <a:off x="0" y="0"/>
+          <a:ext cx="0" cy="0"/>
+          <a:chOff x="0" y="0"/>
+          <a:chExt cx="0" cy="0"/>
+        </a:xfrm>
+      </p:grpSpPr>
+      <p:sp>
+        <p:nvSpPr>
+          <p:cNvPr id="2" name="Text 0"/>
+          <p:cNvSpPr/>
+          <p:nvPr/>
+        </p:nvSpPr>
+        <p:spPr>
+          <a:xfrm>
+            <a:off x="548640" y="384048"/>
+            <a:ext cx="5486400" cy="274320"/>
+          </a:xfrm>
+          <a:prstGeom prst="rect">
+            <a:avLst/>
+          </a:prstGeom>
+          <a:noFill/>
+          <a:ln/>
+        </p:spPr>
+        <p:txBody>
+          <a:bodyPr wrap="square" lIns="0" tIns="0" rIns="0" bIns="0" rtlCol="0" anchor="ctr"/>
+          <a:lstStyle/>
+          <a:p>
+            <a:pPr marL="0" indent="0">
+              <a:buNone/>
+            </a:pPr>
+            <a:r>
+              <a:rPr lang="en-US" sz="1200" b="1" kern="0" spc="200" dirty="0">
+                <a:solidFill>
+                  <a:srgbClr val="C9A227"/>
+                </a:solidFill>
+                <a:latin typeface="Calibri" pitchFamily="34" charset="0"/>
+                <a:ea typeface="Calibri" pitchFamily="34" charset="-122"/>
+                <a:cs typeface="Calibri" pitchFamily="34" charset="-120"/>
+              </a:rPr>
+              <a:t>BLOQUE TÉCNICO</a:t>
+            </a:r>
+            <a:endParaRPr lang="en-US" sz="1200" dirty="0"/>
+          </a:p>
+        </p:txBody>
+      </p:sp>
+      <p:sp>
+        <p:nvSpPr>
+          <p:cNvPr id="3" name="Text 1"/>
+          <p:cNvSpPr/>
+          <p:nvPr/>
+        </p:nvSpPr>
+        <p:spPr>
+          <a:xfrm>
+            <a:off x="548640" y="658368"/>
+            <a:ext cx="11064240" cy="822960"/>
+          </a:xfrm>
+          <a:prstGeom prst="rect">
+            <a:avLst/>
+          </a:prstGeom>
+          <a:noFill/>
+          <a:ln/>
+        </p:spPr>
+        <p:txBody>
+          <a:bodyPr wrap="square" lIns="0" tIns="0" rIns="0" bIns="0" rtlCol="0" anchor="ctr"/>
+          <a:lstStyle/>
+          <a:p>
+            <a:pPr marL="0" indent="0">
+              <a:buNone/>
+            </a:pPr>
+            <a:r>
+              <a:rPr lang="en-US" sz="3200" b="1" dirty="0">
+                <a:solidFill>
+                  <a:srgbClr val="1E2761"/>
+                </a:solidFill>
+                <a:latin typeface="Cambria" pitchFamily="34" charset="0"/>
+                <a:ea typeface="Cambria" pitchFamily="34" charset="-122"/>
+                <a:cs typeface="Cambria" pitchFamily="34" charset="-120"/>
+              </a:rPr>
+              <a:t>Calibración del modelo</a:t>
+            </a:r>
+            <a:endParaRPr lang="en-US" sz="3200" dirty="0"/>
+          </a:p>
+        </p:txBody>
+      </p:sp>
+      <p:sp>
+        <p:nvSpPr>
+          <p:cNvPr id="4" name="Text 2"/>
+          <p:cNvSpPr/>
+          <p:nvPr/>
+        </p:nvSpPr>
+        <p:spPr>
+          <a:xfrm>
+            <a:off x="548640" y="1417320"/>
+            <a:ext cx="10789920" cy="457200"/>
+          </a:xfrm>
+          <a:prstGeom prst="rect">
+            <a:avLst/>
+          </a:prstGeom>
+          <a:noFill/>
+          <a:ln/>
+        </p:spPr>
+        <p:txBody>
+          <a:bodyPr wrap="square" lIns="0" tIns="0" rIns="0" bIns="0" rtlCol="0" anchor="ctr"/>
+          <a:lstStyle/>
+          <a:p>
+            <a:pPr marL="0" indent="0">
+              <a:buNone/>
+            </a:pPr>
+            <a:r>
+              <a:rPr lang="en-US" sz="1250" dirty="0">
+                <a:solidFill>
+                  <a:srgbClr val="5B6584"/>
+                </a:solidFill>
+                <a:latin typeface="Calibri" pitchFamily="34" charset="0"/>
+                <a:ea typeface="Calibri" pitchFamily="34" charset="-122"/>
+                <a:cs typeface="Calibri" pitchFamily="34" charset="-120"/>
+              </a:rPr>
+              <a:t>La </a:t>
+            </a:r>
+            <a:r>
+              <a:rPr lang="en-US" sz="1250" dirty="0" err="1">
+                <a:solidFill>
+                  <a:srgbClr val="5B6584"/>
+                </a:solidFill>
+                <a:latin typeface="Calibri" pitchFamily="34" charset="0"/>
+                <a:ea typeface="Calibri" pitchFamily="34" charset="-122"/>
+                <a:cs typeface="Calibri" pitchFamily="34" charset="-120"/>
+              </a:rPr>
+              <a:t>probabilidad</a:t>
+            </a:r>
+            <a:r>
+              <a:rPr lang="en-US" sz="1250" dirty="0">
+                <a:solidFill>
+                  <a:srgbClr val="5B6584"/>
+                </a:solidFill>
+                <a:latin typeface="Calibri" pitchFamily="34" charset="0"/>
+                <a:ea typeface="Calibri" pitchFamily="34" charset="-122"/>
+                <a:cs typeface="Calibri" pitchFamily="34" charset="-120"/>
+              </a:rPr>
+              <a:t> predicha debe reflejar la tasa de default real, porque de ahí salen pricing y provisiones.</a:t>
+            </a:r>
+            <a:endParaRPr lang="en-US" sz="1250" dirty="0"/>
+          </a:p>
+        </p:txBody>
+      </p:sp>
+      <p:graphicFrame>
+        <p:nvGraphicFramePr>
+          <p:cNvPr id="5" name="Chart 0"/>
+          <p:cNvGraphicFramePr/>
+          <p:nvPr/>
+        </p:nvGraphicFramePr>
+        <p:xfrm>
+          <a:off x="548640" y="2011680"/>
+          <a:ext cx="6400800" cy="4206240"/>
+        </p:xfrm>
+        <a:graphic>
+          <a:graphicData uri="http://schemas.openxmlformats.org/drawingml/2006/chart">
+            <c:chart xmlns:c="http://schemas.openxmlformats.org/drawingml/2006/chart" xmlns:r="http://schemas.openxmlformats.org/officeDocument/2006/relationships" r:id="rId3"/>
+          </a:graphicData>
+        </a:graphic>
+      </p:graphicFrame>
+      <p:sp>
+        <p:nvSpPr>
+          <p:cNvPr id="6" name="Shape 3"/>
+          <p:cNvSpPr/>
+          <p:nvPr/>
+        </p:nvSpPr>
+        <p:spPr>
+          <a:xfrm>
+            <a:off x="7223760" y="2011680"/>
+            <a:ext cx="4389120" cy="4206240"/>
+          </a:xfrm>
+          <a:prstGeom prst="roundRect">
+            <a:avLst>
+              <a:gd name="adj" fmla="val 1739"/>
+            </a:avLst>
+          </a:prstGeom>
+          <a:solidFill>
+            <a:srgbClr val="FFFFFF"/>
+          </a:solidFill>
+          <a:ln w="12700">
+            <a:solidFill>
+              <a:srgbClr val="E2E7F2"/>
+            </a:solidFill>
+            <a:prstDash val="solid"/>
+          </a:ln>
+        </p:spPr>
+        <p:txBody>
+          <a:bodyPr/>
+          <a:lstStyle/>
+          <a:p>
+            <a:endParaRPr lang="en-PE"/>
+          </a:p>
+        </p:txBody>
+      </p:sp>
+      <p:sp>
+        <p:nvSpPr>
+          <p:cNvPr id="7" name="Text 4"/>
+          <p:cNvSpPr/>
+          <p:nvPr/>
+        </p:nvSpPr>
+        <p:spPr>
+          <a:xfrm>
+            <a:off x="7498080" y="2240280"/>
+            <a:ext cx="3840480" cy="365760"/>
+          </a:xfrm>
+          <a:prstGeom prst="rect">
+            <a:avLst/>
+          </a:prstGeom>
+          <a:noFill/>
+          <a:ln/>
+        </p:spPr>
+        <p:txBody>
+          <a:bodyPr wrap="square" lIns="0" tIns="0" rIns="0" bIns="0" rtlCol="0" anchor="ctr"/>
+          <a:lstStyle/>
+          <a:p>
+            <a:pPr marL="0" indent="0">
+              <a:buNone/>
+            </a:pPr>
+            <a:r>
+              <a:rPr lang="en-US" sz="1500" b="1" dirty="0">
+                <a:solidFill>
+                  <a:srgbClr val="1E2761"/>
+                </a:solidFill>
+                <a:latin typeface="Cambria" pitchFamily="34" charset="0"/>
+                <a:ea typeface="Cambria" pitchFamily="34" charset="-122"/>
+                <a:cs typeface="Cambria" pitchFamily="34" charset="-120"/>
+              </a:rPr>
+              <a:t>Método y lectura</a:t>
+            </a:r>
+            <a:endParaRPr lang="en-US" sz="1500" dirty="0"/>
+          </a:p>
+        </p:txBody>
+      </p:sp>
+      <p:sp>
+        <p:nvSpPr>
+          <p:cNvPr id="8" name="Shape 5"/>
+          <p:cNvSpPr/>
+          <p:nvPr/>
+        </p:nvSpPr>
+        <p:spPr>
+          <a:xfrm>
+            <a:off x="7498080" y="2992934"/>
+            <a:ext cx="82296" cy="82296"/>
+          </a:xfrm>
+          <a:prstGeom prst="ellipse">
+            <a:avLst/>
+          </a:prstGeom>
+          <a:solidFill>
+            <a:srgbClr val="C9A227"/>
+          </a:solidFill>
+          <a:ln/>
+        </p:spPr>
+        <p:txBody>
+          <a:bodyPr/>
+          <a:lstStyle/>
+          <a:p>
+            <a:endParaRPr lang="en-PE"/>
+          </a:p>
+        </p:txBody>
+      </p:sp>
+      <p:sp>
+        <p:nvSpPr>
+          <p:cNvPr id="9" name="Text 6"/>
+          <p:cNvSpPr/>
+          <p:nvPr/>
+        </p:nvSpPr>
+        <p:spPr>
+          <a:xfrm>
+            <a:off x="7726680" y="2651760"/>
+            <a:ext cx="3794760" cy="777240"/>
+          </a:xfrm>
+          <a:prstGeom prst="rect">
+            <a:avLst/>
+          </a:prstGeom>
+          <a:noFill/>
+          <a:ln/>
+        </p:spPr>
+        <p:txBody>
+          <a:bodyPr wrap="square" lIns="0" tIns="0" rIns="0" bIns="0" rtlCol="0" anchor="ctr"/>
+          <a:lstStyle/>
+          <a:p>
+            <a:pPr marL="0" indent="0">
+              <a:buNone/>
+            </a:pPr>
+            <a:r>
+              <a:rPr lang="en-US" sz="1150" dirty="0">
+                <a:solidFill>
+                  <a:srgbClr val="141A45"/>
+                </a:solidFill>
+                <a:latin typeface="Calibri" pitchFamily="34" charset="0"/>
+                <a:ea typeface="Calibri" pitchFamily="34" charset="-122"/>
+                <a:cs typeface="Calibri" pitchFamily="34" charset="-120"/>
+              </a:rPr>
+              <a:t>Método aplicado: Platt scaling sobre el score base.</a:t>
+            </a:r>
+            <a:endParaRPr lang="en-US" sz="1150" dirty="0"/>
+          </a:p>
+        </p:txBody>
+      </p:sp>
+      <p:sp>
+        <p:nvSpPr>
+          <p:cNvPr id="10" name="Shape 7"/>
+          <p:cNvSpPr/>
+          <p:nvPr/>
+        </p:nvSpPr>
+        <p:spPr>
+          <a:xfrm>
+            <a:off x="7498080" y="3696724"/>
+            <a:ext cx="82296" cy="82296"/>
+          </a:xfrm>
+          <a:prstGeom prst="ellipse">
+            <a:avLst/>
+          </a:prstGeom>
+          <a:solidFill>
+            <a:srgbClr val="C9A227"/>
+          </a:solidFill>
+          <a:ln/>
+        </p:spPr>
+        <p:txBody>
+          <a:bodyPr/>
+          <a:lstStyle/>
+          <a:p>
+            <a:endParaRPr lang="en-PE"/>
+          </a:p>
+        </p:txBody>
+      </p:sp>
+      <p:sp>
+        <p:nvSpPr>
+          <p:cNvPr id="11" name="Text 8"/>
+          <p:cNvSpPr/>
+          <p:nvPr/>
+        </p:nvSpPr>
+        <p:spPr>
+          <a:xfrm>
+            <a:off x="7726680" y="3520440"/>
+            <a:ext cx="3794760" cy="777240"/>
+          </a:xfrm>
+          <a:prstGeom prst="rect">
+            <a:avLst/>
+          </a:prstGeom>
+          <a:noFill/>
+          <a:ln/>
+        </p:spPr>
+        <p:txBody>
+          <a:bodyPr wrap="square" lIns="0" tIns="0" rIns="0" bIns="0" rtlCol="0" anchor="ctr"/>
+          <a:lstStyle/>
+          <a:p>
+            <a:pPr marL="0" indent="0">
+              <a:buNone/>
+            </a:pPr>
+            <a:r>
+              <a:rPr lang="en-US" sz="1150" dirty="0">
+                <a:solidFill>
+                  <a:srgbClr val="141A45"/>
+                </a:solidFill>
+                <a:latin typeface="Calibri" pitchFamily="34" charset="0"/>
+                <a:ea typeface="Calibri" pitchFamily="34" charset="-122"/>
+                <a:cs typeface="Calibri" pitchFamily="34" charset="-120"/>
+              </a:rPr>
+              <a:t>Luego de la </a:t>
+            </a:r>
+            <a:r>
+              <a:rPr lang="en-US" sz="1150" dirty="0" err="1">
+                <a:solidFill>
+                  <a:srgbClr val="141A45"/>
+                </a:solidFill>
+                <a:latin typeface="Calibri" pitchFamily="34" charset="0"/>
+                <a:ea typeface="Calibri" pitchFamily="34" charset="-122"/>
+                <a:cs typeface="Calibri" pitchFamily="34" charset="-120"/>
+              </a:rPr>
+              <a:t>calibración</a:t>
+            </a:r>
+            <a:r>
+              <a:rPr lang="en-US" sz="1150" dirty="0">
+                <a:solidFill>
+                  <a:srgbClr val="141A45"/>
+                </a:solidFill>
+                <a:latin typeface="Calibri" pitchFamily="34" charset="0"/>
+                <a:ea typeface="Calibri" pitchFamily="34" charset="-122"/>
+                <a:cs typeface="Calibri" pitchFamily="34" charset="-120"/>
+              </a:rPr>
+              <a:t>, </a:t>
+            </a:r>
+            <a:r>
+              <a:rPr lang="en-US" sz="1150" dirty="0" err="1">
+                <a:solidFill>
+                  <a:srgbClr val="141A45"/>
+                </a:solidFill>
+                <a:latin typeface="Calibri" pitchFamily="34" charset="0"/>
+                <a:ea typeface="Calibri" pitchFamily="34" charset="-122"/>
+                <a:cs typeface="Calibri" pitchFamily="34" charset="-120"/>
+              </a:rPr>
+              <a:t>los</a:t>
+            </a:r>
+            <a:r>
+              <a:rPr lang="en-US" sz="1150" dirty="0">
+                <a:solidFill>
+                  <a:srgbClr val="141A45"/>
+                </a:solidFill>
+                <a:latin typeface="Calibri" pitchFamily="34" charset="0"/>
+                <a:ea typeface="Calibri" pitchFamily="34" charset="-122"/>
+                <a:cs typeface="Calibri" pitchFamily="34" charset="-120"/>
+              </a:rPr>
+              <a:t> 10 deciles caen dentro del intervalo de Vasicek (95%, ρ Basel retail) — calibración validada estadísticamente, no solo visualmente.</a:t>
+            </a:r>
+            <a:endParaRPr lang="en-US" sz="1150" dirty="0"/>
+          </a:p>
+        </p:txBody>
+      </p:sp>
+      <p:sp>
+        <p:nvSpPr>
+          <p:cNvPr id="12" name="Shape 9"/>
+          <p:cNvSpPr/>
+          <p:nvPr/>
+        </p:nvSpPr>
+        <p:spPr>
+          <a:xfrm>
+            <a:off x="7498080" y="4640354"/>
+            <a:ext cx="82296" cy="82296"/>
+          </a:xfrm>
+          <a:prstGeom prst="ellipse">
+            <a:avLst/>
+          </a:prstGeom>
+          <a:solidFill>
+            <a:srgbClr val="C9A227"/>
+          </a:solidFill>
+          <a:ln/>
+        </p:spPr>
+        <p:txBody>
+          <a:bodyPr/>
+          <a:lstStyle/>
+          <a:p>
+            <a:endParaRPr lang="en-PE"/>
+          </a:p>
+        </p:txBody>
+      </p:sp>
+      <p:sp>
+        <p:nvSpPr>
+          <p:cNvPr id="13" name="Text 10"/>
+          <p:cNvSpPr/>
+          <p:nvPr/>
+        </p:nvSpPr>
+        <p:spPr>
+          <a:xfrm>
+            <a:off x="7726680" y="4389120"/>
+            <a:ext cx="3794760" cy="777240"/>
+          </a:xfrm>
+          <a:prstGeom prst="rect">
+            <a:avLst/>
+          </a:prstGeom>
+          <a:noFill/>
+          <a:ln/>
+        </p:spPr>
+        <p:txBody>
+          <a:bodyPr wrap="square" lIns="0" tIns="0" rIns="0" bIns="0" rtlCol="0" anchor="ctr"/>
+          <a:lstStyle/>
+          <a:p>
+            <a:pPr marL="0" indent="0">
+              <a:buNone/>
+            </a:pPr>
+            <a:r>
+              <a:rPr lang="en-US" sz="1150" dirty="0">
+                <a:solidFill>
+                  <a:srgbClr val="141A45"/>
+                </a:solidFill>
+                <a:latin typeface="Calibri" pitchFamily="34" charset="0"/>
+                <a:ea typeface="Calibri" pitchFamily="34" charset="-122"/>
+                <a:cs typeface="Calibri" pitchFamily="34" charset="-120"/>
+              </a:rPr>
+              <a:t>El decil de mayor riesgo (D10) es el más sensible: revisar aquí ante recalibraciones futuras.</a:t>
+            </a:r>
+            <a:endParaRPr lang="en-US" sz="1150" dirty="0"/>
+          </a:p>
+        </p:txBody>
+      </p:sp>
+      <p:sp>
+        <p:nvSpPr>
+          <p:cNvPr id="14" name="Shape 11"/>
+          <p:cNvSpPr/>
+          <p:nvPr/>
+        </p:nvSpPr>
+        <p:spPr>
+          <a:xfrm>
+            <a:off x="7498080" y="5509034"/>
+            <a:ext cx="82296" cy="82296"/>
+          </a:xfrm>
+          <a:prstGeom prst="ellipse">
+            <a:avLst/>
+          </a:prstGeom>
+          <a:solidFill>
+            <a:srgbClr val="C9A227"/>
+          </a:solidFill>
+          <a:ln/>
+        </p:spPr>
+        <p:txBody>
+          <a:bodyPr/>
+          <a:lstStyle/>
+          <a:p>
+            <a:endParaRPr lang="en-PE"/>
+          </a:p>
+        </p:txBody>
+      </p:sp>
+      <p:sp>
+        <p:nvSpPr>
+          <p:cNvPr id="15" name="Text 12"/>
+          <p:cNvSpPr/>
+          <p:nvPr/>
+        </p:nvSpPr>
+        <p:spPr>
+          <a:xfrm>
+            <a:off x="7726680" y="5257800"/>
+            <a:ext cx="3794760" cy="777240"/>
+          </a:xfrm>
+          <a:prstGeom prst="rect">
+            <a:avLst/>
+          </a:prstGeom>
+          <a:noFill/>
+          <a:ln/>
+        </p:spPr>
+        <p:txBody>
+          <a:bodyPr wrap="square" lIns="0" tIns="0" rIns="0" bIns="0" rtlCol="0" anchor="ctr"/>
+          <a:lstStyle/>
+          <a:p>
+            <a:pPr marL="0" indent="0">
+              <a:buNone/>
+            </a:pPr>
+            <a:r>
+              <a:rPr lang="en-US" sz="1150" dirty="0">
+                <a:solidFill>
+                  <a:srgbClr val="141A45"/>
+                </a:solidFill>
+                <a:latin typeface="Calibri" pitchFamily="34" charset="0"/>
+                <a:ea typeface="Calibri" pitchFamily="34" charset="-122"/>
+                <a:cs typeface="Calibri" pitchFamily="34" charset="-120"/>
+              </a:rPr>
+              <a:t>Habilita uso directo del score para pricing basado en riesgo y cálculo de provisiones (PD × LGD × EAD).</a:t>
+            </a:r>
+            <a:endParaRPr lang="en-US" sz="1150" dirty="0"/>
+          </a:p>
+        </p:txBody>
+      </p:sp>
+      <p:sp>
+        <p:nvSpPr>
+          <p:cNvPr id="16" name="Text 13"/>
+          <p:cNvSpPr/>
+          <p:nvPr/>
+        </p:nvSpPr>
+        <p:spPr>
+          <a:xfrm>
+            <a:off x="457200" y="6537960"/>
+            <a:ext cx="7315200" cy="274320"/>
+          </a:xfrm>
+          <a:prstGeom prst="rect">
+            <a:avLst/>
+          </a:prstGeom>
+          <a:noFill/>
+          <a:ln/>
+        </p:spPr>
+        <p:txBody>
+          <a:bodyPr wrap="square" lIns="0" tIns="0" rIns="0" bIns="0" rtlCol="0" anchor="ctr"/>
+          <a:lstStyle/>
+          <a:p>
+            <a:pPr marL="0" indent="0">
+              <a:buNone/>
+            </a:pPr>
+            <a:r>
+              <a:rPr lang="en-US" sz="900" i="1" dirty="0">
+                <a:solidFill>
+                  <a:srgbClr val="5B6584"/>
+                </a:solidFill>
+                <a:latin typeface="Calibri" pitchFamily="34" charset="0"/>
+                <a:ea typeface="Calibri" pitchFamily="34" charset="-122"/>
+                <a:cs typeface="Calibri" pitchFamily="34" charset="-120"/>
+              </a:rPr>
+              <a:t>Give Me Credit — Modelo de Scoring de Riesgo Crediticio</a:t>
+            </a:r>
+            <a:endParaRPr lang="en-US" sz="900" dirty="0"/>
+          </a:p>
+        </p:txBody>
+      </p:sp>
+      <p:sp>
+        <p:nvSpPr>
+          <p:cNvPr id="17" name="Text 14"/>
+          <p:cNvSpPr/>
+          <p:nvPr/>
+        </p:nvSpPr>
+        <p:spPr>
+          <a:xfrm>
+            <a:off x="11521440" y="6537960"/>
+            <a:ext cx="365760" cy="274320"/>
+          </a:xfrm>
+          <a:prstGeom prst="rect">
+            <a:avLst/>
+          </a:prstGeom>
+          <a:noFill/>
+          <a:ln/>
+        </p:spPr>
+        <p:txBody>
+          <a:bodyPr wrap="square" lIns="0" tIns="0" rIns="0" bIns="0" rtlCol="0" anchor="ctr"/>
+          <a:lstStyle/>
+          <a:p>
+            <a:pPr marL="0" indent="0" algn="r">
+              <a:buNone/>
+            </a:pPr>
+            <a:r>
+              <a:rPr lang="en-US" sz="900" dirty="0">
+                <a:solidFill>
+                  <a:srgbClr val="5B6584"/>
+                </a:solidFill>
+                <a:latin typeface="Calibri" pitchFamily="34" charset="0"/>
+                <a:ea typeface="Calibri" pitchFamily="34" charset="-122"/>
+                <a:cs typeface="Calibri" pitchFamily="34" charset="-120"/>
+              </a:rPr>
+              <a:t>10</a:t>
             </a:r>
             <a:endParaRPr lang="en-US" sz="900" dirty="0"/>
           </a:p>
@@ -8299,7 +8463,51 @@
                 <a:ea typeface="Calibri" pitchFamily="34" charset="-122"/>
                 <a:cs typeface="Calibri" pitchFamily="34" charset="-120"/>
               </a:rPr>
-              <a:t>Las 4 bandas son fijas (no un cutoff continuo) y ya están calibradas en producción — ver la economía real de cada banda en la sección de impacto económico.</a:t>
+              <a:t>Las 4 bandas son </a:t>
+            </a:r>
+            <a:r>
+              <a:rPr lang="en-US" sz="1200" i="1" dirty="0" err="1">
+                <a:solidFill>
+                  <a:srgbClr val="5B6584"/>
+                </a:solidFill>
+                <a:latin typeface="Calibri" pitchFamily="34" charset="0"/>
+                <a:ea typeface="Calibri" pitchFamily="34" charset="-122"/>
+                <a:cs typeface="Calibri" pitchFamily="34" charset="-120"/>
+              </a:rPr>
+              <a:t>fijas</a:t>
+            </a:r>
+            <a:r>
+              <a:rPr lang="en-US" sz="1200" i="1" dirty="0">
+                <a:solidFill>
+                  <a:srgbClr val="5B6584"/>
+                </a:solidFill>
+                <a:latin typeface="Calibri" pitchFamily="34" charset="0"/>
+                <a:ea typeface="Calibri" pitchFamily="34" charset="-122"/>
+                <a:cs typeface="Calibri" pitchFamily="34" charset="-120"/>
+              </a:rPr>
+              <a:t> y </a:t>
+            </a:r>
+            <a:r>
+              <a:rPr lang="en-US" sz="1200" i="1" dirty="0" err="1">
+                <a:solidFill>
+                  <a:srgbClr val="5B6584"/>
+                </a:solidFill>
+                <a:latin typeface="Calibri" pitchFamily="34" charset="0"/>
+                <a:ea typeface="Calibri" pitchFamily="34" charset="-122"/>
+                <a:cs typeface="Calibri" pitchFamily="34" charset="-120"/>
+              </a:rPr>
+              <a:t>ya</a:t>
+            </a:r>
+            <a:r>
+              <a:rPr lang="en-US" sz="1200" i="1" dirty="0">
+                <a:solidFill>
+                  <a:srgbClr val="5B6584"/>
+                </a:solidFill>
+                <a:latin typeface="Calibri" pitchFamily="34" charset="0"/>
+                <a:ea typeface="Calibri" pitchFamily="34" charset="-122"/>
+                <a:cs typeface="Calibri" pitchFamily="34" charset="-120"/>
+              </a:rPr>
+              <a:t> están calibradas en producción — ver la economía real de cada banda en la sección de impacto económico.</a:t>
             </a:r>
             <a:endParaRPr lang="en-US" sz="1200" dirty="0"/>
           </a:p>
@@ -9696,10 +9904,129 @@
                   <a:srgbClr val="5B6584"/>
                 </a:solidFill>
                 <a:latin typeface="Calibri" pitchFamily="34" charset="0"/>
-                <a:ea typeface="Calibri" pitchFamily="34" charset="-122"/>
                 <a:cs typeface="Calibri" pitchFamily="34" charset="-120"/>
               </a:rPr>
-              <a:t>La misma lectura del SHAP, sin jerga técnica — lista para un comité de riesgos.</a:t>
+              <a:t>El pareto de </a:t>
+            </a:r>
+            <a:r>
+              <a:rPr lang="en-US" sz="1250" i="1" dirty="0" err="1">
+                <a:solidFill>
+                  <a:srgbClr val="5B6584"/>
+                </a:solidFill>
+                <a:latin typeface="Calibri" pitchFamily="34" charset="0"/>
+                <a:cs typeface="Calibri" pitchFamily="34" charset="-120"/>
+              </a:rPr>
+              <a:t>importancia</a:t>
+            </a:r>
+            <a:r>
+              <a:rPr lang="en-US" sz="1250" i="1" dirty="0">
+                <a:solidFill>
+                  <a:srgbClr val="5B6584"/>
+                </a:solidFill>
+                <a:latin typeface="Calibri" pitchFamily="34" charset="0"/>
+                <a:cs typeface="Calibri" pitchFamily="34" charset="-120"/>
+              </a:rPr>
+              <a:t> o </a:t>
+            </a:r>
+            <a:r>
+              <a:rPr lang="en-US" sz="1250" i="1" dirty="0" err="1">
+                <a:solidFill>
+                  <a:srgbClr val="5B6584"/>
+                </a:solidFill>
+                <a:latin typeface="Calibri" pitchFamily="34" charset="0"/>
+                <a:cs typeface="Calibri" pitchFamily="34" charset="-120"/>
+              </a:rPr>
+              <a:t>contribución</a:t>
+            </a:r>
+            <a:r>
+              <a:rPr lang="en-US" sz="1250" i="1" dirty="0">
+                <a:solidFill>
+                  <a:srgbClr val="5B6584"/>
+                </a:solidFill>
+                <a:latin typeface="Calibri" pitchFamily="34" charset="0"/>
+                <a:cs typeface="Calibri" pitchFamily="34" charset="-120"/>
+              </a:rPr>
+              <a:t> que </a:t>
+            </a:r>
+            <a:r>
+              <a:rPr lang="en-US" sz="1250" i="1" dirty="0" err="1">
+                <a:solidFill>
+                  <a:srgbClr val="5B6584"/>
+                </a:solidFill>
+                <a:latin typeface="Calibri" pitchFamily="34" charset="0"/>
+                <a:cs typeface="Calibri" pitchFamily="34" charset="-120"/>
+              </a:rPr>
+              <a:t>tuvieron</a:t>
+            </a:r>
+            <a:r>
+              <a:rPr lang="en-US" sz="1250" i="1" dirty="0">
+                <a:solidFill>
+                  <a:srgbClr val="5B6584"/>
+                </a:solidFill>
+                <a:latin typeface="Calibri" pitchFamily="34" charset="0"/>
+                <a:cs typeface="Calibri" pitchFamily="34" charset="-120"/>
+              </a:rPr>
+              <a:t> las variables a </a:t>
+            </a:r>
+            <a:r>
+              <a:rPr lang="en-US" sz="1250" i="1" dirty="0" err="1">
+                <a:solidFill>
+                  <a:srgbClr val="5B6584"/>
+                </a:solidFill>
+                <a:latin typeface="Calibri" pitchFamily="34" charset="0"/>
+                <a:cs typeface="Calibri" pitchFamily="34" charset="-120"/>
+              </a:rPr>
+              <a:t>nivel</a:t>
+            </a:r>
+            <a:r>
+              <a:rPr lang="en-US" sz="1250" i="1" dirty="0">
+                <a:solidFill>
+                  <a:srgbClr val="5B6584"/>
+                </a:solidFill>
+                <a:latin typeface="Calibri" pitchFamily="34" charset="0"/>
+                <a:cs typeface="Calibri" pitchFamily="34" charset="-120"/>
+              </a:rPr>
+              <a:t> global </a:t>
+            </a:r>
+            <a:r>
+              <a:rPr lang="en-US" sz="1250" i="1" dirty="0" err="1">
+                <a:solidFill>
+                  <a:srgbClr val="5B6584"/>
+                </a:solidFill>
+                <a:latin typeface="Calibri" pitchFamily="34" charset="0"/>
+                <a:cs typeface="Calibri" pitchFamily="34" charset="-120"/>
+              </a:rPr>
+              <a:t>fueron</a:t>
+            </a:r>
+            <a:r>
+              <a:rPr lang="en-US" sz="1250" i="1" dirty="0">
+                <a:solidFill>
+                  <a:srgbClr val="5B6584"/>
+                </a:solidFill>
+                <a:latin typeface="Calibri" pitchFamily="34" charset="0"/>
+                <a:cs typeface="Calibri" pitchFamily="34" charset="-120"/>
+              </a:rPr>
+              <a:t> las </a:t>
+            </a:r>
+            <a:r>
+              <a:rPr lang="en-US" sz="1250" i="1" dirty="0" err="1">
+                <a:solidFill>
+                  <a:srgbClr val="5B6584"/>
+                </a:solidFill>
+                <a:latin typeface="Calibri" pitchFamily="34" charset="0"/>
+                <a:cs typeface="Calibri" pitchFamily="34" charset="-120"/>
+              </a:rPr>
+              <a:t>siguientes</a:t>
+            </a:r>
+            <a:r>
+              <a:rPr lang="en-US" sz="1250" i="1" dirty="0">
+                <a:solidFill>
+                  <a:srgbClr val="5B6584"/>
+                </a:solidFill>
+                <a:latin typeface="Calibri" pitchFamily="34" charset="0"/>
+                <a:cs typeface="Calibri" pitchFamily="34" charset="-120"/>
+              </a:rPr>
+              <a:t>:</a:t>
             </a:r>
             <a:endParaRPr lang="en-US" sz="1250" dirty="0"/>
           </a:p>
@@ -9713,7 +10040,7 @@
         </p:nvSpPr>
         <p:spPr>
           <a:xfrm>
-            <a:off x="548640" y="1965960"/>
+            <a:off x="548640" y="2040910"/>
             <a:ext cx="11064240" cy="896112"/>
           </a:xfrm>
           <a:prstGeom prst="roundRect">
@@ -9747,7 +10074,7 @@
         </p:nvSpPr>
         <p:spPr>
           <a:xfrm>
-            <a:off x="777240" y="2185416"/>
+            <a:off x="777240" y="2260366"/>
             <a:ext cx="457200" cy="457200"/>
           </a:xfrm>
           <a:prstGeom prst="ellipse">
@@ -9774,7 +10101,7 @@
         </p:nvSpPr>
         <p:spPr>
           <a:xfrm>
-            <a:off x="777240" y="2185416"/>
+            <a:off x="777240" y="2260366"/>
             <a:ext cx="457200" cy="457200"/>
           </a:xfrm>
           <a:prstGeom prst="rect">
@@ -9813,7 +10140,7 @@
         </p:nvSpPr>
         <p:spPr>
           <a:xfrm>
-            <a:off x="1463040" y="2057400"/>
+            <a:off x="1463040" y="2132350"/>
             <a:ext cx="3108960" cy="731520"/>
           </a:xfrm>
           <a:prstGeom prst="rect">
@@ -9852,7 +10179,7 @@
         </p:nvSpPr>
         <p:spPr>
           <a:xfrm>
-            <a:off x="4663440" y="2057400"/>
+            <a:off x="4663440" y="2132350"/>
             <a:ext cx="6766560" cy="731520"/>
           </a:xfrm>
           <a:prstGeom prst="rect">
@@ -9891,7 +10218,7 @@
         </p:nvSpPr>
         <p:spPr>
           <a:xfrm>
-            <a:off x="548640" y="3017520"/>
+            <a:off x="548640" y="3392270"/>
             <a:ext cx="11064240" cy="896112"/>
           </a:xfrm>
           <a:prstGeom prst="roundRect">
@@ -9925,7 +10252,7 @@
         </p:nvSpPr>
         <p:spPr>
           <a:xfrm>
-            <a:off x="777240" y="3236976"/>
+            <a:off x="777240" y="3611726"/>
             <a:ext cx="457200" cy="457200"/>
           </a:xfrm>
           <a:prstGeom prst="ellipse">
@@ -9952,7 +10279,7 @@
         </p:nvSpPr>
         <p:spPr>
           <a:xfrm>
-            <a:off x="777240" y="3236976"/>
+            <a:off x="777240" y="3611726"/>
             <a:ext cx="457200" cy="457200"/>
           </a:xfrm>
           <a:prstGeom prst="rect">
@@ -9991,7 +10318,7 @@
         </p:nvSpPr>
         <p:spPr>
           <a:xfrm>
-            <a:off x="1463040" y="3108960"/>
+            <a:off x="1463040" y="3483710"/>
             <a:ext cx="3108960" cy="731520"/>
           </a:xfrm>
           <a:prstGeom prst="rect">
@@ -10030,7 +10357,7 @@
         </p:nvSpPr>
         <p:spPr>
           <a:xfrm>
-            <a:off x="4663440" y="3108960"/>
+            <a:off x="4663440" y="3483710"/>
             <a:ext cx="6766560" cy="731520"/>
           </a:xfrm>
           <a:prstGeom prst="rect">
@@ -10069,7 +10396,7 @@
         </p:nvSpPr>
         <p:spPr>
           <a:xfrm>
-            <a:off x="548640" y="4069080"/>
+            <a:off x="548640" y="4833576"/>
             <a:ext cx="11064240" cy="896112"/>
           </a:xfrm>
           <a:prstGeom prst="roundRect">
@@ -10103,7 +10430,7 @@
         </p:nvSpPr>
         <p:spPr>
           <a:xfrm>
-            <a:off x="777240" y="4288536"/>
+            <a:off x="777240" y="5053032"/>
             <a:ext cx="457200" cy="457200"/>
           </a:xfrm>
           <a:prstGeom prst="ellipse">
@@ -10130,7 +10457,7 @@
         </p:nvSpPr>
         <p:spPr>
           <a:xfrm>
-            <a:off x="777240" y="4288536"/>
+            <a:off x="777240" y="5053032"/>
             <a:ext cx="457200" cy="457200"/>
           </a:xfrm>
           <a:prstGeom prst="rect">
@@ -10169,7 +10496,7 @@
         </p:nvSpPr>
         <p:spPr>
           <a:xfrm>
-            <a:off x="1463040" y="4160520"/>
+            <a:off x="1463040" y="4925016"/>
             <a:ext cx="3108960" cy="731520"/>
           </a:xfrm>
           <a:prstGeom prst="rect">
@@ -10208,7 +10535,7 @@
         </p:nvSpPr>
         <p:spPr>
           <a:xfrm>
-            <a:off x="4663440" y="4160520"/>
+            <a:off x="4663440" y="4925016"/>
             <a:ext cx="6766560" cy="731520"/>
           </a:xfrm>
           <a:prstGeom prst="rect">
@@ -10234,184 +10561,6 @@
                 <a:cs typeface="Calibri" pitchFamily="34" charset="-120"/>
               </a:rPr>
               <a:t>Los segmentos más jóvenes muestran mayor riesgo relativo, probablemente por menor historial crediticio.</a:t>
-            </a:r>
-            <a:endParaRPr lang="en-US" sz="1200" dirty="0"/>
-          </a:p>
-        </p:txBody>
-      </p:sp>
-      <p:sp>
-        <p:nvSpPr>
-          <p:cNvPr id="20" name="Shape 18"/>
-          <p:cNvSpPr/>
-          <p:nvPr/>
-        </p:nvSpPr>
-        <p:spPr>
-          <a:xfrm>
-            <a:off x="548640" y="5120640"/>
-            <a:ext cx="11064240" cy="896112"/>
-          </a:xfrm>
-          <a:prstGeom prst="roundRect">
-            <a:avLst>
-              <a:gd name="adj" fmla="val 6122"/>
-            </a:avLst>
-          </a:prstGeom>
-          <a:solidFill>
-            <a:srgbClr val="FFFFFF"/>
-          </a:solidFill>
-          <a:ln w="12700">
-            <a:solidFill>
-              <a:srgbClr val="E2E7F2"/>
-            </a:solidFill>
-            <a:prstDash val="solid"/>
-          </a:ln>
-        </p:spPr>
-        <p:txBody>
-          <a:bodyPr/>
-          <a:lstStyle/>
-          <a:p>
-            <a:endParaRPr lang="en-PE"/>
-          </a:p>
-        </p:txBody>
-      </p:sp>
-      <p:sp>
-        <p:nvSpPr>
-          <p:cNvPr id="21" name="Shape 19"/>
-          <p:cNvSpPr/>
-          <p:nvPr/>
-        </p:nvSpPr>
-        <p:spPr>
-          <a:xfrm>
-            <a:off x="777240" y="5340096"/>
-            <a:ext cx="457200" cy="457200"/>
-          </a:xfrm>
-          <a:prstGeom prst="ellipse">
-            <a:avLst/>
-          </a:prstGeom>
-          <a:solidFill>
-            <a:srgbClr val="1E2761"/>
-          </a:solidFill>
-          <a:ln/>
-        </p:spPr>
-        <p:txBody>
-          <a:bodyPr/>
-          <a:lstStyle/>
-          <a:p>
-            <a:endParaRPr lang="en-PE"/>
-          </a:p>
-        </p:txBody>
-      </p:sp>
-      <p:sp>
-        <p:nvSpPr>
-          <p:cNvPr id="22" name="Text 20"/>
-          <p:cNvSpPr/>
-          <p:nvPr/>
-        </p:nvSpPr>
-        <p:spPr>
-          <a:xfrm>
-            <a:off x="777240" y="5340096"/>
-            <a:ext cx="457200" cy="457200"/>
-          </a:xfrm>
-          <a:prstGeom prst="rect">
-            <a:avLst/>
-          </a:prstGeom>
-          <a:noFill/>
-          <a:ln/>
-        </p:spPr>
-        <p:txBody>
-          <a:bodyPr wrap="square" lIns="0" tIns="0" rIns="0" bIns="0" rtlCol="0" anchor="ctr"/>
-          <a:lstStyle/>
-          <a:p>
-            <a:pPr marL="0" indent="0" algn="ctr">
-              <a:buNone/>
-            </a:pPr>
-            <a:r>
-              <a:rPr lang="en-US" sz="1400" b="1" dirty="0">
-                <a:solidFill>
-                  <a:srgbClr val="FFFFFF"/>
-                </a:solidFill>
-                <a:latin typeface="Calibri" pitchFamily="34" charset="0"/>
-                <a:ea typeface="Calibri" pitchFamily="34" charset="-122"/>
-                <a:cs typeface="Calibri" pitchFamily="34" charset="-120"/>
-              </a:rPr>
-              <a:t>4</a:t>
-            </a:r>
-            <a:endParaRPr lang="en-US" sz="1400" dirty="0"/>
-          </a:p>
-        </p:txBody>
-      </p:sp>
-      <p:sp>
-        <p:nvSpPr>
-          <p:cNvPr id="23" name="Text 21"/>
-          <p:cNvSpPr/>
-          <p:nvPr/>
-        </p:nvSpPr>
-        <p:spPr>
-          <a:xfrm>
-            <a:off x="1463040" y="5212080"/>
-            <a:ext cx="3108960" cy="731520"/>
-          </a:xfrm>
-          <a:prstGeom prst="rect">
-            <a:avLst/>
-          </a:prstGeom>
-          <a:noFill/>
-          <a:ln/>
-        </p:spPr>
-        <p:txBody>
-          <a:bodyPr wrap="square" lIns="0" tIns="0" rIns="0" bIns="0" rtlCol="0" anchor="ctr"/>
-          <a:lstStyle/>
-          <a:p>
-            <a:pPr marL="0" indent="0">
-              <a:buNone/>
-            </a:pPr>
-            <a:r>
-              <a:rPr lang="en-US" sz="1350" b="1" dirty="0">
-                <a:solidFill>
-                  <a:srgbClr val="1E2761"/>
-                </a:solidFill>
-                <a:latin typeface="Cambria" pitchFamily="34" charset="0"/>
-                <a:ea typeface="Cambria" pitchFamily="34" charset="-122"/>
-                <a:cs typeface="Cambria" pitchFamily="34" charset="-120"/>
-              </a:rPr>
-              <a:t>Carga de deuda vs. ingreso</a:t>
-            </a:r>
-            <a:endParaRPr lang="en-US" sz="1350" dirty="0"/>
-          </a:p>
-        </p:txBody>
-      </p:sp>
-      <p:sp>
-        <p:nvSpPr>
-          <p:cNvPr id="24" name="Text 22"/>
-          <p:cNvSpPr/>
-          <p:nvPr/>
-        </p:nvSpPr>
-        <p:spPr>
-          <a:xfrm>
-            <a:off x="4663440" y="5212080"/>
-            <a:ext cx="6766560" cy="731520"/>
-          </a:xfrm>
-          <a:prstGeom prst="rect">
-            <a:avLst/>
-          </a:prstGeom>
-          <a:noFill/>
-          <a:ln/>
-        </p:spPr>
-        <p:txBody>
-          <a:bodyPr wrap="square" lIns="0" tIns="0" rIns="0" bIns="0" rtlCol="0" anchor="ctr"/>
-          <a:lstStyle/>
-          <a:p>
-            <a:pPr marL="0" indent="0">
-              <a:buNone/>
-            </a:pPr>
-            <a:r>
-              <a:rPr lang="en-US" sz="1200" dirty="0">
-                <a:solidFill>
-                  <a:srgbClr val="141A45"/>
-                </a:solidFill>
-                <a:latin typeface="Calibri" pitchFamily="34" charset="0"/>
-                <a:ea typeface="Calibri" pitchFamily="34" charset="-122"/>
-                <a:cs typeface="Calibri" pitchFamily="34" charset="-120"/>
-              </a:rPr>
-              <a:t>A mayor proporción del ingreso comprometida en deuda, mayor probabilidad de incumplimiento.</a:t>
             </a:r>
             <a:endParaRPr lang="en-US" sz="1200" dirty="0"/>
           </a:p>
@@ -10838,7 +10987,45 @@
                 <a:ea typeface="Calibri" pitchFamily="34" charset="-122"/>
                 <a:cs typeface="Calibri" pitchFamily="34" charset="-120"/>
               </a:rPr>
-              <a:t>de la cartera en bandas rentables (Bajo + Medio + Alto)</a:t>
+              <a:t>de la cartera en bandas </a:t>
+            </a:r>
+            <a:r>
+              <a:rPr lang="en-US" sz="1200" dirty="0" err="1">
+                <a:solidFill>
+                  <a:srgbClr val="5B6584"/>
+                </a:solidFill>
+                <a:latin typeface="Calibri" pitchFamily="34" charset="0"/>
+                <a:ea typeface="Calibri" pitchFamily="34" charset="-122"/>
+                <a:cs typeface="Calibri" pitchFamily="34" charset="-120"/>
+              </a:rPr>
+              <a:t>rentables</a:t>
+            </a:r>
+            <a:r>
+              <a:rPr lang="en-US" sz="1200" dirty="0">
+                <a:solidFill>
+                  <a:srgbClr val="5B6584"/>
+                </a:solidFill>
+                <a:latin typeface="Calibri" pitchFamily="34" charset="0"/>
+                <a:ea typeface="Calibri" pitchFamily="34" charset="-122"/>
+                <a:cs typeface="Calibri" pitchFamily="34" charset="-120"/>
+              </a:rPr>
+              <a:t> </a:t>
+            </a:r>
+          </a:p>
+          <a:p>
+            <a:pPr marL="0" indent="0" algn="ctr">
+              <a:buNone/>
+            </a:pPr>
+            <a:r>
+              <a:rPr lang="en-US" sz="1200" dirty="0">
+                <a:solidFill>
+                  <a:srgbClr val="5B6584"/>
+                </a:solidFill>
+                <a:latin typeface="Calibri" pitchFamily="34" charset="0"/>
+                <a:ea typeface="Calibri" pitchFamily="34" charset="-122"/>
+                <a:cs typeface="Calibri" pitchFamily="34" charset="-120"/>
+              </a:rPr>
+              <a:t>(Bajo + Medio + Alto)</a:t>
             </a:r>
             <a:endParaRPr lang="en-US" sz="1200" dirty="0"/>
           </a:p>
@@ -11331,11 +11518,41 @@
             <a:tbl>
               <a:tblPr/>
               <a:tblGrid>
-                <a:gridCol w="2468880"/>
-                <a:gridCol w="2148840"/>
-                <a:gridCol w="2148840"/>
-                <a:gridCol w="2148840"/>
-                <a:gridCol w="2148840"/>
+                <a:gridCol w="2468880">
+                  <a:extLst>
+                    <a:ext uri="{9D8B030D-6E8A-4147-A177-3AD203B41FA5}">
+                      <a16:colId xmlns:a16="http://schemas.microsoft.com/office/drawing/2014/main" val="20000"/>
+                    </a:ext>
+                  </a:extLst>
+                </a:gridCol>
+                <a:gridCol w="2148840">
+                  <a:extLst>
+                    <a:ext uri="{9D8B030D-6E8A-4147-A177-3AD203B41FA5}">
+                      <a16:colId xmlns:a16="http://schemas.microsoft.com/office/drawing/2014/main" val="20001"/>
+                    </a:ext>
+                  </a:extLst>
+                </a:gridCol>
+                <a:gridCol w="2148840">
+                  <a:extLst>
+                    <a:ext uri="{9D8B030D-6E8A-4147-A177-3AD203B41FA5}">
+                      <a16:colId xmlns:a16="http://schemas.microsoft.com/office/drawing/2014/main" val="20002"/>
+                    </a:ext>
+                  </a:extLst>
+                </a:gridCol>
+                <a:gridCol w="2148840">
+                  <a:extLst>
+                    <a:ext uri="{9D8B030D-6E8A-4147-A177-3AD203B41FA5}">
+                      <a16:colId xmlns:a16="http://schemas.microsoft.com/office/drawing/2014/main" val="20003"/>
+                    </a:ext>
+                  </a:extLst>
+                </a:gridCol>
+                <a:gridCol w="2148840">
+                  <a:extLst>
+                    <a:ext uri="{9D8B030D-6E8A-4147-A177-3AD203B41FA5}">
+                      <a16:colId xmlns:a16="http://schemas.microsoft.com/office/drawing/2014/main" val="20004"/>
+                    </a:ext>
+                  </a:extLst>
+                </a:gridCol>
               </a:tblGrid>
               <a:tr h="438912">
                 <a:tc>
@@ -11678,6 +11895,11 @@
                     </a:solidFill>
                   </a:tcPr>
                 </a:tc>
+                <a:extLst>
+                  <a:ext uri="{0D108BD9-81ED-4DB2-BD59-A6C34878D82A}">
+                    <a16:rowId xmlns:a16="http://schemas.microsoft.com/office/drawing/2014/main" val="10000"/>
+                  </a:ext>
+                </a:extLst>
               </a:tr>
               <a:tr h="438912">
                 <a:tc>
@@ -12020,6 +12242,11 @@
                     </a:solidFill>
                   </a:tcPr>
                 </a:tc>
+                <a:extLst>
+                  <a:ext uri="{0D108BD9-81ED-4DB2-BD59-A6C34878D82A}">
+                    <a16:rowId xmlns:a16="http://schemas.microsoft.com/office/drawing/2014/main" val="10001"/>
+                  </a:ext>
+                </a:extLst>
               </a:tr>
               <a:tr h="438912">
                 <a:tc>
@@ -12362,6 +12589,11 @@
                     </a:solidFill>
                   </a:tcPr>
                 </a:tc>
+                <a:extLst>
+                  <a:ext uri="{0D108BD9-81ED-4DB2-BD59-A6C34878D82A}">
+                    <a16:rowId xmlns:a16="http://schemas.microsoft.com/office/drawing/2014/main" val="10002"/>
+                  </a:ext>
+                </a:extLst>
               </a:tr>
               <a:tr h="438912">
                 <a:tc>
@@ -12704,6 +12936,11 @@
                     </a:solidFill>
                   </a:tcPr>
                 </a:tc>
+                <a:extLst>
+                  <a:ext uri="{0D108BD9-81ED-4DB2-BD59-A6C34878D82A}">
+                    <a16:rowId xmlns:a16="http://schemas.microsoft.com/office/drawing/2014/main" val="10003"/>
+                  </a:ext>
+                </a:extLst>
               </a:tr>
               <a:tr h="438912">
                 <a:tc>
@@ -13046,6 +13283,11 @@
                     </a:solidFill>
                   </a:tcPr>
                 </a:tc>
+                <a:extLst>
+                  <a:ext uri="{0D108BD9-81ED-4DB2-BD59-A6C34878D82A}">
+                    <a16:rowId xmlns:a16="http://schemas.microsoft.com/office/drawing/2014/main" val="10004"/>
+                  </a:ext>
+                </a:extLst>
               </a:tr>
             </a:tbl>
           </a:graphicData>
@@ -13093,7 +13335,7 @@
         </p:nvSpPr>
         <p:spPr>
           <a:xfrm>
-            <a:off x="868680" y="4709160"/>
+            <a:off x="868680" y="5173852"/>
             <a:ext cx="502920" cy="502920"/>
           </a:xfrm>
           <a:prstGeom prst="ellipse">
@@ -13108,7 +13350,7 @@
           <a:bodyPr/>
           <a:lstStyle/>
           <a:p>
-            <a:endParaRPr lang="en-PE"/>
+            <a:endParaRPr lang="en-PE" dirty="0"/>
           </a:p>
         </p:txBody>
       </p:sp>
@@ -13120,7 +13362,7 @@
         </p:nvSpPr>
         <p:spPr>
           <a:xfrm>
-            <a:off x="868680" y="4709160"/>
+            <a:off x="868680" y="5173852"/>
             <a:ext cx="502920" cy="502920"/>
           </a:xfrm>
           <a:prstGeom prst="rect">
@@ -13533,7 +13775,7 @@
         </p:nvSpPr>
         <p:spPr>
           <a:xfrm>
-            <a:off x="1463040" y="1920240"/>
+            <a:off x="1463040" y="2025170"/>
             <a:ext cx="4206240" cy="365760"/>
           </a:xfrm>
           <a:prstGeom prst="rect">
@@ -13718,7 +13960,7 @@
         </p:nvSpPr>
         <p:spPr>
           <a:xfrm>
-            <a:off x="7159752" y="1920240"/>
+            <a:off x="7159752" y="2025170"/>
             <a:ext cx="4206240" cy="365760"/>
           </a:xfrm>
           <a:prstGeom prst="rect">
@@ -13903,7 +14145,7 @@
         </p:nvSpPr>
         <p:spPr>
           <a:xfrm>
-            <a:off x="1463040" y="4251960"/>
+            <a:off x="1463040" y="4356890"/>
             <a:ext cx="4206240" cy="365760"/>
           </a:xfrm>
           <a:prstGeom prst="rect">
@@ -14088,7 +14330,7 @@
         </p:nvSpPr>
         <p:spPr>
           <a:xfrm>
-            <a:off x="7159752" y="4251960"/>
+            <a:off x="7159752" y="4356890"/>
             <a:ext cx="4206240" cy="365760"/>
           </a:xfrm>
           <a:prstGeom prst="rect">
@@ -14590,45 +14832,6 @@
       </p:sp>
       <p:sp>
         <p:nvSpPr>
-          <p:cNvPr id="11" name="Text 9"/>
-          <p:cNvSpPr/>
-          <p:nvPr/>
-        </p:nvSpPr>
-        <p:spPr>
-          <a:xfrm>
-            <a:off x="548640" y="5212080"/>
-            <a:ext cx="11064240" cy="640080"/>
-          </a:xfrm>
-          <a:prstGeom prst="rect">
-            <a:avLst/>
-          </a:prstGeom>
-          <a:noFill/>
-          <a:ln/>
-        </p:spPr>
-        <p:txBody>
-          <a:bodyPr wrap="square" lIns="0" tIns="0" rIns="0" bIns="0" rtlCol="0" anchor="ctr"/>
-          <a:lstStyle/>
-          <a:p>
-            <a:pPr marL="0" indent="0" algn="ctr">
-              <a:buNone/>
-            </a:pPr>
-            <a:r>
-              <a:rPr lang="en-US" sz="1600" i="1" dirty="0">
-                <a:solidFill>
-                  <a:srgbClr val="FFFFFF"/>
-                </a:solidFill>
-                <a:latin typeface="Cambria" pitchFamily="34" charset="0"/>
-                <a:ea typeface="Cambria" pitchFamily="34" charset="-122"/>
-                <a:cs typeface="Cambria" pitchFamily="34" charset="-120"/>
-              </a:rPr>
-              <a:t>Un modelo que no solo predice mejor, sino que se puede explicar, calibrar, monitorear y traducir directamente en resultado financiero.</a:t>
-            </a:r>
-            <a:endParaRPr lang="en-US" sz="1600" dirty="0"/>
-          </a:p>
-        </p:txBody>
-      </p:sp>
-      <p:sp>
-        <p:nvSpPr>
           <p:cNvPr id="12" name="Text 10"/>
           <p:cNvSpPr/>
           <p:nvPr/>
@@ -16270,891 +16473,6 @@
                 <a:cs typeface="Calibri" pitchFamily="34" charset="-120"/>
               </a:rPr>
               <a:t>2</a:t>
-            </a:r>
-            <a:endParaRPr lang="en-US" sz="900" dirty="0"/>
-          </a:p>
-        </p:txBody>
-      </p:sp>
-    </p:spTree>
-  </p:cSld>
-  <p:clrMapOvr>
-    <a:masterClrMapping/>
-  </p:clrMapOvr>
-</p:sld>
-</file>
-
-<file path=ppt/slides/slide20.xml><?xml version="1.0" encoding="utf-8"?>
-<p:sld xmlns:a="http://schemas.openxmlformats.org/drawingml/2006/main" xmlns:r="http://schemas.openxmlformats.org/officeDocument/2006/relationships" xmlns:p="http://schemas.openxmlformats.org/presentationml/2006/main">
-  <p:cSld name="Slide 21">
-    <p:bg>
-      <p:bgPr>
-        <a:solidFill>
-          <a:srgbClr val="141A45"/>
-        </a:solidFill>
-        <a:effectLst/>
-      </p:bgPr>
-    </p:bg>
-    <p:spTree>
-      <p:nvGrpSpPr>
-        <p:cNvPr id="1" name=""/>
-        <p:cNvGrpSpPr/>
-        <p:nvPr/>
-      </p:nvGrpSpPr>
-      <p:grpSpPr>
-        <a:xfrm>
-          <a:off x="0" y="0"/>
-          <a:ext cx="0" cy="0"/>
-          <a:chOff x="0" y="0"/>
-          <a:chExt cx="0" cy="0"/>
-        </a:xfrm>
-      </p:grpSpPr>
-      <p:sp>
-        <p:nvSpPr>
-          <p:cNvPr id="2" name="Shape 0"/>
-          <p:cNvSpPr/>
-          <p:nvPr/>
-        </p:nvSpPr>
-        <p:spPr>
-          <a:xfrm>
-            <a:off x="-2743200" y="-1828800"/>
-            <a:ext cx="5486400" cy="5486400"/>
-          </a:xfrm>
-          <a:prstGeom prst="ellipse">
-            <a:avLst/>
-          </a:prstGeom>
-          <a:solidFill>
-            <a:srgbClr val="1E2761"/>
-          </a:solidFill>
-          <a:ln/>
-        </p:spPr>
-        <p:txBody>
-          <a:bodyPr/>
-          <a:lstStyle/>
-          <a:p>
-            <a:endParaRPr lang="en-PE"/>
-          </a:p>
-        </p:txBody>
-      </p:sp>
-      <p:sp>
-        <p:nvSpPr>
-          <p:cNvPr id="3" name="Text 1"/>
-          <p:cNvSpPr/>
-          <p:nvPr/>
-        </p:nvSpPr>
-        <p:spPr>
-          <a:xfrm>
-            <a:off x="548640" y="384048"/>
-            <a:ext cx="5486400" cy="274320"/>
-          </a:xfrm>
-          <a:prstGeom prst="rect">
-            <a:avLst/>
-          </a:prstGeom>
-          <a:noFill/>
-          <a:ln/>
-        </p:spPr>
-        <p:txBody>
-          <a:bodyPr wrap="square" lIns="0" tIns="0" rIns="0" bIns="0" rtlCol="0" anchor="ctr"/>
-          <a:lstStyle/>
-          <a:p>
-            <a:pPr marL="0" indent="0">
-              <a:buNone/>
-            </a:pPr>
-            <a:r>
-              <a:rPr lang="en-US" sz="1200" b="1" kern="0" spc="200" dirty="0">
-                <a:solidFill>
-                  <a:srgbClr val="CADCFC"/>
-                </a:solidFill>
-                <a:latin typeface="Calibri" pitchFamily="34" charset="0"/>
-                <a:ea typeface="Calibri" pitchFamily="34" charset="-122"/>
-                <a:cs typeface="Calibri" pitchFamily="34" charset="-120"/>
-              </a:rPr>
-              <a:t>BACKUP</a:t>
-            </a:r>
-            <a:endParaRPr lang="en-US" sz="1200" dirty="0"/>
-          </a:p>
-        </p:txBody>
-      </p:sp>
-      <p:sp>
-        <p:nvSpPr>
-          <p:cNvPr id="4" name="Text 2"/>
-          <p:cNvSpPr/>
-          <p:nvPr/>
-        </p:nvSpPr>
-        <p:spPr>
-          <a:xfrm>
-            <a:off x="548640" y="658368"/>
-            <a:ext cx="11064240" cy="822960"/>
-          </a:xfrm>
-          <a:prstGeom prst="rect">
-            <a:avLst/>
-          </a:prstGeom>
-          <a:noFill/>
-          <a:ln/>
-        </p:spPr>
-        <p:txBody>
-          <a:bodyPr wrap="square" lIns="0" tIns="0" rIns="0" bIns="0" rtlCol="0" anchor="ctr"/>
-          <a:lstStyle/>
-          <a:p>
-            <a:pPr marL="0" indent="0">
-              <a:buNone/>
-            </a:pPr>
-            <a:r>
-              <a:rPr lang="en-US" sz="3200" b="1" dirty="0">
-                <a:solidFill>
-                  <a:srgbClr val="FFFFFF"/>
-                </a:solidFill>
-                <a:latin typeface="Cambria" pitchFamily="34" charset="0"/>
-                <a:ea typeface="Cambria" pitchFamily="34" charset="-122"/>
-                <a:cs typeface="Cambria" pitchFamily="34" charset="-120"/>
-              </a:rPr>
-              <a:t>Anexos técnicos</a:t>
-            </a:r>
-            <a:endParaRPr lang="en-US" sz="3200" dirty="0"/>
-          </a:p>
-        </p:txBody>
-      </p:sp>
-      <p:sp>
-        <p:nvSpPr>
-          <p:cNvPr id="5" name="Text 3"/>
-          <p:cNvSpPr/>
-          <p:nvPr/>
-        </p:nvSpPr>
-        <p:spPr>
-          <a:xfrm>
-            <a:off x="548640" y="1417320"/>
-            <a:ext cx="10789920" cy="365760"/>
-          </a:xfrm>
-          <a:prstGeom prst="rect">
-            <a:avLst/>
-          </a:prstGeom>
-          <a:noFill/>
-          <a:ln/>
-        </p:spPr>
-        <p:txBody>
-          <a:bodyPr wrap="square" lIns="0" tIns="0" rIns="0" bIns="0" rtlCol="0" anchor="ctr"/>
-          <a:lstStyle/>
-          <a:p>
-            <a:pPr marL="0" indent="0">
-              <a:buNone/>
-            </a:pPr>
-            <a:r>
-              <a:rPr lang="en-US" sz="1300" dirty="0">
-                <a:solidFill>
-                  <a:srgbClr val="CADCFC"/>
-                </a:solidFill>
-                <a:latin typeface="Calibri" pitchFamily="34" charset="0"/>
-                <a:ea typeface="Calibri" pitchFamily="34" charset="-122"/>
-                <a:cs typeface="Calibri" pitchFamily="34" charset="-120"/>
-              </a:rPr>
-              <a:t>Material de respaldo para preguntas del panel — no forma parte de la narrativa principal.</a:t>
-            </a:r>
-            <a:endParaRPr lang="en-US" sz="1300" dirty="0"/>
-          </a:p>
-        </p:txBody>
-      </p:sp>
-      <p:sp>
-        <p:nvSpPr>
-          <p:cNvPr id="6" name="Shape 4"/>
-          <p:cNvSpPr/>
-          <p:nvPr/>
-        </p:nvSpPr>
-        <p:spPr>
-          <a:xfrm>
-            <a:off x="548640" y="2057400"/>
-            <a:ext cx="384048" cy="384048"/>
-          </a:xfrm>
-          <a:prstGeom prst="ellipse">
-            <a:avLst/>
-          </a:prstGeom>
-          <a:solidFill>
-            <a:srgbClr val="C9A227"/>
-          </a:solidFill>
-          <a:ln/>
-        </p:spPr>
-        <p:txBody>
-          <a:bodyPr/>
-          <a:lstStyle/>
-          <a:p>
-            <a:endParaRPr lang="en-PE"/>
-          </a:p>
-        </p:txBody>
-      </p:sp>
-      <p:sp>
-        <p:nvSpPr>
-          <p:cNvPr id="7" name="Text 5"/>
-          <p:cNvSpPr/>
-          <p:nvPr/>
-        </p:nvSpPr>
-        <p:spPr>
-          <a:xfrm>
-            <a:off x="548640" y="2057400"/>
-            <a:ext cx="384048" cy="384048"/>
-          </a:xfrm>
-          <a:prstGeom prst="rect">
-            <a:avLst/>
-          </a:prstGeom>
-          <a:noFill/>
-          <a:ln/>
-        </p:spPr>
-        <p:txBody>
-          <a:bodyPr wrap="square" lIns="0" tIns="0" rIns="0" bIns="0" rtlCol="0" anchor="ctr"/>
-          <a:lstStyle/>
-          <a:p>
-            <a:pPr marL="0" indent="0" algn="ctr">
-              <a:buNone/>
-            </a:pPr>
-            <a:r>
-              <a:rPr lang="en-US" sz="1176" b="1" dirty="0">
-                <a:solidFill>
-                  <a:srgbClr val="141A45"/>
-                </a:solidFill>
-                <a:latin typeface="Calibri" pitchFamily="34" charset="0"/>
-                <a:ea typeface="Calibri" pitchFamily="34" charset="-122"/>
-                <a:cs typeface="Calibri" pitchFamily="34" charset="-120"/>
-              </a:rPr>
-              <a:t>1</a:t>
-            </a:r>
-            <a:endParaRPr lang="en-US" sz="1176" dirty="0"/>
-          </a:p>
-        </p:txBody>
-      </p:sp>
-      <p:sp>
-        <p:nvSpPr>
-          <p:cNvPr id="8" name="Text 6"/>
-          <p:cNvSpPr/>
-          <p:nvPr/>
-        </p:nvSpPr>
-        <p:spPr>
-          <a:xfrm>
-            <a:off x="1143000" y="2075688"/>
-            <a:ext cx="9875520" cy="457200"/>
-          </a:xfrm>
-          <a:prstGeom prst="rect">
-            <a:avLst/>
-          </a:prstGeom>
-          <a:noFill/>
-          <a:ln/>
-        </p:spPr>
-        <p:txBody>
-          <a:bodyPr wrap="square" lIns="0" tIns="0" rIns="0" bIns="0" rtlCol="0" anchor="ctr"/>
-          <a:lstStyle/>
-          <a:p>
-            <a:pPr marL="0" indent="0">
-              <a:buNone/>
-            </a:pPr>
-            <a:r>
-              <a:rPr lang="en-US" sz="1400" dirty="0">
-                <a:solidFill>
-                  <a:srgbClr val="FFFFFF"/>
-                </a:solidFill>
-                <a:latin typeface="Calibri" pitchFamily="34" charset="0"/>
-                <a:ea typeface="Calibri" pitchFamily="34" charset="-122"/>
-                <a:cs typeface="Calibri" pitchFamily="34" charset="-120"/>
-              </a:rPr>
-              <a:t>Hiperparámetros finales del modelo y proceso de tuning</a:t>
-            </a:r>
-            <a:endParaRPr lang="en-US" sz="1400" dirty="0"/>
-          </a:p>
-        </p:txBody>
-      </p:sp>
-      <p:sp>
-        <p:nvSpPr>
-          <p:cNvPr id="9" name="Shape 7"/>
-          <p:cNvSpPr/>
-          <p:nvPr/>
-        </p:nvSpPr>
-        <p:spPr>
-          <a:xfrm>
-            <a:off x="548640" y="2715768"/>
-            <a:ext cx="384048" cy="384048"/>
-          </a:xfrm>
-          <a:prstGeom prst="ellipse">
-            <a:avLst/>
-          </a:prstGeom>
-          <a:solidFill>
-            <a:srgbClr val="C9A227"/>
-          </a:solidFill>
-          <a:ln/>
-        </p:spPr>
-        <p:txBody>
-          <a:bodyPr/>
-          <a:lstStyle/>
-          <a:p>
-            <a:endParaRPr lang="en-PE"/>
-          </a:p>
-        </p:txBody>
-      </p:sp>
-      <p:sp>
-        <p:nvSpPr>
-          <p:cNvPr id="10" name="Text 8"/>
-          <p:cNvSpPr/>
-          <p:nvPr/>
-        </p:nvSpPr>
-        <p:spPr>
-          <a:xfrm>
-            <a:off x="548640" y="2715768"/>
-            <a:ext cx="384048" cy="384048"/>
-          </a:xfrm>
-          <a:prstGeom prst="rect">
-            <a:avLst/>
-          </a:prstGeom>
-          <a:noFill/>
-          <a:ln/>
-        </p:spPr>
-        <p:txBody>
-          <a:bodyPr wrap="square" lIns="0" tIns="0" rIns="0" bIns="0" rtlCol="0" anchor="ctr"/>
-          <a:lstStyle/>
-          <a:p>
-            <a:pPr marL="0" indent="0" algn="ctr">
-              <a:buNone/>
-            </a:pPr>
-            <a:r>
-              <a:rPr lang="en-US" sz="1176" b="1" dirty="0">
-                <a:solidFill>
-                  <a:srgbClr val="141A45"/>
-                </a:solidFill>
-                <a:latin typeface="Calibri" pitchFamily="34" charset="0"/>
-                <a:ea typeface="Calibri" pitchFamily="34" charset="-122"/>
-                <a:cs typeface="Calibri" pitchFamily="34" charset="-120"/>
-              </a:rPr>
-              <a:t>2</a:t>
-            </a:r>
-            <a:endParaRPr lang="en-US" sz="1176" dirty="0"/>
-          </a:p>
-        </p:txBody>
-      </p:sp>
-      <p:sp>
-        <p:nvSpPr>
-          <p:cNvPr id="11" name="Text 9"/>
-          <p:cNvSpPr/>
-          <p:nvPr/>
-        </p:nvSpPr>
-        <p:spPr>
-          <a:xfrm>
-            <a:off x="1143000" y="2734056"/>
-            <a:ext cx="9875520" cy="457200"/>
-          </a:xfrm>
-          <a:prstGeom prst="rect">
-            <a:avLst/>
-          </a:prstGeom>
-          <a:noFill/>
-          <a:ln/>
-        </p:spPr>
-        <p:txBody>
-          <a:bodyPr wrap="square" lIns="0" tIns="0" rIns="0" bIns="0" rtlCol="0" anchor="ctr"/>
-          <a:lstStyle/>
-          <a:p>
-            <a:pPr marL="0" indent="0">
-              <a:buNone/>
-            </a:pPr>
-            <a:r>
-              <a:rPr lang="en-US" sz="1400" dirty="0">
-                <a:solidFill>
-                  <a:srgbClr val="FFFFFF"/>
-                </a:solidFill>
-                <a:latin typeface="Calibri" pitchFamily="34" charset="0"/>
-                <a:ea typeface="Calibri" pitchFamily="34" charset="-122"/>
-                <a:cs typeface="Calibri" pitchFamily="34" charset="-120"/>
-              </a:rPr>
-              <a:t>Matriz de confusión y métricas por punto de corte</a:t>
-            </a:r>
-            <a:endParaRPr lang="en-US" sz="1400" dirty="0"/>
-          </a:p>
-        </p:txBody>
-      </p:sp>
-      <p:sp>
-        <p:nvSpPr>
-          <p:cNvPr id="12" name="Shape 10"/>
-          <p:cNvSpPr/>
-          <p:nvPr/>
-        </p:nvSpPr>
-        <p:spPr>
-          <a:xfrm>
-            <a:off x="548640" y="3374136"/>
-            <a:ext cx="384048" cy="384048"/>
-          </a:xfrm>
-          <a:prstGeom prst="ellipse">
-            <a:avLst/>
-          </a:prstGeom>
-          <a:solidFill>
-            <a:srgbClr val="C9A227"/>
-          </a:solidFill>
-          <a:ln/>
-        </p:spPr>
-        <p:txBody>
-          <a:bodyPr/>
-          <a:lstStyle/>
-          <a:p>
-            <a:endParaRPr lang="en-PE"/>
-          </a:p>
-        </p:txBody>
-      </p:sp>
-      <p:sp>
-        <p:nvSpPr>
-          <p:cNvPr id="13" name="Text 11"/>
-          <p:cNvSpPr/>
-          <p:nvPr/>
-        </p:nvSpPr>
-        <p:spPr>
-          <a:xfrm>
-            <a:off x="548640" y="3374136"/>
-            <a:ext cx="384048" cy="384048"/>
-          </a:xfrm>
-          <a:prstGeom prst="rect">
-            <a:avLst/>
-          </a:prstGeom>
-          <a:noFill/>
-          <a:ln/>
-        </p:spPr>
-        <p:txBody>
-          <a:bodyPr wrap="square" lIns="0" tIns="0" rIns="0" bIns="0" rtlCol="0" anchor="ctr"/>
-          <a:lstStyle/>
-          <a:p>
-            <a:pPr marL="0" indent="0" algn="ctr">
-              <a:buNone/>
-            </a:pPr>
-            <a:r>
-              <a:rPr lang="en-US" sz="1176" b="1" dirty="0">
-                <a:solidFill>
-                  <a:srgbClr val="141A45"/>
-                </a:solidFill>
-                <a:latin typeface="Calibri" pitchFamily="34" charset="0"/>
-                <a:ea typeface="Calibri" pitchFamily="34" charset="-122"/>
-                <a:cs typeface="Calibri" pitchFamily="34" charset="-120"/>
-              </a:rPr>
-              <a:t>3</a:t>
-            </a:r>
-            <a:endParaRPr lang="en-US" sz="1176" dirty="0"/>
-          </a:p>
-        </p:txBody>
-      </p:sp>
-      <p:sp>
-        <p:nvSpPr>
-          <p:cNvPr id="14" name="Text 12"/>
-          <p:cNvSpPr/>
-          <p:nvPr/>
-        </p:nvSpPr>
-        <p:spPr>
-          <a:xfrm>
-            <a:off x="1143000" y="3392424"/>
-            <a:ext cx="9875520" cy="457200"/>
-          </a:xfrm>
-          <a:prstGeom prst="rect">
-            <a:avLst/>
-          </a:prstGeom>
-          <a:noFill/>
-          <a:ln/>
-        </p:spPr>
-        <p:txBody>
-          <a:bodyPr wrap="square" lIns="0" tIns="0" rIns="0" bIns="0" rtlCol="0" anchor="ctr"/>
-          <a:lstStyle/>
-          <a:p>
-            <a:pPr marL="0" indent="0">
-              <a:buNone/>
-            </a:pPr>
-            <a:r>
-              <a:rPr lang="en-US" sz="1400" dirty="0">
-                <a:solidFill>
-                  <a:srgbClr val="FFFFFF"/>
-                </a:solidFill>
-                <a:latin typeface="Calibri" pitchFamily="34" charset="0"/>
-                <a:ea typeface="Calibri" pitchFamily="34" charset="-122"/>
-                <a:cs typeface="Calibri" pitchFamily="34" charset="-120"/>
-              </a:rPr>
-              <a:t>Detalle de tratamiento de missing values y outliers por variable</a:t>
-            </a:r>
-            <a:endParaRPr lang="en-US" sz="1400" dirty="0"/>
-          </a:p>
-        </p:txBody>
-      </p:sp>
-      <p:sp>
-        <p:nvSpPr>
-          <p:cNvPr id="15" name="Shape 13"/>
-          <p:cNvSpPr/>
-          <p:nvPr/>
-        </p:nvSpPr>
-        <p:spPr>
-          <a:xfrm>
-            <a:off x="548640" y="4032504"/>
-            <a:ext cx="384048" cy="384048"/>
-          </a:xfrm>
-          <a:prstGeom prst="ellipse">
-            <a:avLst/>
-          </a:prstGeom>
-          <a:solidFill>
-            <a:srgbClr val="C9A227"/>
-          </a:solidFill>
-          <a:ln/>
-        </p:spPr>
-        <p:txBody>
-          <a:bodyPr/>
-          <a:lstStyle/>
-          <a:p>
-            <a:endParaRPr lang="en-PE"/>
-          </a:p>
-        </p:txBody>
-      </p:sp>
-      <p:sp>
-        <p:nvSpPr>
-          <p:cNvPr id="16" name="Text 14"/>
-          <p:cNvSpPr/>
-          <p:nvPr/>
-        </p:nvSpPr>
-        <p:spPr>
-          <a:xfrm>
-            <a:off x="548640" y="4032504"/>
-            <a:ext cx="384048" cy="384048"/>
-          </a:xfrm>
-          <a:prstGeom prst="rect">
-            <a:avLst/>
-          </a:prstGeom>
-          <a:noFill/>
-          <a:ln/>
-        </p:spPr>
-        <p:txBody>
-          <a:bodyPr wrap="square" lIns="0" tIns="0" rIns="0" bIns="0" rtlCol="0" anchor="ctr"/>
-          <a:lstStyle/>
-          <a:p>
-            <a:pPr marL="0" indent="0" algn="ctr">
-              <a:buNone/>
-            </a:pPr>
-            <a:r>
-              <a:rPr lang="en-US" sz="1176" b="1" dirty="0">
-                <a:solidFill>
-                  <a:srgbClr val="141A45"/>
-                </a:solidFill>
-                <a:latin typeface="Calibri" pitchFamily="34" charset="0"/>
-                <a:ea typeface="Calibri" pitchFamily="34" charset="-122"/>
-                <a:cs typeface="Calibri" pitchFamily="34" charset="-120"/>
-              </a:rPr>
-              <a:t>4</a:t>
-            </a:r>
-            <a:endParaRPr lang="en-US" sz="1176" dirty="0"/>
-          </a:p>
-        </p:txBody>
-      </p:sp>
-      <p:sp>
-        <p:nvSpPr>
-          <p:cNvPr id="17" name="Text 15"/>
-          <p:cNvSpPr/>
-          <p:nvPr/>
-        </p:nvSpPr>
-        <p:spPr>
-          <a:xfrm>
-            <a:off x="1143000" y="4050792"/>
-            <a:ext cx="9875520" cy="457200"/>
-          </a:xfrm>
-          <a:prstGeom prst="rect">
-            <a:avLst/>
-          </a:prstGeom>
-          <a:noFill/>
-          <a:ln/>
-        </p:spPr>
-        <p:txBody>
-          <a:bodyPr wrap="square" lIns="0" tIns="0" rIns="0" bIns="0" rtlCol="0" anchor="ctr"/>
-          <a:lstStyle/>
-          <a:p>
-            <a:pPr marL="0" indent="0">
-              <a:buNone/>
-            </a:pPr>
-            <a:r>
-              <a:rPr lang="en-US" sz="1400" dirty="0">
-                <a:solidFill>
-                  <a:srgbClr val="FFFFFF"/>
-                </a:solidFill>
-                <a:latin typeface="Calibri" pitchFamily="34" charset="0"/>
-                <a:ea typeface="Calibri" pitchFamily="34" charset="-122"/>
-                <a:cs typeface="Calibri" pitchFamily="34" charset="-120"/>
-              </a:rPr>
-              <a:t>Código y notebook de referencia (repositorio)</a:t>
-            </a:r>
-            <a:endParaRPr lang="en-US" sz="1400" dirty="0"/>
-          </a:p>
-        </p:txBody>
-      </p:sp>
-      <p:sp>
-        <p:nvSpPr>
-          <p:cNvPr id="18" name="Shape 16"/>
-          <p:cNvSpPr/>
-          <p:nvPr/>
-        </p:nvSpPr>
-        <p:spPr>
-          <a:xfrm>
-            <a:off x="548640" y="4690872"/>
-            <a:ext cx="384048" cy="384048"/>
-          </a:xfrm>
-          <a:prstGeom prst="ellipse">
-            <a:avLst/>
-          </a:prstGeom>
-          <a:solidFill>
-            <a:srgbClr val="C9A227"/>
-          </a:solidFill>
-          <a:ln/>
-        </p:spPr>
-        <p:txBody>
-          <a:bodyPr/>
-          <a:lstStyle/>
-          <a:p>
-            <a:endParaRPr lang="en-PE"/>
-          </a:p>
-        </p:txBody>
-      </p:sp>
-      <p:sp>
-        <p:nvSpPr>
-          <p:cNvPr id="19" name="Text 17"/>
-          <p:cNvSpPr/>
-          <p:nvPr/>
-        </p:nvSpPr>
-        <p:spPr>
-          <a:xfrm>
-            <a:off x="548640" y="4690872"/>
-            <a:ext cx="384048" cy="384048"/>
-          </a:xfrm>
-          <a:prstGeom prst="rect">
-            <a:avLst/>
-          </a:prstGeom>
-          <a:noFill/>
-          <a:ln/>
-        </p:spPr>
-        <p:txBody>
-          <a:bodyPr wrap="square" lIns="0" tIns="0" rIns="0" bIns="0" rtlCol="0" anchor="ctr"/>
-          <a:lstStyle/>
-          <a:p>
-            <a:pPr marL="0" indent="0" algn="ctr">
-              <a:buNone/>
-            </a:pPr>
-            <a:r>
-              <a:rPr lang="en-US" sz="1176" b="1" dirty="0">
-                <a:solidFill>
-                  <a:srgbClr val="141A45"/>
-                </a:solidFill>
-                <a:latin typeface="Calibri" pitchFamily="34" charset="0"/>
-                <a:ea typeface="Calibri" pitchFamily="34" charset="-122"/>
-                <a:cs typeface="Calibri" pitchFamily="34" charset="-120"/>
-              </a:rPr>
-              <a:t>5</a:t>
-            </a:r>
-            <a:endParaRPr lang="en-US" sz="1176" dirty="0"/>
-          </a:p>
-        </p:txBody>
-      </p:sp>
-      <p:sp>
-        <p:nvSpPr>
-          <p:cNvPr id="20" name="Text 18"/>
-          <p:cNvSpPr/>
-          <p:nvPr/>
-        </p:nvSpPr>
-        <p:spPr>
-          <a:xfrm>
-            <a:off x="1143000" y="4709160"/>
-            <a:ext cx="9875520" cy="457200"/>
-          </a:xfrm>
-          <a:prstGeom prst="rect">
-            <a:avLst/>
-          </a:prstGeom>
-          <a:noFill/>
-          <a:ln/>
-        </p:spPr>
-        <p:txBody>
-          <a:bodyPr wrap="square" lIns="0" tIns="0" rIns="0" bIns="0" rtlCol="0" anchor="ctr"/>
-          <a:lstStyle/>
-          <a:p>
-            <a:pPr marL="0" indent="0">
-              <a:buNone/>
-            </a:pPr>
-            <a:r>
-              <a:rPr lang="en-US" sz="1400" dirty="0">
-                <a:solidFill>
-                  <a:srgbClr val="FFFFFF"/>
-                </a:solidFill>
-                <a:latin typeface="Calibri" pitchFamily="34" charset="0"/>
-                <a:ea typeface="Calibri" pitchFamily="34" charset="-122"/>
-                <a:cs typeface="Calibri" pitchFamily="34" charset="-120"/>
-              </a:rPr>
-              <a:t>Definiciones completas de WOE / IV por variable</a:t>
-            </a:r>
-            <a:endParaRPr lang="en-US" sz="1400" dirty="0"/>
-          </a:p>
-        </p:txBody>
-      </p:sp>
-      <p:sp>
-        <p:nvSpPr>
-          <p:cNvPr id="21" name="Shape 19"/>
-          <p:cNvSpPr/>
-          <p:nvPr/>
-        </p:nvSpPr>
-        <p:spPr>
-          <a:xfrm>
-            <a:off x="548640" y="5349240"/>
-            <a:ext cx="384048" cy="384048"/>
-          </a:xfrm>
-          <a:prstGeom prst="ellipse">
-            <a:avLst/>
-          </a:prstGeom>
-          <a:solidFill>
-            <a:srgbClr val="C9A227"/>
-          </a:solidFill>
-          <a:ln/>
-        </p:spPr>
-        <p:txBody>
-          <a:bodyPr/>
-          <a:lstStyle/>
-          <a:p>
-            <a:endParaRPr lang="en-PE"/>
-          </a:p>
-        </p:txBody>
-      </p:sp>
-      <p:sp>
-        <p:nvSpPr>
-          <p:cNvPr id="22" name="Text 20"/>
-          <p:cNvSpPr/>
-          <p:nvPr/>
-        </p:nvSpPr>
-        <p:spPr>
-          <a:xfrm>
-            <a:off x="548640" y="5349240"/>
-            <a:ext cx="384048" cy="384048"/>
-          </a:xfrm>
-          <a:prstGeom prst="rect">
-            <a:avLst/>
-          </a:prstGeom>
-          <a:noFill/>
-          <a:ln/>
-        </p:spPr>
-        <p:txBody>
-          <a:bodyPr wrap="square" lIns="0" tIns="0" rIns="0" bIns="0" rtlCol="0" anchor="ctr"/>
-          <a:lstStyle/>
-          <a:p>
-            <a:pPr marL="0" indent="0" algn="ctr">
-              <a:buNone/>
-            </a:pPr>
-            <a:r>
-              <a:rPr lang="en-US" sz="1176" b="1" dirty="0">
-                <a:solidFill>
-                  <a:srgbClr val="141A45"/>
-                </a:solidFill>
-                <a:latin typeface="Calibri" pitchFamily="34" charset="0"/>
-                <a:ea typeface="Calibri" pitchFamily="34" charset="-122"/>
-                <a:cs typeface="Calibri" pitchFamily="34" charset="-120"/>
-              </a:rPr>
-              <a:t>6</a:t>
-            </a:r>
-            <a:endParaRPr lang="en-US" sz="1176" dirty="0"/>
-          </a:p>
-        </p:txBody>
-      </p:sp>
-      <p:sp>
-        <p:nvSpPr>
-          <p:cNvPr id="23" name="Text 21"/>
-          <p:cNvSpPr/>
-          <p:nvPr/>
-        </p:nvSpPr>
-        <p:spPr>
-          <a:xfrm>
-            <a:off x="1143000" y="5367528"/>
-            <a:ext cx="9875520" cy="457200"/>
-          </a:xfrm>
-          <a:prstGeom prst="rect">
-            <a:avLst/>
-          </a:prstGeom>
-          <a:noFill/>
-          <a:ln/>
-        </p:spPr>
-        <p:txBody>
-          <a:bodyPr wrap="square" lIns="0" tIns="0" rIns="0" bIns="0" rtlCol="0" anchor="ctr"/>
-          <a:lstStyle/>
-          <a:p>
-            <a:pPr marL="0" indent="0">
-              <a:buNone/>
-            </a:pPr>
-            <a:r>
-              <a:rPr lang="en-US" sz="1400" dirty="0">
-                <a:solidFill>
-                  <a:srgbClr val="FFFFFF"/>
-                </a:solidFill>
-                <a:latin typeface="Calibri" pitchFamily="34" charset="0"/>
-                <a:ea typeface="Calibri" pitchFamily="34" charset="-122"/>
-                <a:cs typeface="Calibri" pitchFamily="34" charset="-120"/>
-              </a:rPr>
-              <a:t>Detalle de la simulación económica (supuestos de LGD y EAD)</a:t>
-            </a:r>
-            <a:endParaRPr lang="en-US" sz="1400" dirty="0"/>
-          </a:p>
-        </p:txBody>
-      </p:sp>
-      <p:sp>
-        <p:nvSpPr>
-          <p:cNvPr id="24" name="Text 22"/>
-          <p:cNvSpPr/>
-          <p:nvPr/>
-        </p:nvSpPr>
-        <p:spPr>
-          <a:xfrm>
-            <a:off x="457200" y="6537960"/>
-            <a:ext cx="7315200" cy="274320"/>
-          </a:xfrm>
-          <a:prstGeom prst="rect">
-            <a:avLst/>
-          </a:prstGeom>
-          <a:noFill/>
-          <a:ln/>
-        </p:spPr>
-        <p:txBody>
-          <a:bodyPr wrap="square" lIns="0" tIns="0" rIns="0" bIns="0" rtlCol="0" anchor="ctr"/>
-          <a:lstStyle/>
-          <a:p>
-            <a:pPr marL="0" indent="0">
-              <a:buNone/>
-            </a:pPr>
-            <a:r>
-              <a:rPr lang="en-US" sz="900" i="1" dirty="0">
-                <a:solidFill>
-                  <a:srgbClr val="8A93B8"/>
-                </a:solidFill>
-                <a:latin typeface="Calibri" pitchFamily="34" charset="0"/>
-                <a:ea typeface="Calibri" pitchFamily="34" charset="-122"/>
-                <a:cs typeface="Calibri" pitchFamily="34" charset="-120"/>
-              </a:rPr>
-              <a:t>Give Me Credit — Modelo de Scoring de Riesgo Crediticio</a:t>
-            </a:r>
-            <a:endParaRPr lang="en-US" sz="900" dirty="0"/>
-          </a:p>
-        </p:txBody>
-      </p:sp>
-      <p:sp>
-        <p:nvSpPr>
-          <p:cNvPr id="25" name="Text 23"/>
-          <p:cNvSpPr/>
-          <p:nvPr/>
-        </p:nvSpPr>
-        <p:spPr>
-          <a:xfrm>
-            <a:off x="11521440" y="6537960"/>
-            <a:ext cx="365760" cy="274320"/>
-          </a:xfrm>
-          <a:prstGeom prst="rect">
-            <a:avLst/>
-          </a:prstGeom>
-          <a:noFill/>
-          <a:ln/>
-        </p:spPr>
-        <p:txBody>
-          <a:bodyPr wrap="square" lIns="0" tIns="0" rIns="0" bIns="0" rtlCol="0" anchor="ctr"/>
-          <a:lstStyle/>
-          <a:p>
-            <a:pPr marL="0" indent="0" algn="r">
-              <a:buNone/>
-            </a:pPr>
-            <a:r>
-              <a:rPr lang="en-US" sz="900" dirty="0">
-                <a:solidFill>
-                  <a:srgbClr val="8A93B8"/>
-                </a:solidFill>
-                <a:latin typeface="Calibri" pitchFamily="34" charset="0"/>
-                <a:ea typeface="Calibri" pitchFamily="34" charset="-122"/>
-                <a:cs typeface="Calibri" pitchFamily="34" charset="-120"/>
-              </a:rPr>
-              <a:t>21</a:t>
             </a:r>
             <a:endParaRPr lang="en-US" sz="900" dirty="0"/>
           </a:p>
@@ -20741,7 +20059,7 @@
                 <a:ea typeface="Calibri" pitchFamily="34" charset="-122"/>
                 <a:cs typeface="Calibri" pitchFamily="34" charset="-120"/>
               </a:rPr>
-              <a:t>Esto siempre lo revisa negocio: qué variables mueven el modelo y por qué.</a:t>
+              <a:t>Que variables mueven el modelo y por qué.</a:t>
             </a:r>
             <a:endParaRPr lang="en-US" sz="1250" dirty="0"/>
           </a:p>
@@ -20771,8 +20089,8 @@
         </p:nvSpPr>
         <p:spPr>
           <a:xfrm>
-            <a:off x="7406640" y="1874520"/>
-            <a:ext cx="4206240" cy="4297680"/>
+            <a:off x="7406640" y="2294243"/>
+            <a:ext cx="4206240" cy="3401568"/>
           </a:xfrm>
           <a:prstGeom prst="roundRect">
             <a:avLst>
@@ -20800,7 +20118,7 @@
         </p:nvSpPr>
         <p:spPr>
           <a:xfrm>
-            <a:off x="7680960" y="2084832"/>
+            <a:off x="7680960" y="2504555"/>
             <a:ext cx="3657600" cy="365760"/>
           </a:xfrm>
           <a:prstGeom prst="rect">
@@ -20839,7 +20157,7 @@
         </p:nvSpPr>
         <p:spPr>
           <a:xfrm>
-            <a:off x="7680960" y="2660904"/>
+            <a:off x="7680960" y="3080627"/>
             <a:ext cx="82296" cy="82296"/>
           </a:xfrm>
           <a:prstGeom prst="ellipse">
@@ -20866,7 +20184,7 @@
         </p:nvSpPr>
         <p:spPr>
           <a:xfrm>
-            <a:off x="7909560" y="2514600"/>
+            <a:off x="7909560" y="2934323"/>
             <a:ext cx="3566160" cy="777240"/>
           </a:xfrm>
           <a:prstGeom prst="rect">
@@ -20905,7 +20223,7 @@
         </p:nvSpPr>
         <p:spPr>
           <a:xfrm>
-            <a:off x="7680960" y="3529584"/>
+            <a:off x="7680960" y="3949307"/>
             <a:ext cx="82296" cy="82296"/>
           </a:xfrm>
           <a:prstGeom prst="ellipse">
@@ -20932,7 +20250,7 @@
         </p:nvSpPr>
         <p:spPr>
           <a:xfrm>
-            <a:off x="7909560" y="3383280"/>
+            <a:off x="7909560" y="3803003"/>
             <a:ext cx="3566160" cy="777240"/>
           </a:xfrm>
           <a:prstGeom prst="rect">
@@ -20971,7 +20289,7 @@
         </p:nvSpPr>
         <p:spPr>
           <a:xfrm>
-            <a:off x="7680960" y="4398264"/>
+            <a:off x="7680960" y="4817987"/>
             <a:ext cx="82296" cy="82296"/>
           </a:xfrm>
           <a:prstGeom prst="ellipse">
@@ -20998,7 +20316,7 @@
         </p:nvSpPr>
         <p:spPr>
           <a:xfrm>
-            <a:off x="7909560" y="4251960"/>
+            <a:off x="7909560" y="4671683"/>
             <a:ext cx="3566160" cy="777240"/>
           </a:xfrm>
           <a:prstGeom prst="rect">
@@ -21024,72 +20342,6 @@
                 <a:cs typeface="Calibri" pitchFamily="34" charset="-120"/>
               </a:rPr>
               <a:t>El efecto de la edad es no lineal: clientes jóvenes concentran mayor riesgo relativo.</a:t>
-            </a:r>
-            <a:endParaRPr lang="en-US" sz="1150" dirty="0"/>
-          </a:p>
-        </p:txBody>
-      </p:sp>
-      <p:sp>
-        <p:nvSpPr>
-          <p:cNvPr id="14" name="Shape 11"/>
-          <p:cNvSpPr/>
-          <p:nvPr/>
-        </p:nvSpPr>
-        <p:spPr>
-          <a:xfrm>
-            <a:off x="7680960" y="5266944"/>
-            <a:ext cx="82296" cy="82296"/>
-          </a:xfrm>
-          <a:prstGeom prst="ellipse">
-            <a:avLst/>
-          </a:prstGeom>
-          <a:solidFill>
-            <a:srgbClr val="C9A227"/>
-          </a:solidFill>
-          <a:ln/>
-        </p:spPr>
-        <p:txBody>
-          <a:bodyPr/>
-          <a:lstStyle/>
-          <a:p>
-            <a:endParaRPr lang="en-PE"/>
-          </a:p>
-        </p:txBody>
-      </p:sp>
-      <p:sp>
-        <p:nvSpPr>
-          <p:cNvPr id="15" name="Text 12"/>
-          <p:cNvSpPr/>
-          <p:nvPr/>
-        </p:nvSpPr>
-        <p:spPr>
-          <a:xfrm>
-            <a:off x="7909560" y="5120640"/>
-            <a:ext cx="3566160" cy="777240"/>
-          </a:xfrm>
-          <a:prstGeom prst="rect">
-            <a:avLst/>
-          </a:prstGeom>
-          <a:noFill/>
-          <a:ln/>
-        </p:spPr>
-        <p:txBody>
-          <a:bodyPr wrap="square" lIns="0" tIns="0" rIns="0" bIns="0" rtlCol="0" anchor="ctr"/>
-          <a:lstStyle/>
-          <a:p>
-            <a:pPr marL="0" indent="0">
-              <a:buNone/>
-            </a:pPr>
-            <a:r>
-              <a:rPr lang="en-US" sz="1150" dirty="0">
-                <a:solidFill>
-                  <a:srgbClr val="CADCFC"/>
-                </a:solidFill>
-                <a:latin typeface="Calibri" pitchFamily="34" charset="0"/>
-                <a:ea typeface="Calibri" pitchFamily="34" charset="-122"/>
-                <a:cs typeface="Calibri" pitchFamily="34" charset="-120"/>
-              </a:rPr>
-              <a:t>El waterfall individual permite explicar el score de cada cliente ante auditoría o reclamo.</a:t>
             </a:r>
             <a:endParaRPr lang="en-US" sz="1150" dirty="0"/>
           </a:p>
@@ -23471,7 +22723,13 @@
           <p:cNvGraphicFramePr>
             <a:graphicFrameLocks noGrp="1"/>
           </p:cNvGraphicFramePr>
-          <p:nvPr/>
+          <p:nvPr>
+            <p:extLst>
+              <p:ext uri="{D42A27DB-BD31-4B8C-83A1-F6EECF244321}">
+                <p14:modId xmlns:p14="http://schemas.microsoft.com/office/powerpoint/2010/main" val="1541492192"/>
+              </p:ext>
+            </p:extLst>
+          </p:nvPr>
         </p:nvGraphicFramePr>
         <p:xfrm>
           <a:off x="548640" y="4754880"/>
@@ -23482,10 +22740,34 @@
             <a:tbl>
               <a:tblPr/>
               <a:tblGrid>
-                <a:gridCol w="1920240"/>
-                <a:gridCol w="1097280"/>
-                <a:gridCol w="1097280"/>
-                <a:gridCol w="1097280"/>
+                <a:gridCol w="1920240">
+                  <a:extLst>
+                    <a:ext uri="{9D8B030D-6E8A-4147-A177-3AD203B41FA5}">
+                      <a16:colId xmlns:a16="http://schemas.microsoft.com/office/drawing/2014/main" val="20000"/>
+                    </a:ext>
+                  </a:extLst>
+                </a:gridCol>
+                <a:gridCol w="1097280">
+                  <a:extLst>
+                    <a:ext uri="{9D8B030D-6E8A-4147-A177-3AD203B41FA5}">
+                      <a16:colId xmlns:a16="http://schemas.microsoft.com/office/drawing/2014/main" val="20001"/>
+                    </a:ext>
+                  </a:extLst>
+                </a:gridCol>
+                <a:gridCol w="1097280">
+                  <a:extLst>
+                    <a:ext uri="{9D8B030D-6E8A-4147-A177-3AD203B41FA5}">
+                      <a16:colId xmlns:a16="http://schemas.microsoft.com/office/drawing/2014/main" val="20002"/>
+                    </a:ext>
+                  </a:extLst>
+                </a:gridCol>
+                <a:gridCol w="1097280">
+                  <a:extLst>
+                    <a:ext uri="{9D8B030D-6E8A-4147-A177-3AD203B41FA5}">
+                      <a16:colId xmlns:a16="http://schemas.microsoft.com/office/drawing/2014/main" val="20003"/>
+                    </a:ext>
+                  </a:extLst>
+                </a:gridCol>
               </a:tblGrid>
               <a:tr h="304800">
                 <a:tc>
@@ -23760,6 +23042,11 @@
                     </a:solidFill>
                   </a:tcPr>
                 </a:tc>
+                <a:extLst>
+                  <a:ext uri="{0D108BD9-81ED-4DB2-BD59-A6C34878D82A}">
+                    <a16:rowId xmlns:a16="http://schemas.microsoft.com/office/drawing/2014/main" val="10000"/>
+                  </a:ext>
+                </a:extLst>
               </a:tr>
               <a:tr h="304800">
                 <a:tc>
@@ -24034,6 +23321,11 @@
                     </a:solidFill>
                   </a:tcPr>
                 </a:tc>
+                <a:extLst>
+                  <a:ext uri="{0D108BD9-81ED-4DB2-BD59-A6C34878D82A}">
+                    <a16:rowId xmlns:a16="http://schemas.microsoft.com/office/drawing/2014/main" val="10001"/>
+                  </a:ext>
+                </a:extLst>
               </a:tr>
               <a:tr h="304800">
                 <a:tc>
@@ -24308,6 +23600,11 @@
                     </a:solidFill>
                   </a:tcPr>
                 </a:tc>
+                <a:extLst>
+                  <a:ext uri="{0D108BD9-81ED-4DB2-BD59-A6C34878D82A}">
+                    <a16:rowId xmlns:a16="http://schemas.microsoft.com/office/drawing/2014/main" val="10002"/>
+                  </a:ext>
+                </a:extLst>
               </a:tr>
               <a:tr h="304800">
                 <a:tc>
@@ -24582,6 +23879,11 @@
                     </a:solidFill>
                   </a:tcPr>
                 </a:tc>
+                <a:extLst>
+                  <a:ext uri="{0D108BD9-81ED-4DB2-BD59-A6C34878D82A}">
+                    <a16:rowId xmlns:a16="http://schemas.microsoft.com/office/drawing/2014/main" val="10003"/>
+                  </a:ext>
+                </a:extLst>
               </a:tr>
               <a:tr h="304800">
                 <a:tc>
@@ -24856,6 +24158,11 @@
                     </a:solidFill>
                   </a:tcPr>
                 </a:tc>
+                <a:extLst>
+                  <a:ext uri="{0D108BD9-81ED-4DB2-BD59-A6C34878D82A}">
+                    <a16:rowId xmlns:a16="http://schemas.microsoft.com/office/drawing/2014/main" val="10004"/>
+                  </a:ext>
+                </a:extLst>
               </a:tr>
             </a:tbl>
           </a:graphicData>

--- a/presentacion/Resumen_Presentacion.pptx
+++ b/presentacion/Resumen_Presentacion.pptx
@@ -6324,7 +6324,7 @@
               <a:buNone/>
             </a:pPr>
             <a:r>
-              <a:rPr lang="en-US" sz="1400" b="1" dirty="0">
+              <a:rPr lang="en-US" sz="1400" b="1" dirty="0" err="1">
                 <a:solidFill>
                   <a:srgbClr val="CADCFC"/>
                 </a:solidFill>
@@ -6332,49 +6332,21 @@
                 <a:ea typeface="Calibri" pitchFamily="34" charset="-122"/>
                 <a:cs typeface="Calibri" pitchFamily="34" charset="-120"/>
               </a:rPr>
-              <a:t>Candidato: </a:t>
-            </a:r>
-            <a:r>
-              <a:rPr lang="en-US" sz="1400" dirty="0">
-                <a:solidFill>
-                  <a:srgbClr val="FFFFFF"/>
+              <a:t>Elaborado</a:t>
+            </a:r>
+            <a:r>
+              <a:rPr lang="en-US" sz="1400" b="1" dirty="0">
+                <a:solidFill>
+                  <a:srgbClr val="CADCFC"/>
                 </a:solidFill>
                 <a:latin typeface="Calibri" pitchFamily="34" charset="0"/>
                 <a:ea typeface="Calibri" pitchFamily="34" charset="-122"/>
                 <a:cs typeface="Calibri" pitchFamily="34" charset="-120"/>
               </a:rPr>
-              <a:t>David Rodriguez</a:t>
-            </a:r>
-            <a:endParaRPr lang="en-US" sz="1400" dirty="0"/>
-          </a:p>
-        </p:txBody>
-      </p:sp>
-      <p:sp>
-        <p:nvSpPr>
-          <p:cNvPr id="10" name="Text 8"/>
-          <p:cNvSpPr/>
-          <p:nvPr/>
-        </p:nvSpPr>
-        <p:spPr>
-          <a:xfrm>
-            <a:off x="822960" y="4709160"/>
-            <a:ext cx="5486400" cy="320040"/>
-          </a:xfrm>
-          <a:prstGeom prst="rect">
-            <a:avLst/>
-          </a:prstGeom>
-          <a:noFill/>
-          <a:ln/>
-        </p:spPr>
-        <p:txBody>
-          <a:bodyPr wrap="square" lIns="0" tIns="0" rIns="0" bIns="0" rtlCol="0" anchor="ctr"/>
-          <a:lstStyle/>
-          <a:p>
-            <a:pPr marL="0" indent="0">
-              <a:buNone/>
-            </a:pPr>
-            <a:r>
-              <a:rPr lang="en-US" sz="1400" b="1" dirty="0">
+              <a:t> </a:t>
+            </a:r>
+            <a:r>
+              <a:rPr lang="en-US" sz="1400" b="1" dirty="0" err="1">
                 <a:solidFill>
                   <a:srgbClr val="CADCFC"/>
                 </a:solidFill>
@@ -6382,18 +6354,131 @@
                 <a:ea typeface="Calibri" pitchFamily="34" charset="-122"/>
                 <a:cs typeface="Calibri" pitchFamily="34" charset="-120"/>
               </a:rPr>
-              <a:t>Postulación: </a:t>
-            </a:r>
-            <a:r>
-              <a:rPr lang="en-US" sz="1400" dirty="0">
-                <a:solidFill>
-                  <a:srgbClr val="FFFFFF"/>
+              <a:t>por</a:t>
+            </a:r>
+            <a:r>
+              <a:rPr lang="en-US" sz="1400" b="1" dirty="0">
+                <a:solidFill>
+                  <a:srgbClr val="CADCFC"/>
                 </a:solidFill>
                 <a:latin typeface="Calibri" pitchFamily="34" charset="0"/>
                 <a:ea typeface="Calibri" pitchFamily="34" charset="-122"/>
                 <a:cs typeface="Calibri" pitchFamily="34" charset="-120"/>
               </a:rPr>
-              <a:t>Data Scientist Jr.</a:t>
+              <a:t>: </a:t>
+            </a:r>
+            <a:r>
+              <a:rPr lang="en-US" sz="1400" dirty="0">
+                <a:solidFill>
+                  <a:srgbClr val="FFFFFF"/>
+                </a:solidFill>
+                <a:latin typeface="Calibri" pitchFamily="34" charset="0"/>
+                <a:ea typeface="Calibri" pitchFamily="34" charset="-122"/>
+                <a:cs typeface="Calibri" pitchFamily="34" charset="-120"/>
+              </a:rPr>
+              <a:t>David Rodriguez</a:t>
+            </a:r>
+            <a:endParaRPr lang="en-US" sz="1400" dirty="0"/>
+          </a:p>
+        </p:txBody>
+      </p:sp>
+      <p:sp>
+        <p:nvSpPr>
+          <p:cNvPr id="10" name="Text 8"/>
+          <p:cNvSpPr/>
+          <p:nvPr/>
+        </p:nvSpPr>
+        <p:spPr>
+          <a:xfrm>
+            <a:off x="822960" y="4709160"/>
+            <a:ext cx="5486400" cy="320040"/>
+          </a:xfrm>
+          <a:prstGeom prst="rect">
+            <a:avLst/>
+          </a:prstGeom>
+          <a:noFill/>
+          <a:ln/>
+        </p:spPr>
+        <p:txBody>
+          <a:bodyPr wrap="square" lIns="0" tIns="0" rIns="0" bIns="0" rtlCol="0" anchor="ctr"/>
+          <a:lstStyle/>
+          <a:p>
+            <a:r>
+              <a:rPr lang="en-US" sz="1400" b="1" dirty="0" err="1">
+                <a:solidFill>
+                  <a:srgbClr val="CADCFC"/>
+                </a:solidFill>
+                <a:latin typeface="Calibri" pitchFamily="34" charset="0"/>
+                <a:ea typeface="Calibri" pitchFamily="34" charset="-122"/>
+                <a:cs typeface="Calibri" pitchFamily="34" charset="-120"/>
+              </a:rPr>
+              <a:t>Linkedin</a:t>
+            </a:r>
+            <a:r>
+              <a:rPr lang="en-US" sz="1400" b="1" dirty="0">
+                <a:solidFill>
+                  <a:srgbClr val="CADCFC"/>
+                </a:solidFill>
+                <a:latin typeface="Calibri" pitchFamily="34" charset="0"/>
+                <a:ea typeface="Calibri" pitchFamily="34" charset="-122"/>
+                <a:cs typeface="Calibri" pitchFamily="34" charset="-120"/>
+              </a:rPr>
+              <a:t>: </a:t>
+            </a:r>
+            <a:r>
+              <a:rPr lang="en-US" sz="1400" dirty="0">
+                <a:solidFill>
+                  <a:srgbClr val="FFFFFF"/>
+                </a:solidFill>
+                <a:latin typeface="Calibri" pitchFamily="34" charset="0"/>
+                <a:ea typeface="Calibri" pitchFamily="34" charset="-122"/>
+                <a:cs typeface="Calibri" pitchFamily="34" charset="-120"/>
+              </a:rPr>
+              <a:t>https://</a:t>
+            </a:r>
+            <a:r>
+              <a:rPr lang="en-US" sz="1400" dirty="0" err="1">
+                <a:solidFill>
+                  <a:srgbClr val="FFFFFF"/>
+                </a:solidFill>
+                <a:latin typeface="Calibri" pitchFamily="34" charset="0"/>
+                <a:ea typeface="Calibri" pitchFamily="34" charset="-122"/>
+                <a:cs typeface="Calibri" pitchFamily="34" charset="-120"/>
+              </a:rPr>
+              <a:t>www.linkedin.com</a:t>
+            </a:r>
+            <a:r>
+              <a:rPr lang="en-US" sz="1400" dirty="0">
+                <a:solidFill>
+                  <a:srgbClr val="FFFFFF"/>
+                </a:solidFill>
+                <a:latin typeface="Calibri" pitchFamily="34" charset="0"/>
+                <a:ea typeface="Calibri" pitchFamily="34" charset="-122"/>
+                <a:cs typeface="Calibri" pitchFamily="34" charset="-120"/>
+              </a:rPr>
+              <a:t>/in/</a:t>
+            </a:r>
+            <a:r>
+              <a:rPr lang="en-US" sz="1400" dirty="0" err="1">
+                <a:solidFill>
+                  <a:srgbClr val="FFFFFF"/>
+                </a:solidFill>
+                <a:latin typeface="Calibri" pitchFamily="34" charset="0"/>
+                <a:ea typeface="Calibri" pitchFamily="34" charset="-122"/>
+                <a:cs typeface="Calibri" pitchFamily="34" charset="-120"/>
+              </a:rPr>
+              <a:t>joeldavidrodriguez</a:t>
+            </a:r>
+            <a:r>
+              <a:rPr lang="en-US" sz="1400" dirty="0">
+                <a:solidFill>
+                  <a:srgbClr val="FFFFFF"/>
+                </a:solidFill>
+                <a:latin typeface="Calibri" pitchFamily="34" charset="0"/>
+                <a:ea typeface="Calibri" pitchFamily="34" charset="-122"/>
+                <a:cs typeface="Calibri" pitchFamily="34" charset="-120"/>
+              </a:rPr>
+              <a:t>/</a:t>
             </a:r>
             <a:endParaRPr lang="en-US" sz="1400" dirty="0"/>
           </a:p>

--- a/presentacion/Resumen_Presentacion.pptx
+++ b/presentacion/Resumen_Presentacion.pptx
@@ -20242,7 +20242,7 @@
         </p:nvSpPr>
         <p:spPr>
           <a:xfrm>
-            <a:off x="7680960" y="3080627"/>
+            <a:off x="7680960" y="3179242"/>
             <a:ext cx="82296" cy="82296"/>
           </a:xfrm>
           <a:prstGeom prst="ellipse">
@@ -20308,7 +20308,7 @@
         </p:nvSpPr>
         <p:spPr>
           <a:xfrm>
-            <a:off x="7680960" y="3949307"/>
+            <a:off x="7680960" y="4047922"/>
             <a:ext cx="82296" cy="82296"/>
           </a:xfrm>
           <a:prstGeom prst="ellipse">
@@ -20374,7 +20374,7 @@
         </p:nvSpPr>
         <p:spPr>
           <a:xfrm>
-            <a:off x="7680960" y="4817987"/>
+            <a:off x="7680960" y="4916602"/>
             <a:ext cx="82296" cy="82296"/>
           </a:xfrm>
           <a:prstGeom prst="ellipse">
@@ -20426,7 +20426,117 @@
                 <a:ea typeface="Calibri" pitchFamily="34" charset="-122"/>
                 <a:cs typeface="Calibri" pitchFamily="34" charset="-120"/>
               </a:rPr>
-              <a:t>El efecto de la edad es no lineal: clientes jóvenes concentran mayor riesgo relativo.</a:t>
+              <a:t>Con respect a la </a:t>
+            </a:r>
+            <a:r>
+              <a:rPr lang="en-US" sz="1150" dirty="0" err="1">
+                <a:solidFill>
+                  <a:srgbClr val="CADCFC"/>
+                </a:solidFill>
+                <a:latin typeface="Calibri" pitchFamily="34" charset="0"/>
+                <a:ea typeface="Calibri" pitchFamily="34" charset="-122"/>
+                <a:cs typeface="Calibri" pitchFamily="34" charset="-120"/>
+              </a:rPr>
+              <a:t>edad</a:t>
+            </a:r>
+            <a:r>
+              <a:rPr lang="en-US" sz="1150" dirty="0">
+                <a:solidFill>
+                  <a:srgbClr val="CADCFC"/>
+                </a:solidFill>
+                <a:latin typeface="Calibri" pitchFamily="34" charset="0"/>
+                <a:ea typeface="Calibri" pitchFamily="34" charset="-122"/>
+                <a:cs typeface="Calibri" pitchFamily="34" charset="-120"/>
+              </a:rPr>
+              <a:t>, se </a:t>
+            </a:r>
+            <a:r>
+              <a:rPr lang="en-US" sz="1150" dirty="0" err="1">
+                <a:solidFill>
+                  <a:srgbClr val="CADCFC"/>
+                </a:solidFill>
+                <a:latin typeface="Calibri" pitchFamily="34" charset="0"/>
+                <a:ea typeface="Calibri" pitchFamily="34" charset="-122"/>
+                <a:cs typeface="Calibri" pitchFamily="34" charset="-120"/>
+              </a:rPr>
+              <a:t>puede</a:t>
+            </a:r>
+            <a:r>
+              <a:rPr lang="en-US" sz="1150" dirty="0">
+                <a:solidFill>
+                  <a:srgbClr val="CADCFC"/>
+                </a:solidFill>
+                <a:latin typeface="Calibri" pitchFamily="34" charset="0"/>
+                <a:ea typeface="Calibri" pitchFamily="34" charset="-122"/>
+                <a:cs typeface="Calibri" pitchFamily="34" charset="-120"/>
+              </a:rPr>
+              <a:t> inferior que </a:t>
+            </a:r>
+            <a:r>
+              <a:rPr lang="en-US" sz="1150" dirty="0" err="1">
+                <a:solidFill>
+                  <a:srgbClr val="CADCFC"/>
+                </a:solidFill>
+                <a:latin typeface="Calibri" pitchFamily="34" charset="0"/>
+                <a:ea typeface="Calibri" pitchFamily="34" charset="-122"/>
+                <a:cs typeface="Calibri" pitchFamily="34" charset="-120"/>
+              </a:rPr>
+              <a:t>los</a:t>
+            </a:r>
+            <a:r>
+              <a:rPr lang="en-US" sz="1150" dirty="0">
+                <a:solidFill>
+                  <a:srgbClr val="CADCFC"/>
+                </a:solidFill>
+                <a:latin typeface="Calibri" pitchFamily="34" charset="0"/>
+                <a:ea typeface="Calibri" pitchFamily="34" charset="-122"/>
+                <a:cs typeface="Calibri" pitchFamily="34" charset="-120"/>
+              </a:rPr>
+              <a:t> </a:t>
+            </a:r>
+            <a:r>
+              <a:rPr lang="en-US" sz="1150" dirty="0" err="1">
+                <a:solidFill>
+                  <a:srgbClr val="CADCFC"/>
+                </a:solidFill>
+                <a:latin typeface="Calibri" pitchFamily="34" charset="0"/>
+                <a:ea typeface="Calibri" pitchFamily="34" charset="-122"/>
+                <a:cs typeface="Calibri" pitchFamily="34" charset="-120"/>
+              </a:rPr>
+              <a:t>jóvenes</a:t>
+            </a:r>
+            <a:r>
+              <a:rPr lang="en-US" sz="1150" dirty="0">
+                <a:solidFill>
+                  <a:srgbClr val="CADCFC"/>
+                </a:solidFill>
+                <a:latin typeface="Calibri" pitchFamily="34" charset="0"/>
+                <a:ea typeface="Calibri" pitchFamily="34" charset="-122"/>
+                <a:cs typeface="Calibri" pitchFamily="34" charset="-120"/>
+              </a:rPr>
+              <a:t> concentran mayor </a:t>
+            </a:r>
+            <a:r>
+              <a:rPr lang="en-US" sz="1150" dirty="0" err="1">
+                <a:solidFill>
+                  <a:srgbClr val="CADCFC"/>
+                </a:solidFill>
+                <a:latin typeface="Calibri" pitchFamily="34" charset="0"/>
+                <a:ea typeface="Calibri" pitchFamily="34" charset="-122"/>
+                <a:cs typeface="Calibri" pitchFamily="34" charset="-120"/>
+              </a:rPr>
+              <a:t>riesgo</a:t>
+            </a:r>
+            <a:r>
+              <a:rPr lang="en-US" sz="1150" dirty="0">
+                <a:solidFill>
+                  <a:srgbClr val="CADCFC"/>
+                </a:solidFill>
+                <a:latin typeface="Calibri" pitchFamily="34" charset="0"/>
+                <a:ea typeface="Calibri" pitchFamily="34" charset="-122"/>
+                <a:cs typeface="Calibri" pitchFamily="34" charset="-120"/>
+              </a:rPr>
+              <a:t>.</a:t>
             </a:r>
             <a:endParaRPr lang="en-US" sz="1150" dirty="0"/>
           </a:p>
